--- a/competition/initial/01-solution-deck.pptx
+++ b/competition/initial/01-solution-deck.pptx
@@ -3115,7 +3115,7 @@
             <a:avLst/>
           </a:prstGeom>
           <a:solidFill>
-            <a:srgbClr val="0B1220"/>
+            <a:srgbClr val="FFFFFF"/>
           </a:solidFill>
           <a:ln>
             <a:noFill/>
@@ -3146,14 +3146,58 @@
       </p:sp>
       <p:sp>
         <p:nvSpPr>
-          <p:cNvPr id="3" name="TextBox 2"/>
+          <p:cNvPr id="3" name="Rectangle 2"/>
+          <p:cNvSpPr/>
+          <p:nvPr/>
+        </p:nvSpPr>
+        <p:spPr>
+          <a:xfrm>
+            <a:off x="0" y="0"/>
+            <a:ext cx="12191695" cy="256032"/>
+          </a:xfrm>
+          <a:prstGeom prst="rect">
+            <a:avLst/>
+          </a:prstGeom>
+          <a:solidFill>
+            <a:srgbClr val="4F46E5"/>
+          </a:solidFill>
+          <a:ln>
+            <a:noFill/>
+          </a:ln>
+          <a:effectLst/>
+        </p:spPr>
+        <p:style>
+          <a:lnRef idx="1">
+            <a:schemeClr val="accent1"/>
+          </a:lnRef>
+          <a:fillRef idx="3">
+            <a:schemeClr val="accent1"/>
+          </a:fillRef>
+          <a:effectRef idx="2">
+            <a:schemeClr val="accent1"/>
+          </a:effectRef>
+          <a:fontRef idx="minor">
+            <a:schemeClr val="lt1"/>
+          </a:fontRef>
+        </p:style>
+        <p:txBody>
+          <a:bodyPr rtlCol="0" anchor="ctr"/>
+          <a:lstStyle/>
+          <a:p>
+            <a:pPr algn="ctr"/>
+          </a:p>
+        </p:txBody>
+      </p:sp>
+      <p:sp>
+        <p:nvSpPr>
+          <p:cNvPr id="4" name="TextBox 3"/>
           <p:cNvSpPr txBox="1"/>
           <p:nvPr/>
         </p:nvSpPr>
         <p:spPr>
           <a:xfrm>
-            <a:off x="822960" y="1920240"/>
-            <a:ext cx="10515600" cy="1463040"/>
+            <a:off x="822960" y="1874519"/>
+            <a:ext cx="10515600" cy="1371600"/>
           </a:xfrm>
           <a:prstGeom prst="rect">
             <a:avLst/>
@@ -3174,7 +3218,7 @@
             <a:r>
               <a:rPr sz="4400" b="1">
                 <a:solidFill>
-                  <a:srgbClr val="FFFFFF"/>
+                  <a:srgbClr val="0F172A"/>
                 </a:solidFill>
                 <a:latin typeface="Microsoft YaHei"/>
                 <a:ea typeface="Microsoft YaHei"/>
@@ -3186,13 +3230,13 @@
       </p:sp>
       <p:sp>
         <p:nvSpPr>
-          <p:cNvPr id="4" name="TextBox 3"/>
+          <p:cNvPr id="5" name="TextBox 4"/>
           <p:cNvSpPr txBox="1"/>
           <p:nvPr/>
         </p:nvSpPr>
         <p:spPr>
           <a:xfrm>
-            <a:off x="822960" y="2743200"/>
+            <a:off x="822960" y="2697480"/>
             <a:ext cx="10515600" cy="731520"/>
           </a:xfrm>
           <a:prstGeom prst="rect">
@@ -3214,7 +3258,7 @@
             <a:r>
               <a:rPr sz="2200" b="0">
                 <a:solidFill>
-                  <a:srgbClr val="22D3EE"/>
+                  <a:srgbClr val="4F46E5"/>
                 </a:solidFill>
                 <a:latin typeface="Microsoft YaHei"/>
                 <a:ea typeface="Microsoft YaHei"/>
@@ -3226,13 +3270,13 @@
       </p:sp>
       <p:sp>
         <p:nvSpPr>
-          <p:cNvPr id="5" name="TextBox 4"/>
+          <p:cNvPr id="6" name="TextBox 5"/>
           <p:cNvSpPr txBox="1"/>
           <p:nvPr/>
         </p:nvSpPr>
         <p:spPr>
           <a:xfrm>
-            <a:off x="822960" y="3749039"/>
+            <a:off x="822960" y="3703320"/>
             <a:ext cx="10515600" cy="548640"/>
           </a:xfrm>
           <a:prstGeom prst="rect">
@@ -3252,9 +3296,9 @@
               </a:spcAft>
             </a:pPr>
             <a:r>
-              <a:rPr sz="1600" b="0">
-                <a:solidFill>
-                  <a:srgbClr val="94A3B8"/>
+              <a:rPr sz="1500" b="0">
+                <a:solidFill>
+                  <a:srgbClr val="64748B"/>
                 </a:solidFill>
                 <a:latin typeface="Microsoft YaHei"/>
                 <a:ea typeface="Microsoft YaHei"/>
@@ -3266,13 +3310,13 @@
       </p:sp>
       <p:sp>
         <p:nvSpPr>
-          <p:cNvPr id="6" name="TextBox 5"/>
+          <p:cNvPr id="7" name="TextBox 6"/>
           <p:cNvSpPr txBox="1"/>
           <p:nvPr/>
         </p:nvSpPr>
         <p:spPr>
           <a:xfrm>
-            <a:off x="822960" y="4389120"/>
+            <a:off x="822960" y="4343400"/>
             <a:ext cx="10515600" cy="457200"/>
           </a:xfrm>
           <a:prstGeom prst="rect">
@@ -3294,25 +3338,25 @@
             <a:r>
               <a:rPr sz="1400" b="0">
                 <a:solidFill>
-                  <a:srgbClr val="94A3B8"/>
-                </a:solidFill>
-                <a:latin typeface="Microsoft YaHei"/>
-                <a:ea typeface="Microsoft YaHei"/>
-              </a:rPr>
-              <a:t>参赛者：&lt;个人姓名&gt; · 个人参赛 · 初赛 V0.1</a:t>
-            </a:r>
-          </a:p>
-        </p:txBody>
-      </p:sp>
-      <p:sp>
-        <p:nvSpPr>
-          <p:cNvPr id="7" name="TextBox 6"/>
+                  <a:srgbClr val="334155"/>
+                </a:solidFill>
+                <a:latin typeface="Microsoft YaHei"/>
+                <a:ea typeface="Microsoft YaHei"/>
+              </a:rPr>
+              <a:t>参赛者：张英超 · 个人参赛 · 初赛 V0.1</a:t>
+            </a:r>
+          </a:p>
+        </p:txBody>
+      </p:sp>
+      <p:sp>
+        <p:nvSpPr>
+          <p:cNvPr id="8" name="TextBox 7"/>
           <p:cNvSpPr txBox="1"/>
           <p:nvPr/>
         </p:nvSpPr>
         <p:spPr>
           <a:xfrm>
-            <a:off x="822960" y="5760720"/>
+            <a:off x="822960" y="5715000"/>
             <a:ext cx="10515600" cy="457200"/>
           </a:xfrm>
           <a:prstGeom prst="rect">
@@ -3332,9 +3376,9 @@
               </a:spcAft>
             </a:pPr>
             <a:r>
-              <a:rPr sz="1400" b="0">
-                <a:solidFill>
-                  <a:srgbClr val="FBBF24"/>
+              <a:rPr sz="1300" b="0">
+                <a:solidFill>
+                  <a:srgbClr val="F59E0B"/>
                 </a:solidFill>
                 <a:latin typeface="Microsoft YaHei"/>
                 <a:ea typeface="Microsoft YaHei"/>
@@ -3377,7 +3421,7 @@
             <a:avLst/>
           </a:prstGeom>
           <a:solidFill>
-            <a:srgbClr val="0B1220"/>
+            <a:srgbClr val="FFFFFF"/>
           </a:solidFill>
           <a:ln>
             <a:noFill/>
@@ -3414,7 +3458,7 @@
         </p:nvSpPr>
         <p:spPr>
           <a:xfrm>
-            <a:off x="548640" y="320040"/>
+            <a:off x="548640" y="384048"/>
             <a:ext cx="11064240" cy="548640"/>
           </a:xfrm>
           <a:prstGeom prst="rect">
@@ -3436,7 +3480,7 @@
             <a:r>
               <a:rPr sz="2600" b="1">
                 <a:solidFill>
-                  <a:srgbClr val="FFFFFF"/>
+                  <a:srgbClr val="0F172A"/>
                 </a:solidFill>
                 <a:latin typeface="Microsoft YaHei"/>
                 <a:ea typeface="Microsoft YaHei"/>
@@ -3454,14 +3498,14 @@
         </p:nvSpPr>
         <p:spPr>
           <a:xfrm>
-            <a:off x="548640" y="1051560"/>
-            <a:ext cx="1463040" cy="54864"/>
+            <a:off x="548640" y="1115568"/>
+            <a:ext cx="1371600" cy="64008"/>
           </a:xfrm>
           <a:prstGeom prst="rect">
             <a:avLst/>
           </a:prstGeom>
           <a:solidFill>
-            <a:srgbClr val="22D3EE"/>
+            <a:srgbClr val="4F46E5"/>
           </a:solidFill>
           <a:ln>
             <a:noFill/>
@@ -3498,7 +3542,7 @@
         </p:nvSpPr>
         <p:spPr>
           <a:xfrm>
-            <a:off x="11338560" y="6400800"/>
+            <a:off x="11338560" y="6446520"/>
             <a:ext cx="640080" cy="365760"/>
           </a:xfrm>
           <a:prstGeom prst="rect">
@@ -3520,7 +3564,7 @@
             <a:r>
               <a:rPr sz="1000" b="0">
                 <a:solidFill>
-                  <a:srgbClr val="94A3B8"/>
+                  <a:srgbClr val="64748B"/>
                 </a:solidFill>
                 <a:latin typeface="Microsoft YaHei"/>
                 <a:ea typeface="Microsoft YaHei"/>
@@ -3560,12 +3604,12 @@
             <a:r>
               <a:rPr sz="1500" b="0">
                 <a:solidFill>
-                  <a:srgbClr val="CBD5E1"/>
-                </a:solidFill>
-                <a:latin typeface="Microsoft YaHei"/>
-                <a:ea typeface="Microsoft YaHei"/>
-              </a:rPr>
-              <a:t>▍结构化校验：Zod 请求与模型输出校验；OpenAI 严格 JSON Schema</a:t>
+                  <a:srgbClr val="334155"/>
+                </a:solidFill>
+                <a:latin typeface="Microsoft YaHei"/>
+                <a:ea typeface="Microsoft YaHei"/>
+              </a:rPr>
+              <a:t>●  结构化校验：Zod 请求与模型输出校验；OpenAI 严格 JSON Schema</a:t>
             </a:r>
           </a:p>
           <a:p>
@@ -3577,12 +3621,12 @@
             <a:r>
               <a:rPr sz="1500" b="0">
                 <a:solidFill>
-                  <a:srgbClr val="CBD5E1"/>
-                </a:solidFill>
-                <a:latin typeface="Microsoft YaHei"/>
-                <a:ea typeface="Microsoft YaHei"/>
-              </a:rPr>
-              <a:t>▍资源控制：心跳、主动取消、2 分钟硬上限、调用次数预算、超时（60s/120s）</a:t>
+                  <a:srgbClr val="334155"/>
+                </a:solidFill>
+                <a:latin typeface="Microsoft YaHei"/>
+                <a:ea typeface="Microsoft YaHei"/>
+              </a:rPr>
+              <a:t>●  资源控制：心跳、主动取消、2 分钟硬上限、调用次数预算、超时（60s/120s）</a:t>
             </a:r>
           </a:p>
           <a:p>
@@ -3594,12 +3638,12 @@
             <a:r>
               <a:rPr sz="1500" b="0">
                 <a:solidFill>
-                  <a:srgbClr val="22D3EE"/>
-                </a:solidFill>
-                <a:latin typeface="Microsoft YaHei"/>
-                <a:ea typeface="Microsoft YaHei"/>
-              </a:rPr>
-              <a:t>▍可观测：Prompt Registry + Studio Trace（promptId/runId/快照/耗时/失败）可回放</a:t>
+                  <a:srgbClr val="2563EB"/>
+                </a:solidFill>
+                <a:latin typeface="Microsoft YaHei"/>
+                <a:ea typeface="Microsoft YaHei"/>
+              </a:rPr>
+              <a:t>●  可观测：Prompt Registry + Studio Trace（promptId/runId/快照/耗时/失败）可回放</a:t>
             </a:r>
           </a:p>
           <a:p>
@@ -3611,12 +3655,12 @@
             <a:r>
               <a:rPr sz="1500" b="0">
                 <a:solidFill>
-                  <a:srgbClr val="A78BFA"/>
-                </a:solidFill>
-                <a:latin typeface="Microsoft YaHei"/>
-                <a:ea typeface="Microsoft YaHei"/>
-              </a:rPr>
-              <a:t>▍可复现：DirectLLM 主路径 + Mock 离线确定性路径，共用同一 Schema</a:t>
+                  <a:srgbClr val="7C3AED"/>
+                </a:solidFill>
+                <a:latin typeface="Microsoft YaHei"/>
+                <a:ea typeface="Microsoft YaHei"/>
+              </a:rPr>
+              <a:t>●  可复现：DirectLLM 主路径 + Mock 离线确定性路径，共用同一 Schema</a:t>
             </a:r>
           </a:p>
           <a:p>
@@ -3628,12 +3672,12 @@
             <a:r>
               <a:rPr sz="1500" b="0">
                 <a:solidFill>
-                  <a:srgbClr val="34D399"/>
-                </a:solidFill>
-                <a:latin typeface="Microsoft YaHei"/>
-                <a:ea typeface="Microsoft YaHei"/>
-              </a:rPr>
-              <a:t>▍测试与评测：Vitest 155 用例 + Playwright e2e + 合成评测集（schema/F1/召回/保持）</a:t>
+                  <a:srgbClr val="0D9488"/>
+                </a:solidFill>
+                <a:latin typeface="Microsoft YaHei"/>
+                <a:ea typeface="Microsoft YaHei"/>
+              </a:rPr>
+              <a:t>●  测试与评测：Vitest 155 用例 + Playwright e2e + 合成评测集（schema/F1/召回/保持）</a:t>
             </a:r>
           </a:p>
         </p:txBody>
@@ -3671,7 +3715,7 @@
             <a:avLst/>
           </a:prstGeom>
           <a:solidFill>
-            <a:srgbClr val="0B1220"/>
+            <a:srgbClr val="FFFFFF"/>
           </a:solidFill>
           <a:ln>
             <a:noFill/>
@@ -3708,7 +3752,7 @@
         </p:nvSpPr>
         <p:spPr>
           <a:xfrm>
-            <a:off x="548640" y="320040"/>
+            <a:off x="548640" y="384048"/>
             <a:ext cx="11064240" cy="548640"/>
           </a:xfrm>
           <a:prstGeom prst="rect">
@@ -3730,7 +3774,7 @@
             <a:r>
               <a:rPr sz="2600" b="1">
                 <a:solidFill>
-                  <a:srgbClr val="FFFFFF"/>
+                  <a:srgbClr val="0F172A"/>
                 </a:solidFill>
                 <a:latin typeface="Microsoft YaHei"/>
                 <a:ea typeface="Microsoft YaHei"/>
@@ -3748,14 +3792,14 @@
         </p:nvSpPr>
         <p:spPr>
           <a:xfrm>
-            <a:off x="548640" y="1051560"/>
-            <a:ext cx="1463040" cy="54864"/>
+            <a:off x="548640" y="1115568"/>
+            <a:ext cx="1371600" cy="64008"/>
           </a:xfrm>
           <a:prstGeom prst="rect">
             <a:avLst/>
           </a:prstGeom>
           <a:solidFill>
-            <a:srgbClr val="22D3EE"/>
+            <a:srgbClr val="2563EB"/>
           </a:solidFill>
           <a:ln>
             <a:noFill/>
@@ -3792,7 +3836,7 @@
         </p:nvSpPr>
         <p:spPr>
           <a:xfrm>
-            <a:off x="11338560" y="6400800"/>
+            <a:off x="11338560" y="6446520"/>
             <a:ext cx="640080" cy="365760"/>
           </a:xfrm>
           <a:prstGeom prst="rect">
@@ -3814,7 +3858,7 @@
             <a:r>
               <a:rPr sz="1000" b="0">
                 <a:solidFill>
-                  <a:srgbClr val="94A3B8"/>
+                  <a:srgbClr val="64748B"/>
                 </a:solidFill>
                 <a:latin typeface="Microsoft YaHei"/>
                 <a:ea typeface="Microsoft YaHei"/>
@@ -3854,7 +3898,7 @@
             <a:r>
               <a:rPr sz="1500" b="0">
                 <a:solidFill>
-                  <a:srgbClr val="CBD5E1"/>
+                  <a:srgbClr val="334155"/>
                 </a:solidFill>
                 <a:latin typeface="Microsoft YaHei"/>
                 <a:ea typeface="Microsoft YaHei"/>
@@ -3918,7 +3962,7 @@
             <a:r>
               <a:rPr sz="1100" b="0">
                 <a:solidFill>
-                  <a:srgbClr val="94A3B8"/>
+                  <a:srgbClr val="64748B"/>
                 </a:solidFill>
                 <a:latin typeface="Microsoft YaHei"/>
                 <a:ea typeface="Microsoft YaHei"/>
@@ -3982,7 +4026,7 @@
             <a:r>
               <a:rPr sz="1100" b="0">
                 <a:solidFill>
-                  <a:srgbClr val="94A3B8"/>
+                  <a:srgbClr val="64748B"/>
                 </a:solidFill>
                 <a:latin typeface="Microsoft YaHei"/>
                 <a:ea typeface="Microsoft YaHei"/>
@@ -4046,7 +4090,7 @@
             <a:r>
               <a:rPr sz="1100" b="0">
                 <a:solidFill>
-                  <a:srgbClr val="94A3B8"/>
+                  <a:srgbClr val="64748B"/>
                 </a:solidFill>
                 <a:latin typeface="Microsoft YaHei"/>
                 <a:ea typeface="Microsoft YaHei"/>
@@ -4086,7 +4130,7 @@
             <a:r>
               <a:rPr sz="1200" b="0">
                 <a:solidFill>
-                  <a:srgbClr val="94A3B8"/>
+                  <a:srgbClr val="64748B"/>
                 </a:solidFill>
                 <a:latin typeface="Microsoft YaHei"/>
                 <a:ea typeface="Microsoft YaHei"/>
@@ -4129,7 +4173,7 @@
             <a:avLst/>
           </a:prstGeom>
           <a:solidFill>
-            <a:srgbClr val="0B1220"/>
+            <a:srgbClr val="FFFFFF"/>
           </a:solidFill>
           <a:ln>
             <a:noFill/>
@@ -4166,7 +4210,7 @@
         </p:nvSpPr>
         <p:spPr>
           <a:xfrm>
-            <a:off x="548640" y="320040"/>
+            <a:off x="548640" y="384048"/>
             <a:ext cx="11064240" cy="548640"/>
           </a:xfrm>
           <a:prstGeom prst="rect">
@@ -4188,7 +4232,7 @@
             <a:r>
               <a:rPr sz="2600" b="1">
                 <a:solidFill>
-                  <a:srgbClr val="FFFFFF"/>
+                  <a:srgbClr val="0F172A"/>
                 </a:solidFill>
                 <a:latin typeface="Microsoft YaHei"/>
                 <a:ea typeface="Microsoft YaHei"/>
@@ -4206,14 +4250,14 @@
         </p:nvSpPr>
         <p:spPr>
           <a:xfrm>
-            <a:off x="548640" y="1051560"/>
-            <a:ext cx="1463040" cy="54864"/>
+            <a:off x="548640" y="1115568"/>
+            <a:ext cx="1371600" cy="64008"/>
           </a:xfrm>
           <a:prstGeom prst="rect">
             <a:avLst/>
           </a:prstGeom>
           <a:solidFill>
-            <a:srgbClr val="22D3EE"/>
+            <a:srgbClr val="0D9488"/>
           </a:solidFill>
           <a:ln>
             <a:noFill/>
@@ -4250,7 +4294,7 @@
         </p:nvSpPr>
         <p:spPr>
           <a:xfrm>
-            <a:off x="11338560" y="6400800"/>
+            <a:off x="11338560" y="6446520"/>
             <a:ext cx="640080" cy="365760"/>
           </a:xfrm>
           <a:prstGeom prst="rect">
@@ -4272,7 +4316,7 @@
             <a:r>
               <a:rPr sz="1000" b="0">
                 <a:solidFill>
-                  <a:srgbClr val="94A3B8"/>
+                  <a:srgbClr val="64748B"/>
                 </a:solidFill>
                 <a:latin typeface="Microsoft YaHei"/>
                 <a:ea typeface="Microsoft YaHei"/>
@@ -4312,12 +4356,12 @@
             <a:r>
               <a:rPr sz="1500" b="0">
                 <a:solidFill>
-                  <a:srgbClr val="34D399"/>
-                </a:solidFill>
-                <a:latin typeface="Microsoft YaHei"/>
-                <a:ea typeface="Microsoft YaHei"/>
-              </a:rPr>
-              <a:t>▍本地优先：简历/事实/Trace 存于浏览器本地（Zustand + IndexedDB），无服务端数据库</a:t>
+                  <a:srgbClr val="0D9488"/>
+                </a:solidFill>
+                <a:latin typeface="Microsoft YaHei"/>
+                <a:ea typeface="Microsoft YaHei"/>
+              </a:rPr>
+              <a:t>●  本地优先：简历/事实/Trace 存于浏览器本地（Zustand + IndexedDB），无服务端数据库</a:t>
             </a:r>
           </a:p>
           <a:p>
@@ -4329,12 +4373,12 @@
             <a:r>
               <a:rPr sz="1500" b="0">
                 <a:solidFill>
-                  <a:srgbClr val="34D399"/>
-                </a:solidFill>
-                <a:latin typeface="Microsoft YaHei"/>
-                <a:ea typeface="Microsoft YaHei"/>
-              </a:rPr>
-              <a:t>▍隐私：不采集不上传；演示与评测一律使用合成/示例数据</a:t>
+                  <a:srgbClr val="0D9488"/>
+                </a:solidFill>
+                <a:latin typeface="Microsoft YaHei"/>
+                <a:ea typeface="Microsoft YaHei"/>
+              </a:rPr>
+              <a:t>●  隐私：不采集不上传；演示与评测一律使用合成/示例数据</a:t>
             </a:r>
           </a:p>
           <a:p>
@@ -4346,12 +4390,12 @@
             <a:r>
               <a:rPr sz="1500" b="0">
                 <a:solidFill>
-                  <a:srgbClr val="22D3EE"/>
-                </a:solidFill>
-                <a:latin typeface="Microsoft YaHei"/>
-                <a:ea typeface="Microsoft YaHei"/>
-              </a:rPr>
-              <a:t>▍模型服务披露：用户自配 OpenAI 兼容服务；默认 Mock 可复现；API Key 不进仓库/备份/演示</a:t>
+                  <a:srgbClr val="2563EB"/>
+                </a:solidFill>
+                <a:latin typeface="Microsoft YaHei"/>
+                <a:ea typeface="Microsoft YaHei"/>
+              </a:rPr>
+              <a:t>●  模型服务披露：用户自配 OpenAI 兼容服务；默认 Mock 可复现；API Key 不进仓库/备份/演示</a:t>
             </a:r>
           </a:p>
           <a:p>
@@ -4363,12 +4407,12 @@
             <a:r>
               <a:rPr sz="1500" b="0">
                 <a:solidFill>
-                  <a:srgbClr val="FBBF24"/>
-                </a:solidFill>
-                <a:latin typeface="Microsoft YaHei"/>
-                <a:ea typeface="Microsoft YaHei"/>
-              </a:rPr>
-              <a:t>▍MCP 边界：本阶段提供等价连接器契约，迁移仅需协议适配（见材料 05）</a:t>
+                  <a:srgbClr val="F59E0B"/>
+                </a:solidFill>
+                <a:latin typeface="Microsoft YaHei"/>
+                <a:ea typeface="Microsoft YaHei"/>
+              </a:rPr>
+              <a:t>●  MCP 边界：本阶段提供等价连接器契约，迁移仅需协议适配（见材料 05）</a:t>
             </a:r>
           </a:p>
           <a:p>
@@ -4380,12 +4424,12 @@
             <a:r>
               <a:rPr sz="1500" b="0">
                 <a:solidFill>
-                  <a:srgbClr val="FBBF24"/>
-                </a:solidFill>
-                <a:latin typeface="Microsoft YaHei"/>
-                <a:ea typeface="Microsoft YaHei"/>
-              </a:rPr>
-              <a:t>▍RAG 边界：以结构化事实 + 稳定 ID + 确定性筛选代替知识库 RAG</a:t>
+                  <a:srgbClr val="F59E0B"/>
+                </a:solidFill>
+                <a:latin typeface="Microsoft YaHei"/>
+                <a:ea typeface="Microsoft YaHei"/>
+              </a:rPr>
+              <a:t>●  RAG 边界：以结构化事实 + 稳定 ID + 确定性筛选代替知识库 RAG</a:t>
             </a:r>
           </a:p>
           <a:p>
@@ -4397,12 +4441,12 @@
             <a:r>
               <a:rPr sz="1500" b="0">
                 <a:solidFill>
-                  <a:srgbClr val="94A3B8"/>
-                </a:solidFill>
-                <a:latin typeface="Microsoft YaHei"/>
-                <a:ea typeface="Microsoft YaHei"/>
-              </a:rPr>
-              <a:t>▍开源：仓库已公开；本阶段不新增协议；复赛前落地 LICENSE/依赖/部署/贡献规范</a:t>
+                  <a:srgbClr val="64748B"/>
+                </a:solidFill>
+                <a:latin typeface="Microsoft YaHei"/>
+                <a:ea typeface="Microsoft YaHei"/>
+              </a:rPr>
+              <a:t>●  开源：仓库已公开；本阶段不新增协议；复赛前落地 LICENSE/依赖/部署/贡献规范</a:t>
             </a:r>
           </a:p>
         </p:txBody>
@@ -4440,7 +4484,7 @@
             <a:avLst/>
           </a:prstGeom>
           <a:solidFill>
-            <a:srgbClr val="0B1220"/>
+            <a:srgbClr val="FFFFFF"/>
           </a:solidFill>
           <a:ln>
             <a:noFill/>
@@ -4477,7 +4521,7 @@
         </p:nvSpPr>
         <p:spPr>
           <a:xfrm>
-            <a:off x="548640" y="320040"/>
+            <a:off x="548640" y="384048"/>
             <a:ext cx="11064240" cy="548640"/>
           </a:xfrm>
           <a:prstGeom prst="rect">
@@ -4499,7 +4543,7 @@
             <a:r>
               <a:rPr sz="2600" b="1">
                 <a:solidFill>
-                  <a:srgbClr val="FFFFFF"/>
+                  <a:srgbClr val="0F172A"/>
                 </a:solidFill>
                 <a:latin typeface="Microsoft YaHei"/>
                 <a:ea typeface="Microsoft YaHei"/>
@@ -4517,14 +4561,14 @@
         </p:nvSpPr>
         <p:spPr>
           <a:xfrm>
-            <a:off x="548640" y="1051560"/>
-            <a:ext cx="1463040" cy="54864"/>
+            <a:off x="548640" y="1115568"/>
+            <a:ext cx="1371600" cy="64008"/>
           </a:xfrm>
           <a:prstGeom prst="rect">
             <a:avLst/>
           </a:prstGeom>
           <a:solidFill>
-            <a:srgbClr val="22D3EE"/>
+            <a:srgbClr val="4F46E5"/>
           </a:solidFill>
           <a:ln>
             <a:noFill/>
@@ -4561,7 +4605,7 @@
         </p:nvSpPr>
         <p:spPr>
           <a:xfrm>
-            <a:off x="11338560" y="6400800"/>
+            <a:off x="11338560" y="6446520"/>
             <a:ext cx="640080" cy="365760"/>
           </a:xfrm>
           <a:prstGeom prst="rect">
@@ -4583,7 +4627,7 @@
             <a:r>
               <a:rPr sz="1000" b="0">
                 <a:solidFill>
-                  <a:srgbClr val="94A3B8"/>
+                  <a:srgbClr val="64748B"/>
                 </a:solidFill>
                 <a:latin typeface="Microsoft YaHei"/>
                 <a:ea typeface="Microsoft YaHei"/>
@@ -4623,12 +4667,12 @@
             <a:r>
               <a:rPr sz="1500" b="1">
                 <a:solidFill>
-                  <a:srgbClr val="22D3EE"/>
-                </a:solidFill>
-                <a:latin typeface="Microsoft YaHei"/>
-                <a:ea typeface="Microsoft YaHei"/>
-              </a:rPr>
-              <a:t>▍实现 AgentTeams 运行时：主控 + 4 Agent 的可执行协同层</a:t>
+                  <a:srgbClr val="4F46E5"/>
+                </a:solidFill>
+                <a:latin typeface="Microsoft YaHei"/>
+                <a:ea typeface="Microsoft YaHei"/>
+              </a:rPr>
+              <a:t>●  实现 AgentTeams 运行时：主控 + 4 Agent 的可执行协同层</a:t>
             </a:r>
           </a:p>
           <a:p>
@@ -4640,12 +4684,12 @@
             <a:r>
               <a:rPr sz="1500" b="1">
                 <a:solidFill>
-                  <a:srgbClr val="22D3EE"/>
-                </a:solidFill>
-                <a:latin typeface="Microsoft YaHei"/>
-                <a:ea typeface="Microsoft YaHei"/>
-              </a:rPr>
-              <a:t>▍Skill 包工程化：版本、发布、回滚、质量评估与开源分发</a:t>
+                  <a:srgbClr val="4F46E5"/>
+                </a:solidFill>
+                <a:latin typeface="Microsoft YaHei"/>
+                <a:ea typeface="Microsoft YaHei"/>
+              </a:rPr>
+              <a:t>●  Skill 包工程化：版本、发布、回滚、质量评估与开源分发</a:t>
             </a:r>
           </a:p>
           <a:p>
@@ -4657,12 +4701,12 @@
             <a:r>
               <a:rPr sz="1500" b="1">
                 <a:solidFill>
-                  <a:srgbClr val="22D3EE"/>
-                </a:solidFill>
-                <a:latin typeface="Microsoft YaHei"/>
-                <a:ea typeface="Microsoft YaHei"/>
-              </a:rPr>
-              <a:t>▍可执行 Demo：完整场景链路 + 样例输入输出 + 日志/Trace/指标 + 异常处理</a:t>
+                  <a:srgbClr val="4F46E5"/>
+                </a:solidFill>
+                <a:latin typeface="Microsoft YaHei"/>
+                <a:ea typeface="Microsoft YaHei"/>
+              </a:rPr>
+              <a:t>●  可执行 Demo：完整场景链路 + 样例输入输出 + 日志/Trace/指标 + 异常处理</a:t>
             </a:r>
           </a:p>
           <a:p>
@@ -4674,12 +4718,12 @@
             <a:r>
               <a:rPr sz="1500" b="1">
                 <a:solidFill>
-                  <a:srgbClr val="22D3EE"/>
-                </a:solidFill>
-                <a:latin typeface="Microsoft YaHei"/>
-                <a:ea typeface="Microsoft YaHei"/>
-              </a:rPr>
-              <a:t>▍回放评测：Golden/Badcase 数据集，对比不同版本效果</a:t>
+                  <a:srgbClr val="4F46E5"/>
+                </a:solidFill>
+                <a:latin typeface="Microsoft YaHei"/>
+                <a:ea typeface="Microsoft YaHei"/>
+              </a:rPr>
+              <a:t>●  回放评测：Golden/Badcase 数据集，对比不同版本效果</a:t>
             </a:r>
           </a:p>
           <a:p>
@@ -4691,12 +4735,12 @@
             <a:r>
               <a:rPr sz="1500" b="1">
                 <a:solidFill>
-                  <a:srgbClr val="22D3EE"/>
-                </a:solidFill>
-                <a:latin typeface="Microsoft YaHei"/>
-                <a:ea typeface="Microsoft YaHei"/>
-              </a:rPr>
-              <a:t>▍公开工程材料：LICENSE、依赖清单、部署指南、贡献规范</a:t>
+                  <a:srgbClr val="4F46E5"/>
+                </a:solidFill>
+                <a:latin typeface="Microsoft YaHei"/>
+                <a:ea typeface="Microsoft YaHei"/>
+              </a:rPr>
+              <a:t>●  公开工程材料：LICENSE、依赖清单、部署指南、贡献规范</a:t>
             </a:r>
           </a:p>
         </p:txBody>
@@ -4731,7 +4775,7 @@
             <a:r>
               <a:rPr sz="1600" b="1">
                 <a:solidFill>
-                  <a:srgbClr val="FBBF24"/>
+                  <a:srgbClr val="F59E0B"/>
                 </a:solidFill>
                 <a:latin typeface="Microsoft YaHei"/>
                 <a:ea typeface="Microsoft YaHei"/>
@@ -4774,7 +4818,7 @@
             <a:avLst/>
           </a:prstGeom>
           <a:solidFill>
-            <a:srgbClr val="0B1220"/>
+            <a:srgbClr val="FFFFFF"/>
           </a:solidFill>
           <a:ln>
             <a:noFill/>
@@ -4811,7 +4855,7 @@
         </p:nvSpPr>
         <p:spPr>
           <a:xfrm>
-            <a:off x="548640" y="320040"/>
+            <a:off x="548640" y="384048"/>
             <a:ext cx="11064240" cy="548640"/>
           </a:xfrm>
           <a:prstGeom prst="rect">
@@ -4833,7 +4877,7 @@
             <a:r>
               <a:rPr sz="2600" b="1">
                 <a:solidFill>
-                  <a:srgbClr val="FFFFFF"/>
+                  <a:srgbClr val="0F172A"/>
                 </a:solidFill>
                 <a:latin typeface="Microsoft YaHei"/>
                 <a:ea typeface="Microsoft YaHei"/>
@@ -4851,14 +4895,14 @@
         </p:nvSpPr>
         <p:spPr>
           <a:xfrm>
-            <a:off x="548640" y="1051560"/>
-            <a:ext cx="1463040" cy="54864"/>
+            <a:off x="548640" y="1115568"/>
+            <a:ext cx="1371600" cy="64008"/>
           </a:xfrm>
           <a:prstGeom prst="rect">
             <a:avLst/>
           </a:prstGeom>
           <a:solidFill>
-            <a:srgbClr val="22D3EE"/>
+            <a:srgbClr val="2563EB"/>
           </a:solidFill>
           <a:ln>
             <a:noFill/>
@@ -4895,7 +4939,7 @@
         </p:nvSpPr>
         <p:spPr>
           <a:xfrm>
-            <a:off x="11338560" y="6400800"/>
+            <a:off x="11338560" y="6446520"/>
             <a:ext cx="640080" cy="365760"/>
           </a:xfrm>
           <a:prstGeom prst="rect">
@@ -4917,7 +4961,7 @@
             <a:r>
               <a:rPr sz="1000" b="0">
                 <a:solidFill>
-                  <a:srgbClr val="94A3B8"/>
+                  <a:srgbClr val="64748B"/>
                 </a:solidFill>
                 <a:latin typeface="Microsoft YaHei"/>
                 <a:ea typeface="Microsoft YaHei"/>
@@ -4957,12 +5001,12 @@
             <a:r>
               <a:rPr sz="1700" b="1">
                 <a:solidFill>
-                  <a:srgbClr val="FFFFFF"/>
-                </a:solidFill>
-                <a:latin typeface="Microsoft YaHei"/>
-                <a:ea typeface="Microsoft YaHei"/>
-              </a:rPr>
-              <a:t>▍求职者的难点不是“生成更好看的简历”，而是把零散经历变成可验证事实，再做可信决策</a:t>
+                  <a:srgbClr val="0F172A"/>
+                </a:solidFill>
+                <a:latin typeface="Microsoft YaHei"/>
+                <a:ea typeface="Microsoft YaHei"/>
+              </a:rPr>
+              <a:t>●  求职者的难点不是“生成更好看的简历”，而是把零散经历变成可验证事实，再做可信决策</a:t>
             </a:r>
           </a:p>
           <a:p>
@@ -4974,12 +5018,12 @@
             <a:r>
               <a:rPr sz="1500" b="0">
                 <a:solidFill>
-                  <a:srgbClr val="CBD5E1"/>
-                </a:solidFill>
-                <a:latin typeface="Microsoft YaHei"/>
-                <a:ea typeface="Microsoft YaHei"/>
-              </a:rPr>
-              <a:t>▍目标用户：求职者（校招/社招）与求职辅导者</a:t>
+                  <a:srgbClr val="334155"/>
+                </a:solidFill>
+                <a:latin typeface="Microsoft YaHei"/>
+                <a:ea typeface="Microsoft YaHei"/>
+              </a:rPr>
+              <a:t>●  目标用户：求职者（校招/社招）与求职辅导者</a:t>
             </a:r>
           </a:p>
           <a:p>
@@ -4991,12 +5035,12 @@
             <a:r>
               <a:rPr sz="1500" b="0">
                 <a:solidFill>
-                  <a:srgbClr val="CBD5E1"/>
-                </a:solidFill>
-                <a:latin typeface="Microsoft YaHei"/>
-                <a:ea typeface="Microsoft YaHei"/>
-              </a:rPr>
-              <a:t>▍输入：JD 原文 + 原始简历 + 项目化经历事实</a:t>
+                  <a:srgbClr val="334155"/>
+                </a:solidFill>
+                <a:latin typeface="Microsoft YaHei"/>
+                <a:ea typeface="Microsoft YaHei"/>
+              </a:rPr>
+              <a:t>●  输入：JD 原文 + 原始简历 + 项目化经历事实</a:t>
             </a:r>
           </a:p>
           <a:p>
@@ -5008,12 +5052,12 @@
             <a:r>
               <a:rPr sz="1500" b="0">
                 <a:solidFill>
-                  <a:srgbClr val="CBD5E1"/>
-                </a:solidFill>
-                <a:latin typeface="Microsoft YaHei"/>
-                <a:ea typeface="Microsoft YaHei"/>
-              </a:rPr>
-              <a:t>▍输出：可信的岗位准备度、岗位定制优化简历、可审计的投递交付</a:t>
+                  <a:srgbClr val="334155"/>
+                </a:solidFill>
+                <a:latin typeface="Microsoft YaHei"/>
+                <a:ea typeface="Microsoft YaHei"/>
+              </a:rPr>
+              <a:t>●  输出：可信的岗位准备度、岗位定制优化简历、可审计的投递交付</a:t>
             </a:r>
           </a:p>
           <a:p>
@@ -5025,12 +5069,12 @@
             <a:r>
               <a:rPr sz="1500" b="0">
                 <a:solidFill>
-                  <a:srgbClr val="22D3EE"/>
-                </a:solidFill>
-                <a:latin typeface="Microsoft YaHei"/>
-                <a:ea typeface="Microsoft YaHei"/>
-              </a:rPr>
-              <a:t>▍行业可复制性：任何“材料 → 决策 → 交付”的高可信场景（晋升、留学、招标）</a:t>
+                  <a:srgbClr val="2563EB"/>
+                </a:solidFill>
+                <a:latin typeface="Microsoft YaHei"/>
+                <a:ea typeface="Microsoft YaHei"/>
+              </a:rPr>
+              <a:t>●  行业可复制性：任何“材料 → 决策 → 交付”的高可信场景（晋升、留学、招标）</a:t>
             </a:r>
           </a:p>
           <a:p>
@@ -5042,12 +5086,12 @@
             <a:r>
               <a:rPr sz="1500" b="0">
                 <a:solidFill>
-                  <a:srgbClr val="34D399"/>
-                </a:solidFill>
-                <a:latin typeface="Microsoft YaHei"/>
-                <a:ea typeface="Microsoft YaHei"/>
-              </a:rPr>
-              <a:t>▍真实价值：减少误读与虚构，把主观美化变为可追溯、可复现的决策闭环</a:t>
+                  <a:srgbClr val="0D9488"/>
+                </a:solidFill>
+                <a:latin typeface="Microsoft YaHei"/>
+                <a:ea typeface="Microsoft YaHei"/>
+              </a:rPr>
+              <a:t>●  真实价值：减少误读与虚构，把主观美化变为可追溯、可复现的决策闭环</a:t>
             </a:r>
           </a:p>
         </p:txBody>
@@ -5085,7 +5129,7 @@
             <a:avLst/>
           </a:prstGeom>
           <a:solidFill>
-            <a:srgbClr val="0B1220"/>
+            <a:srgbClr val="FFFFFF"/>
           </a:solidFill>
           <a:ln>
             <a:noFill/>
@@ -5122,7 +5166,7 @@
         </p:nvSpPr>
         <p:spPr>
           <a:xfrm>
-            <a:off x="548640" y="320040"/>
+            <a:off x="548640" y="384048"/>
             <a:ext cx="11064240" cy="548640"/>
           </a:xfrm>
           <a:prstGeom prst="rect">
@@ -5144,7 +5188,7 @@
             <a:r>
               <a:rPr sz="2600" b="1">
                 <a:solidFill>
-                  <a:srgbClr val="FFFFFF"/>
+                  <a:srgbClr val="0F172A"/>
                 </a:solidFill>
                 <a:latin typeface="Microsoft YaHei"/>
                 <a:ea typeface="Microsoft YaHei"/>
@@ -5162,14 +5206,14 @@
         </p:nvSpPr>
         <p:spPr>
           <a:xfrm>
-            <a:off x="548640" y="1051560"/>
-            <a:ext cx="1463040" cy="54864"/>
+            <a:off x="548640" y="1115568"/>
+            <a:ext cx="1371600" cy="64008"/>
           </a:xfrm>
           <a:prstGeom prst="rect">
             <a:avLst/>
           </a:prstGeom>
           <a:solidFill>
-            <a:srgbClr val="22D3EE"/>
+            <a:srgbClr val="E11D48"/>
           </a:solidFill>
           <a:ln>
             <a:noFill/>
@@ -5206,7 +5250,7 @@
         </p:nvSpPr>
         <p:spPr>
           <a:xfrm>
-            <a:off x="11338560" y="6400800"/>
+            <a:off x="11338560" y="6446520"/>
             <a:ext cx="640080" cy="365760"/>
           </a:xfrm>
           <a:prstGeom prst="rect">
@@ -5228,7 +5272,7 @@
             <a:r>
               <a:rPr sz="1000" b="0">
                 <a:solidFill>
-                  <a:srgbClr val="94A3B8"/>
+                  <a:srgbClr val="64748B"/>
                 </a:solidFill>
                 <a:latin typeface="Microsoft YaHei"/>
                 <a:ea typeface="Microsoft YaHei"/>
@@ -5268,12 +5312,12 @@
             <a:r>
               <a:rPr sz="1700" b="1">
                 <a:solidFill>
-                  <a:srgbClr val="FB7185"/>
-                </a:solidFill>
-                <a:latin typeface="Microsoft YaHei"/>
-                <a:ea typeface="Microsoft YaHei"/>
-              </a:rPr>
-              <a:t>▍JD 误读</a:t>
+                  <a:srgbClr val="E11D48"/>
+                </a:solidFill>
+                <a:latin typeface="Microsoft YaHei"/>
+                <a:ea typeface="Microsoft YaHei"/>
+              </a:rPr>
+              <a:t>●  JD 误读</a:t>
             </a:r>
           </a:p>
           <a:p>
@@ -5285,12 +5329,12 @@
             <a:r>
               <a:rPr sz="1500" b="0">
                 <a:solidFill>
-                  <a:srgbClr val="CBD5E1"/>
-                </a:solidFill>
-                <a:latin typeface="Microsoft YaHei"/>
-                <a:ea typeface="Microsoft YaHei"/>
-              </a:rPr>
-              <a:t>▍关键词堆砌、漏读优先级与否定条件，把推断当要求</a:t>
+                  <a:srgbClr val="334155"/>
+                </a:solidFill>
+                <a:latin typeface="Microsoft YaHei"/>
+                <a:ea typeface="Microsoft YaHei"/>
+              </a:rPr>
+              <a:t>●  关键词堆砌、漏读优先级与否定条件，把推断当要求</a:t>
             </a:r>
           </a:p>
           <a:p>
@@ -5302,12 +5346,12 @@
             <a:r>
               <a:rPr sz="1700" b="1">
                 <a:solidFill>
-                  <a:srgbClr val="FB7185"/>
-                </a:solidFill>
-                <a:latin typeface="Microsoft YaHei"/>
-                <a:ea typeface="Microsoft YaHei"/>
-              </a:rPr>
-              <a:t>▍经历虚构</a:t>
+                  <a:srgbClr val="E11D48"/>
+                </a:solidFill>
+                <a:latin typeface="Microsoft YaHei"/>
+                <a:ea typeface="Microsoft YaHei"/>
+              </a:rPr>
+              <a:t>●  经历虚构</a:t>
             </a:r>
           </a:p>
           <a:p>
@@ -5319,12 +5363,12 @@
             <a:r>
               <a:rPr sz="1500" b="0">
                 <a:solidFill>
-                  <a:srgbClr val="CBD5E1"/>
-                </a:solidFill>
-                <a:latin typeface="Microsoft YaHei"/>
-                <a:ea typeface="Microsoft YaHei"/>
-              </a:rPr>
-              <a:t>▍AI 改写无依据、成果无法溯源，量化数字随口编</a:t>
+                  <a:srgbClr val="334155"/>
+                </a:solidFill>
+                <a:latin typeface="Microsoft YaHei"/>
+                <a:ea typeface="Microsoft YaHei"/>
+              </a:rPr>
+              <a:t>●  AI 改写无依据、成果无法溯源，量化数字随口编</a:t>
             </a:r>
           </a:p>
           <a:p>
@@ -5336,12 +5380,12 @@
             <a:r>
               <a:rPr sz="1700" b="1">
                 <a:solidFill>
-                  <a:srgbClr val="FB7185"/>
-                </a:solidFill>
-                <a:latin typeface="Microsoft YaHei"/>
-                <a:ea typeface="Microsoft YaHei"/>
-              </a:rPr>
-              <a:t>▍版本混乱</a:t>
+                  <a:srgbClr val="E11D48"/>
+                </a:solidFill>
+                <a:latin typeface="Microsoft YaHei"/>
+                <a:ea typeface="Microsoft YaHei"/>
+              </a:rPr>
+              <a:t>●  版本混乱</a:t>
             </a:r>
           </a:p>
           <a:p>
@@ -5353,12 +5397,12 @@
             <a:r>
               <a:rPr sz="1500" b="0">
                 <a:solidFill>
-                  <a:srgbClr val="CBD5E1"/>
-                </a:solidFill>
-                <a:latin typeface="Microsoft YaHei"/>
-                <a:ea typeface="Microsoft YaHei"/>
-              </a:rPr>
-              <a:t>▍多岗位版本交叉污染，新旧材料混用，导出旧结果</a:t>
+                  <a:srgbClr val="334155"/>
+                </a:solidFill>
+                <a:latin typeface="Microsoft YaHei"/>
+                <a:ea typeface="Microsoft YaHei"/>
+              </a:rPr>
+              <a:t>●  多岗位版本交叉污染，新旧材料混用，导出旧结果</a:t>
             </a:r>
           </a:p>
           <a:p>
@@ -5370,12 +5414,12 @@
             <a:r>
               <a:rPr sz="1700" b="1">
                 <a:solidFill>
-                  <a:srgbClr val="FB7185"/>
-                </a:solidFill>
-                <a:latin typeface="Microsoft YaHei"/>
-                <a:ea typeface="Microsoft YaHei"/>
-              </a:rPr>
-              <a:t>▍结果不可审计</a:t>
+                  <a:srgbClr val="E11D48"/>
+                </a:solidFill>
+                <a:latin typeface="Microsoft YaHei"/>
+                <a:ea typeface="Microsoft YaHei"/>
+              </a:rPr>
+              <a:t>●  结果不可审计</a:t>
             </a:r>
           </a:p>
           <a:p>
@@ -5387,12 +5431,12 @@
             <a:r>
               <a:rPr sz="1500" b="0">
                 <a:solidFill>
-                  <a:srgbClr val="CBD5E1"/>
-                </a:solidFill>
-                <a:latin typeface="Microsoft YaHei"/>
-                <a:ea typeface="Microsoft YaHei"/>
-              </a:rPr>
-              <a:t>▍评分靠模型自报，无法回放、无法复核</a:t>
+                  <a:srgbClr val="334155"/>
+                </a:solidFill>
+                <a:latin typeface="Microsoft YaHei"/>
+                <a:ea typeface="Microsoft YaHei"/>
+              </a:rPr>
+              <a:t>●  评分靠模型自报，无法回放、无法复核</a:t>
             </a:r>
           </a:p>
         </p:txBody>
@@ -5430,7 +5474,7 @@
             <a:avLst/>
           </a:prstGeom>
           <a:solidFill>
-            <a:srgbClr val="0B1220"/>
+            <a:srgbClr val="FFFFFF"/>
           </a:solidFill>
           <a:ln>
             <a:noFill/>
@@ -5467,7 +5511,7 @@
         </p:nvSpPr>
         <p:spPr>
           <a:xfrm>
-            <a:off x="548640" y="320040"/>
+            <a:off x="548640" y="384048"/>
             <a:ext cx="11064240" cy="548640"/>
           </a:xfrm>
           <a:prstGeom prst="rect">
@@ -5489,7 +5533,7 @@
             <a:r>
               <a:rPr sz="2600" b="1">
                 <a:solidFill>
-                  <a:srgbClr val="FFFFFF"/>
+                  <a:srgbClr val="0F172A"/>
                 </a:solidFill>
                 <a:latin typeface="Microsoft YaHei"/>
                 <a:ea typeface="Microsoft YaHei"/>
@@ -5507,14 +5551,14 @@
         </p:nvSpPr>
         <p:spPr>
           <a:xfrm>
-            <a:off x="548640" y="1051560"/>
-            <a:ext cx="1463040" cy="54864"/>
+            <a:off x="548640" y="1115568"/>
+            <a:ext cx="1371600" cy="64008"/>
           </a:xfrm>
           <a:prstGeom prst="rect">
             <a:avLst/>
           </a:prstGeom>
           <a:solidFill>
-            <a:srgbClr val="22D3EE"/>
+            <a:srgbClr val="2563EB"/>
           </a:solidFill>
           <a:ln>
             <a:noFill/>
@@ -5551,7 +5595,7 @@
         </p:nvSpPr>
         <p:spPr>
           <a:xfrm>
-            <a:off x="11338560" y="6400800"/>
+            <a:off x="11338560" y="6446520"/>
             <a:ext cx="640080" cy="365760"/>
           </a:xfrm>
           <a:prstGeom prst="rect">
@@ -5573,7 +5617,7 @@
             <a:r>
               <a:rPr sz="1000" b="0">
                 <a:solidFill>
-                  <a:srgbClr val="94A3B8"/>
+                  <a:srgbClr val="64748B"/>
                 </a:solidFill>
                 <a:latin typeface="Microsoft YaHei"/>
                 <a:ea typeface="Microsoft YaHei"/>
@@ -5613,7 +5657,7 @@
             <a:r>
               <a:rPr sz="2200" b="1">
                 <a:solidFill>
-                  <a:srgbClr val="22D3EE"/>
+                  <a:srgbClr val="4F46E5"/>
                 </a:solidFill>
                 <a:latin typeface="Microsoft YaHei"/>
                 <a:ea typeface="Microsoft YaHei"/>
@@ -5630,7 +5674,7 @@
             <a:r>
               <a:rPr sz="1500" b="0">
                 <a:solidFill>
-                  <a:srgbClr val="FBBF24"/>
+                  <a:srgbClr val="F59E0B"/>
                 </a:solidFill>
                 <a:latin typeface="Microsoft YaHei"/>
                 <a:ea typeface="Microsoft YaHei"/>
@@ -5670,12 +5714,12 @@
             <a:r>
               <a:rPr sz="1500" b="0">
                 <a:solidFill>
-                  <a:srgbClr val="CBD5E1"/>
-                </a:solidFill>
-                <a:latin typeface="Microsoft YaHei"/>
-                <a:ea typeface="Microsoft YaHei"/>
-              </a:rPr>
-              <a:t>▍材料：岗位/JD/简历 + 项目化事实库（带原文引用与确认状态）</a:t>
+                  <a:srgbClr val="334155"/>
+                </a:solidFill>
+                <a:latin typeface="Microsoft YaHei"/>
+                <a:ea typeface="Microsoft YaHei"/>
+              </a:rPr>
+              <a:t>●  材料：岗位/JD/简历 + 项目化事实库（带原文引用与确认状态）</a:t>
             </a:r>
           </a:p>
           <a:p>
@@ -5687,12 +5731,12 @@
             <a:r>
               <a:rPr sz="1500" b="0">
                 <a:solidFill>
-                  <a:srgbClr val="CBD5E1"/>
-                </a:solidFill>
-                <a:latin typeface="Microsoft YaHei"/>
-                <a:ea typeface="Microsoft YaHei"/>
-              </a:rPr>
-              <a:t>▍分析：JD 决策地图 → 人工确认 → 事实匹配 → 准备度/缺口 → 定向补证</a:t>
+                  <a:srgbClr val="334155"/>
+                </a:solidFill>
+                <a:latin typeface="Microsoft YaHei"/>
+                <a:ea typeface="Microsoft YaHei"/>
+              </a:rPr>
+              <a:t>●  分析：JD 决策地图 → 人工确认 → 事实匹配 → 准备度/缺口 → 定向补证</a:t>
             </a:r>
           </a:p>
           <a:p>
@@ -5704,12 +5748,12 @@
             <a:r>
               <a:rPr sz="1500" b="0">
                 <a:solidFill>
-                  <a:srgbClr val="CBD5E1"/>
-                </a:solidFill>
-                <a:latin typeface="Microsoft YaHei"/>
-                <a:ea typeface="Microsoft YaHei"/>
-              </a:rPr>
-              <a:t>▍制作：仅基于已确认事实生成优化方案与简历草稿 → 逐项采用</a:t>
+                  <a:srgbClr val="334155"/>
+                </a:solidFill>
+                <a:latin typeface="Microsoft YaHei"/>
+                <a:ea typeface="Microsoft YaHei"/>
+              </a:rPr>
+              <a:t>●  制作：仅基于已确认事实生成优化方案与简历草稿 → 逐项采用</a:t>
             </a:r>
           </a:p>
           <a:p>
@@ -5721,12 +5765,12 @@
             <a:r>
               <a:rPr sz="1500" b="0">
                 <a:solidFill>
-                  <a:srgbClr val="CBD5E1"/>
-                </a:solidFill>
-                <a:latin typeface="Microsoft YaHei"/>
-                <a:ea typeface="Microsoft YaHei"/>
-              </a:rPr>
-              <a:t>▍交付：ATS 就绪度 + 导出门禁 + 投递记录；面试策略不阻塞交付</a:t>
+                  <a:srgbClr val="334155"/>
+                </a:solidFill>
+                <a:latin typeface="Microsoft YaHei"/>
+                <a:ea typeface="Microsoft YaHei"/>
+              </a:rPr>
+              <a:t>●  交付：ATS 就绪度 + 导出门禁 + 投递记录；面试策略不阻塞交付</a:t>
             </a:r>
           </a:p>
         </p:txBody>
@@ -5764,7 +5808,7 @@
             <a:avLst/>
           </a:prstGeom>
           <a:solidFill>
-            <a:srgbClr val="0B1220"/>
+            <a:srgbClr val="FFFFFF"/>
           </a:solidFill>
           <a:ln>
             <a:noFill/>
@@ -5801,7 +5845,7 @@
         </p:nvSpPr>
         <p:spPr>
           <a:xfrm>
-            <a:off x="548640" y="320040"/>
+            <a:off x="548640" y="384048"/>
             <a:ext cx="11064240" cy="548640"/>
           </a:xfrm>
           <a:prstGeom prst="rect">
@@ -5823,7 +5867,7 @@
             <a:r>
               <a:rPr sz="2600" b="1">
                 <a:solidFill>
-                  <a:srgbClr val="FFFFFF"/>
+                  <a:srgbClr val="0F172A"/>
                 </a:solidFill>
                 <a:latin typeface="Microsoft YaHei"/>
                 <a:ea typeface="Microsoft YaHei"/>
@@ -5841,14 +5885,14 @@
         </p:nvSpPr>
         <p:spPr>
           <a:xfrm>
-            <a:off x="548640" y="1051560"/>
-            <a:ext cx="1463040" cy="54864"/>
+            <a:off x="548640" y="1115568"/>
+            <a:ext cx="1371600" cy="64008"/>
           </a:xfrm>
           <a:prstGeom prst="rect">
             <a:avLst/>
           </a:prstGeom>
           <a:solidFill>
-            <a:srgbClr val="22D3EE"/>
+            <a:srgbClr val="7C3AED"/>
           </a:solidFill>
           <a:ln>
             <a:noFill/>
@@ -5885,7 +5929,7 @@
         </p:nvSpPr>
         <p:spPr>
           <a:xfrm>
-            <a:off x="11338560" y="6400800"/>
+            <a:off x="11338560" y="6446520"/>
             <a:ext cx="640080" cy="365760"/>
           </a:xfrm>
           <a:prstGeom prst="rect">
@@ -5907,7 +5951,7 @@
             <a:r>
               <a:rPr sz="1000" b="0">
                 <a:solidFill>
-                  <a:srgbClr val="94A3B8"/>
+                  <a:srgbClr val="64748B"/>
                 </a:solidFill>
                 <a:latin typeface="Microsoft YaHei"/>
                 <a:ea typeface="Microsoft YaHei"/>
@@ -5947,12 +5991,12 @@
             <a:r>
               <a:rPr sz="1500" b="0">
                 <a:solidFill>
-                  <a:srgbClr val="CBD5E1"/>
-                </a:solidFill>
-                <a:latin typeface="Microsoft YaHei"/>
-                <a:ea typeface="Microsoft YaHei"/>
-              </a:rPr>
-              <a:t>▍入口层：岗位 / JD / 简历 / 证据 / 导出</a:t>
+                  <a:srgbClr val="334155"/>
+                </a:solidFill>
+                <a:latin typeface="Microsoft YaHei"/>
+                <a:ea typeface="Microsoft YaHei"/>
+              </a:rPr>
+              <a:t>●  入口层：岗位 / JD / 简历 / 证据 / 导出</a:t>
             </a:r>
           </a:p>
           <a:p>
@@ -5964,12 +6008,12 @@
             <a:r>
               <a:rPr sz="1500" b="1">
                 <a:solidFill>
-                  <a:srgbClr val="22D3EE"/>
-                </a:solidFill>
-                <a:latin typeface="Microsoft YaHei"/>
-                <a:ea typeface="Microsoft YaHei"/>
-              </a:rPr>
-              <a:t>▍AgentTeams 编排层：主控任务拆解、阶段路由、上下文编排、状态追踪</a:t>
+                  <a:srgbClr val="4F46E5"/>
+                </a:solidFill>
+                <a:latin typeface="Microsoft YaHei"/>
+                <a:ea typeface="Microsoft YaHei"/>
+              </a:rPr>
+              <a:t>●  AgentTeams 编排层：主控任务拆解、阶段路由、上下文编排、状态追踪</a:t>
             </a:r>
           </a:p>
           <a:p>
@@ -5981,12 +6025,12 @@
             <a:r>
               <a:rPr sz="1500" b="0">
                 <a:solidFill>
-                  <a:srgbClr val="A78BFA"/>
-                </a:solidFill>
-                <a:latin typeface="Microsoft YaHei"/>
-                <a:ea typeface="Microsoft YaHei"/>
-              </a:rPr>
-              <a:t>▍多 Agent 层：JobRequirementAnalyst · EvidenceCurator · ResumeStrategist · QualityDeliveryGuardian</a:t>
+                  <a:srgbClr val="7C3AED"/>
+                </a:solidFill>
+                <a:latin typeface="Microsoft YaHei"/>
+                <a:ea typeface="Microsoft YaHei"/>
+              </a:rPr>
+              <a:t>●  多 Agent 层：JobRequirementAnalyst · EvidenceCurator · ResumeStrategist · QualityDeliveryGuardian</a:t>
             </a:r>
           </a:p>
           <a:p>
@@ -5998,12 +6042,12 @@
             <a:r>
               <a:rPr sz="1500" b="0">
                 <a:solidFill>
-                  <a:srgbClr val="34D399"/>
-                </a:solidFill>
-                <a:latin typeface="Microsoft YaHei"/>
-                <a:ea typeface="Microsoft YaHei"/>
-              </a:rPr>
-              <a:t>▍Skill 能力层：材料校验 · JD 决策地图 · 事实检索 · 补证 · 可信改写 · 交付门禁 · Trace · 评测</a:t>
+                  <a:srgbClr val="0D9488"/>
+                </a:solidFill>
+                <a:latin typeface="Microsoft YaHei"/>
+                <a:ea typeface="Microsoft YaHei"/>
+              </a:rPr>
+              <a:t>●  Skill 能力层：材料校验 · JD 决策地图 · 事实检索 · 补证 · 可信改写 · 交付门禁 · Trace · 评测</a:t>
             </a:r>
           </a:p>
           <a:p>
@@ -6015,12 +6059,12 @@
             <a:r>
               <a:rPr sz="1500" b="0">
                 <a:solidFill>
-                  <a:srgbClr val="CBD5E1"/>
-                </a:solidFill>
-                <a:latin typeface="Microsoft YaHei"/>
-                <a:ea typeface="Microsoft YaHei"/>
-              </a:rPr>
-              <a:t>▍连接器契约层：DirectLLM / Mock / 导入解析 / 导出（MCP 等价，见材料 05）</a:t>
+                  <a:srgbClr val="334155"/>
+                </a:solidFill>
+                <a:latin typeface="Microsoft YaHei"/>
+                <a:ea typeface="Microsoft YaHei"/>
+              </a:rPr>
+              <a:t>●  连接器契约层：DirectLLM / Mock / 导入解析 / 导出（MCP 等价，见材料 05）</a:t>
             </a:r>
           </a:p>
           <a:p>
@@ -6032,12 +6076,12 @@
             <a:r>
               <a:rPr sz="1500" b="0">
                 <a:solidFill>
-                  <a:srgbClr val="CBD5E1"/>
-                </a:solidFill>
-                <a:latin typeface="Microsoft YaHei"/>
-                <a:ea typeface="Microsoft YaHei"/>
-              </a:rPr>
-              <a:t>▍证据治理层：共享状态 + Studio Trace + Zod 校验 + 评测集</a:t>
+                  <a:srgbClr val="334155"/>
+                </a:solidFill>
+                <a:latin typeface="Microsoft YaHei"/>
+                <a:ea typeface="Microsoft YaHei"/>
+              </a:rPr>
+              <a:t>●  证据治理层：共享状态 + Studio Trace + Zod 校验 + 评测集</a:t>
             </a:r>
           </a:p>
         </p:txBody>
@@ -6075,7 +6119,7 @@
             <a:avLst/>
           </a:prstGeom>
           <a:solidFill>
-            <a:srgbClr val="0B1220"/>
+            <a:srgbClr val="FFFFFF"/>
           </a:solidFill>
           <a:ln>
             <a:noFill/>
@@ -6112,7 +6156,7 @@
         </p:nvSpPr>
         <p:spPr>
           <a:xfrm>
-            <a:off x="548640" y="320040"/>
+            <a:off x="548640" y="384048"/>
             <a:ext cx="11064240" cy="548640"/>
           </a:xfrm>
           <a:prstGeom prst="rect">
@@ -6134,7 +6178,7 @@
             <a:r>
               <a:rPr sz="2600" b="1">
                 <a:solidFill>
-                  <a:srgbClr val="FFFFFF"/>
+                  <a:srgbClr val="0F172A"/>
                 </a:solidFill>
                 <a:latin typeface="Microsoft YaHei"/>
                 <a:ea typeface="Microsoft YaHei"/>
@@ -6152,14 +6196,14 @@
         </p:nvSpPr>
         <p:spPr>
           <a:xfrm>
-            <a:off x="548640" y="1051560"/>
-            <a:ext cx="1463040" cy="54864"/>
+            <a:off x="548640" y="1115568"/>
+            <a:ext cx="1371600" cy="64008"/>
           </a:xfrm>
           <a:prstGeom prst="rect">
             <a:avLst/>
           </a:prstGeom>
           <a:solidFill>
-            <a:srgbClr val="22D3EE"/>
+            <a:srgbClr val="0EA5E9"/>
           </a:solidFill>
           <a:ln>
             <a:noFill/>
@@ -6196,7 +6240,7 @@
         </p:nvSpPr>
         <p:spPr>
           <a:xfrm>
-            <a:off x="11338560" y="6400800"/>
+            <a:off x="11338560" y="6446520"/>
             <a:ext cx="640080" cy="365760"/>
           </a:xfrm>
           <a:prstGeom prst="rect">
@@ -6218,7 +6262,7 @@
             <a:r>
               <a:rPr sz="1000" b="0">
                 <a:solidFill>
-                  <a:srgbClr val="94A3B8"/>
+                  <a:srgbClr val="64748B"/>
                 </a:solidFill>
                 <a:latin typeface="Microsoft YaHei"/>
                 <a:ea typeface="Microsoft YaHei"/>
@@ -6258,7 +6302,7 @@
             <a:r>
               <a:rPr sz="1600" b="1">
                 <a:solidFill>
-                  <a:srgbClr val="22D3EE"/>
+                  <a:srgbClr val="0EA5E9"/>
                 </a:solidFill>
                 <a:latin typeface="Microsoft YaHei"/>
                 <a:ea typeface="Microsoft YaHei"/>
@@ -6298,12 +6342,12 @@
             <a:r>
               <a:rPr sz="1500" b="0">
                 <a:solidFill>
-                  <a:srgbClr val="CBD5E1"/>
-                </a:solidFill>
-                <a:latin typeface="Microsoft YaHei"/>
-                <a:ea typeface="Microsoft YaHei"/>
-              </a:rPr>
-              <a:t>▍缺口 → 补证 → 重匹配 构成回流，事实确认后重新参与匹配</a:t>
+                  <a:srgbClr val="334155"/>
+                </a:solidFill>
+                <a:latin typeface="Microsoft YaHei"/>
+                <a:ea typeface="Microsoft YaHei"/>
+              </a:rPr>
+              <a:t>●  缺口 → 补证 → 重匹配 构成回流，事实确认后重新参与匹配</a:t>
             </a:r>
           </a:p>
           <a:p>
@@ -6315,12 +6359,12 @@
             <a:r>
               <a:rPr sz="1500" b="0">
                 <a:solidFill>
-                  <a:srgbClr val="94A3B8"/>
-                </a:solidFill>
-                <a:latin typeface="Microsoft YaHei"/>
-                <a:ea typeface="Microsoft YaHei"/>
-              </a:rPr>
-              <a:t>▍面试准备 / 复盘为辅助流程，不阻塞简历交付</a:t>
+                  <a:srgbClr val="64748B"/>
+                </a:solidFill>
+                <a:latin typeface="Microsoft YaHei"/>
+                <a:ea typeface="Microsoft YaHei"/>
+              </a:rPr>
+              <a:t>●  面试准备 / 复盘为辅助流程，不阻塞简历交付</a:t>
             </a:r>
           </a:p>
           <a:p>
@@ -6332,12 +6376,12 @@
             <a:r>
               <a:rPr sz="1500" b="0">
                 <a:solidFill>
-                  <a:srgbClr val="FBBF24"/>
-                </a:solidFill>
-                <a:latin typeface="Microsoft YaHei"/>
-                <a:ea typeface="Microsoft YaHei"/>
-              </a:rPr>
-              <a:t>▍依赖变化（JD/材料/事实/风格）→ 结果置为过期，禁止导出旧结果</a:t>
+                  <a:srgbClr val="F59E0B"/>
+                </a:solidFill>
+                <a:latin typeface="Microsoft YaHei"/>
+                <a:ea typeface="Microsoft YaHei"/>
+              </a:rPr>
+              <a:t>●  依赖变化（JD/材料/事实/风格）→ 结果置为过期，禁止导出旧结果</a:t>
             </a:r>
           </a:p>
           <a:p>
@@ -6349,12 +6393,12 @@
             <a:r>
               <a:rPr sz="1500" b="0">
                 <a:solidFill>
-                  <a:srgbClr val="34D399"/>
-                </a:solidFill>
-                <a:latin typeface="Microsoft YaHei"/>
-                <a:ea typeface="Microsoft YaHei"/>
-              </a:rPr>
-              <a:t>▍上下文传递：requirementId · claimId · traceId 贯穿引用链</a:t>
+                  <a:srgbClr val="0D9488"/>
+                </a:solidFill>
+                <a:latin typeface="Microsoft YaHei"/>
+                <a:ea typeface="Microsoft YaHei"/>
+              </a:rPr>
+              <a:t>●  上下文传递：requirementId · claimId · traceId 贯穿引用链</a:t>
             </a:r>
           </a:p>
         </p:txBody>
@@ -6392,7 +6436,7 @@
             <a:avLst/>
           </a:prstGeom>
           <a:solidFill>
-            <a:srgbClr val="0B1220"/>
+            <a:srgbClr val="FFFFFF"/>
           </a:solidFill>
           <a:ln>
             <a:noFill/>
@@ -6429,7 +6473,7 @@
         </p:nvSpPr>
         <p:spPr>
           <a:xfrm>
-            <a:off x="548640" y="320040"/>
+            <a:off x="548640" y="384048"/>
             <a:ext cx="11064240" cy="548640"/>
           </a:xfrm>
           <a:prstGeom prst="rect">
@@ -6451,7 +6495,7 @@
             <a:r>
               <a:rPr sz="2600" b="1">
                 <a:solidFill>
-                  <a:srgbClr val="FFFFFF"/>
+                  <a:srgbClr val="0F172A"/>
                 </a:solidFill>
                 <a:latin typeface="Microsoft YaHei"/>
                 <a:ea typeface="Microsoft YaHei"/>
@@ -6469,14 +6513,14 @@
         </p:nvSpPr>
         <p:spPr>
           <a:xfrm>
-            <a:off x="548640" y="1051560"/>
-            <a:ext cx="1463040" cy="54864"/>
+            <a:off x="548640" y="1115568"/>
+            <a:ext cx="1371600" cy="64008"/>
           </a:xfrm>
           <a:prstGeom prst="rect">
             <a:avLst/>
           </a:prstGeom>
           <a:solidFill>
-            <a:srgbClr val="22D3EE"/>
+            <a:srgbClr val="7C3AED"/>
           </a:solidFill>
           <a:ln>
             <a:noFill/>
@@ -6513,7 +6557,7 @@
         </p:nvSpPr>
         <p:spPr>
           <a:xfrm>
-            <a:off x="11338560" y="6400800"/>
+            <a:off x="11338560" y="6446520"/>
             <a:ext cx="640080" cy="365760"/>
           </a:xfrm>
           <a:prstGeom prst="rect">
@@ -6535,7 +6579,7 @@
             <a:r>
               <a:rPr sz="1000" b="0">
                 <a:solidFill>
-                  <a:srgbClr val="94A3B8"/>
+                  <a:srgbClr val="64748B"/>
                 </a:solidFill>
                 <a:latin typeface="Microsoft YaHei"/>
                 <a:ea typeface="Microsoft YaHei"/>
@@ -6575,7 +6619,7 @@
             <a:r>
               <a:rPr sz="1300" b="1">
                 <a:solidFill>
-                  <a:srgbClr val="FFFFFF"/>
+                  <a:srgbClr val="0F172A"/>
                 </a:solidFill>
                 <a:latin typeface="Microsoft YaHei"/>
                 <a:ea typeface="Microsoft YaHei"/>
@@ -6615,7 +6659,7 @@
             <a:r>
               <a:rPr sz="1300" b="1">
                 <a:solidFill>
-                  <a:srgbClr val="FFFFFF"/>
+                  <a:srgbClr val="0F172A"/>
                 </a:solidFill>
                 <a:latin typeface="Microsoft YaHei"/>
                 <a:ea typeface="Microsoft YaHei"/>
@@ -6655,7 +6699,7 @@
             <a:r>
               <a:rPr sz="1200" b="1">
                 <a:solidFill>
-                  <a:srgbClr val="FFFFFF"/>
+                  <a:srgbClr val="0F172A"/>
                 </a:solidFill>
                 <a:latin typeface="Microsoft YaHei"/>
                 <a:ea typeface="Microsoft YaHei"/>
@@ -6695,7 +6739,7 @@
             <a:r>
               <a:rPr sz="1300" b="0">
                 <a:solidFill>
-                  <a:srgbClr val="22D3EE"/>
+                  <a:srgbClr val="4F46E5"/>
                 </a:solidFill>
                 <a:latin typeface="Microsoft YaHei"/>
                 <a:ea typeface="Microsoft YaHei"/>
@@ -6735,7 +6779,7 @@
             <a:r>
               <a:rPr sz="1300" b="0">
                 <a:solidFill>
-                  <a:srgbClr val="CBD5E1"/>
+                  <a:srgbClr val="334155"/>
                 </a:solidFill>
                 <a:latin typeface="Microsoft YaHei"/>
                 <a:ea typeface="Microsoft YaHei"/>
@@ -6775,7 +6819,7 @@
             <a:r>
               <a:rPr sz="1200" b="0">
                 <a:solidFill>
-                  <a:srgbClr val="FBBF24"/>
+                  <a:srgbClr val="F59E0B"/>
                 </a:solidFill>
                 <a:latin typeface="Microsoft YaHei"/>
                 <a:ea typeface="Microsoft YaHei"/>
@@ -6815,7 +6859,7 @@
             <a:r>
               <a:rPr sz="1300" b="0">
                 <a:solidFill>
-                  <a:srgbClr val="22D3EE"/>
+                  <a:srgbClr val="4F46E5"/>
                 </a:solidFill>
                 <a:latin typeface="Microsoft YaHei"/>
                 <a:ea typeface="Microsoft YaHei"/>
@@ -6855,7 +6899,7 @@
             <a:r>
               <a:rPr sz="1300" b="0">
                 <a:solidFill>
-                  <a:srgbClr val="CBD5E1"/>
+                  <a:srgbClr val="334155"/>
                 </a:solidFill>
                 <a:latin typeface="Microsoft YaHei"/>
                 <a:ea typeface="Microsoft YaHei"/>
@@ -6895,7 +6939,7 @@
             <a:r>
               <a:rPr sz="1200" b="0">
                 <a:solidFill>
-                  <a:srgbClr val="FBBF24"/>
+                  <a:srgbClr val="F59E0B"/>
                 </a:solidFill>
                 <a:latin typeface="Microsoft YaHei"/>
                 <a:ea typeface="Microsoft YaHei"/>
@@ -6935,7 +6979,7 @@
             <a:r>
               <a:rPr sz="1300" b="0">
                 <a:solidFill>
-                  <a:srgbClr val="22D3EE"/>
+                  <a:srgbClr val="4F46E5"/>
                 </a:solidFill>
                 <a:latin typeface="Microsoft YaHei"/>
                 <a:ea typeface="Microsoft YaHei"/>
@@ -6975,7 +7019,7 @@
             <a:r>
               <a:rPr sz="1300" b="0">
                 <a:solidFill>
-                  <a:srgbClr val="CBD5E1"/>
+                  <a:srgbClr val="334155"/>
                 </a:solidFill>
                 <a:latin typeface="Microsoft YaHei"/>
                 <a:ea typeface="Microsoft YaHei"/>
@@ -7015,7 +7059,7 @@
             <a:r>
               <a:rPr sz="1200" b="0">
                 <a:solidFill>
-                  <a:srgbClr val="FBBF24"/>
+                  <a:srgbClr val="F59E0B"/>
                 </a:solidFill>
                 <a:latin typeface="Microsoft YaHei"/>
                 <a:ea typeface="Microsoft YaHei"/>
@@ -7055,7 +7099,7 @@
             <a:r>
               <a:rPr sz="1300" b="0">
                 <a:solidFill>
-                  <a:srgbClr val="22D3EE"/>
+                  <a:srgbClr val="4F46E5"/>
                 </a:solidFill>
                 <a:latin typeface="Microsoft YaHei"/>
                 <a:ea typeface="Microsoft YaHei"/>
@@ -7095,7 +7139,7 @@
             <a:r>
               <a:rPr sz="1300" b="0">
                 <a:solidFill>
-                  <a:srgbClr val="CBD5E1"/>
+                  <a:srgbClr val="334155"/>
                 </a:solidFill>
                 <a:latin typeface="Microsoft YaHei"/>
                 <a:ea typeface="Microsoft YaHei"/>
@@ -7135,7 +7179,7 @@
             <a:r>
               <a:rPr sz="1200" b="0">
                 <a:solidFill>
-                  <a:srgbClr val="FBBF24"/>
+                  <a:srgbClr val="F59E0B"/>
                 </a:solidFill>
                 <a:latin typeface="Microsoft YaHei"/>
                 <a:ea typeface="Microsoft YaHei"/>
@@ -7178,7 +7222,7 @@
             <a:avLst/>
           </a:prstGeom>
           <a:solidFill>
-            <a:srgbClr val="0B1220"/>
+            <a:srgbClr val="FFFFFF"/>
           </a:solidFill>
           <a:ln>
             <a:noFill/>
@@ -7215,7 +7259,7 @@
         </p:nvSpPr>
         <p:spPr>
           <a:xfrm>
-            <a:off x="548640" y="320040"/>
+            <a:off x="548640" y="384048"/>
             <a:ext cx="11064240" cy="548640"/>
           </a:xfrm>
           <a:prstGeom prst="rect">
@@ -7237,7 +7281,7 @@
             <a:r>
               <a:rPr sz="2600" b="1">
                 <a:solidFill>
-                  <a:srgbClr val="FFFFFF"/>
+                  <a:srgbClr val="0F172A"/>
                 </a:solidFill>
                 <a:latin typeface="Microsoft YaHei"/>
                 <a:ea typeface="Microsoft YaHei"/>
@@ -7255,14 +7299,14 @@
         </p:nvSpPr>
         <p:spPr>
           <a:xfrm>
-            <a:off x="548640" y="1051560"/>
-            <a:ext cx="1463040" cy="54864"/>
+            <a:off x="548640" y="1115568"/>
+            <a:ext cx="1371600" cy="64008"/>
           </a:xfrm>
           <a:prstGeom prst="rect">
             <a:avLst/>
           </a:prstGeom>
           <a:solidFill>
-            <a:srgbClr val="22D3EE"/>
+            <a:srgbClr val="0D9488"/>
           </a:solidFill>
           <a:ln>
             <a:noFill/>
@@ -7299,7 +7343,7 @@
         </p:nvSpPr>
         <p:spPr>
           <a:xfrm>
-            <a:off x="11338560" y="6400800"/>
+            <a:off x="11338560" y="6446520"/>
             <a:ext cx="640080" cy="365760"/>
           </a:xfrm>
           <a:prstGeom prst="rect">
@@ -7321,7 +7365,7 @@
             <a:r>
               <a:rPr sz="1000" b="0">
                 <a:solidFill>
-                  <a:srgbClr val="94A3B8"/>
+                  <a:srgbClr val="64748B"/>
                 </a:solidFill>
                 <a:latin typeface="Microsoft YaHei"/>
                 <a:ea typeface="Microsoft YaHei"/>
@@ -7361,12 +7405,12 @@
             <a:r>
               <a:rPr sz="1500" b="0">
                 <a:solidFill>
-                  <a:srgbClr val="CBD5E1"/>
-                </a:solidFill>
-                <a:latin typeface="Microsoft YaHei"/>
-                <a:ea typeface="Microsoft YaHei"/>
-              </a:rPr>
-              <a:t>▍material-validation 材料校验 → 主控前置门禁</a:t>
+                  <a:srgbClr val="334155"/>
+                </a:solidFill>
+                <a:latin typeface="Microsoft YaHei"/>
+                <a:ea typeface="Microsoft YaHei"/>
+              </a:rPr>
+              <a:t>●  material-validation 材料校验 → 主控前置门禁</a:t>
             </a:r>
           </a:p>
           <a:p>
@@ -7378,12 +7422,12 @@
             <a:r>
               <a:rPr sz="1500" b="0">
                 <a:solidFill>
-                  <a:srgbClr val="CBD5E1"/>
-                </a:solidFill>
-                <a:latin typeface="Microsoft YaHei"/>
-                <a:ea typeface="Microsoft YaHei"/>
-              </a:rPr>
-              <a:t>▍jd-decision-map JD 决策地图 → JobRequirementAnalyst</a:t>
+                  <a:srgbClr val="334155"/>
+                </a:solidFill>
+                <a:latin typeface="Microsoft YaHei"/>
+                <a:ea typeface="Microsoft YaHei"/>
+              </a:rPr>
+              <a:t>●  jd-decision-map JD 决策地图 → JobRequirementAnalyst</a:t>
             </a:r>
           </a:p>
           <a:p>
@@ -7395,12 +7439,12 @@
             <a:r>
               <a:rPr sz="1500" b="0">
                 <a:solidFill>
-                  <a:srgbClr val="CBD5E1"/>
-                </a:solidFill>
-                <a:latin typeface="Microsoft YaHei"/>
-                <a:ea typeface="Microsoft YaHei"/>
-              </a:rPr>
-              <a:t>▍fact-retrieval / evidence-curation 事实检索与补证 → EvidenceCurator</a:t>
+                  <a:srgbClr val="334155"/>
+                </a:solidFill>
+                <a:latin typeface="Microsoft YaHei"/>
+                <a:ea typeface="Microsoft YaHei"/>
+              </a:rPr>
+              <a:t>●  fact-retrieval / evidence-curation 事实检索与补证 → EvidenceCurator</a:t>
             </a:r>
           </a:p>
           <a:p>
@@ -7412,12 +7456,12 @@
             <a:r>
               <a:rPr sz="1500" b="0">
                 <a:solidFill>
-                  <a:srgbClr val="CBD5E1"/>
-                </a:solidFill>
-                <a:latin typeface="Microsoft YaHei"/>
-                <a:ea typeface="Microsoft YaHei"/>
-              </a:rPr>
-              <a:t>▍trusted-rewrite 可信改写 → ResumeStrategist</a:t>
+                  <a:srgbClr val="334155"/>
+                </a:solidFill>
+                <a:latin typeface="Microsoft YaHei"/>
+                <a:ea typeface="Microsoft YaHei"/>
+              </a:rPr>
+              <a:t>●  trusted-rewrite 可信改写 → ResumeStrategist</a:t>
             </a:r>
           </a:p>
           <a:p>
@@ -7429,12 +7473,12 @@
             <a:r>
               <a:rPr sz="1500" b="0">
                 <a:solidFill>
-                  <a:srgbClr val="CBD5E1"/>
-                </a:solidFill>
-                <a:latin typeface="Microsoft YaHei"/>
-                <a:ea typeface="Microsoft YaHei"/>
-              </a:rPr>
-              <a:t>▍delivery-gate 交付门禁 → QualityDeliveryGuardian</a:t>
+                  <a:srgbClr val="334155"/>
+                </a:solidFill>
+                <a:latin typeface="Microsoft YaHei"/>
+                <a:ea typeface="Microsoft YaHei"/>
+              </a:rPr>
+              <a:t>●  delivery-gate 交付门禁 → QualityDeliveryGuardian</a:t>
             </a:r>
           </a:p>
           <a:p>
@@ -7446,12 +7490,12 @@
             <a:r>
               <a:rPr sz="1500" b="0">
                 <a:solidFill>
-                  <a:srgbClr val="CBD5E1"/>
-                </a:solidFill>
-                <a:latin typeface="Microsoft YaHei"/>
-                <a:ea typeface="Microsoft YaHei"/>
-              </a:rPr>
-              <a:t>▍trace-observability / mock-evaluation 可观测与评测 → 全部</a:t>
+                  <a:srgbClr val="334155"/>
+                </a:solidFill>
+                <a:latin typeface="Microsoft YaHei"/>
+                <a:ea typeface="Microsoft YaHei"/>
+              </a:rPr>
+              <a:t>●  trace-observability / mock-evaluation 可观测与评测 → 全部</a:t>
             </a:r>
           </a:p>
           <a:p>
@@ -7463,12 +7507,12 @@
             <a:r>
               <a:rPr sz="1500" b="1">
                 <a:solidFill>
-                  <a:srgbClr val="FBBF24"/>
-                </a:solidFill>
-                <a:latin typeface="Microsoft YaHei"/>
-                <a:ea typeface="Microsoft YaHei"/>
-              </a:rPr>
-              <a:t>▍统一披露：输入输出 / 调用条件 / 依赖 / 失败处理 / 权限安全 / 复用价值（见材料 04）</a:t>
+                  <a:srgbClr val="F59E0B"/>
+                </a:solidFill>
+                <a:latin typeface="Microsoft YaHei"/>
+                <a:ea typeface="Microsoft YaHei"/>
+              </a:rPr>
+              <a:t>●  统一披露：输入输出 / 调用条件 / 依赖 / 失败处理 / 权限安全 / 复用价值（见材料 04）</a:t>
             </a:r>
           </a:p>
         </p:txBody>
@@ -7506,7 +7550,7 @@
             <a:avLst/>
           </a:prstGeom>
           <a:solidFill>
-            <a:srgbClr val="0B1220"/>
+            <a:srgbClr val="FFFFFF"/>
           </a:solidFill>
           <a:ln>
             <a:noFill/>
@@ -7543,7 +7587,7 @@
         </p:nvSpPr>
         <p:spPr>
           <a:xfrm>
-            <a:off x="548640" y="320040"/>
+            <a:off x="548640" y="384048"/>
             <a:ext cx="11064240" cy="548640"/>
           </a:xfrm>
           <a:prstGeom prst="rect">
@@ -7565,7 +7609,7 @@
             <a:r>
               <a:rPr sz="2600" b="1">
                 <a:solidFill>
-                  <a:srgbClr val="FFFFFF"/>
+                  <a:srgbClr val="0F172A"/>
                 </a:solidFill>
                 <a:latin typeface="Microsoft YaHei"/>
                 <a:ea typeface="Microsoft YaHei"/>
@@ -7583,14 +7627,14 @@
         </p:nvSpPr>
         <p:spPr>
           <a:xfrm>
-            <a:off x="548640" y="1051560"/>
-            <a:ext cx="1463040" cy="54864"/>
+            <a:off x="548640" y="1115568"/>
+            <a:ext cx="1371600" cy="64008"/>
           </a:xfrm>
           <a:prstGeom prst="rect">
             <a:avLst/>
           </a:prstGeom>
           <a:solidFill>
-            <a:srgbClr val="22D3EE"/>
+            <a:srgbClr val="0D9488"/>
           </a:solidFill>
           <a:ln>
             <a:noFill/>
@@ -7627,7 +7671,7 @@
         </p:nvSpPr>
         <p:spPr>
           <a:xfrm>
-            <a:off x="11338560" y="6400800"/>
+            <a:off x="11338560" y="6446520"/>
             <a:ext cx="640080" cy="365760"/>
           </a:xfrm>
           <a:prstGeom prst="rect">
@@ -7649,7 +7693,7 @@
             <a:r>
               <a:rPr sz="1000" b="0">
                 <a:solidFill>
-                  <a:srgbClr val="94A3B8"/>
+                  <a:srgbClr val="64748B"/>
                 </a:solidFill>
                 <a:latin typeface="Microsoft YaHei"/>
                 <a:ea typeface="Microsoft YaHei"/>
@@ -7689,12 +7733,12 @@
             <a:r>
               <a:rPr sz="1500" b="0">
                 <a:solidFill>
-                  <a:srgbClr val="34D399"/>
-                </a:solidFill>
-                <a:latin typeface="Microsoft YaHei"/>
-                <a:ea typeface="Microsoft YaHei"/>
-              </a:rPr>
-              <a:t>▍来源引用：JD 原子要求锚定原文 span；事实带原文引用；简历 bullet 关联 claimId</a:t>
+                  <a:srgbClr val="0D9488"/>
+                </a:solidFill>
+                <a:latin typeface="Microsoft YaHei"/>
+                <a:ea typeface="Microsoft YaHei"/>
+              </a:rPr>
+              <a:t>●  来源引用：JD 原子要求锚定原文 span；事实带原文引用；简历 bullet 关联 claimId</a:t>
             </a:r>
           </a:p>
           <a:p>
@@ -7706,12 +7750,12 @@
             <a:r>
               <a:rPr sz="1500" b="0">
                 <a:solidFill>
-                  <a:srgbClr val="22D3EE"/>
-                </a:solidFill>
-                <a:latin typeface="Microsoft YaHei"/>
-                <a:ea typeface="Microsoft YaHei"/>
-              </a:rPr>
-              <a:t>▍三级可信状态：候选 → 待复核 → 已确认；已确认才参与交付</a:t>
+                  <a:srgbClr val="0EA5E9"/>
+                </a:solidFill>
+                <a:latin typeface="Microsoft YaHei"/>
+                <a:ea typeface="Microsoft YaHei"/>
+              </a:rPr>
+              <a:t>●  三级可信状态：候选 → 待复核 → 已确认；已确认才参与交付</a:t>
             </a:r>
           </a:p>
           <a:p>
@@ -7723,12 +7767,12 @@
             <a:r>
               <a:rPr sz="1500" b="0">
                 <a:solidFill>
-                  <a:srgbClr val="FBBF24"/>
-                </a:solidFill>
-                <a:latin typeface="Microsoft YaHei"/>
-                <a:ea typeface="Microsoft YaHei"/>
-              </a:rPr>
-              <a:t>▍过期传播：JD/材料/事实/风格变化后，下游结果置为已过期并锁定</a:t>
+                  <a:srgbClr val="F59E0B"/>
+                </a:solidFill>
+                <a:latin typeface="Microsoft YaHei"/>
+                <a:ea typeface="Microsoft YaHei"/>
+              </a:rPr>
+              <a:t>●  过期传播：JD/材料/事实/风格变化后，下游结果置为已过期并锁定</a:t>
             </a:r>
           </a:p>
           <a:p>
@@ -7740,12 +7784,12 @@
             <a:r>
               <a:rPr sz="1500" b="0">
                 <a:solidFill>
-                  <a:srgbClr val="FBBF24"/>
-                </a:solidFill>
-                <a:latin typeface="Microsoft YaHei"/>
-                <a:ea typeface="Microsoft YaHei"/>
-              </a:rPr>
-              <a:t>▍人工审批：需求地图确认、证据确认、优化项采用、最终导出四道人工门禁</a:t>
+                  <a:srgbClr val="F59E0B"/>
+                </a:solidFill>
+                <a:latin typeface="Microsoft YaHei"/>
+                <a:ea typeface="Microsoft YaHei"/>
+              </a:rPr>
+              <a:t>●  人工审批：需求地图确认、证据确认、优化项采用、最终导出四道人工门禁</a:t>
             </a:r>
           </a:p>
           <a:p>
@@ -7757,12 +7801,12 @@
             <a:r>
               <a:rPr sz="1500" b="0">
                 <a:solidFill>
-                  <a:srgbClr val="34D399"/>
-                </a:solidFill>
-                <a:latin typeface="Microsoft YaHei"/>
-                <a:ea typeface="Microsoft YaHei"/>
-              </a:rPr>
-              <a:t>▍确定性评分：岗位准备度由 TypeScript 按优先级与证据强度计算，非模型自报</a:t>
+                  <a:srgbClr val="0D9488"/>
+                </a:solidFill>
+                <a:latin typeface="Microsoft YaHei"/>
+                <a:ea typeface="Microsoft YaHei"/>
+              </a:rPr>
+              <a:t>●  确定性评分：岗位准备度由 TypeScript 按优先级与证据强度计算，非模型自报</a:t>
             </a:r>
           </a:p>
         </p:txBody>

--- a/competition/initial/01-solution-deck.pptx
+++ b/competition/initial/01-solution-deck.pptx
@@ -3153,13 +3153,13 @@
         <p:spPr>
           <a:xfrm>
             <a:off x="0" y="0"/>
-            <a:ext cx="12191695" cy="256032"/>
+            <a:ext cx="12191695" cy="274320"/>
           </a:xfrm>
           <a:prstGeom prst="rect">
             <a:avLst/>
           </a:prstGeom>
           <a:solidFill>
-            <a:srgbClr val="4F46E5"/>
+            <a:srgbClr val="1F3A93"/>
           </a:solidFill>
           <a:ln>
             <a:noFill/>
@@ -3196,8 +3196,8 @@
         </p:nvSpPr>
         <p:spPr>
           <a:xfrm>
-            <a:off x="822960" y="1874519"/>
-            <a:ext cx="10515600" cy="1371600"/>
+            <a:off x="822960" y="1737360"/>
+            <a:ext cx="10515600" cy="457200"/>
           </a:xfrm>
           <a:prstGeom prst="rect">
             <a:avLst/>
@@ -3212,18 +3212,18 @@
           <a:p>
             <a:pPr algn="l">
               <a:spcAft>
-                <a:spcPts val="600"/>
+                <a:spcPts val="400"/>
               </a:spcAft>
             </a:pPr>
             <a:r>
-              <a:rPr sz="4400" b="1">
-                <a:solidFill>
-                  <a:srgbClr val="0F172A"/>
-                </a:solidFill>
-                <a:latin typeface="Microsoft YaHei"/>
-                <a:ea typeface="Microsoft YaHei"/>
-              </a:rPr>
-              <a:t>职途智策 AgentTeam</a:t>
+              <a:rPr sz="1300" b="0">
+                <a:solidFill>
+                  <a:srgbClr val="64748B"/>
+                </a:solidFill>
+                <a:latin typeface="Microsoft YaHei"/>
+                <a:ea typeface="Microsoft YaHei"/>
+              </a:rPr>
+              <a:t>GOAI 新智基座｜Agent Infra · 复杂任务多 Agent 自主协同</a:t>
             </a:r>
           </a:p>
         </p:txBody>
@@ -3236,8 +3236,8 @@
         </p:nvSpPr>
         <p:spPr>
           <a:xfrm>
-            <a:off x="822960" y="2697480"/>
-            <a:ext cx="10515600" cy="731520"/>
+            <a:off x="822960" y="2194560"/>
+            <a:ext cx="10515600" cy="1097280"/>
           </a:xfrm>
           <a:prstGeom prst="rect">
             <a:avLst/>
@@ -3252,18 +3252,18 @@
           <a:p>
             <a:pPr algn="l">
               <a:spcAft>
-                <a:spcPts val="600"/>
+                <a:spcPts val="400"/>
               </a:spcAft>
             </a:pPr>
             <a:r>
-              <a:rPr sz="2200" b="0">
-                <a:solidFill>
-                  <a:srgbClr val="4F46E5"/>
-                </a:solidFill>
-                <a:latin typeface="Microsoft YaHei"/>
-                <a:ea typeface="Microsoft YaHei"/>
-              </a:rPr>
-              <a:t>面向求职决策的可信多 Agent 协作系统</a:t>
+              <a:rPr sz="4600" b="1">
+                <a:solidFill>
+                  <a:srgbClr val="0F172A"/>
+                </a:solidFill>
+                <a:latin typeface="Microsoft YaHei"/>
+                <a:ea typeface="Microsoft YaHei"/>
+              </a:rPr>
+              <a:t>职途智策 AgentTeam</a:t>
             </a:r>
           </a:p>
         </p:txBody>
@@ -3276,8 +3276,8 @@
         </p:nvSpPr>
         <p:spPr>
           <a:xfrm>
-            <a:off x="822960" y="3703320"/>
-            <a:ext cx="10515600" cy="548640"/>
+            <a:off x="822960" y="3154680"/>
+            <a:ext cx="10515600" cy="640080"/>
           </a:xfrm>
           <a:prstGeom prst="rect">
             <a:avLst/>
@@ -3292,31 +3292,75 @@
           <a:p>
             <a:pPr algn="l">
               <a:spcAft>
-                <a:spcPts val="600"/>
+                <a:spcPts val="400"/>
               </a:spcAft>
             </a:pPr>
             <a:r>
-              <a:rPr sz="1500" b="0">
-                <a:solidFill>
-                  <a:srgbClr val="64748B"/>
-                </a:solidFill>
-                <a:latin typeface="Microsoft YaHei"/>
-                <a:ea typeface="Microsoft YaHei"/>
-              </a:rPr>
-              <a:t>GOAI 新智基座｜Agent Infra · 复杂任务多 Agent 自主协同</a:t>
-            </a:r>
-          </a:p>
-        </p:txBody>
-      </p:sp>
-      <p:sp>
-        <p:nvSpPr>
-          <p:cNvPr id="7" name="TextBox 6"/>
+              <a:rPr sz="2100" b="1">
+                <a:solidFill>
+                  <a:srgbClr val="1F3A93"/>
+                </a:solidFill>
+                <a:latin typeface="Microsoft YaHei"/>
+                <a:ea typeface="Microsoft YaHei"/>
+              </a:rPr>
+              <a:t>面向求职决策的可信多 Agent 协作系统</a:t>
+            </a:r>
+          </a:p>
+        </p:txBody>
+      </p:sp>
+      <p:sp>
+        <p:nvSpPr>
+          <p:cNvPr id="7" name="Rectangle 6"/>
+          <p:cNvSpPr/>
+          <p:nvPr/>
+        </p:nvSpPr>
+        <p:spPr>
+          <a:xfrm>
+            <a:off x="822960" y="3931920"/>
+            <a:ext cx="2194560" cy="45720"/>
+          </a:xfrm>
+          <a:prstGeom prst="rect">
+            <a:avLst/>
+          </a:prstGeom>
+          <a:solidFill>
+            <a:srgbClr val="1F3A93"/>
+          </a:solidFill>
+          <a:ln>
+            <a:noFill/>
+          </a:ln>
+          <a:effectLst/>
+        </p:spPr>
+        <p:style>
+          <a:lnRef idx="1">
+            <a:schemeClr val="accent1"/>
+          </a:lnRef>
+          <a:fillRef idx="3">
+            <a:schemeClr val="accent1"/>
+          </a:fillRef>
+          <a:effectRef idx="2">
+            <a:schemeClr val="accent1"/>
+          </a:effectRef>
+          <a:fontRef idx="minor">
+            <a:schemeClr val="lt1"/>
+          </a:fontRef>
+        </p:style>
+        <p:txBody>
+          <a:bodyPr rtlCol="0" anchor="ctr"/>
+          <a:lstStyle/>
+          <a:p>
+            <a:pPr algn="ctr"/>
+          </a:p>
+        </p:txBody>
+      </p:sp>
+      <p:sp>
+        <p:nvSpPr>
+          <p:cNvPr id="8" name="TextBox 7"/>
           <p:cNvSpPr txBox="1"/>
           <p:nvPr/>
         </p:nvSpPr>
         <p:spPr>
           <a:xfrm>
-            <a:off x="822960" y="4343400"/>
+            <a:off x="822960" y="4297680"/>
             <a:ext cx="10515600" cy="457200"/>
           </a:xfrm>
           <a:prstGeom prst="rect">
@@ -3332,7 +3376,7 @@
           <a:p>
             <a:pPr algn="l">
               <a:spcAft>
-                <a:spcPts val="600"/>
+                <a:spcPts val="400"/>
               </a:spcAft>
             </a:pPr>
             <a:r>
@@ -3350,13 +3394,13 @@
       </p:sp>
       <p:sp>
         <p:nvSpPr>
-          <p:cNvPr id="8" name="TextBox 7"/>
+          <p:cNvPr id="9" name="TextBox 8"/>
           <p:cNvSpPr txBox="1"/>
           <p:nvPr/>
         </p:nvSpPr>
         <p:spPr>
           <a:xfrm>
-            <a:off x="822960" y="5715000"/>
+            <a:off x="822960" y="5120640"/>
             <a:ext cx="10515600" cy="457200"/>
           </a:xfrm>
           <a:prstGeom prst="rect">
@@ -3372,7 +3416,7 @@
           <a:p>
             <a:pPr algn="l">
               <a:spcAft>
-                <a:spcPts val="600"/>
+                <a:spcPts val="400"/>
               </a:spcAft>
             </a:pPr>
             <a:r>
@@ -3383,7 +3427,7 @@
                 <a:latin typeface="Microsoft YaHei"/>
                 <a:ea typeface="Microsoft YaHei"/>
               </a:rPr>
-              <a:t>AgentTeams · Skill · 可信门禁 · 可观测 · 可回放</a:t>
+              <a:t>AgentTeams   Skill   可信门禁   可观测   可回放</a:t>
             </a:r>
           </a:p>
         </p:txBody>
@@ -3458,8 +3502,8 @@
         </p:nvSpPr>
         <p:spPr>
           <a:xfrm>
-            <a:off x="548640" y="384048"/>
-            <a:ext cx="11064240" cy="548640"/>
+            <a:off x="502920" y="365760"/>
+            <a:ext cx="10972800" cy="548640"/>
           </a:xfrm>
           <a:prstGeom prst="rect">
             <a:avLst/>
@@ -3474,11 +3518,11 @@
           <a:p>
             <a:pPr algn="l">
               <a:spcAft>
-                <a:spcPts val="600"/>
+                <a:spcPts val="400"/>
               </a:spcAft>
             </a:pPr>
             <a:r>
-              <a:rPr sz="2600" b="1">
+              <a:rPr sz="2400" b="1">
                 <a:solidFill>
                   <a:srgbClr val="0F172A"/>
                 </a:solidFill>
@@ -3498,14 +3542,14 @@
         </p:nvSpPr>
         <p:spPr>
           <a:xfrm>
-            <a:off x="548640" y="1115568"/>
+            <a:off x="502920" y="1078992"/>
             <a:ext cx="1371600" cy="64008"/>
           </a:xfrm>
           <a:prstGeom prst="rect">
             <a:avLst/>
           </a:prstGeom>
           <a:solidFill>
-            <a:srgbClr val="4F46E5"/>
+            <a:srgbClr val="1F3A93"/>
           </a:solidFill>
           <a:ln>
             <a:noFill/>
@@ -3542,8 +3586,8 @@
         </p:nvSpPr>
         <p:spPr>
           <a:xfrm>
-            <a:off x="11338560" y="6446520"/>
-            <a:ext cx="640080" cy="365760"/>
+            <a:off x="11430000" y="6446520"/>
+            <a:ext cx="548640" cy="365760"/>
           </a:xfrm>
           <a:prstGeom prst="rect">
             <a:avLst/>
@@ -3558,11 +3602,11 @@
           <a:p>
             <a:pPr algn="r">
               <a:spcAft>
-                <a:spcPts val="600"/>
+                <a:spcPts val="400"/>
               </a:spcAft>
             </a:pPr>
             <a:r>
-              <a:rPr sz="1000" b="0">
+              <a:rPr sz="900" b="0">
                 <a:solidFill>
                   <a:srgbClr val="64748B"/>
                 </a:solidFill>
@@ -3576,14 +3620,62 @@
       </p:sp>
       <p:sp>
         <p:nvSpPr>
-          <p:cNvPr id="6" name="TextBox 5"/>
+          <p:cNvPr id="6" name="Rounded Rectangle 5"/>
+          <p:cNvSpPr/>
+          <p:nvPr/>
+        </p:nvSpPr>
+        <p:spPr>
+          <a:xfrm>
+            <a:off x="502920" y="1554480"/>
+            <a:ext cx="5394960" cy="1234440"/>
+          </a:xfrm>
+          <a:prstGeom prst="roundRect">
+            <a:avLst>
+              <a:gd name="adj" fmla="val 8000"/>
+            </a:avLst>
+          </a:prstGeom>
+          <a:solidFill>
+            <a:srgbClr val="F8FAFC"/>
+          </a:solidFill>
+          <a:ln w="19050">
+            <a:solidFill>
+              <a:srgbClr val="E2E8F0"/>
+            </a:solidFill>
+          </a:ln>
+          <a:effectLst/>
+        </p:spPr>
+        <p:style>
+          <a:lnRef idx="1">
+            <a:schemeClr val="accent1"/>
+          </a:lnRef>
+          <a:fillRef idx="3">
+            <a:schemeClr val="accent1"/>
+          </a:fillRef>
+          <a:effectRef idx="2">
+            <a:schemeClr val="accent1"/>
+          </a:effectRef>
+          <a:fontRef idx="minor">
+            <a:schemeClr val="lt1"/>
+          </a:fontRef>
+        </p:style>
+        <p:txBody>
+          <a:bodyPr rtlCol="0" anchor="ctr"/>
+          <a:lstStyle/>
+          <a:p>
+            <a:pPr algn="ctr"/>
+          </a:p>
+        </p:txBody>
+      </p:sp>
+      <p:sp>
+        <p:nvSpPr>
+          <p:cNvPr id="7" name="TextBox 6"/>
           <p:cNvSpPr txBox="1"/>
           <p:nvPr/>
         </p:nvSpPr>
         <p:spPr>
           <a:xfrm>
-            <a:off x="640080" y="1737360"/>
-            <a:ext cx="10972800" cy="4754880"/>
+            <a:off x="640080" y="1645920"/>
+            <a:ext cx="5120640" cy="1051560"/>
           </a:xfrm>
           <a:prstGeom prst="rect">
             <a:avLst/>
@@ -3596,88 +3688,372 @@
           </a:bodyPr>
           <a:lstStyle/>
           <a:p>
+            <a:r>
+              <a:rPr sz="1200" b="1">
+                <a:solidFill>
+                  <a:srgbClr val="1F3A93"/>
+                </a:solidFill>
+                <a:latin typeface="Microsoft YaHei"/>
+                <a:ea typeface="Microsoft YaHei"/>
+              </a:rPr>
+              <a:t>结构化校验</a:t>
+            </a:r>
+          </a:p>
+          <a:p>
             <a:pPr>
+              <a:spcBef>
+                <a:spcPts val="400"/>
+              </a:spcBef>
+            </a:pPr>
+            <a:r>
+              <a:rPr sz="1050" b="0">
+                <a:solidFill>
+                  <a:srgbClr val="334155"/>
+                </a:solidFill>
+                <a:latin typeface="Microsoft YaHei"/>
+                <a:ea typeface="Microsoft YaHei"/>
+              </a:rPr>
+              <a:t>Zod 请求与输出校验；OpenAI 严格 JSON Schema</a:t>
+            </a:r>
+          </a:p>
+        </p:txBody>
+      </p:sp>
+      <p:sp>
+        <p:nvSpPr>
+          <p:cNvPr id="8" name="Rounded Rectangle 7"/>
+          <p:cNvSpPr/>
+          <p:nvPr/>
+        </p:nvSpPr>
+        <p:spPr>
+          <a:xfrm>
+            <a:off x="6126480" y="1554480"/>
+            <a:ext cx="5394960" cy="1234440"/>
+          </a:xfrm>
+          <a:prstGeom prst="roundRect">
+            <a:avLst>
+              <a:gd name="adj" fmla="val 8000"/>
+            </a:avLst>
+          </a:prstGeom>
+          <a:solidFill>
+            <a:srgbClr val="F8FAFC"/>
+          </a:solidFill>
+          <a:ln w="19050">
+            <a:solidFill>
+              <a:srgbClr val="E2E8F0"/>
+            </a:solidFill>
+          </a:ln>
+          <a:effectLst/>
+        </p:spPr>
+        <p:style>
+          <a:lnRef idx="1">
+            <a:schemeClr val="accent1"/>
+          </a:lnRef>
+          <a:fillRef idx="3">
+            <a:schemeClr val="accent1"/>
+          </a:fillRef>
+          <a:effectRef idx="2">
+            <a:schemeClr val="accent1"/>
+          </a:effectRef>
+          <a:fontRef idx="minor">
+            <a:schemeClr val="lt1"/>
+          </a:fontRef>
+        </p:style>
+        <p:txBody>
+          <a:bodyPr rtlCol="0" anchor="ctr"/>
+          <a:lstStyle/>
+          <a:p>
+            <a:pPr algn="ctr"/>
+          </a:p>
+        </p:txBody>
+      </p:sp>
+      <p:sp>
+        <p:nvSpPr>
+          <p:cNvPr id="9" name="TextBox 8"/>
+          <p:cNvSpPr txBox="1"/>
+          <p:nvPr/>
+        </p:nvSpPr>
+        <p:spPr>
+          <a:xfrm>
+            <a:off x="6263640" y="1645920"/>
+            <a:ext cx="5120640" cy="1051560"/>
+          </a:xfrm>
+          <a:prstGeom prst="rect">
+            <a:avLst/>
+          </a:prstGeom>
+          <a:noFill/>
+        </p:spPr>
+        <p:txBody>
+          <a:bodyPr wrap="square">
+            <a:spAutoFit/>
+          </a:bodyPr>
+          <a:lstStyle/>
+          <a:p>
+            <a:r>
+              <a:rPr sz="1200" b="1">
+                <a:solidFill>
+                  <a:srgbClr val="1F3A93"/>
+                </a:solidFill>
+                <a:latin typeface="Microsoft YaHei"/>
+                <a:ea typeface="Microsoft YaHei"/>
+              </a:rPr>
+              <a:t>资源控制</a:t>
+            </a:r>
+          </a:p>
+          <a:p>
+            <a:pPr>
+              <a:spcBef>
+                <a:spcPts val="400"/>
+              </a:spcBef>
+            </a:pPr>
+            <a:r>
+              <a:rPr sz="1050" b="0">
+                <a:solidFill>
+                  <a:srgbClr val="334155"/>
+                </a:solidFill>
+                <a:latin typeface="Microsoft YaHei"/>
+                <a:ea typeface="Microsoft YaHei"/>
+              </a:rPr>
+              <a:t>心跳·取消·2分钟硬上限·调用预算·超时</a:t>
+            </a:r>
+          </a:p>
+        </p:txBody>
+      </p:sp>
+      <p:sp>
+        <p:nvSpPr>
+          <p:cNvPr id="10" name="Rounded Rectangle 9"/>
+          <p:cNvSpPr/>
+          <p:nvPr/>
+        </p:nvSpPr>
+        <p:spPr>
+          <a:xfrm>
+            <a:off x="502920" y="3017520"/>
+            <a:ext cx="5394960" cy="1234440"/>
+          </a:xfrm>
+          <a:prstGeom prst="roundRect">
+            <a:avLst>
+              <a:gd name="adj" fmla="val 8000"/>
+            </a:avLst>
+          </a:prstGeom>
+          <a:solidFill>
+            <a:srgbClr val="F8FAFC"/>
+          </a:solidFill>
+          <a:ln w="19050">
+            <a:solidFill>
+              <a:srgbClr val="E2E8F0"/>
+            </a:solidFill>
+          </a:ln>
+          <a:effectLst/>
+        </p:spPr>
+        <p:style>
+          <a:lnRef idx="1">
+            <a:schemeClr val="accent1"/>
+          </a:lnRef>
+          <a:fillRef idx="3">
+            <a:schemeClr val="accent1"/>
+          </a:fillRef>
+          <a:effectRef idx="2">
+            <a:schemeClr val="accent1"/>
+          </a:effectRef>
+          <a:fontRef idx="minor">
+            <a:schemeClr val="lt1"/>
+          </a:fontRef>
+        </p:style>
+        <p:txBody>
+          <a:bodyPr rtlCol="0" anchor="ctr"/>
+          <a:lstStyle/>
+          <a:p>
+            <a:pPr algn="ctr"/>
+          </a:p>
+        </p:txBody>
+      </p:sp>
+      <p:sp>
+        <p:nvSpPr>
+          <p:cNvPr id="11" name="TextBox 10"/>
+          <p:cNvSpPr txBox="1"/>
+          <p:nvPr/>
+        </p:nvSpPr>
+        <p:spPr>
+          <a:xfrm>
+            <a:off x="640080" y="3108960"/>
+            <a:ext cx="5120640" cy="1051560"/>
+          </a:xfrm>
+          <a:prstGeom prst="rect">
+            <a:avLst/>
+          </a:prstGeom>
+          <a:noFill/>
+        </p:spPr>
+        <p:txBody>
+          <a:bodyPr wrap="square">
+            <a:spAutoFit/>
+          </a:bodyPr>
+          <a:lstStyle/>
+          <a:p>
+            <a:r>
+              <a:rPr sz="1200" b="1">
+                <a:solidFill>
+                  <a:srgbClr val="1F3A93"/>
+                </a:solidFill>
+                <a:latin typeface="Microsoft YaHei"/>
+                <a:ea typeface="Microsoft YaHei"/>
+              </a:rPr>
+              <a:t>可观测</a:t>
+            </a:r>
+          </a:p>
+          <a:p>
+            <a:pPr>
+              <a:spcBef>
+                <a:spcPts val="400"/>
+              </a:spcBef>
+            </a:pPr>
+            <a:r>
+              <a:rPr sz="1050" b="0">
+                <a:solidFill>
+                  <a:srgbClr val="334155"/>
+                </a:solidFill>
+                <a:latin typeface="Microsoft YaHei"/>
+                <a:ea typeface="Microsoft YaHei"/>
+              </a:rPr>
+              <a:t>Prompt Registry + Studio Trace 可回放</a:t>
+            </a:r>
+          </a:p>
+        </p:txBody>
+      </p:sp>
+      <p:sp>
+        <p:nvSpPr>
+          <p:cNvPr id="12" name="Rounded Rectangle 11"/>
+          <p:cNvSpPr/>
+          <p:nvPr/>
+        </p:nvSpPr>
+        <p:spPr>
+          <a:xfrm>
+            <a:off x="6126480" y="3017520"/>
+            <a:ext cx="5394960" cy="1234440"/>
+          </a:xfrm>
+          <a:prstGeom prst="roundRect">
+            <a:avLst>
+              <a:gd name="adj" fmla="val 8000"/>
+            </a:avLst>
+          </a:prstGeom>
+          <a:solidFill>
+            <a:srgbClr val="F8FAFC"/>
+          </a:solidFill>
+          <a:ln w="19050">
+            <a:solidFill>
+              <a:srgbClr val="E2E8F0"/>
+            </a:solidFill>
+          </a:ln>
+          <a:effectLst/>
+        </p:spPr>
+        <p:style>
+          <a:lnRef idx="1">
+            <a:schemeClr val="accent1"/>
+          </a:lnRef>
+          <a:fillRef idx="3">
+            <a:schemeClr val="accent1"/>
+          </a:fillRef>
+          <a:effectRef idx="2">
+            <a:schemeClr val="accent1"/>
+          </a:effectRef>
+          <a:fontRef idx="minor">
+            <a:schemeClr val="lt1"/>
+          </a:fontRef>
+        </p:style>
+        <p:txBody>
+          <a:bodyPr rtlCol="0" anchor="ctr"/>
+          <a:lstStyle/>
+          <a:p>
+            <a:pPr algn="ctr"/>
+          </a:p>
+        </p:txBody>
+      </p:sp>
+      <p:sp>
+        <p:nvSpPr>
+          <p:cNvPr id="13" name="TextBox 12"/>
+          <p:cNvSpPr txBox="1"/>
+          <p:nvPr/>
+        </p:nvSpPr>
+        <p:spPr>
+          <a:xfrm>
+            <a:off x="6263640" y="3108960"/>
+            <a:ext cx="5120640" cy="1051560"/>
+          </a:xfrm>
+          <a:prstGeom prst="rect">
+            <a:avLst/>
+          </a:prstGeom>
+          <a:noFill/>
+        </p:spPr>
+        <p:txBody>
+          <a:bodyPr wrap="square">
+            <a:spAutoFit/>
+          </a:bodyPr>
+          <a:lstStyle/>
+          <a:p>
+            <a:r>
+              <a:rPr sz="1200" b="1">
+                <a:solidFill>
+                  <a:srgbClr val="1F3A93"/>
+                </a:solidFill>
+                <a:latin typeface="Microsoft YaHei"/>
+                <a:ea typeface="Microsoft YaHei"/>
+              </a:rPr>
+              <a:t>可复现</a:t>
+            </a:r>
+          </a:p>
+          <a:p>
+            <a:pPr>
+              <a:spcBef>
+                <a:spcPts val="400"/>
+              </a:spcBef>
+            </a:pPr>
+            <a:r>
+              <a:rPr sz="1050" b="0">
+                <a:solidFill>
+                  <a:srgbClr val="334155"/>
+                </a:solidFill>
+                <a:latin typeface="Microsoft YaHei"/>
+                <a:ea typeface="Microsoft YaHei"/>
+              </a:rPr>
+              <a:t>DirectLLM 主路径 + Mock 离线确定性路径</a:t>
+            </a:r>
+          </a:p>
+        </p:txBody>
+      </p:sp>
+      <p:sp>
+        <p:nvSpPr>
+          <p:cNvPr id="14" name="TextBox 13"/>
+          <p:cNvSpPr txBox="1"/>
+          <p:nvPr/>
+        </p:nvSpPr>
+        <p:spPr>
+          <a:xfrm>
+            <a:off x="502920" y="4389120"/>
+            <a:ext cx="11155680" cy="548640"/>
+          </a:xfrm>
+          <a:prstGeom prst="rect">
+            <a:avLst/>
+          </a:prstGeom>
+          <a:noFill/>
+        </p:spPr>
+        <p:txBody>
+          <a:bodyPr wrap="square" anchor="t">
+            <a:spAutoFit/>
+          </a:bodyPr>
+          <a:lstStyle/>
+          <a:p>
+            <a:pPr algn="l">
               <a:spcAft>
-                <a:spcPts val="900"/>
+                <a:spcPts val="400"/>
               </a:spcAft>
             </a:pPr>
             <a:r>
-              <a:rPr sz="1500" b="0">
-                <a:solidFill>
-                  <a:srgbClr val="334155"/>
-                </a:solidFill>
-                <a:latin typeface="Microsoft YaHei"/>
-                <a:ea typeface="Microsoft YaHei"/>
-              </a:rPr>
-              <a:t>●  结构化校验：Zod 请求与模型输出校验；OpenAI 严格 JSON Schema</a:t>
-            </a:r>
-          </a:p>
-          <a:p>
-            <a:pPr>
-              <a:spcAft>
-                <a:spcPts val="900"/>
-              </a:spcAft>
-            </a:pPr>
-            <a:r>
-              <a:rPr sz="1500" b="0">
-                <a:solidFill>
-                  <a:srgbClr val="334155"/>
-                </a:solidFill>
-                <a:latin typeface="Microsoft YaHei"/>
-                <a:ea typeface="Microsoft YaHei"/>
-              </a:rPr>
-              <a:t>●  资源控制：心跳、主动取消、2 分钟硬上限、调用次数预算、超时（60s/120s）</a:t>
-            </a:r>
-          </a:p>
-          <a:p>
-            <a:pPr>
-              <a:spcAft>
-                <a:spcPts val="900"/>
-              </a:spcAft>
-            </a:pPr>
-            <a:r>
-              <a:rPr sz="1500" b="0">
-                <a:solidFill>
-                  <a:srgbClr val="2563EB"/>
-                </a:solidFill>
-                <a:latin typeface="Microsoft YaHei"/>
-                <a:ea typeface="Microsoft YaHei"/>
-              </a:rPr>
-              <a:t>●  可观测：Prompt Registry + Studio Trace（promptId/runId/快照/耗时/失败）可回放</a:t>
-            </a:r>
-          </a:p>
-          <a:p>
-            <a:pPr>
-              <a:spcAft>
-                <a:spcPts val="900"/>
-              </a:spcAft>
-            </a:pPr>
-            <a:r>
-              <a:rPr sz="1500" b="0">
-                <a:solidFill>
-                  <a:srgbClr val="7C3AED"/>
-                </a:solidFill>
-                <a:latin typeface="Microsoft YaHei"/>
-                <a:ea typeface="Microsoft YaHei"/>
-              </a:rPr>
-              <a:t>●  可复现：DirectLLM 主路径 + Mock 离线确定性路径，共用同一 Schema</a:t>
-            </a:r>
-          </a:p>
-          <a:p>
-            <a:pPr>
-              <a:spcAft>
-                <a:spcPts val="900"/>
-              </a:spcAft>
-            </a:pPr>
-            <a:r>
-              <a:rPr sz="1500" b="0">
+              <a:rPr sz="1300" b="1">
                 <a:solidFill>
                   <a:srgbClr val="0D9488"/>
                 </a:solidFill>
                 <a:latin typeface="Microsoft YaHei"/>
                 <a:ea typeface="Microsoft YaHei"/>
               </a:rPr>
-              <a:t>●  测试与评测：Vitest 155 用例 + Playwright e2e + 合成评测集（schema/F1/召回/保持）</a:t>
+              <a:t>测试与评测：Vitest 155 用例 + Playwright e2e + 合成评测集（schema/F1/召回/保持）。</a:t>
             </a:r>
           </a:p>
         </p:txBody>
@@ -3752,8 +4128,8 @@
         </p:nvSpPr>
         <p:spPr>
           <a:xfrm>
-            <a:off x="548640" y="384048"/>
-            <a:ext cx="11064240" cy="548640"/>
+            <a:off x="502920" y="365760"/>
+            <a:ext cx="10972800" cy="548640"/>
           </a:xfrm>
           <a:prstGeom prst="rect">
             <a:avLst/>
@@ -3768,11 +4144,11 @@
           <a:p>
             <a:pPr algn="l">
               <a:spcAft>
-                <a:spcPts val="600"/>
+                <a:spcPts val="400"/>
               </a:spcAft>
             </a:pPr>
             <a:r>
-              <a:rPr sz="2600" b="1">
+              <a:rPr sz="2400" b="1">
                 <a:solidFill>
                   <a:srgbClr val="0F172A"/>
                 </a:solidFill>
@@ -3792,14 +4168,14 @@
         </p:nvSpPr>
         <p:spPr>
           <a:xfrm>
-            <a:off x="548640" y="1115568"/>
+            <a:off x="502920" y="1078992"/>
             <a:ext cx="1371600" cy="64008"/>
           </a:xfrm>
           <a:prstGeom prst="rect">
             <a:avLst/>
           </a:prstGeom>
           <a:solidFill>
-            <a:srgbClr val="2563EB"/>
+            <a:srgbClr val="1F3A93"/>
           </a:solidFill>
           <a:ln>
             <a:noFill/>
@@ -3836,8 +4212,8 @@
         </p:nvSpPr>
         <p:spPr>
           <a:xfrm>
-            <a:off x="11338560" y="6446520"/>
-            <a:ext cx="640080" cy="365760"/>
+            <a:off x="11430000" y="6446520"/>
+            <a:ext cx="548640" cy="365760"/>
           </a:xfrm>
           <a:prstGeom prst="rect">
             <a:avLst/>
@@ -3852,11 +4228,11 @@
           <a:p>
             <a:pPr algn="r">
               <a:spcAft>
-                <a:spcPts val="600"/>
+                <a:spcPts val="400"/>
               </a:spcAft>
             </a:pPr>
             <a:r>
-              <a:rPr sz="1000" b="0">
+              <a:rPr sz="900" b="0">
                 <a:solidFill>
                   <a:srgbClr val="64748B"/>
                 </a:solidFill>
@@ -3864,53 +4240,13 @@
                 <a:ea typeface="Microsoft YaHei"/>
               </a:rPr>
               <a:t>11/13</a:t>
-            </a:r>
-          </a:p>
-        </p:txBody>
-      </p:sp>
-      <p:sp>
-        <p:nvSpPr>
-          <p:cNvPr id="6" name="TextBox 5"/>
-          <p:cNvSpPr txBox="1"/>
-          <p:nvPr/>
-        </p:nvSpPr>
-        <p:spPr>
-          <a:xfrm>
-            <a:off x="640080" y="1554480"/>
-            <a:ext cx="10972800" cy="548640"/>
-          </a:xfrm>
-          <a:prstGeom prst="rect">
-            <a:avLst/>
-          </a:prstGeom>
-          <a:noFill/>
-        </p:spPr>
-        <p:txBody>
-          <a:bodyPr wrap="square" anchor="t">
-            <a:spAutoFit/>
-          </a:bodyPr>
-          <a:lstStyle/>
-          <a:p>
-            <a:pPr algn="l">
-              <a:spcAft>
-                <a:spcPts val="600"/>
-              </a:spcAft>
-            </a:pPr>
-            <a:r>
-              <a:rPr sz="1500" b="0">
-                <a:solidFill>
-                  <a:srgbClr val="334155"/>
-                </a:solidFill>
-                <a:latin typeface="Microsoft YaHei"/>
-                <a:ea typeface="Microsoft YaHei"/>
-              </a:rPr>
-              <a:t>JD → 确认需求地图 → 匹配事实 → 优化 → 导出（合成数据，见 assets/screenshots/）</a:t>
             </a:r>
           </a:p>
         </p:txBody>
       </p:sp>
       <p:pic>
         <p:nvPicPr>
-          <p:cNvPr id="7" name="Picture 6" descr="01-materials.png"/>
+          <p:cNvPr id="6" name="Picture 5" descr="01-materials.png"/>
           <p:cNvPicPr>
             <a:picLocks noChangeAspect="1"/>
           </p:cNvPicPr>
@@ -3924,7 +4260,7 @@
         </p:blipFill>
         <p:spPr>
           <a:xfrm>
-            <a:off x="640080" y="2148840"/>
+            <a:off x="502920" y="1737360"/>
             <a:ext cx="3657600" cy="2286000"/>
           </a:xfrm>
           <a:prstGeom prst="rect">
@@ -3934,13 +4270,13 @@
       </p:pic>
       <p:sp>
         <p:nvSpPr>
-          <p:cNvPr id="8" name="TextBox 7"/>
+          <p:cNvPr id="7" name="TextBox 6"/>
           <p:cNvSpPr txBox="1"/>
           <p:nvPr/>
         </p:nvSpPr>
         <p:spPr>
           <a:xfrm>
-            <a:off x="640080" y="4754880"/>
+            <a:off x="502920" y="4572000"/>
             <a:ext cx="3657600" cy="365760"/>
           </a:xfrm>
           <a:prstGeom prst="rect">
@@ -3956,7 +4292,7 @@
           <a:p>
             <a:pPr algn="ctr">
               <a:spcAft>
-                <a:spcPts val="600"/>
+                <a:spcPts val="400"/>
               </a:spcAft>
             </a:pPr>
             <a:r>
@@ -3974,7 +4310,7 @@
       </p:sp>
       <p:pic>
         <p:nvPicPr>
-          <p:cNvPr id="9" name="Picture 8" descr="02-requirement-map.png"/>
+          <p:cNvPr id="8" name="Picture 7" descr="02-requirement-map.png"/>
           <p:cNvPicPr>
             <a:picLocks noChangeAspect="1"/>
           </p:cNvPicPr>
@@ -3988,7 +4324,7 @@
         </p:blipFill>
         <p:spPr>
           <a:xfrm>
-            <a:off x="4434840" y="2148840"/>
+            <a:off x="4297680" y="1737360"/>
             <a:ext cx="3657600" cy="2286000"/>
           </a:xfrm>
           <a:prstGeom prst="rect">
@@ -3998,13 +4334,13 @@
       </p:pic>
       <p:sp>
         <p:nvSpPr>
-          <p:cNvPr id="10" name="TextBox 9"/>
+          <p:cNvPr id="9" name="TextBox 8"/>
           <p:cNvSpPr txBox="1"/>
           <p:nvPr/>
         </p:nvSpPr>
         <p:spPr>
           <a:xfrm>
-            <a:off x="4434840" y="4754880"/>
+            <a:off x="4297680" y="4572000"/>
             <a:ext cx="3657600" cy="365760"/>
           </a:xfrm>
           <a:prstGeom prst="rect">
@@ -4020,7 +4356,7 @@
           <a:p>
             <a:pPr algn="ctr">
               <a:spcAft>
-                <a:spcPts val="600"/>
+                <a:spcPts val="400"/>
               </a:spcAft>
             </a:pPr>
             <a:r>
@@ -4038,7 +4374,7 @@
       </p:sp>
       <p:pic>
         <p:nvPicPr>
-          <p:cNvPr id="11" name="Picture 10" descr="03-fact-match.png"/>
+          <p:cNvPr id="10" name="Picture 9" descr="03-fact-match.png"/>
           <p:cNvPicPr>
             <a:picLocks noChangeAspect="1"/>
           </p:cNvPicPr>
@@ -4052,7 +4388,7 @@
         </p:blipFill>
         <p:spPr>
           <a:xfrm>
-            <a:off x="8229600" y="2148840"/>
+            <a:off x="8092440" y="1737360"/>
             <a:ext cx="3657600" cy="2286000"/>
           </a:xfrm>
           <a:prstGeom prst="rect">
@@ -4062,13 +4398,13 @@
       </p:pic>
       <p:sp>
         <p:nvSpPr>
-          <p:cNvPr id="12" name="TextBox 11"/>
+          <p:cNvPr id="11" name="TextBox 10"/>
           <p:cNvSpPr txBox="1"/>
           <p:nvPr/>
         </p:nvSpPr>
         <p:spPr>
           <a:xfrm>
-            <a:off x="8229600" y="4754880"/>
+            <a:off x="8092440" y="4572000"/>
             <a:ext cx="3657600" cy="365760"/>
           </a:xfrm>
           <a:prstGeom prst="rect">
@@ -4084,7 +4420,7 @@
           <a:p>
             <a:pPr algn="ctr">
               <a:spcAft>
-                <a:spcPts val="600"/>
+                <a:spcPts val="400"/>
               </a:spcAft>
             </a:pPr>
             <a:r>
@@ -4102,14 +4438,14 @@
       </p:sp>
       <p:sp>
         <p:nvSpPr>
-          <p:cNvPr id="13" name="TextBox 12"/>
+          <p:cNvPr id="12" name="TextBox 11"/>
           <p:cNvSpPr txBox="1"/>
           <p:nvPr/>
         </p:nvSpPr>
         <p:spPr>
           <a:xfrm>
-            <a:off x="640080" y="5394960"/>
-            <a:ext cx="10972800" cy="457200"/>
+            <a:off x="502920" y="5212080"/>
+            <a:ext cx="11155680" cy="548640"/>
           </a:xfrm>
           <a:prstGeom prst="rect">
             <a:avLst/>
@@ -4124,18 +4460,18 @@
           <a:p>
             <a:pPr algn="l">
               <a:spcAft>
-                <a:spcPts val="600"/>
+                <a:spcPts val="400"/>
               </a:spcAft>
             </a:pPr>
             <a:r>
-              <a:rPr sz="1200" b="0">
-                <a:solidFill>
-                  <a:srgbClr val="64748B"/>
-                </a:solidFill>
-                <a:latin typeface="Microsoft YaHei"/>
-                <a:ea typeface="Microsoft YaHei"/>
-              </a:rPr>
-              <a:t>另含：最终简历 / 导出门禁 / Studio Trace / Mock 评测 截图</a:t>
+              <a:rPr sz="1300" b="0">
+                <a:solidFill>
+                  <a:srgbClr val="334155"/>
+                </a:solidFill>
+                <a:latin typeface="Microsoft YaHei"/>
+                <a:ea typeface="Microsoft YaHei"/>
+              </a:rPr>
+              <a:t>JD → 确认需求地图 → 匹配事实 → 优化 → 导出（合成数据，另含最终简历/导出门禁/Trace/评测截图）。</a:t>
             </a:r>
           </a:p>
         </p:txBody>
@@ -4210,8 +4546,8 @@
         </p:nvSpPr>
         <p:spPr>
           <a:xfrm>
-            <a:off x="548640" y="384048"/>
-            <a:ext cx="11064240" cy="548640"/>
+            <a:off x="502920" y="365760"/>
+            <a:ext cx="10972800" cy="548640"/>
           </a:xfrm>
           <a:prstGeom prst="rect">
             <a:avLst/>
@@ -4226,11 +4562,11 @@
           <a:p>
             <a:pPr algn="l">
               <a:spcAft>
-                <a:spcPts val="600"/>
+                <a:spcPts val="400"/>
               </a:spcAft>
             </a:pPr>
             <a:r>
-              <a:rPr sz="2600" b="1">
+              <a:rPr sz="2400" b="1">
                 <a:solidFill>
                   <a:srgbClr val="0F172A"/>
                 </a:solidFill>
@@ -4250,7 +4586,7 @@
         </p:nvSpPr>
         <p:spPr>
           <a:xfrm>
-            <a:off x="548640" y="1115568"/>
+            <a:off x="502920" y="1078992"/>
             <a:ext cx="1371600" cy="64008"/>
           </a:xfrm>
           <a:prstGeom prst="rect">
@@ -4294,8 +4630,8 @@
         </p:nvSpPr>
         <p:spPr>
           <a:xfrm>
-            <a:off x="11338560" y="6446520"/>
-            <a:ext cx="640080" cy="365760"/>
+            <a:off x="11430000" y="6446520"/>
+            <a:ext cx="548640" cy="365760"/>
           </a:xfrm>
           <a:prstGeom prst="rect">
             <a:avLst/>
@@ -4310,11 +4646,11 @@
           <a:p>
             <a:pPr algn="r">
               <a:spcAft>
-                <a:spcPts val="600"/>
+                <a:spcPts val="400"/>
               </a:spcAft>
             </a:pPr>
             <a:r>
-              <a:rPr sz="1000" b="0">
+              <a:rPr sz="900" b="0">
                 <a:solidFill>
                   <a:srgbClr val="64748B"/>
                 </a:solidFill>
@@ -4328,14 +4664,62 @@
       </p:sp>
       <p:sp>
         <p:nvSpPr>
-          <p:cNvPr id="6" name="TextBox 5"/>
+          <p:cNvPr id="6" name="Rounded Rectangle 5"/>
+          <p:cNvSpPr/>
+          <p:nvPr/>
+        </p:nvSpPr>
+        <p:spPr>
+          <a:xfrm>
+            <a:off x="502920" y="1554480"/>
+            <a:ext cx="5394960" cy="1234440"/>
+          </a:xfrm>
+          <a:prstGeom prst="roundRect">
+            <a:avLst>
+              <a:gd name="adj" fmla="val 8000"/>
+            </a:avLst>
+          </a:prstGeom>
+          <a:solidFill>
+            <a:srgbClr val="F8FAFC"/>
+          </a:solidFill>
+          <a:ln w="19050">
+            <a:solidFill>
+              <a:srgbClr val="E2E8F0"/>
+            </a:solidFill>
+          </a:ln>
+          <a:effectLst/>
+        </p:spPr>
+        <p:style>
+          <a:lnRef idx="1">
+            <a:schemeClr val="accent1"/>
+          </a:lnRef>
+          <a:fillRef idx="3">
+            <a:schemeClr val="accent1"/>
+          </a:fillRef>
+          <a:effectRef idx="2">
+            <a:schemeClr val="accent1"/>
+          </a:effectRef>
+          <a:fontRef idx="minor">
+            <a:schemeClr val="lt1"/>
+          </a:fontRef>
+        </p:style>
+        <p:txBody>
+          <a:bodyPr rtlCol="0" anchor="ctr"/>
+          <a:lstStyle/>
+          <a:p>
+            <a:pPr algn="ctr"/>
+          </a:p>
+        </p:txBody>
+      </p:sp>
+      <p:sp>
+        <p:nvSpPr>
+          <p:cNvPr id="7" name="TextBox 6"/>
           <p:cNvSpPr txBox="1"/>
           <p:nvPr/>
         </p:nvSpPr>
         <p:spPr>
           <a:xfrm>
-            <a:off x="640080" y="1737360"/>
-            <a:ext cx="10972800" cy="4754880"/>
+            <a:off x="640080" y="1645920"/>
+            <a:ext cx="5120640" cy="1051560"/>
           </a:xfrm>
           <a:prstGeom prst="rect">
             <a:avLst/>
@@ -4348,105 +4732,412 @@
           </a:bodyPr>
           <a:lstStyle/>
           <a:p>
+            <a:r>
+              <a:rPr sz="1200" b="1">
+                <a:solidFill>
+                  <a:srgbClr val="0D9488"/>
+                </a:solidFill>
+                <a:latin typeface="Microsoft YaHei"/>
+                <a:ea typeface="Microsoft YaHei"/>
+              </a:rPr>
+              <a:t>本地优先</a:t>
+            </a:r>
+          </a:p>
+          <a:p>
             <a:pPr>
+              <a:spcBef>
+                <a:spcPts val="400"/>
+              </a:spcBef>
+            </a:pPr>
+            <a:r>
+              <a:rPr sz="1050" b="0">
+                <a:solidFill>
+                  <a:srgbClr val="334155"/>
+                </a:solidFill>
+                <a:latin typeface="Microsoft YaHei"/>
+                <a:ea typeface="Microsoft YaHei"/>
+              </a:rPr>
+              <a:t>简历/事实/Trace 存浏览器本地，无服务端数据库</a:t>
+            </a:r>
+          </a:p>
+        </p:txBody>
+      </p:sp>
+      <p:sp>
+        <p:nvSpPr>
+          <p:cNvPr id="8" name="Rounded Rectangle 7"/>
+          <p:cNvSpPr/>
+          <p:nvPr/>
+        </p:nvSpPr>
+        <p:spPr>
+          <a:xfrm>
+            <a:off x="6126480" y="1554480"/>
+            <a:ext cx="5394960" cy="1234440"/>
+          </a:xfrm>
+          <a:prstGeom prst="roundRect">
+            <a:avLst>
+              <a:gd name="adj" fmla="val 8000"/>
+            </a:avLst>
+          </a:prstGeom>
+          <a:solidFill>
+            <a:srgbClr val="F8FAFC"/>
+          </a:solidFill>
+          <a:ln w="19050">
+            <a:solidFill>
+              <a:srgbClr val="E2E8F0"/>
+            </a:solidFill>
+          </a:ln>
+          <a:effectLst/>
+        </p:spPr>
+        <p:style>
+          <a:lnRef idx="1">
+            <a:schemeClr val="accent1"/>
+          </a:lnRef>
+          <a:fillRef idx="3">
+            <a:schemeClr val="accent1"/>
+          </a:fillRef>
+          <a:effectRef idx="2">
+            <a:schemeClr val="accent1"/>
+          </a:effectRef>
+          <a:fontRef idx="minor">
+            <a:schemeClr val="lt1"/>
+          </a:fontRef>
+        </p:style>
+        <p:txBody>
+          <a:bodyPr rtlCol="0" anchor="ctr"/>
+          <a:lstStyle/>
+          <a:p>
+            <a:pPr algn="ctr"/>
+          </a:p>
+        </p:txBody>
+      </p:sp>
+      <p:sp>
+        <p:nvSpPr>
+          <p:cNvPr id="9" name="TextBox 8"/>
+          <p:cNvSpPr txBox="1"/>
+          <p:nvPr/>
+        </p:nvSpPr>
+        <p:spPr>
+          <a:xfrm>
+            <a:off x="6263640" y="1645920"/>
+            <a:ext cx="5120640" cy="1051560"/>
+          </a:xfrm>
+          <a:prstGeom prst="rect">
+            <a:avLst/>
+          </a:prstGeom>
+          <a:noFill/>
+        </p:spPr>
+        <p:txBody>
+          <a:bodyPr wrap="square">
+            <a:spAutoFit/>
+          </a:bodyPr>
+          <a:lstStyle/>
+          <a:p>
+            <a:r>
+              <a:rPr sz="1200" b="1">
+                <a:solidFill>
+                  <a:srgbClr val="0D9488"/>
+                </a:solidFill>
+                <a:latin typeface="Microsoft YaHei"/>
+                <a:ea typeface="Microsoft YaHei"/>
+              </a:rPr>
+              <a:t>隐私</a:t>
+            </a:r>
+          </a:p>
+          <a:p>
+            <a:pPr>
+              <a:spcBef>
+                <a:spcPts val="400"/>
+              </a:spcBef>
+            </a:pPr>
+            <a:r>
+              <a:rPr sz="1050" b="0">
+                <a:solidFill>
+                  <a:srgbClr val="334155"/>
+                </a:solidFill>
+                <a:latin typeface="Microsoft YaHei"/>
+                <a:ea typeface="Microsoft YaHei"/>
+              </a:rPr>
+              <a:t>不采集不上传；演示评测用合成数据</a:t>
+            </a:r>
+          </a:p>
+        </p:txBody>
+      </p:sp>
+      <p:sp>
+        <p:nvSpPr>
+          <p:cNvPr id="10" name="Rounded Rectangle 9"/>
+          <p:cNvSpPr/>
+          <p:nvPr/>
+        </p:nvSpPr>
+        <p:spPr>
+          <a:xfrm>
+            <a:off x="502920" y="3017520"/>
+            <a:ext cx="5394960" cy="1234440"/>
+          </a:xfrm>
+          <a:prstGeom prst="roundRect">
+            <a:avLst>
+              <a:gd name="adj" fmla="val 8000"/>
+            </a:avLst>
+          </a:prstGeom>
+          <a:solidFill>
+            <a:srgbClr val="F8FAFC"/>
+          </a:solidFill>
+          <a:ln w="19050">
+            <a:solidFill>
+              <a:srgbClr val="E2E8F0"/>
+            </a:solidFill>
+          </a:ln>
+          <a:effectLst/>
+        </p:spPr>
+        <p:style>
+          <a:lnRef idx="1">
+            <a:schemeClr val="accent1"/>
+          </a:lnRef>
+          <a:fillRef idx="3">
+            <a:schemeClr val="accent1"/>
+          </a:fillRef>
+          <a:effectRef idx="2">
+            <a:schemeClr val="accent1"/>
+          </a:effectRef>
+          <a:fontRef idx="minor">
+            <a:schemeClr val="lt1"/>
+          </a:fontRef>
+        </p:style>
+        <p:txBody>
+          <a:bodyPr rtlCol="0" anchor="ctr"/>
+          <a:lstStyle/>
+          <a:p>
+            <a:pPr algn="ctr"/>
+          </a:p>
+        </p:txBody>
+      </p:sp>
+      <p:sp>
+        <p:nvSpPr>
+          <p:cNvPr id="11" name="TextBox 10"/>
+          <p:cNvSpPr txBox="1"/>
+          <p:nvPr/>
+        </p:nvSpPr>
+        <p:spPr>
+          <a:xfrm>
+            <a:off x="640080" y="3108960"/>
+            <a:ext cx="5120640" cy="1051560"/>
+          </a:xfrm>
+          <a:prstGeom prst="rect">
+            <a:avLst/>
+          </a:prstGeom>
+          <a:noFill/>
+        </p:spPr>
+        <p:txBody>
+          <a:bodyPr wrap="square">
+            <a:spAutoFit/>
+          </a:bodyPr>
+          <a:lstStyle/>
+          <a:p>
+            <a:r>
+              <a:rPr sz="1200" b="1">
+                <a:solidFill>
+                  <a:srgbClr val="0D9488"/>
+                </a:solidFill>
+                <a:latin typeface="Microsoft YaHei"/>
+                <a:ea typeface="Microsoft YaHei"/>
+              </a:rPr>
+              <a:t>模型服务披露</a:t>
+            </a:r>
+          </a:p>
+          <a:p>
+            <a:pPr>
+              <a:spcBef>
+                <a:spcPts val="400"/>
+              </a:spcBef>
+            </a:pPr>
+            <a:r>
+              <a:rPr sz="1050" b="0">
+                <a:solidFill>
+                  <a:srgbClr val="334155"/>
+                </a:solidFill>
+                <a:latin typeface="Microsoft YaHei"/>
+                <a:ea typeface="Microsoft YaHei"/>
+              </a:rPr>
+              <a:t>用户自配兼容服务；Mock 可复现；API Key 不外泄</a:t>
+            </a:r>
+          </a:p>
+        </p:txBody>
+      </p:sp>
+      <p:sp>
+        <p:nvSpPr>
+          <p:cNvPr id="12" name="Rounded Rectangle 11"/>
+          <p:cNvSpPr/>
+          <p:nvPr/>
+        </p:nvSpPr>
+        <p:spPr>
+          <a:xfrm>
+            <a:off x="6126480" y="3017520"/>
+            <a:ext cx="5394960" cy="1234440"/>
+          </a:xfrm>
+          <a:prstGeom prst="roundRect">
+            <a:avLst>
+              <a:gd name="adj" fmla="val 8000"/>
+            </a:avLst>
+          </a:prstGeom>
+          <a:solidFill>
+            <a:srgbClr val="F8FAFC"/>
+          </a:solidFill>
+          <a:ln w="19050">
+            <a:solidFill>
+              <a:srgbClr val="E2E8F0"/>
+            </a:solidFill>
+          </a:ln>
+          <a:effectLst/>
+        </p:spPr>
+        <p:style>
+          <a:lnRef idx="1">
+            <a:schemeClr val="accent1"/>
+          </a:lnRef>
+          <a:fillRef idx="3">
+            <a:schemeClr val="accent1"/>
+          </a:fillRef>
+          <a:effectRef idx="2">
+            <a:schemeClr val="accent1"/>
+          </a:effectRef>
+          <a:fontRef idx="minor">
+            <a:schemeClr val="lt1"/>
+          </a:fontRef>
+        </p:style>
+        <p:txBody>
+          <a:bodyPr rtlCol="0" anchor="ctr"/>
+          <a:lstStyle/>
+          <a:p>
+            <a:pPr algn="ctr"/>
+          </a:p>
+        </p:txBody>
+      </p:sp>
+      <p:sp>
+        <p:nvSpPr>
+          <p:cNvPr id="13" name="TextBox 12"/>
+          <p:cNvSpPr txBox="1"/>
+          <p:nvPr/>
+        </p:nvSpPr>
+        <p:spPr>
+          <a:xfrm>
+            <a:off x="6263640" y="3108960"/>
+            <a:ext cx="5120640" cy="1051560"/>
+          </a:xfrm>
+          <a:prstGeom prst="rect">
+            <a:avLst/>
+          </a:prstGeom>
+          <a:noFill/>
+        </p:spPr>
+        <p:txBody>
+          <a:bodyPr wrap="square">
+            <a:spAutoFit/>
+          </a:bodyPr>
+          <a:lstStyle/>
+          <a:p>
+            <a:r>
+              <a:rPr sz="1200" b="1">
+                <a:solidFill>
+                  <a:srgbClr val="0D9488"/>
+                </a:solidFill>
+                <a:latin typeface="Microsoft YaHei"/>
+                <a:ea typeface="Microsoft YaHei"/>
+              </a:rPr>
+              <a:t>开源</a:t>
+            </a:r>
+          </a:p>
+          <a:p>
+            <a:pPr>
+              <a:spcBef>
+                <a:spcPts val="400"/>
+              </a:spcBef>
+            </a:pPr>
+            <a:r>
+              <a:rPr sz="1050" b="0">
+                <a:solidFill>
+                  <a:srgbClr val="334155"/>
+                </a:solidFill>
+                <a:latin typeface="Microsoft YaHei"/>
+                <a:ea typeface="Microsoft YaHei"/>
+              </a:rPr>
+              <a:t>仓库已公开；复赛前落地 LICENSE/依赖/部署/贡献规范</a:t>
+            </a:r>
+          </a:p>
+        </p:txBody>
+      </p:sp>
+      <p:sp>
+        <p:nvSpPr>
+          <p:cNvPr id="14" name="TextBox 13"/>
+          <p:cNvSpPr txBox="1"/>
+          <p:nvPr/>
+        </p:nvSpPr>
+        <p:spPr>
+          <a:xfrm>
+            <a:off x="502920" y="4297680"/>
+            <a:ext cx="11155680" cy="457200"/>
+          </a:xfrm>
+          <a:prstGeom prst="rect">
+            <a:avLst/>
+          </a:prstGeom>
+          <a:noFill/>
+        </p:spPr>
+        <p:txBody>
+          <a:bodyPr wrap="square" anchor="t">
+            <a:spAutoFit/>
+          </a:bodyPr>
+          <a:lstStyle/>
+          <a:p>
+            <a:pPr algn="l">
               <a:spcAft>
-                <a:spcPts val="900"/>
+                <a:spcPts val="400"/>
               </a:spcAft>
             </a:pPr>
             <a:r>
-              <a:rPr sz="1500" b="0">
-                <a:solidFill>
-                  <a:srgbClr val="0D9488"/>
-                </a:solidFill>
-                <a:latin typeface="Microsoft YaHei"/>
-                <a:ea typeface="Microsoft YaHei"/>
-              </a:rPr>
-              <a:t>●  本地优先：简历/事实/Trace 存于浏览器本地（Zustand + IndexedDB），无服务端数据库</a:t>
-            </a:r>
-          </a:p>
-          <a:p>
-            <a:pPr>
+              <a:rPr sz="1200" b="0">
+                <a:solidFill>
+                  <a:srgbClr val="334155"/>
+                </a:solidFill>
+                <a:latin typeface="Microsoft YaHei"/>
+                <a:ea typeface="Microsoft YaHei"/>
+              </a:rPr>
+              <a:t>MCP：本阶段提供等价连接器契约，迁移仅需协议适配（见材料 05）。</a:t>
+            </a:r>
+          </a:p>
+        </p:txBody>
+      </p:sp>
+      <p:sp>
+        <p:nvSpPr>
+          <p:cNvPr id="15" name="TextBox 14"/>
+          <p:cNvSpPr txBox="1"/>
+          <p:nvPr/>
+        </p:nvSpPr>
+        <p:spPr>
+          <a:xfrm>
+            <a:off x="502920" y="4846320"/>
+            <a:ext cx="11155680" cy="457200"/>
+          </a:xfrm>
+          <a:prstGeom prst="rect">
+            <a:avLst/>
+          </a:prstGeom>
+          <a:noFill/>
+        </p:spPr>
+        <p:txBody>
+          <a:bodyPr wrap="square" anchor="t">
+            <a:spAutoFit/>
+          </a:bodyPr>
+          <a:lstStyle/>
+          <a:p>
+            <a:pPr algn="l">
               <a:spcAft>
-                <a:spcPts val="900"/>
+                <a:spcPts val="400"/>
               </a:spcAft>
             </a:pPr>
             <a:r>
-              <a:rPr sz="1500" b="0">
-                <a:solidFill>
-                  <a:srgbClr val="0D9488"/>
-                </a:solidFill>
-                <a:latin typeface="Microsoft YaHei"/>
-                <a:ea typeface="Microsoft YaHei"/>
-              </a:rPr>
-              <a:t>●  隐私：不采集不上传；演示与评测一律使用合成/示例数据</a:t>
-            </a:r>
-          </a:p>
-          <a:p>
-            <a:pPr>
-              <a:spcAft>
-                <a:spcPts val="900"/>
-              </a:spcAft>
-            </a:pPr>
-            <a:r>
-              <a:rPr sz="1500" b="0">
-                <a:solidFill>
-                  <a:srgbClr val="2563EB"/>
-                </a:solidFill>
-                <a:latin typeface="Microsoft YaHei"/>
-                <a:ea typeface="Microsoft YaHei"/>
-              </a:rPr>
-              <a:t>●  模型服务披露：用户自配 OpenAI 兼容服务；默认 Mock 可复现；API Key 不进仓库/备份/演示</a:t>
-            </a:r>
-          </a:p>
-          <a:p>
-            <a:pPr>
-              <a:spcAft>
-                <a:spcPts val="900"/>
-              </a:spcAft>
-            </a:pPr>
-            <a:r>
-              <a:rPr sz="1500" b="0">
-                <a:solidFill>
-                  <a:srgbClr val="F59E0B"/>
-                </a:solidFill>
-                <a:latin typeface="Microsoft YaHei"/>
-                <a:ea typeface="Microsoft YaHei"/>
-              </a:rPr>
-              <a:t>●  MCP 边界：本阶段提供等价连接器契约，迁移仅需协议适配（见材料 05）</a:t>
-            </a:r>
-          </a:p>
-          <a:p>
-            <a:pPr>
-              <a:spcAft>
-                <a:spcPts val="900"/>
-              </a:spcAft>
-            </a:pPr>
-            <a:r>
-              <a:rPr sz="1500" b="0">
-                <a:solidFill>
-                  <a:srgbClr val="F59E0B"/>
-                </a:solidFill>
-                <a:latin typeface="Microsoft YaHei"/>
-                <a:ea typeface="Microsoft YaHei"/>
-              </a:rPr>
-              <a:t>●  RAG 边界：以结构化事实 + 稳定 ID + 确定性筛选代替知识库 RAG</a:t>
-            </a:r>
-          </a:p>
-          <a:p>
-            <a:pPr>
-              <a:spcAft>
-                <a:spcPts val="900"/>
-              </a:spcAft>
-            </a:pPr>
-            <a:r>
-              <a:rPr sz="1500" b="0">
-                <a:solidFill>
-                  <a:srgbClr val="64748B"/>
-                </a:solidFill>
-                <a:latin typeface="Microsoft YaHei"/>
-                <a:ea typeface="Microsoft YaHei"/>
-              </a:rPr>
-              <a:t>●  开源：仓库已公开；本阶段不新增协议；复赛前落地 LICENSE/依赖/部署/贡献规范</a:t>
+              <a:rPr sz="1200" b="0">
+                <a:solidFill>
+                  <a:srgbClr val="334155"/>
+                </a:solidFill>
+                <a:latin typeface="Microsoft YaHei"/>
+                <a:ea typeface="Microsoft YaHei"/>
+              </a:rPr>
+              <a:t>RAG：以结构化事实 + 稳定 ID + 确定性筛选代替知识库 RAG。</a:t>
             </a:r>
           </a:p>
         </p:txBody>
@@ -4521,8 +5212,8 @@
         </p:nvSpPr>
         <p:spPr>
           <a:xfrm>
-            <a:off x="548640" y="384048"/>
-            <a:ext cx="11064240" cy="548640"/>
+            <a:off x="502920" y="365760"/>
+            <a:ext cx="10972800" cy="548640"/>
           </a:xfrm>
           <a:prstGeom prst="rect">
             <a:avLst/>
@@ -4537,11 +5228,11 @@
           <a:p>
             <a:pPr algn="l">
               <a:spcAft>
-                <a:spcPts val="600"/>
+                <a:spcPts val="400"/>
               </a:spcAft>
             </a:pPr>
             <a:r>
-              <a:rPr sz="2600" b="1">
+              <a:rPr sz="2400" b="1">
                 <a:solidFill>
                   <a:srgbClr val="0F172A"/>
                 </a:solidFill>
@@ -4561,14 +5252,14 @@
         </p:nvSpPr>
         <p:spPr>
           <a:xfrm>
-            <a:off x="548640" y="1115568"/>
+            <a:off x="502920" y="1078992"/>
             <a:ext cx="1371600" cy="64008"/>
           </a:xfrm>
           <a:prstGeom prst="rect">
             <a:avLst/>
           </a:prstGeom>
           <a:solidFill>
-            <a:srgbClr val="4F46E5"/>
+            <a:srgbClr val="1F3A93"/>
           </a:solidFill>
           <a:ln>
             <a:noFill/>
@@ -4605,8 +5296,8 @@
         </p:nvSpPr>
         <p:spPr>
           <a:xfrm>
-            <a:off x="11338560" y="6446520"/>
-            <a:ext cx="640080" cy="365760"/>
+            <a:off x="11430000" y="6446520"/>
+            <a:ext cx="548640" cy="365760"/>
           </a:xfrm>
           <a:prstGeom prst="rect">
             <a:avLst/>
@@ -4621,11 +5312,11 @@
           <a:p>
             <a:pPr algn="r">
               <a:spcAft>
-                <a:spcPts val="600"/>
+                <a:spcPts val="400"/>
               </a:spcAft>
             </a:pPr>
             <a:r>
-              <a:rPr sz="1000" b="0">
+              <a:rPr sz="900" b="0">
                 <a:solidFill>
                   <a:srgbClr val="64748B"/>
                 </a:solidFill>
@@ -4639,109 +5330,49 @@
       </p:sp>
       <p:sp>
         <p:nvSpPr>
-          <p:cNvPr id="6" name="TextBox 5"/>
-          <p:cNvSpPr txBox="1"/>
-          <p:nvPr/>
-        </p:nvSpPr>
-        <p:spPr>
-          <a:xfrm>
-            <a:off x="640080" y="1828800"/>
-            <a:ext cx="10972800" cy="4114800"/>
-          </a:xfrm>
-          <a:prstGeom prst="rect">
-            <a:avLst/>
-          </a:prstGeom>
-          <a:noFill/>
-        </p:spPr>
-        <p:txBody>
-          <a:bodyPr wrap="square">
-            <a:spAutoFit/>
-          </a:bodyPr>
-          <a:lstStyle/>
-          <a:p>
-            <a:pPr>
-              <a:spcAft>
-                <a:spcPts val="900"/>
-              </a:spcAft>
-            </a:pPr>
-            <a:r>
-              <a:rPr sz="1500" b="1">
-                <a:solidFill>
-                  <a:srgbClr val="4F46E5"/>
-                </a:solidFill>
-                <a:latin typeface="Microsoft YaHei"/>
-                <a:ea typeface="Microsoft YaHei"/>
-              </a:rPr>
-              <a:t>●  实现 AgentTeams 运行时：主控 + 4 Agent 的可执行协同层</a:t>
-            </a:r>
-          </a:p>
-          <a:p>
-            <a:pPr>
-              <a:spcAft>
-                <a:spcPts val="900"/>
-              </a:spcAft>
-            </a:pPr>
-            <a:r>
-              <a:rPr sz="1500" b="1">
-                <a:solidFill>
-                  <a:srgbClr val="4F46E5"/>
-                </a:solidFill>
-                <a:latin typeface="Microsoft YaHei"/>
-                <a:ea typeface="Microsoft YaHei"/>
-              </a:rPr>
-              <a:t>●  Skill 包工程化：版本、发布、回滚、质量评估与开源分发</a:t>
-            </a:r>
-          </a:p>
-          <a:p>
-            <a:pPr>
-              <a:spcAft>
-                <a:spcPts val="900"/>
-              </a:spcAft>
-            </a:pPr>
-            <a:r>
-              <a:rPr sz="1500" b="1">
-                <a:solidFill>
-                  <a:srgbClr val="4F46E5"/>
-                </a:solidFill>
-                <a:latin typeface="Microsoft YaHei"/>
-                <a:ea typeface="Microsoft YaHei"/>
-              </a:rPr>
-              <a:t>●  可执行 Demo：完整场景链路 + 样例输入输出 + 日志/Trace/指标 + 异常处理</a:t>
-            </a:r>
-          </a:p>
-          <a:p>
-            <a:pPr>
-              <a:spcAft>
-                <a:spcPts val="900"/>
-              </a:spcAft>
-            </a:pPr>
-            <a:r>
-              <a:rPr sz="1500" b="1">
-                <a:solidFill>
-                  <a:srgbClr val="4F46E5"/>
-                </a:solidFill>
-                <a:latin typeface="Microsoft YaHei"/>
-                <a:ea typeface="Microsoft YaHei"/>
-              </a:rPr>
-              <a:t>●  回放评测：Golden/Badcase 数据集，对比不同版本效果</a:t>
-            </a:r>
-          </a:p>
-          <a:p>
-            <a:pPr>
-              <a:spcAft>
-                <a:spcPts val="900"/>
-              </a:spcAft>
-            </a:pPr>
-            <a:r>
-              <a:rPr sz="1500" b="1">
-                <a:solidFill>
-                  <a:srgbClr val="4F46E5"/>
-                </a:solidFill>
-                <a:latin typeface="Microsoft YaHei"/>
-                <a:ea typeface="Microsoft YaHei"/>
-              </a:rPr>
-              <a:t>●  公开工程材料：LICENSE、依赖清单、部署指南、贡献规范</a:t>
-            </a:r>
+          <p:cNvPr id="6" name="Rounded Rectangle 5"/>
+          <p:cNvSpPr/>
+          <p:nvPr/>
+        </p:nvSpPr>
+        <p:spPr>
+          <a:xfrm>
+            <a:off x="502920" y="2103120"/>
+            <a:ext cx="2103120" cy="2103120"/>
+          </a:xfrm>
+          <a:prstGeom prst="roundRect">
+            <a:avLst>
+              <a:gd name="adj" fmla="val 8000"/>
+            </a:avLst>
+          </a:prstGeom>
+          <a:solidFill>
+            <a:srgbClr val="F8FAFC"/>
+          </a:solidFill>
+          <a:ln w="19050">
+            <a:solidFill>
+              <a:srgbClr val="E2E8F0"/>
+            </a:solidFill>
+          </a:ln>
+          <a:effectLst/>
+        </p:spPr>
+        <p:style>
+          <a:lnRef idx="1">
+            <a:schemeClr val="accent1"/>
+          </a:lnRef>
+          <a:fillRef idx="3">
+            <a:schemeClr val="accent1"/>
+          </a:fillRef>
+          <a:effectRef idx="2">
+            <a:schemeClr val="accent1"/>
+          </a:effectRef>
+          <a:fontRef idx="minor">
+            <a:schemeClr val="lt1"/>
+          </a:fontRef>
+        </p:style>
+        <p:txBody>
+          <a:bodyPr rtlCol="0" anchor="ctr"/>
+          <a:lstStyle/>
+          <a:p>
+            <a:pPr algn="ctr"/>
           </a:p>
         </p:txBody>
       </p:sp>
@@ -4753,8 +5384,8 @@
         </p:nvSpPr>
         <p:spPr>
           <a:xfrm>
-            <a:off x="640080" y="5852160"/>
-            <a:ext cx="10972800" cy="548640"/>
+            <a:off x="502920" y="2286000"/>
+            <a:ext cx="2103120" cy="457200"/>
           </a:xfrm>
           <a:prstGeom prst="rect">
             <a:avLst/>
@@ -4767,13 +5398,690 @@
           </a:bodyPr>
           <a:lstStyle/>
           <a:p>
-            <a:pPr algn="l">
+            <a:pPr algn="ctr">
               <a:spcAft>
-                <a:spcPts val="600"/>
+                <a:spcPts val="400"/>
               </a:spcAft>
             </a:pPr>
             <a:r>
-              <a:rPr sz="1600" b="1">
+              <a:rPr sz="2000" b="1">
+                <a:solidFill>
+                  <a:srgbClr val="1F3A93"/>
+                </a:solidFill>
+                <a:latin typeface="Microsoft YaHei"/>
+                <a:ea typeface="Microsoft YaHei"/>
+              </a:rPr>
+              <a:t>01</a:t>
+            </a:r>
+          </a:p>
+        </p:txBody>
+      </p:sp>
+      <p:sp>
+        <p:nvSpPr>
+          <p:cNvPr id="8" name="TextBox 7"/>
+          <p:cNvSpPr txBox="1"/>
+          <p:nvPr/>
+        </p:nvSpPr>
+        <p:spPr>
+          <a:xfrm>
+            <a:off x="502920" y="2834640"/>
+            <a:ext cx="2103120" cy="1280160"/>
+          </a:xfrm>
+          <a:prstGeom prst="rect">
+            <a:avLst/>
+          </a:prstGeom>
+          <a:noFill/>
+        </p:spPr>
+        <p:txBody>
+          <a:bodyPr wrap="square" anchor="t">
+            <a:spAutoFit/>
+          </a:bodyPr>
+          <a:lstStyle/>
+          <a:p>
+            <a:pPr algn="ctr">
+              <a:spcAft>
+                <a:spcPts val="400"/>
+              </a:spcAft>
+            </a:pPr>
+            <a:r>
+              <a:rPr sz="1100" b="0">
+                <a:solidFill>
+                  <a:srgbClr val="334155"/>
+                </a:solidFill>
+                <a:latin typeface="Microsoft YaHei"/>
+                <a:ea typeface="Microsoft YaHei"/>
+              </a:rPr>
+              <a:t>AgentTeams 运行时</a:t>
+            </a:r>
+          </a:p>
+          <a:p>
+            <a:pPr algn="ctr">
+              <a:spcAft>
+                <a:spcPts val="400"/>
+              </a:spcAft>
+            </a:pPr>
+            <a:r>
+              <a:rPr sz="1100" b="0">
+                <a:solidFill>
+                  <a:srgbClr val="334155"/>
+                </a:solidFill>
+                <a:latin typeface="Microsoft YaHei"/>
+                <a:ea typeface="Microsoft YaHei"/>
+              </a:rPr>
+              <a:t>主控 + 4 Agent 可执行协同层</a:t>
+            </a:r>
+          </a:p>
+        </p:txBody>
+      </p:sp>
+      <p:sp>
+        <p:nvSpPr>
+          <p:cNvPr id="9" name="Rounded Rectangle 8"/>
+          <p:cNvSpPr/>
+          <p:nvPr/>
+        </p:nvSpPr>
+        <p:spPr>
+          <a:xfrm>
+            <a:off x="2770632" y="2103120"/>
+            <a:ext cx="2103120" cy="2103120"/>
+          </a:xfrm>
+          <a:prstGeom prst="roundRect">
+            <a:avLst>
+              <a:gd name="adj" fmla="val 8000"/>
+            </a:avLst>
+          </a:prstGeom>
+          <a:solidFill>
+            <a:srgbClr val="F8FAFC"/>
+          </a:solidFill>
+          <a:ln w="19050">
+            <a:solidFill>
+              <a:srgbClr val="E2E8F0"/>
+            </a:solidFill>
+          </a:ln>
+          <a:effectLst/>
+        </p:spPr>
+        <p:style>
+          <a:lnRef idx="1">
+            <a:schemeClr val="accent1"/>
+          </a:lnRef>
+          <a:fillRef idx="3">
+            <a:schemeClr val="accent1"/>
+          </a:fillRef>
+          <a:effectRef idx="2">
+            <a:schemeClr val="accent1"/>
+          </a:effectRef>
+          <a:fontRef idx="minor">
+            <a:schemeClr val="lt1"/>
+          </a:fontRef>
+        </p:style>
+        <p:txBody>
+          <a:bodyPr rtlCol="0" anchor="ctr"/>
+          <a:lstStyle/>
+          <a:p>
+            <a:pPr algn="ctr"/>
+          </a:p>
+        </p:txBody>
+      </p:sp>
+      <p:sp>
+        <p:nvSpPr>
+          <p:cNvPr id="10" name="TextBox 9"/>
+          <p:cNvSpPr txBox="1"/>
+          <p:nvPr/>
+        </p:nvSpPr>
+        <p:spPr>
+          <a:xfrm>
+            <a:off x="2770632" y="2286000"/>
+            <a:ext cx="2103120" cy="457200"/>
+          </a:xfrm>
+          <a:prstGeom prst="rect">
+            <a:avLst/>
+          </a:prstGeom>
+          <a:noFill/>
+        </p:spPr>
+        <p:txBody>
+          <a:bodyPr wrap="square" anchor="t">
+            <a:spAutoFit/>
+          </a:bodyPr>
+          <a:lstStyle/>
+          <a:p>
+            <a:pPr algn="ctr">
+              <a:spcAft>
+                <a:spcPts val="400"/>
+              </a:spcAft>
+            </a:pPr>
+            <a:r>
+              <a:rPr sz="2000" b="1">
+                <a:solidFill>
+                  <a:srgbClr val="1F3A93"/>
+                </a:solidFill>
+                <a:latin typeface="Microsoft YaHei"/>
+                <a:ea typeface="Microsoft YaHei"/>
+              </a:rPr>
+              <a:t>02</a:t>
+            </a:r>
+          </a:p>
+        </p:txBody>
+      </p:sp>
+      <p:sp>
+        <p:nvSpPr>
+          <p:cNvPr id="11" name="TextBox 10"/>
+          <p:cNvSpPr txBox="1"/>
+          <p:nvPr/>
+        </p:nvSpPr>
+        <p:spPr>
+          <a:xfrm>
+            <a:off x="2770632" y="2834640"/>
+            <a:ext cx="2103120" cy="1280160"/>
+          </a:xfrm>
+          <a:prstGeom prst="rect">
+            <a:avLst/>
+          </a:prstGeom>
+          <a:noFill/>
+        </p:spPr>
+        <p:txBody>
+          <a:bodyPr wrap="square" anchor="t">
+            <a:spAutoFit/>
+          </a:bodyPr>
+          <a:lstStyle/>
+          <a:p>
+            <a:pPr algn="ctr">
+              <a:spcAft>
+                <a:spcPts val="400"/>
+              </a:spcAft>
+            </a:pPr>
+            <a:r>
+              <a:rPr sz="1100" b="0">
+                <a:solidFill>
+                  <a:srgbClr val="334155"/>
+                </a:solidFill>
+                <a:latin typeface="Microsoft YaHei"/>
+                <a:ea typeface="Microsoft YaHei"/>
+              </a:rPr>
+              <a:t>Skill 包工程化</a:t>
+            </a:r>
+          </a:p>
+          <a:p>
+            <a:pPr algn="ctr">
+              <a:spcAft>
+                <a:spcPts val="400"/>
+              </a:spcAft>
+            </a:pPr>
+            <a:r>
+              <a:rPr sz="1100" b="0">
+                <a:solidFill>
+                  <a:srgbClr val="334155"/>
+                </a:solidFill>
+                <a:latin typeface="Microsoft YaHei"/>
+                <a:ea typeface="Microsoft YaHei"/>
+              </a:rPr>
+              <a:t>版本/发布/回滚/评估/分发</a:t>
+            </a:r>
+          </a:p>
+        </p:txBody>
+      </p:sp>
+      <p:sp>
+        <p:nvSpPr>
+          <p:cNvPr id="12" name="Rounded Rectangle 11"/>
+          <p:cNvSpPr/>
+          <p:nvPr/>
+        </p:nvSpPr>
+        <p:spPr>
+          <a:xfrm>
+            <a:off x="5038344" y="2103120"/>
+            <a:ext cx="2103120" cy="2103120"/>
+          </a:xfrm>
+          <a:prstGeom prst="roundRect">
+            <a:avLst>
+              <a:gd name="adj" fmla="val 8000"/>
+            </a:avLst>
+          </a:prstGeom>
+          <a:solidFill>
+            <a:srgbClr val="F8FAFC"/>
+          </a:solidFill>
+          <a:ln w="19050">
+            <a:solidFill>
+              <a:srgbClr val="E2E8F0"/>
+            </a:solidFill>
+          </a:ln>
+          <a:effectLst/>
+        </p:spPr>
+        <p:style>
+          <a:lnRef idx="1">
+            <a:schemeClr val="accent1"/>
+          </a:lnRef>
+          <a:fillRef idx="3">
+            <a:schemeClr val="accent1"/>
+          </a:fillRef>
+          <a:effectRef idx="2">
+            <a:schemeClr val="accent1"/>
+          </a:effectRef>
+          <a:fontRef idx="minor">
+            <a:schemeClr val="lt1"/>
+          </a:fontRef>
+        </p:style>
+        <p:txBody>
+          <a:bodyPr rtlCol="0" anchor="ctr"/>
+          <a:lstStyle/>
+          <a:p>
+            <a:pPr algn="ctr"/>
+          </a:p>
+        </p:txBody>
+      </p:sp>
+      <p:sp>
+        <p:nvSpPr>
+          <p:cNvPr id="13" name="TextBox 12"/>
+          <p:cNvSpPr txBox="1"/>
+          <p:nvPr/>
+        </p:nvSpPr>
+        <p:spPr>
+          <a:xfrm>
+            <a:off x="5038344" y="2286000"/>
+            <a:ext cx="2103120" cy="457200"/>
+          </a:xfrm>
+          <a:prstGeom prst="rect">
+            <a:avLst/>
+          </a:prstGeom>
+          <a:noFill/>
+        </p:spPr>
+        <p:txBody>
+          <a:bodyPr wrap="square" anchor="t">
+            <a:spAutoFit/>
+          </a:bodyPr>
+          <a:lstStyle/>
+          <a:p>
+            <a:pPr algn="ctr">
+              <a:spcAft>
+                <a:spcPts val="400"/>
+              </a:spcAft>
+            </a:pPr>
+            <a:r>
+              <a:rPr sz="2000" b="1">
+                <a:solidFill>
+                  <a:srgbClr val="1F3A93"/>
+                </a:solidFill>
+                <a:latin typeface="Microsoft YaHei"/>
+                <a:ea typeface="Microsoft YaHei"/>
+              </a:rPr>
+              <a:t>03</a:t>
+            </a:r>
+          </a:p>
+        </p:txBody>
+      </p:sp>
+      <p:sp>
+        <p:nvSpPr>
+          <p:cNvPr id="14" name="TextBox 13"/>
+          <p:cNvSpPr txBox="1"/>
+          <p:nvPr/>
+        </p:nvSpPr>
+        <p:spPr>
+          <a:xfrm>
+            <a:off x="5038344" y="2834640"/>
+            <a:ext cx="2103120" cy="1280160"/>
+          </a:xfrm>
+          <a:prstGeom prst="rect">
+            <a:avLst/>
+          </a:prstGeom>
+          <a:noFill/>
+        </p:spPr>
+        <p:txBody>
+          <a:bodyPr wrap="square" anchor="t">
+            <a:spAutoFit/>
+          </a:bodyPr>
+          <a:lstStyle/>
+          <a:p>
+            <a:pPr algn="ctr">
+              <a:spcAft>
+                <a:spcPts val="400"/>
+              </a:spcAft>
+            </a:pPr>
+            <a:r>
+              <a:rPr sz="1100" b="0">
+                <a:solidFill>
+                  <a:srgbClr val="334155"/>
+                </a:solidFill>
+                <a:latin typeface="Microsoft YaHei"/>
+                <a:ea typeface="Microsoft YaHei"/>
+              </a:rPr>
+              <a:t>可执行 Demo</a:t>
+            </a:r>
+          </a:p>
+          <a:p>
+            <a:pPr algn="ctr">
+              <a:spcAft>
+                <a:spcPts val="400"/>
+              </a:spcAft>
+            </a:pPr>
+            <a:r>
+              <a:rPr sz="1100" b="0">
+                <a:solidFill>
+                  <a:srgbClr val="334155"/>
+                </a:solidFill>
+                <a:latin typeface="Microsoft YaHei"/>
+                <a:ea typeface="Microsoft YaHei"/>
+              </a:rPr>
+              <a:t>完整链路 + 日志/Trace/指标</a:t>
+            </a:r>
+          </a:p>
+        </p:txBody>
+      </p:sp>
+      <p:sp>
+        <p:nvSpPr>
+          <p:cNvPr id="15" name="Rounded Rectangle 14"/>
+          <p:cNvSpPr/>
+          <p:nvPr/>
+        </p:nvSpPr>
+        <p:spPr>
+          <a:xfrm>
+            <a:off x="7306056" y="2103120"/>
+            <a:ext cx="2103120" cy="2103120"/>
+          </a:xfrm>
+          <a:prstGeom prst="roundRect">
+            <a:avLst>
+              <a:gd name="adj" fmla="val 8000"/>
+            </a:avLst>
+          </a:prstGeom>
+          <a:solidFill>
+            <a:srgbClr val="F8FAFC"/>
+          </a:solidFill>
+          <a:ln w="19050">
+            <a:solidFill>
+              <a:srgbClr val="E2E8F0"/>
+            </a:solidFill>
+          </a:ln>
+          <a:effectLst/>
+        </p:spPr>
+        <p:style>
+          <a:lnRef idx="1">
+            <a:schemeClr val="accent1"/>
+          </a:lnRef>
+          <a:fillRef idx="3">
+            <a:schemeClr val="accent1"/>
+          </a:fillRef>
+          <a:effectRef idx="2">
+            <a:schemeClr val="accent1"/>
+          </a:effectRef>
+          <a:fontRef idx="minor">
+            <a:schemeClr val="lt1"/>
+          </a:fontRef>
+        </p:style>
+        <p:txBody>
+          <a:bodyPr rtlCol="0" anchor="ctr"/>
+          <a:lstStyle/>
+          <a:p>
+            <a:pPr algn="ctr"/>
+          </a:p>
+        </p:txBody>
+      </p:sp>
+      <p:sp>
+        <p:nvSpPr>
+          <p:cNvPr id="16" name="TextBox 15"/>
+          <p:cNvSpPr txBox="1"/>
+          <p:nvPr/>
+        </p:nvSpPr>
+        <p:spPr>
+          <a:xfrm>
+            <a:off x="7306056" y="2286000"/>
+            <a:ext cx="2103120" cy="457200"/>
+          </a:xfrm>
+          <a:prstGeom prst="rect">
+            <a:avLst/>
+          </a:prstGeom>
+          <a:noFill/>
+        </p:spPr>
+        <p:txBody>
+          <a:bodyPr wrap="square" anchor="t">
+            <a:spAutoFit/>
+          </a:bodyPr>
+          <a:lstStyle/>
+          <a:p>
+            <a:pPr algn="ctr">
+              <a:spcAft>
+                <a:spcPts val="400"/>
+              </a:spcAft>
+            </a:pPr>
+            <a:r>
+              <a:rPr sz="2000" b="1">
+                <a:solidFill>
+                  <a:srgbClr val="1F3A93"/>
+                </a:solidFill>
+                <a:latin typeface="Microsoft YaHei"/>
+                <a:ea typeface="Microsoft YaHei"/>
+              </a:rPr>
+              <a:t>04</a:t>
+            </a:r>
+          </a:p>
+        </p:txBody>
+      </p:sp>
+      <p:sp>
+        <p:nvSpPr>
+          <p:cNvPr id="17" name="TextBox 16"/>
+          <p:cNvSpPr txBox="1"/>
+          <p:nvPr/>
+        </p:nvSpPr>
+        <p:spPr>
+          <a:xfrm>
+            <a:off x="7306056" y="2834640"/>
+            <a:ext cx="2103120" cy="1280160"/>
+          </a:xfrm>
+          <a:prstGeom prst="rect">
+            <a:avLst/>
+          </a:prstGeom>
+          <a:noFill/>
+        </p:spPr>
+        <p:txBody>
+          <a:bodyPr wrap="square" anchor="t">
+            <a:spAutoFit/>
+          </a:bodyPr>
+          <a:lstStyle/>
+          <a:p>
+            <a:pPr algn="ctr">
+              <a:spcAft>
+                <a:spcPts val="400"/>
+              </a:spcAft>
+            </a:pPr>
+            <a:r>
+              <a:rPr sz="1100" b="0">
+                <a:solidFill>
+                  <a:srgbClr val="334155"/>
+                </a:solidFill>
+                <a:latin typeface="Microsoft YaHei"/>
+                <a:ea typeface="Microsoft YaHei"/>
+              </a:rPr>
+              <a:t>回放评测</a:t>
+            </a:r>
+          </a:p>
+          <a:p>
+            <a:pPr algn="ctr">
+              <a:spcAft>
+                <a:spcPts val="400"/>
+              </a:spcAft>
+            </a:pPr>
+            <a:r>
+              <a:rPr sz="1100" b="0">
+                <a:solidFill>
+                  <a:srgbClr val="334155"/>
+                </a:solidFill>
+                <a:latin typeface="Microsoft YaHei"/>
+                <a:ea typeface="Microsoft YaHei"/>
+              </a:rPr>
+              <a:t>Golden/Badcase 数据集</a:t>
+            </a:r>
+          </a:p>
+        </p:txBody>
+      </p:sp>
+      <p:sp>
+        <p:nvSpPr>
+          <p:cNvPr id="18" name="Rounded Rectangle 17"/>
+          <p:cNvSpPr/>
+          <p:nvPr/>
+        </p:nvSpPr>
+        <p:spPr>
+          <a:xfrm>
+            <a:off x="9573768" y="2103120"/>
+            <a:ext cx="2103120" cy="2103120"/>
+          </a:xfrm>
+          <a:prstGeom prst="roundRect">
+            <a:avLst>
+              <a:gd name="adj" fmla="val 8000"/>
+            </a:avLst>
+          </a:prstGeom>
+          <a:solidFill>
+            <a:srgbClr val="F8FAFC"/>
+          </a:solidFill>
+          <a:ln w="19050">
+            <a:solidFill>
+              <a:srgbClr val="E2E8F0"/>
+            </a:solidFill>
+          </a:ln>
+          <a:effectLst/>
+        </p:spPr>
+        <p:style>
+          <a:lnRef idx="1">
+            <a:schemeClr val="accent1"/>
+          </a:lnRef>
+          <a:fillRef idx="3">
+            <a:schemeClr val="accent1"/>
+          </a:fillRef>
+          <a:effectRef idx="2">
+            <a:schemeClr val="accent1"/>
+          </a:effectRef>
+          <a:fontRef idx="minor">
+            <a:schemeClr val="lt1"/>
+          </a:fontRef>
+        </p:style>
+        <p:txBody>
+          <a:bodyPr rtlCol="0" anchor="ctr"/>
+          <a:lstStyle/>
+          <a:p>
+            <a:pPr algn="ctr"/>
+          </a:p>
+        </p:txBody>
+      </p:sp>
+      <p:sp>
+        <p:nvSpPr>
+          <p:cNvPr id="19" name="TextBox 18"/>
+          <p:cNvSpPr txBox="1"/>
+          <p:nvPr/>
+        </p:nvSpPr>
+        <p:spPr>
+          <a:xfrm>
+            <a:off x="9573768" y="2286000"/>
+            <a:ext cx="2103120" cy="457200"/>
+          </a:xfrm>
+          <a:prstGeom prst="rect">
+            <a:avLst/>
+          </a:prstGeom>
+          <a:noFill/>
+        </p:spPr>
+        <p:txBody>
+          <a:bodyPr wrap="square" anchor="t">
+            <a:spAutoFit/>
+          </a:bodyPr>
+          <a:lstStyle/>
+          <a:p>
+            <a:pPr algn="ctr">
+              <a:spcAft>
+                <a:spcPts val="400"/>
+              </a:spcAft>
+            </a:pPr>
+            <a:r>
+              <a:rPr sz="2000" b="1">
+                <a:solidFill>
+                  <a:srgbClr val="1F3A93"/>
+                </a:solidFill>
+                <a:latin typeface="Microsoft YaHei"/>
+                <a:ea typeface="Microsoft YaHei"/>
+              </a:rPr>
+              <a:t>05</a:t>
+            </a:r>
+          </a:p>
+        </p:txBody>
+      </p:sp>
+      <p:sp>
+        <p:nvSpPr>
+          <p:cNvPr id="20" name="TextBox 19"/>
+          <p:cNvSpPr txBox="1"/>
+          <p:nvPr/>
+        </p:nvSpPr>
+        <p:spPr>
+          <a:xfrm>
+            <a:off x="9573768" y="2834640"/>
+            <a:ext cx="2103120" cy="1280160"/>
+          </a:xfrm>
+          <a:prstGeom prst="rect">
+            <a:avLst/>
+          </a:prstGeom>
+          <a:noFill/>
+        </p:spPr>
+        <p:txBody>
+          <a:bodyPr wrap="square" anchor="t">
+            <a:spAutoFit/>
+          </a:bodyPr>
+          <a:lstStyle/>
+          <a:p>
+            <a:pPr algn="ctr">
+              <a:spcAft>
+                <a:spcPts val="400"/>
+              </a:spcAft>
+            </a:pPr>
+            <a:r>
+              <a:rPr sz="1100" b="0">
+                <a:solidFill>
+                  <a:srgbClr val="334155"/>
+                </a:solidFill>
+                <a:latin typeface="Microsoft YaHei"/>
+                <a:ea typeface="Microsoft YaHei"/>
+              </a:rPr>
+              <a:t>公开工程材料</a:t>
+            </a:r>
+          </a:p>
+          <a:p>
+            <a:pPr algn="ctr">
+              <a:spcAft>
+                <a:spcPts val="400"/>
+              </a:spcAft>
+            </a:pPr>
+            <a:r>
+              <a:rPr sz="1100" b="0">
+                <a:solidFill>
+                  <a:srgbClr val="334155"/>
+                </a:solidFill>
+                <a:latin typeface="Microsoft YaHei"/>
+                <a:ea typeface="Microsoft YaHei"/>
+              </a:rPr>
+              <a:t>LICENSE/依赖/部署/贡献规范</a:t>
+            </a:r>
+          </a:p>
+        </p:txBody>
+      </p:sp>
+      <p:sp>
+        <p:nvSpPr>
+          <p:cNvPr id="21" name="TextBox 20"/>
+          <p:cNvSpPr txBox="1"/>
+          <p:nvPr/>
+        </p:nvSpPr>
+        <p:spPr>
+          <a:xfrm>
+            <a:off x="502920" y="5394960"/>
+            <a:ext cx="11155680" cy="548640"/>
+          </a:xfrm>
+          <a:prstGeom prst="rect">
+            <a:avLst/>
+          </a:prstGeom>
+          <a:noFill/>
+        </p:spPr>
+        <p:txBody>
+          <a:bodyPr wrap="square" anchor="t">
+            <a:spAutoFit/>
+          </a:bodyPr>
+          <a:lstStyle/>
+          <a:p>
+            <a:pPr algn="ctr">
+              <a:spcAft>
+                <a:spcPts val="400"/>
+              </a:spcAft>
+            </a:pPr>
+            <a:r>
+              <a:rPr sz="1500" b="1">
                 <a:solidFill>
                   <a:srgbClr val="F59E0B"/>
                 </a:solidFill>
@@ -4855,8 +6163,8 @@
         </p:nvSpPr>
         <p:spPr>
           <a:xfrm>
-            <a:off x="548640" y="384048"/>
-            <a:ext cx="11064240" cy="548640"/>
+            <a:off x="502920" y="365760"/>
+            <a:ext cx="10972800" cy="548640"/>
           </a:xfrm>
           <a:prstGeom prst="rect">
             <a:avLst/>
@@ -4871,11 +6179,11 @@
           <a:p>
             <a:pPr algn="l">
               <a:spcAft>
-                <a:spcPts val="600"/>
+                <a:spcPts val="400"/>
               </a:spcAft>
             </a:pPr>
             <a:r>
-              <a:rPr sz="2600" b="1">
+              <a:rPr sz="2400" b="1">
                 <a:solidFill>
                   <a:srgbClr val="0F172A"/>
                 </a:solidFill>
@@ -4895,14 +6203,14 @@
         </p:nvSpPr>
         <p:spPr>
           <a:xfrm>
-            <a:off x="548640" y="1115568"/>
+            <a:off x="502920" y="1078992"/>
             <a:ext cx="1371600" cy="64008"/>
           </a:xfrm>
           <a:prstGeom prst="rect">
             <a:avLst/>
           </a:prstGeom>
           <a:solidFill>
-            <a:srgbClr val="2563EB"/>
+            <a:srgbClr val="1F3A93"/>
           </a:solidFill>
           <a:ln>
             <a:noFill/>
@@ -4939,8 +6247,8 @@
         </p:nvSpPr>
         <p:spPr>
           <a:xfrm>
-            <a:off x="11338560" y="6446520"/>
-            <a:ext cx="640080" cy="365760"/>
+            <a:off x="11430000" y="6446520"/>
+            <a:ext cx="548640" cy="365760"/>
           </a:xfrm>
           <a:prstGeom prst="rect">
             <a:avLst/>
@@ -4955,11 +6263,11 @@
           <a:p>
             <a:pPr algn="r">
               <a:spcAft>
-                <a:spcPts val="600"/>
+                <a:spcPts val="400"/>
               </a:spcAft>
             </a:pPr>
             <a:r>
-              <a:rPr sz="1000" b="0">
+              <a:rPr sz="900" b="0">
                 <a:solidFill>
                   <a:srgbClr val="64748B"/>
                 </a:solidFill>
@@ -4973,14 +6281,62 @@
       </p:sp>
       <p:sp>
         <p:nvSpPr>
-          <p:cNvPr id="6" name="TextBox 5"/>
+          <p:cNvPr id="6" name="Rounded Rectangle 5"/>
+          <p:cNvSpPr/>
+          <p:nvPr/>
+        </p:nvSpPr>
+        <p:spPr>
+          <a:xfrm>
+            <a:off x="502920" y="1554480"/>
+            <a:ext cx="5394960" cy="1234440"/>
+          </a:xfrm>
+          <a:prstGeom prst="roundRect">
+            <a:avLst>
+              <a:gd name="adj" fmla="val 8000"/>
+            </a:avLst>
+          </a:prstGeom>
+          <a:solidFill>
+            <a:srgbClr val="F8FAFC"/>
+          </a:solidFill>
+          <a:ln w="19050">
+            <a:solidFill>
+              <a:srgbClr val="E2E8F0"/>
+            </a:solidFill>
+          </a:ln>
+          <a:effectLst/>
+        </p:spPr>
+        <p:style>
+          <a:lnRef idx="1">
+            <a:schemeClr val="accent1"/>
+          </a:lnRef>
+          <a:fillRef idx="3">
+            <a:schemeClr val="accent1"/>
+          </a:fillRef>
+          <a:effectRef idx="2">
+            <a:schemeClr val="accent1"/>
+          </a:effectRef>
+          <a:fontRef idx="minor">
+            <a:schemeClr val="lt1"/>
+          </a:fontRef>
+        </p:style>
+        <p:txBody>
+          <a:bodyPr rtlCol="0" anchor="ctr"/>
+          <a:lstStyle/>
+          <a:p>
+            <a:pPr algn="ctr"/>
+          </a:p>
+        </p:txBody>
+      </p:sp>
+      <p:sp>
+        <p:nvSpPr>
+          <p:cNvPr id="7" name="TextBox 6"/>
           <p:cNvSpPr txBox="1"/>
           <p:nvPr/>
         </p:nvSpPr>
         <p:spPr>
           <a:xfrm>
-            <a:off x="640080" y="1737360"/>
-            <a:ext cx="10972800" cy="4754880"/>
+            <a:off x="640080" y="1645920"/>
+            <a:ext cx="5120640" cy="1051560"/>
           </a:xfrm>
           <a:prstGeom prst="rect">
             <a:avLst/>
@@ -4993,105 +6349,412 @@
           </a:bodyPr>
           <a:lstStyle/>
           <a:p>
+            <a:r>
+              <a:rPr sz="1200" b="1">
+                <a:solidFill>
+                  <a:srgbClr val="1F3A93"/>
+                </a:solidFill>
+                <a:latin typeface="Microsoft YaHei"/>
+                <a:ea typeface="Microsoft YaHei"/>
+              </a:rPr>
+              <a:t>核心问题</a:t>
+            </a:r>
+          </a:p>
+          <a:p>
             <a:pPr>
+              <a:spcBef>
+                <a:spcPts val="400"/>
+              </a:spcBef>
+            </a:pPr>
+            <a:r>
+              <a:rPr sz="1050" b="0">
+                <a:solidFill>
+                  <a:srgbClr val="334155"/>
+                </a:solidFill>
+                <a:latin typeface="Microsoft YaHei"/>
+                <a:ea typeface="Microsoft YaHei"/>
+              </a:rPr>
+              <a:t>求职者的难点不是“简历不好看”，而是把零散经历变成可验证事实再做可信决策。</a:t>
+            </a:r>
+          </a:p>
+        </p:txBody>
+      </p:sp>
+      <p:sp>
+        <p:nvSpPr>
+          <p:cNvPr id="8" name="Rounded Rectangle 7"/>
+          <p:cNvSpPr/>
+          <p:nvPr/>
+        </p:nvSpPr>
+        <p:spPr>
+          <a:xfrm>
+            <a:off x="6126480" y="1554480"/>
+            <a:ext cx="5394960" cy="1234440"/>
+          </a:xfrm>
+          <a:prstGeom prst="roundRect">
+            <a:avLst>
+              <a:gd name="adj" fmla="val 8000"/>
+            </a:avLst>
+          </a:prstGeom>
+          <a:solidFill>
+            <a:srgbClr val="F8FAFC"/>
+          </a:solidFill>
+          <a:ln w="19050">
+            <a:solidFill>
+              <a:srgbClr val="E2E8F0"/>
+            </a:solidFill>
+          </a:ln>
+          <a:effectLst/>
+        </p:spPr>
+        <p:style>
+          <a:lnRef idx="1">
+            <a:schemeClr val="accent1"/>
+          </a:lnRef>
+          <a:fillRef idx="3">
+            <a:schemeClr val="accent1"/>
+          </a:fillRef>
+          <a:effectRef idx="2">
+            <a:schemeClr val="accent1"/>
+          </a:effectRef>
+          <a:fontRef idx="minor">
+            <a:schemeClr val="lt1"/>
+          </a:fontRef>
+        </p:style>
+        <p:txBody>
+          <a:bodyPr rtlCol="0" anchor="ctr"/>
+          <a:lstStyle/>
+          <a:p>
+            <a:pPr algn="ctr"/>
+          </a:p>
+        </p:txBody>
+      </p:sp>
+      <p:sp>
+        <p:nvSpPr>
+          <p:cNvPr id="9" name="TextBox 8"/>
+          <p:cNvSpPr txBox="1"/>
+          <p:nvPr/>
+        </p:nvSpPr>
+        <p:spPr>
+          <a:xfrm>
+            <a:off x="6263640" y="1645920"/>
+            <a:ext cx="5120640" cy="1051560"/>
+          </a:xfrm>
+          <a:prstGeom prst="rect">
+            <a:avLst/>
+          </a:prstGeom>
+          <a:noFill/>
+        </p:spPr>
+        <p:txBody>
+          <a:bodyPr wrap="square">
+            <a:spAutoFit/>
+          </a:bodyPr>
+          <a:lstStyle/>
+          <a:p>
+            <a:r>
+              <a:rPr sz="1200" b="1">
+                <a:solidFill>
+                  <a:srgbClr val="1F3A93"/>
+                </a:solidFill>
+                <a:latin typeface="Microsoft YaHei"/>
+                <a:ea typeface="Microsoft YaHei"/>
+              </a:rPr>
+              <a:t>目标用户</a:t>
+            </a:r>
+          </a:p>
+          <a:p>
+            <a:pPr>
+              <a:spcBef>
+                <a:spcPts val="400"/>
+              </a:spcBef>
+            </a:pPr>
+            <a:r>
+              <a:rPr sz="1050" b="0">
+                <a:solidFill>
+                  <a:srgbClr val="334155"/>
+                </a:solidFill>
+                <a:latin typeface="Microsoft YaHei"/>
+                <a:ea typeface="Microsoft YaHei"/>
+              </a:rPr>
+              <a:t>求职者（校招/社招）、求职辅导者。</a:t>
+            </a:r>
+          </a:p>
+        </p:txBody>
+      </p:sp>
+      <p:sp>
+        <p:nvSpPr>
+          <p:cNvPr id="10" name="Rounded Rectangle 9"/>
+          <p:cNvSpPr/>
+          <p:nvPr/>
+        </p:nvSpPr>
+        <p:spPr>
+          <a:xfrm>
+            <a:off x="502920" y="3017520"/>
+            <a:ext cx="5394960" cy="1234440"/>
+          </a:xfrm>
+          <a:prstGeom prst="roundRect">
+            <a:avLst>
+              <a:gd name="adj" fmla="val 8000"/>
+            </a:avLst>
+          </a:prstGeom>
+          <a:solidFill>
+            <a:srgbClr val="F8FAFC"/>
+          </a:solidFill>
+          <a:ln w="19050">
+            <a:solidFill>
+              <a:srgbClr val="E2E8F0"/>
+            </a:solidFill>
+          </a:ln>
+          <a:effectLst/>
+        </p:spPr>
+        <p:style>
+          <a:lnRef idx="1">
+            <a:schemeClr val="accent1"/>
+          </a:lnRef>
+          <a:fillRef idx="3">
+            <a:schemeClr val="accent1"/>
+          </a:fillRef>
+          <a:effectRef idx="2">
+            <a:schemeClr val="accent1"/>
+          </a:effectRef>
+          <a:fontRef idx="minor">
+            <a:schemeClr val="lt1"/>
+          </a:fontRef>
+        </p:style>
+        <p:txBody>
+          <a:bodyPr rtlCol="0" anchor="ctr"/>
+          <a:lstStyle/>
+          <a:p>
+            <a:pPr algn="ctr"/>
+          </a:p>
+        </p:txBody>
+      </p:sp>
+      <p:sp>
+        <p:nvSpPr>
+          <p:cNvPr id="11" name="TextBox 10"/>
+          <p:cNvSpPr txBox="1"/>
+          <p:nvPr/>
+        </p:nvSpPr>
+        <p:spPr>
+          <a:xfrm>
+            <a:off x="640080" y="3108960"/>
+            <a:ext cx="5120640" cy="1051560"/>
+          </a:xfrm>
+          <a:prstGeom prst="rect">
+            <a:avLst/>
+          </a:prstGeom>
+          <a:noFill/>
+        </p:spPr>
+        <p:txBody>
+          <a:bodyPr wrap="square">
+            <a:spAutoFit/>
+          </a:bodyPr>
+          <a:lstStyle/>
+          <a:p>
+            <a:r>
+              <a:rPr sz="1200" b="1">
+                <a:solidFill>
+                  <a:srgbClr val="1F3A93"/>
+                </a:solidFill>
+                <a:latin typeface="Microsoft YaHei"/>
+                <a:ea typeface="Microsoft YaHei"/>
+              </a:rPr>
+              <a:t>输入</a:t>
+            </a:r>
+          </a:p>
+          <a:p>
+            <a:pPr>
+              <a:spcBef>
+                <a:spcPts val="400"/>
+              </a:spcBef>
+            </a:pPr>
+            <a:r>
+              <a:rPr sz="1050" b="0">
+                <a:solidFill>
+                  <a:srgbClr val="334155"/>
+                </a:solidFill>
+                <a:latin typeface="Microsoft YaHei"/>
+                <a:ea typeface="Microsoft YaHei"/>
+              </a:rPr>
+              <a:t>JD 原文 + 原始简历 + 项目化经历事实。</a:t>
+            </a:r>
+          </a:p>
+        </p:txBody>
+      </p:sp>
+      <p:sp>
+        <p:nvSpPr>
+          <p:cNvPr id="12" name="Rounded Rectangle 11"/>
+          <p:cNvSpPr/>
+          <p:nvPr/>
+        </p:nvSpPr>
+        <p:spPr>
+          <a:xfrm>
+            <a:off x="6126480" y="3017520"/>
+            <a:ext cx="5394960" cy="1234440"/>
+          </a:xfrm>
+          <a:prstGeom prst="roundRect">
+            <a:avLst>
+              <a:gd name="adj" fmla="val 8000"/>
+            </a:avLst>
+          </a:prstGeom>
+          <a:solidFill>
+            <a:srgbClr val="F8FAFC"/>
+          </a:solidFill>
+          <a:ln w="19050">
+            <a:solidFill>
+              <a:srgbClr val="E2E8F0"/>
+            </a:solidFill>
+          </a:ln>
+          <a:effectLst/>
+        </p:spPr>
+        <p:style>
+          <a:lnRef idx="1">
+            <a:schemeClr val="accent1"/>
+          </a:lnRef>
+          <a:fillRef idx="3">
+            <a:schemeClr val="accent1"/>
+          </a:fillRef>
+          <a:effectRef idx="2">
+            <a:schemeClr val="accent1"/>
+          </a:effectRef>
+          <a:fontRef idx="minor">
+            <a:schemeClr val="lt1"/>
+          </a:fontRef>
+        </p:style>
+        <p:txBody>
+          <a:bodyPr rtlCol="0" anchor="ctr"/>
+          <a:lstStyle/>
+          <a:p>
+            <a:pPr algn="ctr"/>
+          </a:p>
+        </p:txBody>
+      </p:sp>
+      <p:sp>
+        <p:nvSpPr>
+          <p:cNvPr id="13" name="TextBox 12"/>
+          <p:cNvSpPr txBox="1"/>
+          <p:nvPr/>
+        </p:nvSpPr>
+        <p:spPr>
+          <a:xfrm>
+            <a:off x="6263640" y="3108960"/>
+            <a:ext cx="5120640" cy="1051560"/>
+          </a:xfrm>
+          <a:prstGeom prst="rect">
+            <a:avLst/>
+          </a:prstGeom>
+          <a:noFill/>
+        </p:spPr>
+        <p:txBody>
+          <a:bodyPr wrap="square">
+            <a:spAutoFit/>
+          </a:bodyPr>
+          <a:lstStyle/>
+          <a:p>
+            <a:r>
+              <a:rPr sz="1200" b="1">
+                <a:solidFill>
+                  <a:srgbClr val="1F3A93"/>
+                </a:solidFill>
+                <a:latin typeface="Microsoft YaHei"/>
+                <a:ea typeface="Microsoft YaHei"/>
+              </a:rPr>
+              <a:t>输出</a:t>
+            </a:r>
+          </a:p>
+          <a:p>
+            <a:pPr>
+              <a:spcBef>
+                <a:spcPts val="400"/>
+              </a:spcBef>
+            </a:pPr>
+            <a:r>
+              <a:rPr sz="1050" b="0">
+                <a:solidFill>
+                  <a:srgbClr val="334155"/>
+                </a:solidFill>
+                <a:latin typeface="Microsoft YaHei"/>
+                <a:ea typeface="Microsoft YaHei"/>
+              </a:rPr>
+              <a:t>可信岗位准备度、定制优化简历、可审计投递交付。</a:t>
+            </a:r>
+          </a:p>
+        </p:txBody>
+      </p:sp>
+      <p:sp>
+        <p:nvSpPr>
+          <p:cNvPr id="14" name="TextBox 13"/>
+          <p:cNvSpPr txBox="1"/>
+          <p:nvPr/>
+        </p:nvSpPr>
+        <p:spPr>
+          <a:xfrm>
+            <a:off x="502920" y="4297680"/>
+            <a:ext cx="11155680" cy="548640"/>
+          </a:xfrm>
+          <a:prstGeom prst="rect">
+            <a:avLst/>
+          </a:prstGeom>
+          <a:noFill/>
+        </p:spPr>
+        <p:txBody>
+          <a:bodyPr wrap="square" anchor="t">
+            <a:spAutoFit/>
+          </a:bodyPr>
+          <a:lstStyle/>
+          <a:p>
+            <a:pPr algn="l">
               <a:spcAft>
-                <a:spcPts val="900"/>
+                <a:spcPts val="400"/>
               </a:spcAft>
             </a:pPr>
             <a:r>
-              <a:rPr sz="1700" b="1">
-                <a:solidFill>
-                  <a:srgbClr val="0F172A"/>
-                </a:solidFill>
-                <a:latin typeface="Microsoft YaHei"/>
-                <a:ea typeface="Microsoft YaHei"/>
-              </a:rPr>
-              <a:t>●  求职者的难点不是“生成更好看的简历”，而是把零散经历变成可验证事实，再做可信决策</a:t>
-            </a:r>
-          </a:p>
-          <a:p>
-            <a:pPr>
+              <a:rPr sz="1300" b="1">
+                <a:solidFill>
+                  <a:srgbClr val="1F3A93"/>
+                </a:solidFill>
+                <a:latin typeface="Microsoft YaHei"/>
+                <a:ea typeface="Microsoft YaHei"/>
+              </a:rPr>
+              <a:t>行业可复制性：任何“材料 → 决策 → 交付”的高可信场景（晋升、留学、招标）。</a:t>
+            </a:r>
+          </a:p>
+        </p:txBody>
+      </p:sp>
+      <p:sp>
+        <p:nvSpPr>
+          <p:cNvPr id="15" name="TextBox 14"/>
+          <p:cNvSpPr txBox="1"/>
+          <p:nvPr/>
+        </p:nvSpPr>
+        <p:spPr>
+          <a:xfrm>
+            <a:off x="502920" y="4937760"/>
+            <a:ext cx="11155680" cy="548640"/>
+          </a:xfrm>
+          <a:prstGeom prst="rect">
+            <a:avLst/>
+          </a:prstGeom>
+          <a:noFill/>
+        </p:spPr>
+        <p:txBody>
+          <a:bodyPr wrap="square" anchor="t">
+            <a:spAutoFit/>
+          </a:bodyPr>
+          <a:lstStyle/>
+          <a:p>
+            <a:pPr algn="l">
               <a:spcAft>
-                <a:spcPts val="900"/>
+                <a:spcPts val="400"/>
               </a:spcAft>
             </a:pPr>
             <a:r>
-              <a:rPr sz="1500" b="0">
-                <a:solidFill>
-                  <a:srgbClr val="334155"/>
-                </a:solidFill>
-                <a:latin typeface="Microsoft YaHei"/>
-                <a:ea typeface="Microsoft YaHei"/>
-              </a:rPr>
-              <a:t>●  目标用户：求职者（校招/社招）与求职辅导者</a:t>
-            </a:r>
-          </a:p>
-          <a:p>
-            <a:pPr>
-              <a:spcAft>
-                <a:spcPts val="900"/>
-              </a:spcAft>
-            </a:pPr>
-            <a:r>
-              <a:rPr sz="1500" b="0">
-                <a:solidFill>
-                  <a:srgbClr val="334155"/>
-                </a:solidFill>
-                <a:latin typeface="Microsoft YaHei"/>
-                <a:ea typeface="Microsoft YaHei"/>
-              </a:rPr>
-              <a:t>●  输入：JD 原文 + 原始简历 + 项目化经历事实</a:t>
-            </a:r>
-          </a:p>
-          <a:p>
-            <a:pPr>
-              <a:spcAft>
-                <a:spcPts val="900"/>
-              </a:spcAft>
-            </a:pPr>
-            <a:r>
-              <a:rPr sz="1500" b="0">
-                <a:solidFill>
-                  <a:srgbClr val="334155"/>
-                </a:solidFill>
-                <a:latin typeface="Microsoft YaHei"/>
-                <a:ea typeface="Microsoft YaHei"/>
-              </a:rPr>
-              <a:t>●  输出：可信的岗位准备度、岗位定制优化简历、可审计的投递交付</a:t>
-            </a:r>
-          </a:p>
-          <a:p>
-            <a:pPr>
-              <a:spcAft>
-                <a:spcPts val="900"/>
-              </a:spcAft>
-            </a:pPr>
-            <a:r>
-              <a:rPr sz="1500" b="0">
-                <a:solidFill>
-                  <a:srgbClr val="2563EB"/>
-                </a:solidFill>
-                <a:latin typeface="Microsoft YaHei"/>
-                <a:ea typeface="Microsoft YaHei"/>
-              </a:rPr>
-              <a:t>●  行业可复制性：任何“材料 → 决策 → 交付”的高可信场景（晋升、留学、招标）</a:t>
-            </a:r>
-          </a:p>
-          <a:p>
-            <a:pPr>
-              <a:spcAft>
-                <a:spcPts val="900"/>
-              </a:spcAft>
-            </a:pPr>
-            <a:r>
-              <a:rPr sz="1500" b="0">
+              <a:rPr sz="1300" b="1">
                 <a:solidFill>
                   <a:srgbClr val="0D9488"/>
                 </a:solidFill>
                 <a:latin typeface="Microsoft YaHei"/>
                 <a:ea typeface="Microsoft YaHei"/>
               </a:rPr>
-              <a:t>●  真实价值：减少误读与虚构，把主观美化变为可追溯、可复现的决策闭环</a:t>
+              <a:t>真实价值：减少误读与虚构，把主观美化变为可追溯、可复现的决策闭环。</a:t>
             </a:r>
           </a:p>
         </p:txBody>
@@ -5166,8 +6829,8 @@
         </p:nvSpPr>
         <p:spPr>
           <a:xfrm>
-            <a:off x="548640" y="384048"/>
-            <a:ext cx="11064240" cy="548640"/>
+            <a:off x="502920" y="365760"/>
+            <a:ext cx="10972800" cy="548640"/>
           </a:xfrm>
           <a:prstGeom prst="rect">
             <a:avLst/>
@@ -5182,11 +6845,11 @@
           <a:p>
             <a:pPr algn="l">
               <a:spcAft>
-                <a:spcPts val="600"/>
+                <a:spcPts val="400"/>
               </a:spcAft>
             </a:pPr>
             <a:r>
-              <a:rPr sz="2600" b="1">
+              <a:rPr sz="2400" b="1">
                 <a:solidFill>
                   <a:srgbClr val="0F172A"/>
                 </a:solidFill>
@@ -5206,7 +6869,7 @@
         </p:nvSpPr>
         <p:spPr>
           <a:xfrm>
-            <a:off x="548640" y="1115568"/>
+            <a:off x="502920" y="1078992"/>
             <a:ext cx="1371600" cy="64008"/>
           </a:xfrm>
           <a:prstGeom prst="rect">
@@ -5250,8 +6913,8 @@
         </p:nvSpPr>
         <p:spPr>
           <a:xfrm>
-            <a:off x="11338560" y="6446520"/>
-            <a:ext cx="640080" cy="365760"/>
+            <a:off x="11430000" y="6446520"/>
+            <a:ext cx="548640" cy="365760"/>
           </a:xfrm>
           <a:prstGeom prst="rect">
             <a:avLst/>
@@ -5266,11 +6929,11 @@
           <a:p>
             <a:pPr algn="r">
               <a:spcAft>
-                <a:spcPts val="600"/>
+                <a:spcPts val="400"/>
               </a:spcAft>
             </a:pPr>
             <a:r>
-              <a:rPr sz="1000" b="0">
+              <a:rPr sz="900" b="0">
                 <a:solidFill>
                   <a:srgbClr val="64748B"/>
                 </a:solidFill>
@@ -5284,14 +6947,62 @@
       </p:sp>
       <p:sp>
         <p:nvSpPr>
-          <p:cNvPr id="6" name="TextBox 5"/>
+          <p:cNvPr id="6" name="Rounded Rectangle 5"/>
+          <p:cNvSpPr/>
+          <p:nvPr/>
+        </p:nvSpPr>
+        <p:spPr>
+          <a:xfrm>
+            <a:off x="502920" y="1554480"/>
+            <a:ext cx="5394960" cy="1234440"/>
+          </a:xfrm>
+          <a:prstGeom prst="roundRect">
+            <a:avLst>
+              <a:gd name="adj" fmla="val 8000"/>
+            </a:avLst>
+          </a:prstGeom>
+          <a:solidFill>
+            <a:srgbClr val="F8FAFC"/>
+          </a:solidFill>
+          <a:ln w="19050">
+            <a:solidFill>
+              <a:srgbClr val="E2E8F0"/>
+            </a:solidFill>
+          </a:ln>
+          <a:effectLst/>
+        </p:spPr>
+        <p:style>
+          <a:lnRef idx="1">
+            <a:schemeClr val="accent1"/>
+          </a:lnRef>
+          <a:fillRef idx="3">
+            <a:schemeClr val="accent1"/>
+          </a:fillRef>
+          <a:effectRef idx="2">
+            <a:schemeClr val="accent1"/>
+          </a:effectRef>
+          <a:fontRef idx="minor">
+            <a:schemeClr val="lt1"/>
+          </a:fontRef>
+        </p:style>
+        <p:txBody>
+          <a:bodyPr rtlCol="0" anchor="ctr"/>
+          <a:lstStyle/>
+          <a:p>
+            <a:pPr algn="ctr"/>
+          </a:p>
+        </p:txBody>
+      </p:sp>
+      <p:sp>
+        <p:nvSpPr>
+          <p:cNvPr id="7" name="TextBox 6"/>
           <p:cNvSpPr txBox="1"/>
           <p:nvPr/>
         </p:nvSpPr>
         <p:spPr>
           <a:xfrm>
-            <a:off x="640080" y="1737360"/>
-            <a:ext cx="10972800" cy="4754880"/>
+            <a:off x="640080" y="1645920"/>
+            <a:ext cx="5120640" cy="1051560"/>
           </a:xfrm>
           <a:prstGeom prst="rect">
             <a:avLst/>
@@ -5304,139 +7015,332 @@
           </a:bodyPr>
           <a:lstStyle/>
           <a:p>
+            <a:r>
+              <a:rPr sz="1200" b="1">
+                <a:solidFill>
+                  <a:srgbClr val="E11D48"/>
+                </a:solidFill>
+                <a:latin typeface="Microsoft YaHei"/>
+                <a:ea typeface="Microsoft YaHei"/>
+              </a:rPr>
+              <a:t>JD 误读</a:t>
+            </a:r>
+          </a:p>
+          <a:p>
             <a:pPr>
-              <a:spcAft>
-                <a:spcPts val="900"/>
-              </a:spcAft>
+              <a:spcBef>
+                <a:spcPts val="400"/>
+              </a:spcBef>
             </a:pPr>
             <a:r>
-              <a:rPr sz="1700" b="1">
+              <a:rPr sz="1050" b="0">
+                <a:solidFill>
+                  <a:srgbClr val="334155"/>
+                </a:solidFill>
+                <a:latin typeface="Microsoft YaHei"/>
+                <a:ea typeface="Microsoft YaHei"/>
+              </a:rPr>
+              <a:t>关键词堆砌、漏读优先级与否定条件，把推断当要求。</a:t>
+            </a:r>
+          </a:p>
+        </p:txBody>
+      </p:sp>
+      <p:sp>
+        <p:nvSpPr>
+          <p:cNvPr id="8" name="Rounded Rectangle 7"/>
+          <p:cNvSpPr/>
+          <p:nvPr/>
+        </p:nvSpPr>
+        <p:spPr>
+          <a:xfrm>
+            <a:off x="6126480" y="1554480"/>
+            <a:ext cx="5394960" cy="1234440"/>
+          </a:xfrm>
+          <a:prstGeom prst="roundRect">
+            <a:avLst>
+              <a:gd name="adj" fmla="val 8000"/>
+            </a:avLst>
+          </a:prstGeom>
+          <a:solidFill>
+            <a:srgbClr val="F8FAFC"/>
+          </a:solidFill>
+          <a:ln w="19050">
+            <a:solidFill>
+              <a:srgbClr val="E2E8F0"/>
+            </a:solidFill>
+          </a:ln>
+          <a:effectLst/>
+        </p:spPr>
+        <p:style>
+          <a:lnRef idx="1">
+            <a:schemeClr val="accent1"/>
+          </a:lnRef>
+          <a:fillRef idx="3">
+            <a:schemeClr val="accent1"/>
+          </a:fillRef>
+          <a:effectRef idx="2">
+            <a:schemeClr val="accent1"/>
+          </a:effectRef>
+          <a:fontRef idx="minor">
+            <a:schemeClr val="lt1"/>
+          </a:fontRef>
+        </p:style>
+        <p:txBody>
+          <a:bodyPr rtlCol="0" anchor="ctr"/>
+          <a:lstStyle/>
+          <a:p>
+            <a:pPr algn="ctr"/>
+          </a:p>
+        </p:txBody>
+      </p:sp>
+      <p:sp>
+        <p:nvSpPr>
+          <p:cNvPr id="9" name="TextBox 8"/>
+          <p:cNvSpPr txBox="1"/>
+          <p:nvPr/>
+        </p:nvSpPr>
+        <p:spPr>
+          <a:xfrm>
+            <a:off x="6263640" y="1645920"/>
+            <a:ext cx="5120640" cy="1051560"/>
+          </a:xfrm>
+          <a:prstGeom prst="rect">
+            <a:avLst/>
+          </a:prstGeom>
+          <a:noFill/>
+        </p:spPr>
+        <p:txBody>
+          <a:bodyPr wrap="square">
+            <a:spAutoFit/>
+          </a:bodyPr>
+          <a:lstStyle/>
+          <a:p>
+            <a:r>
+              <a:rPr sz="1200" b="1">
                 <a:solidFill>
                   <a:srgbClr val="E11D48"/>
                 </a:solidFill>
                 <a:latin typeface="Microsoft YaHei"/>
                 <a:ea typeface="Microsoft YaHei"/>
               </a:rPr>
-              <a:t>●  JD 误读</a:t>
+              <a:t>经历虚构</a:t>
             </a:r>
           </a:p>
           <a:p>
             <a:pPr>
-              <a:spcAft>
-                <a:spcPts val="900"/>
-              </a:spcAft>
+              <a:spcBef>
+                <a:spcPts val="400"/>
+              </a:spcBef>
             </a:pPr>
             <a:r>
-              <a:rPr sz="1500" b="0">
+              <a:rPr sz="1050" b="0">
                 <a:solidFill>
                   <a:srgbClr val="334155"/>
                 </a:solidFill>
                 <a:latin typeface="Microsoft YaHei"/>
                 <a:ea typeface="Microsoft YaHei"/>
               </a:rPr>
-              <a:t>●  关键词堆砌、漏读优先级与否定条件，把推断当要求</a:t>
+              <a:t>AI 改写无依据、成果无法溯源，量化数字随口编。</a:t>
+            </a:r>
+          </a:p>
+        </p:txBody>
+      </p:sp>
+      <p:sp>
+        <p:nvSpPr>
+          <p:cNvPr id="10" name="Rounded Rectangle 9"/>
+          <p:cNvSpPr/>
+          <p:nvPr/>
+        </p:nvSpPr>
+        <p:spPr>
+          <a:xfrm>
+            <a:off x="502920" y="3017520"/>
+            <a:ext cx="5394960" cy="1234440"/>
+          </a:xfrm>
+          <a:prstGeom prst="roundRect">
+            <a:avLst>
+              <a:gd name="adj" fmla="val 8000"/>
+            </a:avLst>
+          </a:prstGeom>
+          <a:solidFill>
+            <a:srgbClr val="F8FAFC"/>
+          </a:solidFill>
+          <a:ln w="19050">
+            <a:solidFill>
+              <a:srgbClr val="E2E8F0"/>
+            </a:solidFill>
+          </a:ln>
+          <a:effectLst/>
+        </p:spPr>
+        <p:style>
+          <a:lnRef idx="1">
+            <a:schemeClr val="accent1"/>
+          </a:lnRef>
+          <a:fillRef idx="3">
+            <a:schemeClr val="accent1"/>
+          </a:fillRef>
+          <a:effectRef idx="2">
+            <a:schemeClr val="accent1"/>
+          </a:effectRef>
+          <a:fontRef idx="minor">
+            <a:schemeClr val="lt1"/>
+          </a:fontRef>
+        </p:style>
+        <p:txBody>
+          <a:bodyPr rtlCol="0" anchor="ctr"/>
+          <a:lstStyle/>
+          <a:p>
+            <a:pPr algn="ctr"/>
+          </a:p>
+        </p:txBody>
+      </p:sp>
+      <p:sp>
+        <p:nvSpPr>
+          <p:cNvPr id="11" name="TextBox 10"/>
+          <p:cNvSpPr txBox="1"/>
+          <p:nvPr/>
+        </p:nvSpPr>
+        <p:spPr>
+          <a:xfrm>
+            <a:off x="640080" y="3108960"/>
+            <a:ext cx="5120640" cy="1051560"/>
+          </a:xfrm>
+          <a:prstGeom prst="rect">
+            <a:avLst/>
+          </a:prstGeom>
+          <a:noFill/>
+        </p:spPr>
+        <p:txBody>
+          <a:bodyPr wrap="square">
+            <a:spAutoFit/>
+          </a:bodyPr>
+          <a:lstStyle/>
+          <a:p>
+            <a:r>
+              <a:rPr sz="1200" b="1">
+                <a:solidFill>
+                  <a:srgbClr val="E11D48"/>
+                </a:solidFill>
+                <a:latin typeface="Microsoft YaHei"/>
+                <a:ea typeface="Microsoft YaHei"/>
+              </a:rPr>
+              <a:t>版本混乱</a:t>
             </a:r>
           </a:p>
           <a:p>
             <a:pPr>
-              <a:spcAft>
-                <a:spcPts val="900"/>
-              </a:spcAft>
+              <a:spcBef>
+                <a:spcPts val="400"/>
+              </a:spcBef>
             </a:pPr>
             <a:r>
-              <a:rPr sz="1700" b="1">
+              <a:rPr sz="1050" b="0">
+                <a:solidFill>
+                  <a:srgbClr val="334155"/>
+                </a:solidFill>
+                <a:latin typeface="Microsoft YaHei"/>
+                <a:ea typeface="Microsoft YaHei"/>
+              </a:rPr>
+              <a:t>多岗位版本交叉污染，新旧材料混用，导出旧结果。</a:t>
+            </a:r>
+          </a:p>
+        </p:txBody>
+      </p:sp>
+      <p:sp>
+        <p:nvSpPr>
+          <p:cNvPr id="12" name="Rounded Rectangle 11"/>
+          <p:cNvSpPr/>
+          <p:nvPr/>
+        </p:nvSpPr>
+        <p:spPr>
+          <a:xfrm>
+            <a:off x="6126480" y="3017520"/>
+            <a:ext cx="5394960" cy="1234440"/>
+          </a:xfrm>
+          <a:prstGeom prst="roundRect">
+            <a:avLst>
+              <a:gd name="adj" fmla="val 8000"/>
+            </a:avLst>
+          </a:prstGeom>
+          <a:solidFill>
+            <a:srgbClr val="F8FAFC"/>
+          </a:solidFill>
+          <a:ln w="19050">
+            <a:solidFill>
+              <a:srgbClr val="E2E8F0"/>
+            </a:solidFill>
+          </a:ln>
+          <a:effectLst/>
+        </p:spPr>
+        <p:style>
+          <a:lnRef idx="1">
+            <a:schemeClr val="accent1"/>
+          </a:lnRef>
+          <a:fillRef idx="3">
+            <a:schemeClr val="accent1"/>
+          </a:fillRef>
+          <a:effectRef idx="2">
+            <a:schemeClr val="accent1"/>
+          </a:effectRef>
+          <a:fontRef idx="minor">
+            <a:schemeClr val="lt1"/>
+          </a:fontRef>
+        </p:style>
+        <p:txBody>
+          <a:bodyPr rtlCol="0" anchor="ctr"/>
+          <a:lstStyle/>
+          <a:p>
+            <a:pPr algn="ctr"/>
+          </a:p>
+        </p:txBody>
+      </p:sp>
+      <p:sp>
+        <p:nvSpPr>
+          <p:cNvPr id="13" name="TextBox 12"/>
+          <p:cNvSpPr txBox="1"/>
+          <p:nvPr/>
+        </p:nvSpPr>
+        <p:spPr>
+          <a:xfrm>
+            <a:off x="6263640" y="3108960"/>
+            <a:ext cx="5120640" cy="1051560"/>
+          </a:xfrm>
+          <a:prstGeom prst="rect">
+            <a:avLst/>
+          </a:prstGeom>
+          <a:noFill/>
+        </p:spPr>
+        <p:txBody>
+          <a:bodyPr wrap="square">
+            <a:spAutoFit/>
+          </a:bodyPr>
+          <a:lstStyle/>
+          <a:p>
+            <a:r>
+              <a:rPr sz="1200" b="1">
                 <a:solidFill>
                   <a:srgbClr val="E11D48"/>
                 </a:solidFill>
                 <a:latin typeface="Microsoft YaHei"/>
                 <a:ea typeface="Microsoft YaHei"/>
               </a:rPr>
-              <a:t>●  经历虚构</a:t>
+              <a:t>结果不可审计</a:t>
             </a:r>
           </a:p>
           <a:p>
             <a:pPr>
-              <a:spcAft>
-                <a:spcPts val="900"/>
-              </a:spcAft>
+              <a:spcBef>
+                <a:spcPts val="400"/>
+              </a:spcBef>
             </a:pPr>
             <a:r>
-              <a:rPr sz="1500" b="0">
+              <a:rPr sz="1050" b="0">
                 <a:solidFill>
                   <a:srgbClr val="334155"/>
                 </a:solidFill>
                 <a:latin typeface="Microsoft YaHei"/>
                 <a:ea typeface="Microsoft YaHei"/>
               </a:rPr>
-              <a:t>●  AI 改写无依据、成果无法溯源，量化数字随口编</a:t>
-            </a:r>
-          </a:p>
-          <a:p>
-            <a:pPr>
-              <a:spcAft>
-                <a:spcPts val="900"/>
-              </a:spcAft>
-            </a:pPr>
-            <a:r>
-              <a:rPr sz="1700" b="1">
-                <a:solidFill>
-                  <a:srgbClr val="E11D48"/>
-                </a:solidFill>
-                <a:latin typeface="Microsoft YaHei"/>
-                <a:ea typeface="Microsoft YaHei"/>
-              </a:rPr>
-              <a:t>●  版本混乱</a:t>
-            </a:r>
-          </a:p>
-          <a:p>
-            <a:pPr>
-              <a:spcAft>
-                <a:spcPts val="900"/>
-              </a:spcAft>
-            </a:pPr>
-            <a:r>
-              <a:rPr sz="1500" b="0">
-                <a:solidFill>
-                  <a:srgbClr val="334155"/>
-                </a:solidFill>
-                <a:latin typeface="Microsoft YaHei"/>
-                <a:ea typeface="Microsoft YaHei"/>
-              </a:rPr>
-              <a:t>●  多岗位版本交叉污染，新旧材料混用，导出旧结果</a:t>
-            </a:r>
-          </a:p>
-          <a:p>
-            <a:pPr>
-              <a:spcAft>
-                <a:spcPts val="900"/>
-              </a:spcAft>
-            </a:pPr>
-            <a:r>
-              <a:rPr sz="1700" b="1">
-                <a:solidFill>
-                  <a:srgbClr val="E11D48"/>
-                </a:solidFill>
-                <a:latin typeface="Microsoft YaHei"/>
-                <a:ea typeface="Microsoft YaHei"/>
-              </a:rPr>
-              <a:t>●  结果不可审计</a:t>
-            </a:r>
-          </a:p>
-          <a:p>
-            <a:pPr>
-              <a:spcAft>
-                <a:spcPts val="900"/>
-              </a:spcAft>
-            </a:pPr>
-            <a:r>
-              <a:rPr sz="1500" b="0">
-                <a:solidFill>
-                  <a:srgbClr val="334155"/>
-                </a:solidFill>
-                <a:latin typeface="Microsoft YaHei"/>
-                <a:ea typeface="Microsoft YaHei"/>
-              </a:rPr>
-              <a:t>●  评分靠模型自报，无法回放、无法复核</a:t>
+              <a:t>评分靠模型自报，无法回放、无法复核。</a:t>
             </a:r>
           </a:p>
         </p:txBody>
@@ -5511,8 +7415,8 @@
         </p:nvSpPr>
         <p:spPr>
           <a:xfrm>
-            <a:off x="548640" y="384048"/>
-            <a:ext cx="11064240" cy="548640"/>
+            <a:off x="502920" y="365760"/>
+            <a:ext cx="10972800" cy="548640"/>
           </a:xfrm>
           <a:prstGeom prst="rect">
             <a:avLst/>
@@ -5527,11 +7431,11 @@
           <a:p>
             <a:pPr algn="l">
               <a:spcAft>
-                <a:spcPts val="600"/>
+                <a:spcPts val="400"/>
               </a:spcAft>
             </a:pPr>
             <a:r>
-              <a:rPr sz="2600" b="1">
+              <a:rPr sz="2400" b="1">
                 <a:solidFill>
                   <a:srgbClr val="0F172A"/>
                 </a:solidFill>
@@ -5551,14 +7455,14 @@
         </p:nvSpPr>
         <p:spPr>
           <a:xfrm>
-            <a:off x="548640" y="1115568"/>
+            <a:off x="502920" y="1078992"/>
             <a:ext cx="1371600" cy="64008"/>
           </a:xfrm>
           <a:prstGeom prst="rect">
             <a:avLst/>
           </a:prstGeom>
           <a:solidFill>
-            <a:srgbClr val="2563EB"/>
+            <a:srgbClr val="1F3A93"/>
           </a:solidFill>
           <a:ln>
             <a:noFill/>
@@ -5595,8 +7499,8 @@
         </p:nvSpPr>
         <p:spPr>
           <a:xfrm>
-            <a:off x="11338560" y="6446520"/>
-            <a:ext cx="640080" cy="365760"/>
+            <a:off x="11430000" y="6446520"/>
+            <a:ext cx="548640" cy="365760"/>
           </a:xfrm>
           <a:prstGeom prst="rect">
             <a:avLst/>
@@ -5611,11 +7515,11 @@
           <a:p>
             <a:pPr algn="r">
               <a:spcAft>
-                <a:spcPts val="600"/>
+                <a:spcPts val="400"/>
               </a:spcAft>
             </a:pPr>
             <a:r>
-              <a:rPr sz="1000" b="0">
+              <a:rPr sz="900" b="0">
                 <a:solidFill>
                   <a:srgbClr val="64748B"/>
                 </a:solidFill>
@@ -5629,14 +7533,418 @@
       </p:sp>
       <p:sp>
         <p:nvSpPr>
-          <p:cNvPr id="6" name="TextBox 5"/>
+          <p:cNvPr id="6" name="Rounded Rectangle 5"/>
+          <p:cNvSpPr/>
+          <p:nvPr/>
+        </p:nvSpPr>
+        <p:spPr>
+          <a:xfrm>
+            <a:off x="2941167" y="2103120"/>
+            <a:ext cx="1371600" cy="822960"/>
+          </a:xfrm>
+          <a:prstGeom prst="roundRect">
+            <a:avLst>
+              <a:gd name="adj" fmla="val 8000"/>
+            </a:avLst>
+          </a:prstGeom>
+          <a:solidFill>
+            <a:srgbClr val="FFFFFF"/>
+          </a:solidFill>
+          <a:ln w="19050">
+            <a:solidFill>
+              <a:srgbClr val="3F6FCC"/>
+            </a:solidFill>
+          </a:ln>
+          <a:effectLst/>
+        </p:spPr>
+        <p:style>
+          <a:lnRef idx="1">
+            <a:schemeClr val="accent1"/>
+          </a:lnRef>
+          <a:fillRef idx="3">
+            <a:schemeClr val="accent1"/>
+          </a:fillRef>
+          <a:effectRef idx="2">
+            <a:schemeClr val="accent1"/>
+          </a:effectRef>
+          <a:fontRef idx="minor">
+            <a:schemeClr val="lt1"/>
+          </a:fontRef>
+        </p:style>
+        <p:txBody>
+          <a:bodyPr rtlCol="0" anchor="ctr" wrap="square"/>
+          <a:lstStyle/>
+          <a:p>
+            <a:pPr algn="ctr"/>
+            <a:r>
+              <a:rPr sz="1200" b="1">
+                <a:solidFill>
+                  <a:srgbClr val="0F172A"/>
+                </a:solidFill>
+                <a:latin typeface="Microsoft YaHei"/>
+                <a:ea typeface="Microsoft YaHei"/>
+              </a:rPr>
+              <a:t>材料</a:t>
+            </a:r>
+          </a:p>
+          <a:p>
+            <a:pPr algn="ctr"/>
+            <a:r>
+              <a:rPr sz="800" b="0">
+                <a:solidFill>
+                  <a:srgbClr val="64748B"/>
+                </a:solidFill>
+                <a:latin typeface="Microsoft YaHei"/>
+                <a:ea typeface="Microsoft YaHei"/>
+              </a:rPr>
+              <a:t>岗位/JD/简历</a:t>
+            </a:r>
+          </a:p>
+        </p:txBody>
+      </p:sp>
+      <p:sp>
+        <p:nvSpPr>
+          <p:cNvPr id="7" name="TextBox 6"/>
           <p:cNvSpPr txBox="1"/>
           <p:nvPr/>
         </p:nvSpPr>
         <p:spPr>
           <a:xfrm>
-            <a:off x="640080" y="1737360"/>
-            <a:ext cx="10972800" cy="914400"/>
+            <a:off x="4312767" y="2331720"/>
+            <a:ext cx="274320" cy="457200"/>
+          </a:xfrm>
+          <a:prstGeom prst="rect">
+            <a:avLst/>
+          </a:prstGeom>
+          <a:noFill/>
+        </p:spPr>
+        <p:txBody>
+          <a:bodyPr wrap="square" anchor="ctr">
+            <a:spAutoFit/>
+          </a:bodyPr>
+          <a:lstStyle/>
+          <a:p>
+            <a:pPr algn="ctr">
+              <a:spcAft>
+                <a:spcPts val="400"/>
+              </a:spcAft>
+            </a:pPr>
+            <a:r>
+              <a:rPr sz="1600" b="1">
+                <a:solidFill>
+                  <a:srgbClr val="3F6FCC"/>
+                </a:solidFill>
+                <a:latin typeface="Microsoft YaHei"/>
+                <a:ea typeface="Microsoft YaHei"/>
+              </a:rPr>
+              <a:t>→</a:t>
+            </a:r>
+          </a:p>
+        </p:txBody>
+      </p:sp>
+      <p:sp>
+        <p:nvSpPr>
+          <p:cNvPr id="8" name="Rounded Rectangle 7"/>
+          <p:cNvSpPr/>
+          <p:nvPr/>
+        </p:nvSpPr>
+        <p:spPr>
+          <a:xfrm>
+            <a:off x="4587087" y="2103120"/>
+            <a:ext cx="1371600" cy="822960"/>
+          </a:xfrm>
+          <a:prstGeom prst="roundRect">
+            <a:avLst>
+              <a:gd name="adj" fmla="val 8000"/>
+            </a:avLst>
+          </a:prstGeom>
+          <a:solidFill>
+            <a:srgbClr val="FFFFFF"/>
+          </a:solidFill>
+          <a:ln w="19050">
+            <a:solidFill>
+              <a:srgbClr val="3F6FCC"/>
+            </a:solidFill>
+          </a:ln>
+          <a:effectLst/>
+        </p:spPr>
+        <p:style>
+          <a:lnRef idx="1">
+            <a:schemeClr val="accent1"/>
+          </a:lnRef>
+          <a:fillRef idx="3">
+            <a:schemeClr val="accent1"/>
+          </a:fillRef>
+          <a:effectRef idx="2">
+            <a:schemeClr val="accent1"/>
+          </a:effectRef>
+          <a:fontRef idx="minor">
+            <a:schemeClr val="lt1"/>
+          </a:fontRef>
+        </p:style>
+        <p:txBody>
+          <a:bodyPr rtlCol="0" anchor="ctr" wrap="square"/>
+          <a:lstStyle/>
+          <a:p>
+            <a:pPr algn="ctr"/>
+            <a:r>
+              <a:rPr sz="1200" b="1">
+                <a:solidFill>
+                  <a:srgbClr val="0F172A"/>
+                </a:solidFill>
+                <a:latin typeface="Microsoft YaHei"/>
+                <a:ea typeface="Microsoft YaHei"/>
+              </a:rPr>
+              <a:t>分析</a:t>
+            </a:r>
+          </a:p>
+          <a:p>
+            <a:pPr algn="ctr"/>
+            <a:r>
+              <a:rPr sz="800" b="0">
+                <a:solidFill>
+                  <a:srgbClr val="64748B"/>
+                </a:solidFill>
+                <a:latin typeface="Microsoft YaHei"/>
+                <a:ea typeface="Microsoft YaHei"/>
+              </a:rPr>
+              <a:t>决策地图·匹配</a:t>
+            </a:r>
+          </a:p>
+        </p:txBody>
+      </p:sp>
+      <p:sp>
+        <p:nvSpPr>
+          <p:cNvPr id="9" name="TextBox 8"/>
+          <p:cNvSpPr txBox="1"/>
+          <p:nvPr/>
+        </p:nvSpPr>
+        <p:spPr>
+          <a:xfrm>
+            <a:off x="5958687" y="2331720"/>
+            <a:ext cx="274320" cy="457200"/>
+          </a:xfrm>
+          <a:prstGeom prst="rect">
+            <a:avLst/>
+          </a:prstGeom>
+          <a:noFill/>
+        </p:spPr>
+        <p:txBody>
+          <a:bodyPr wrap="square" anchor="ctr">
+            <a:spAutoFit/>
+          </a:bodyPr>
+          <a:lstStyle/>
+          <a:p>
+            <a:pPr algn="ctr">
+              <a:spcAft>
+                <a:spcPts val="400"/>
+              </a:spcAft>
+            </a:pPr>
+            <a:r>
+              <a:rPr sz="1600" b="1">
+                <a:solidFill>
+                  <a:srgbClr val="3F6FCC"/>
+                </a:solidFill>
+                <a:latin typeface="Microsoft YaHei"/>
+                <a:ea typeface="Microsoft YaHei"/>
+              </a:rPr>
+              <a:t>→</a:t>
+            </a:r>
+          </a:p>
+        </p:txBody>
+      </p:sp>
+      <p:sp>
+        <p:nvSpPr>
+          <p:cNvPr id="10" name="Rounded Rectangle 9"/>
+          <p:cNvSpPr/>
+          <p:nvPr/>
+        </p:nvSpPr>
+        <p:spPr>
+          <a:xfrm>
+            <a:off x="6233007" y="2103120"/>
+            <a:ext cx="1371600" cy="822960"/>
+          </a:xfrm>
+          <a:prstGeom prst="roundRect">
+            <a:avLst>
+              <a:gd name="adj" fmla="val 8000"/>
+            </a:avLst>
+          </a:prstGeom>
+          <a:solidFill>
+            <a:srgbClr val="FFFFFF"/>
+          </a:solidFill>
+          <a:ln w="19050">
+            <a:solidFill>
+              <a:srgbClr val="3F6FCC"/>
+            </a:solidFill>
+          </a:ln>
+          <a:effectLst/>
+        </p:spPr>
+        <p:style>
+          <a:lnRef idx="1">
+            <a:schemeClr val="accent1"/>
+          </a:lnRef>
+          <a:fillRef idx="3">
+            <a:schemeClr val="accent1"/>
+          </a:fillRef>
+          <a:effectRef idx="2">
+            <a:schemeClr val="accent1"/>
+          </a:effectRef>
+          <a:fontRef idx="minor">
+            <a:schemeClr val="lt1"/>
+          </a:fontRef>
+        </p:style>
+        <p:txBody>
+          <a:bodyPr rtlCol="0" anchor="ctr" wrap="square"/>
+          <a:lstStyle/>
+          <a:p>
+            <a:pPr algn="ctr"/>
+            <a:r>
+              <a:rPr sz="1200" b="1">
+                <a:solidFill>
+                  <a:srgbClr val="0F172A"/>
+                </a:solidFill>
+                <a:latin typeface="Microsoft YaHei"/>
+                <a:ea typeface="Microsoft YaHei"/>
+              </a:rPr>
+              <a:t>制作</a:t>
+            </a:r>
+          </a:p>
+          <a:p>
+            <a:pPr algn="ctr"/>
+            <a:r>
+              <a:rPr sz="800" b="0">
+                <a:solidFill>
+                  <a:srgbClr val="64748B"/>
+                </a:solidFill>
+                <a:latin typeface="Microsoft YaHei"/>
+                <a:ea typeface="Microsoft YaHei"/>
+              </a:rPr>
+              <a:t>优化+草稿</a:t>
+            </a:r>
+          </a:p>
+        </p:txBody>
+      </p:sp>
+      <p:sp>
+        <p:nvSpPr>
+          <p:cNvPr id="11" name="TextBox 10"/>
+          <p:cNvSpPr txBox="1"/>
+          <p:nvPr/>
+        </p:nvSpPr>
+        <p:spPr>
+          <a:xfrm>
+            <a:off x="7604607" y="2331720"/>
+            <a:ext cx="274320" cy="457200"/>
+          </a:xfrm>
+          <a:prstGeom prst="rect">
+            <a:avLst/>
+          </a:prstGeom>
+          <a:noFill/>
+        </p:spPr>
+        <p:txBody>
+          <a:bodyPr wrap="square" anchor="ctr">
+            <a:spAutoFit/>
+          </a:bodyPr>
+          <a:lstStyle/>
+          <a:p>
+            <a:pPr algn="ctr">
+              <a:spcAft>
+                <a:spcPts val="400"/>
+              </a:spcAft>
+            </a:pPr>
+            <a:r>
+              <a:rPr sz="1600" b="1">
+                <a:solidFill>
+                  <a:srgbClr val="3F6FCC"/>
+                </a:solidFill>
+                <a:latin typeface="Microsoft YaHei"/>
+                <a:ea typeface="Microsoft YaHei"/>
+              </a:rPr>
+              <a:t>→</a:t>
+            </a:r>
+          </a:p>
+        </p:txBody>
+      </p:sp>
+      <p:sp>
+        <p:nvSpPr>
+          <p:cNvPr id="12" name="Rounded Rectangle 11"/>
+          <p:cNvSpPr/>
+          <p:nvPr/>
+        </p:nvSpPr>
+        <p:spPr>
+          <a:xfrm>
+            <a:off x="7878927" y="2103120"/>
+            <a:ext cx="1371600" cy="822960"/>
+          </a:xfrm>
+          <a:prstGeom prst="roundRect">
+            <a:avLst>
+              <a:gd name="adj" fmla="val 8000"/>
+            </a:avLst>
+          </a:prstGeom>
+          <a:solidFill>
+            <a:srgbClr val="FFFFFF"/>
+          </a:solidFill>
+          <a:ln w="19050">
+            <a:solidFill>
+              <a:srgbClr val="3F6FCC"/>
+            </a:solidFill>
+          </a:ln>
+          <a:effectLst/>
+        </p:spPr>
+        <p:style>
+          <a:lnRef idx="1">
+            <a:schemeClr val="accent1"/>
+          </a:lnRef>
+          <a:fillRef idx="3">
+            <a:schemeClr val="accent1"/>
+          </a:fillRef>
+          <a:effectRef idx="2">
+            <a:schemeClr val="accent1"/>
+          </a:effectRef>
+          <a:fontRef idx="minor">
+            <a:schemeClr val="lt1"/>
+          </a:fontRef>
+        </p:style>
+        <p:txBody>
+          <a:bodyPr rtlCol="0" anchor="ctr" wrap="square"/>
+          <a:lstStyle/>
+          <a:p>
+            <a:pPr algn="ctr"/>
+            <a:r>
+              <a:rPr sz="1200" b="1">
+                <a:solidFill>
+                  <a:srgbClr val="0F172A"/>
+                </a:solidFill>
+                <a:latin typeface="Microsoft YaHei"/>
+                <a:ea typeface="Microsoft YaHei"/>
+              </a:rPr>
+              <a:t>交付</a:t>
+            </a:r>
+          </a:p>
+          <a:p>
+            <a:pPr algn="ctr"/>
+            <a:r>
+              <a:rPr sz="800" b="0">
+                <a:solidFill>
+                  <a:srgbClr val="64748B"/>
+                </a:solidFill>
+                <a:latin typeface="Microsoft YaHei"/>
+                <a:ea typeface="Microsoft YaHei"/>
+              </a:rPr>
+              <a:t>ATS门禁+导出</a:t>
+            </a:r>
+          </a:p>
+        </p:txBody>
+      </p:sp>
+      <p:sp>
+        <p:nvSpPr>
+          <p:cNvPr id="13" name="TextBox 12"/>
+          <p:cNvSpPr txBox="1"/>
+          <p:nvPr/>
+        </p:nvSpPr>
+        <p:spPr>
+          <a:xfrm>
+            <a:off x="502920" y="3566160"/>
+            <a:ext cx="11155680" cy="548640"/>
           </a:xfrm>
           <a:prstGeom prst="rect">
             <a:avLst/>
@@ -5649,128 +7957,100 @@
           </a:bodyPr>
           <a:lstStyle/>
           <a:p>
+            <a:pPr algn="ctr">
+              <a:spcAft>
+                <a:spcPts val="400"/>
+              </a:spcAft>
+            </a:pPr>
+            <a:r>
+              <a:rPr sz="1400" b="1">
+                <a:solidFill>
+                  <a:srgbClr val="F59E0B"/>
+                </a:solidFill>
+                <a:latin typeface="Microsoft YaHei"/>
+                <a:ea typeface="Microsoft YaHei"/>
+              </a:rPr>
+              <a:t>识别到 ≠ 可信：需求、事实、优化项、最终简历都有确认门禁。</a:t>
+            </a:r>
+          </a:p>
+        </p:txBody>
+      </p:sp>
+      <p:sp>
+        <p:nvSpPr>
+          <p:cNvPr id="14" name="TextBox 13"/>
+          <p:cNvSpPr txBox="1"/>
+          <p:nvPr/>
+        </p:nvSpPr>
+        <p:spPr>
+          <a:xfrm>
+            <a:off x="502920" y="4389120"/>
+            <a:ext cx="11155680" cy="457200"/>
+          </a:xfrm>
+          <a:prstGeom prst="rect">
+            <a:avLst/>
+          </a:prstGeom>
+          <a:noFill/>
+        </p:spPr>
+        <p:txBody>
+          <a:bodyPr wrap="square" anchor="t">
+            <a:spAutoFit/>
+          </a:bodyPr>
+          <a:lstStyle/>
+          <a:p>
             <a:pPr algn="l">
               <a:spcAft>
-                <a:spcPts val="600"/>
+                <a:spcPts val="400"/>
               </a:spcAft>
             </a:pPr>
             <a:r>
-              <a:rPr sz="2200" b="1">
-                <a:solidFill>
-                  <a:srgbClr val="4F46E5"/>
-                </a:solidFill>
-                <a:latin typeface="Microsoft YaHei"/>
-                <a:ea typeface="Microsoft YaHei"/>
-              </a:rPr>
-              <a:t>材料 → 分析 → 制作 → 交付</a:t>
-            </a:r>
-          </a:p>
+              <a:rPr sz="1300" b="0">
+                <a:solidFill>
+                  <a:srgbClr val="334155"/>
+                </a:solidFill>
+                <a:latin typeface="Microsoft YaHei"/>
+                <a:ea typeface="Microsoft YaHei"/>
+              </a:rPr>
+              <a:t>●  事实库带原文引用与确认状态，全程可追溯</a:t>
+            </a:r>
+          </a:p>
+        </p:txBody>
+      </p:sp>
+      <p:sp>
+        <p:nvSpPr>
+          <p:cNvPr id="15" name="TextBox 14"/>
+          <p:cNvSpPr txBox="1"/>
+          <p:nvPr/>
+        </p:nvSpPr>
+        <p:spPr>
+          <a:xfrm>
+            <a:off x="502920" y="4937760"/>
+            <a:ext cx="11155680" cy="457200"/>
+          </a:xfrm>
+          <a:prstGeom prst="rect">
+            <a:avLst/>
+          </a:prstGeom>
+          <a:noFill/>
+        </p:spPr>
+        <p:txBody>
+          <a:bodyPr wrap="square" anchor="t">
+            <a:spAutoFit/>
+          </a:bodyPr>
+          <a:lstStyle/>
           <a:p>
             <a:pPr algn="l">
               <a:spcAft>
-                <a:spcPts val="600"/>
+                <a:spcPts val="400"/>
               </a:spcAft>
             </a:pPr>
             <a:r>
-              <a:rPr sz="1500" b="0">
-                <a:solidFill>
-                  <a:srgbClr val="F59E0B"/>
-                </a:solidFill>
-                <a:latin typeface="Microsoft YaHei"/>
-                <a:ea typeface="Microsoft YaHei"/>
-              </a:rPr>
-              <a:t>识别到 ≠ 可信：需求、事实、优化项、最终简历都有确认门禁</a:t>
-            </a:r>
-          </a:p>
-        </p:txBody>
-      </p:sp>
-      <p:sp>
-        <p:nvSpPr>
-          <p:cNvPr id="7" name="TextBox 6"/>
-          <p:cNvSpPr txBox="1"/>
-          <p:nvPr/>
-        </p:nvSpPr>
-        <p:spPr>
-          <a:xfrm>
-            <a:off x="640080" y="3017520"/>
-            <a:ext cx="10972800" cy="3474720"/>
-          </a:xfrm>
-          <a:prstGeom prst="rect">
-            <a:avLst/>
-          </a:prstGeom>
-          <a:noFill/>
-        </p:spPr>
-        <p:txBody>
-          <a:bodyPr wrap="square">
-            <a:spAutoFit/>
-          </a:bodyPr>
-          <a:lstStyle/>
-          <a:p>
-            <a:pPr>
-              <a:spcAft>
-                <a:spcPts val="900"/>
-              </a:spcAft>
-            </a:pPr>
-            <a:r>
-              <a:rPr sz="1500" b="0">
+              <a:rPr sz="1300" b="0">
                 <a:solidFill>
                   <a:srgbClr val="334155"/>
                 </a:solidFill>
                 <a:latin typeface="Microsoft YaHei"/>
                 <a:ea typeface="Microsoft YaHei"/>
               </a:rPr>
-              <a:t>●  材料：岗位/JD/简历 + 项目化事实库（带原文引用与确认状态）</a:t>
-            </a:r>
-          </a:p>
-          <a:p>
-            <a:pPr>
-              <a:spcAft>
-                <a:spcPts val="900"/>
-              </a:spcAft>
-            </a:pPr>
-            <a:r>
-              <a:rPr sz="1500" b="0">
-                <a:solidFill>
-                  <a:srgbClr val="334155"/>
-                </a:solidFill>
-                <a:latin typeface="Microsoft YaHei"/>
-                <a:ea typeface="Microsoft YaHei"/>
-              </a:rPr>
-              <a:t>●  分析：JD 决策地图 → 人工确认 → 事实匹配 → 准备度/缺口 → 定向补证</a:t>
-            </a:r>
-          </a:p>
-          <a:p>
-            <a:pPr>
-              <a:spcAft>
-                <a:spcPts val="900"/>
-              </a:spcAft>
-            </a:pPr>
-            <a:r>
-              <a:rPr sz="1500" b="0">
-                <a:solidFill>
-                  <a:srgbClr val="334155"/>
-                </a:solidFill>
-                <a:latin typeface="Microsoft YaHei"/>
-                <a:ea typeface="Microsoft YaHei"/>
-              </a:rPr>
-              <a:t>●  制作：仅基于已确认事实生成优化方案与简历草稿 → 逐项采用</a:t>
-            </a:r>
-          </a:p>
-          <a:p>
-            <a:pPr>
-              <a:spcAft>
-                <a:spcPts val="900"/>
-              </a:spcAft>
-            </a:pPr>
-            <a:r>
-              <a:rPr sz="1500" b="0">
-                <a:solidFill>
-                  <a:srgbClr val="334155"/>
-                </a:solidFill>
-                <a:latin typeface="Microsoft YaHei"/>
-                <a:ea typeface="Microsoft YaHei"/>
-              </a:rPr>
-              <a:t>●  交付：ATS 就绪度 + 导出门禁 + 投递记录；面试策略不阻塞交付</a:t>
+              <a:t>●  面试策略为辅助流程，不阻塞简历交付</a:t>
             </a:r>
           </a:p>
         </p:txBody>
@@ -5845,8 +8125,8 @@
         </p:nvSpPr>
         <p:spPr>
           <a:xfrm>
-            <a:off x="548640" y="384048"/>
-            <a:ext cx="11064240" cy="548640"/>
+            <a:off x="502920" y="365760"/>
+            <a:ext cx="10972800" cy="548640"/>
           </a:xfrm>
           <a:prstGeom prst="rect">
             <a:avLst/>
@@ -5861,11 +8141,11 @@
           <a:p>
             <a:pPr algn="l">
               <a:spcAft>
-                <a:spcPts val="600"/>
+                <a:spcPts val="400"/>
               </a:spcAft>
             </a:pPr>
             <a:r>
-              <a:rPr sz="2600" b="1">
+              <a:rPr sz="2400" b="1">
                 <a:solidFill>
                   <a:srgbClr val="0F172A"/>
                 </a:solidFill>
@@ -5885,11 +8165,229 @@
         </p:nvSpPr>
         <p:spPr>
           <a:xfrm>
-            <a:off x="548640" y="1115568"/>
+            <a:off x="502920" y="1078992"/>
             <a:ext cx="1371600" cy="64008"/>
           </a:xfrm>
           <a:prstGeom prst="rect">
             <a:avLst/>
+          </a:prstGeom>
+          <a:solidFill>
+            <a:srgbClr val="1F3A93"/>
+          </a:solidFill>
+          <a:ln>
+            <a:noFill/>
+          </a:ln>
+          <a:effectLst/>
+        </p:spPr>
+        <p:style>
+          <a:lnRef idx="1">
+            <a:schemeClr val="accent1"/>
+          </a:lnRef>
+          <a:fillRef idx="3">
+            <a:schemeClr val="accent1"/>
+          </a:fillRef>
+          <a:effectRef idx="2">
+            <a:schemeClr val="accent1"/>
+          </a:effectRef>
+          <a:fontRef idx="minor">
+            <a:schemeClr val="lt1"/>
+          </a:fontRef>
+        </p:style>
+        <p:txBody>
+          <a:bodyPr rtlCol="0" anchor="ctr"/>
+          <a:lstStyle/>
+          <a:p>
+            <a:pPr algn="ctr"/>
+          </a:p>
+        </p:txBody>
+      </p:sp>
+      <p:sp>
+        <p:nvSpPr>
+          <p:cNvPr id="5" name="TextBox 4"/>
+          <p:cNvSpPr txBox="1"/>
+          <p:nvPr/>
+        </p:nvSpPr>
+        <p:spPr>
+          <a:xfrm>
+            <a:off x="11430000" y="6446520"/>
+            <a:ext cx="548640" cy="365760"/>
+          </a:xfrm>
+          <a:prstGeom prst="rect">
+            <a:avLst/>
+          </a:prstGeom>
+          <a:noFill/>
+        </p:spPr>
+        <p:txBody>
+          <a:bodyPr wrap="square" anchor="t">
+            <a:spAutoFit/>
+          </a:bodyPr>
+          <a:lstStyle/>
+          <a:p>
+            <a:pPr algn="r">
+              <a:spcAft>
+                <a:spcPts val="400"/>
+              </a:spcAft>
+            </a:pPr>
+            <a:r>
+              <a:rPr sz="900" b="0">
+                <a:solidFill>
+                  <a:srgbClr val="64748B"/>
+                </a:solidFill>
+                <a:latin typeface="Microsoft YaHei"/>
+                <a:ea typeface="Microsoft YaHei"/>
+              </a:rPr>
+              <a:t>05/13</a:t>
+            </a:r>
+          </a:p>
+        </p:txBody>
+      </p:sp>
+      <p:sp>
+        <p:nvSpPr>
+          <p:cNvPr id="6" name="Rounded Rectangle 5"/>
+          <p:cNvSpPr/>
+          <p:nvPr/>
+        </p:nvSpPr>
+        <p:spPr>
+          <a:xfrm>
+            <a:off x="502920" y="1554480"/>
+            <a:ext cx="11155680" cy="713232"/>
+          </a:xfrm>
+          <a:prstGeom prst="roundRect">
+            <a:avLst>
+              <a:gd name="adj" fmla="val 8000"/>
+            </a:avLst>
+          </a:prstGeom>
+          <a:solidFill>
+            <a:srgbClr val="1F3A93"/>
+          </a:solidFill>
+          <a:ln>
+            <a:noFill/>
+          </a:ln>
+          <a:effectLst/>
+        </p:spPr>
+        <p:style>
+          <a:lnRef idx="1">
+            <a:schemeClr val="accent1"/>
+          </a:lnRef>
+          <a:fillRef idx="3">
+            <a:schemeClr val="accent1"/>
+          </a:fillRef>
+          <a:effectRef idx="2">
+            <a:schemeClr val="accent1"/>
+          </a:effectRef>
+          <a:fontRef idx="minor">
+            <a:schemeClr val="lt1"/>
+          </a:fontRef>
+        </p:style>
+        <p:txBody>
+          <a:bodyPr rtlCol="0" anchor="ctr" wrap="square" lIns="228600"/>
+          <a:lstStyle/>
+          <a:p>
+            <a:pPr algn="ctr"/>
+            <a:r>
+              <a:rPr sz="1300" b="1">
+                <a:solidFill>
+                  <a:srgbClr val="FFFFFF"/>
+                </a:solidFill>
+                <a:latin typeface="Microsoft YaHei"/>
+                <a:ea typeface="Microsoft YaHei"/>
+              </a:rPr>
+              <a:t>入口层  </a:t>
+            </a:r>
+            <a:r>
+              <a:rPr sz="1050" b="0">
+                <a:solidFill>
+                  <a:srgbClr val="FFFFFF"/>
+                </a:solidFill>
+                <a:latin typeface="Microsoft YaHei"/>
+                <a:ea typeface="Microsoft YaHei"/>
+              </a:rPr>
+              <a:t>岗位 / JD / 简历 / 证据 / 导出</a:t>
+            </a:r>
+          </a:p>
+        </p:txBody>
+      </p:sp>
+      <p:sp>
+        <p:nvSpPr>
+          <p:cNvPr id="7" name="Rounded Rectangle 6"/>
+          <p:cNvSpPr/>
+          <p:nvPr/>
+        </p:nvSpPr>
+        <p:spPr>
+          <a:xfrm>
+            <a:off x="502920" y="2377440"/>
+            <a:ext cx="11155680" cy="713232"/>
+          </a:xfrm>
+          <a:prstGeom prst="roundRect">
+            <a:avLst>
+              <a:gd name="adj" fmla="val 8000"/>
+            </a:avLst>
+          </a:prstGeom>
+          <a:solidFill>
+            <a:srgbClr val="3F6FCC"/>
+          </a:solidFill>
+          <a:ln>
+            <a:noFill/>
+          </a:ln>
+          <a:effectLst/>
+        </p:spPr>
+        <p:style>
+          <a:lnRef idx="1">
+            <a:schemeClr val="accent1"/>
+          </a:lnRef>
+          <a:fillRef idx="3">
+            <a:schemeClr val="accent1"/>
+          </a:fillRef>
+          <a:effectRef idx="2">
+            <a:schemeClr val="accent1"/>
+          </a:effectRef>
+          <a:fontRef idx="minor">
+            <a:schemeClr val="lt1"/>
+          </a:fontRef>
+        </p:style>
+        <p:txBody>
+          <a:bodyPr rtlCol="0" anchor="ctr" wrap="square" lIns="228600"/>
+          <a:lstStyle/>
+          <a:p>
+            <a:pPr algn="ctr"/>
+            <a:r>
+              <a:rPr sz="1300" b="1">
+                <a:solidFill>
+                  <a:srgbClr val="FFFFFF"/>
+                </a:solidFill>
+                <a:latin typeface="Microsoft YaHei"/>
+                <a:ea typeface="Microsoft YaHei"/>
+              </a:rPr>
+              <a:t>AgentTeams 编排层  </a:t>
+            </a:r>
+            <a:r>
+              <a:rPr sz="1050" b="0">
+                <a:solidFill>
+                  <a:srgbClr val="FFFFFF"/>
+                </a:solidFill>
+                <a:latin typeface="Microsoft YaHei"/>
+                <a:ea typeface="Microsoft YaHei"/>
+              </a:rPr>
+              <a:t>主控：任务拆解 · 阶段路由 · 上下文编排 · 状态追踪 · 升级决策</a:t>
+            </a:r>
+          </a:p>
+        </p:txBody>
+      </p:sp>
+      <p:sp>
+        <p:nvSpPr>
+          <p:cNvPr id="8" name="Rounded Rectangle 7"/>
+          <p:cNvSpPr/>
+          <p:nvPr/>
+        </p:nvSpPr>
+        <p:spPr>
+          <a:xfrm>
+            <a:off x="502920" y="3200400"/>
+            <a:ext cx="11155680" cy="713232"/>
+          </a:xfrm>
+          <a:prstGeom prst="roundRect">
+            <a:avLst>
+              <a:gd name="adj" fmla="val 8000"/>
+            </a:avLst>
           </a:prstGeom>
           <a:solidFill>
             <a:srgbClr val="7C3AED"/>
@@ -5914,174 +8412,227 @@
           </a:fontRef>
         </p:style>
         <p:txBody>
-          <a:bodyPr rtlCol="0" anchor="ctr"/>
+          <a:bodyPr rtlCol="0" anchor="ctr" wrap="square" lIns="228600"/>
           <a:lstStyle/>
           <a:p>
             <a:pPr algn="ctr"/>
-          </a:p>
-        </p:txBody>
-      </p:sp>
-      <p:sp>
-        <p:nvSpPr>
-          <p:cNvPr id="5" name="TextBox 4"/>
-          <p:cNvSpPr txBox="1"/>
-          <p:nvPr/>
-        </p:nvSpPr>
-        <p:spPr>
-          <a:xfrm>
-            <a:off x="11338560" y="6446520"/>
-            <a:ext cx="640080" cy="365760"/>
-          </a:xfrm>
-          <a:prstGeom prst="rect">
-            <a:avLst/>
-          </a:prstGeom>
-          <a:noFill/>
-        </p:spPr>
-        <p:txBody>
-          <a:bodyPr wrap="square" anchor="t">
-            <a:spAutoFit/>
-          </a:bodyPr>
-          <a:lstStyle/>
-          <a:p>
-            <a:pPr algn="r">
-              <a:spcAft>
-                <a:spcPts val="600"/>
-              </a:spcAft>
-            </a:pPr>
-            <a:r>
-              <a:rPr sz="1000" b="0">
-                <a:solidFill>
-                  <a:srgbClr val="64748B"/>
-                </a:solidFill>
-                <a:latin typeface="Microsoft YaHei"/>
-                <a:ea typeface="Microsoft YaHei"/>
-              </a:rPr>
-              <a:t>05/13</a:t>
-            </a:r>
-          </a:p>
-        </p:txBody>
-      </p:sp>
-      <p:sp>
-        <p:nvSpPr>
-          <p:cNvPr id="6" name="TextBox 5"/>
-          <p:cNvSpPr txBox="1"/>
-          <p:nvPr/>
-        </p:nvSpPr>
-        <p:spPr>
-          <a:xfrm>
-            <a:off x="640080" y="1737360"/>
-            <a:ext cx="10972800" cy="4754880"/>
-          </a:xfrm>
-          <a:prstGeom prst="rect">
-            <a:avLst/>
-          </a:prstGeom>
-          <a:noFill/>
-        </p:spPr>
-        <p:txBody>
-          <a:bodyPr wrap="square">
-            <a:spAutoFit/>
-          </a:bodyPr>
-          <a:lstStyle/>
-          <a:p>
-            <a:pPr>
-              <a:spcAft>
-                <a:spcPts val="900"/>
-              </a:spcAft>
-            </a:pPr>
-            <a:r>
-              <a:rPr sz="1500" b="0">
-                <a:solidFill>
-                  <a:srgbClr val="334155"/>
-                </a:solidFill>
-                <a:latin typeface="Microsoft YaHei"/>
-                <a:ea typeface="Microsoft YaHei"/>
-              </a:rPr>
-              <a:t>●  入口层：岗位 / JD / 简历 / 证据 / 导出</a:t>
-            </a:r>
-          </a:p>
-          <a:p>
-            <a:pPr>
-              <a:spcAft>
-                <a:spcPts val="900"/>
-              </a:spcAft>
-            </a:pPr>
-            <a:r>
-              <a:rPr sz="1500" b="1">
-                <a:solidFill>
-                  <a:srgbClr val="4F46E5"/>
-                </a:solidFill>
-                <a:latin typeface="Microsoft YaHei"/>
-                <a:ea typeface="Microsoft YaHei"/>
-              </a:rPr>
-              <a:t>●  AgentTeams 编排层：主控任务拆解、阶段路由、上下文编排、状态追踪</a:t>
-            </a:r>
-          </a:p>
-          <a:p>
-            <a:pPr>
-              <a:spcAft>
-                <a:spcPts val="900"/>
-              </a:spcAft>
-            </a:pPr>
-            <a:r>
-              <a:rPr sz="1500" b="0">
-                <a:solidFill>
-                  <a:srgbClr val="7C3AED"/>
-                </a:solidFill>
-                <a:latin typeface="Microsoft YaHei"/>
-                <a:ea typeface="Microsoft YaHei"/>
-              </a:rPr>
-              <a:t>●  多 Agent 层：JobRequirementAnalyst · EvidenceCurator · ResumeStrategist · QualityDeliveryGuardian</a:t>
-            </a:r>
-          </a:p>
-          <a:p>
-            <a:pPr>
-              <a:spcAft>
-                <a:spcPts val="900"/>
-              </a:spcAft>
-            </a:pPr>
-            <a:r>
-              <a:rPr sz="1500" b="0">
-                <a:solidFill>
-                  <a:srgbClr val="0D9488"/>
-                </a:solidFill>
-                <a:latin typeface="Microsoft YaHei"/>
-                <a:ea typeface="Microsoft YaHei"/>
-              </a:rPr>
-              <a:t>●  Skill 能力层：材料校验 · JD 决策地图 · 事实检索 · 补证 · 可信改写 · 交付门禁 · Trace · 评测</a:t>
-            </a:r>
-          </a:p>
-          <a:p>
-            <a:pPr>
-              <a:spcAft>
-                <a:spcPts val="900"/>
-              </a:spcAft>
-            </a:pPr>
-            <a:r>
-              <a:rPr sz="1500" b="0">
-                <a:solidFill>
-                  <a:srgbClr val="334155"/>
-                </a:solidFill>
-                <a:latin typeface="Microsoft YaHei"/>
-                <a:ea typeface="Microsoft YaHei"/>
-              </a:rPr>
-              <a:t>●  连接器契约层：DirectLLM / Mock / 导入解析 / 导出（MCP 等价，见材料 05）</a:t>
-            </a:r>
-          </a:p>
-          <a:p>
-            <a:pPr>
-              <a:spcAft>
-                <a:spcPts val="900"/>
-              </a:spcAft>
-            </a:pPr>
-            <a:r>
-              <a:rPr sz="1500" b="0">
-                <a:solidFill>
-                  <a:srgbClr val="334155"/>
-                </a:solidFill>
-                <a:latin typeface="Microsoft YaHei"/>
-                <a:ea typeface="Microsoft YaHei"/>
-              </a:rPr>
-              <a:t>●  证据治理层：共享状态 + Studio Trace + Zod 校验 + 评测集</a:t>
+            <a:r>
+              <a:rPr sz="1300" b="1">
+                <a:solidFill>
+                  <a:srgbClr val="FFFFFF"/>
+                </a:solidFill>
+                <a:latin typeface="Microsoft YaHei"/>
+                <a:ea typeface="Microsoft YaHei"/>
+              </a:rPr>
+              <a:t>多 Agent 层  </a:t>
+            </a:r>
+            <a:r>
+              <a:rPr sz="1050" b="0">
+                <a:solidFill>
+                  <a:srgbClr val="FFFFFF"/>
+                </a:solidFill>
+                <a:latin typeface="Microsoft YaHei"/>
+                <a:ea typeface="Microsoft YaHei"/>
+              </a:rPr>
+              <a:t>JobRequirementAnalyst · EvidenceCurator · ResumeStrategist · QualityDeliveryGuardian</a:t>
+            </a:r>
+          </a:p>
+        </p:txBody>
+      </p:sp>
+      <p:sp>
+        <p:nvSpPr>
+          <p:cNvPr id="9" name="Rounded Rectangle 8"/>
+          <p:cNvSpPr/>
+          <p:nvPr/>
+        </p:nvSpPr>
+        <p:spPr>
+          <a:xfrm>
+            <a:off x="502920" y="4023360"/>
+            <a:ext cx="11155680" cy="713232"/>
+          </a:xfrm>
+          <a:prstGeom prst="roundRect">
+            <a:avLst>
+              <a:gd name="adj" fmla="val 8000"/>
+            </a:avLst>
+          </a:prstGeom>
+          <a:solidFill>
+            <a:srgbClr val="0D9488"/>
+          </a:solidFill>
+          <a:ln>
+            <a:noFill/>
+          </a:ln>
+          <a:effectLst/>
+        </p:spPr>
+        <p:style>
+          <a:lnRef idx="1">
+            <a:schemeClr val="accent1"/>
+          </a:lnRef>
+          <a:fillRef idx="3">
+            <a:schemeClr val="accent1"/>
+          </a:fillRef>
+          <a:effectRef idx="2">
+            <a:schemeClr val="accent1"/>
+          </a:effectRef>
+          <a:fontRef idx="minor">
+            <a:schemeClr val="lt1"/>
+          </a:fontRef>
+        </p:style>
+        <p:txBody>
+          <a:bodyPr rtlCol="0" anchor="ctr" wrap="square" lIns="228600"/>
+          <a:lstStyle/>
+          <a:p>
+            <a:pPr algn="ctr"/>
+            <a:r>
+              <a:rPr sz="1300" b="1">
+                <a:solidFill>
+                  <a:srgbClr val="FFFFFF"/>
+                </a:solidFill>
+                <a:latin typeface="Microsoft YaHei"/>
+                <a:ea typeface="Microsoft YaHei"/>
+              </a:rPr>
+              <a:t>Skill 能力层  </a:t>
+            </a:r>
+            <a:r>
+              <a:rPr sz="1050" b="0">
+                <a:solidFill>
+                  <a:srgbClr val="FFFFFF"/>
+                </a:solidFill>
+                <a:latin typeface="Microsoft YaHei"/>
+                <a:ea typeface="Microsoft YaHei"/>
+              </a:rPr>
+              <a:t>材料校验 · JD 决策地图 · 事实检索 · 补证 · 可信改写 · 交付门禁 · Trace · 评测</a:t>
+            </a:r>
+          </a:p>
+        </p:txBody>
+      </p:sp>
+      <p:sp>
+        <p:nvSpPr>
+          <p:cNvPr id="10" name="Rounded Rectangle 9"/>
+          <p:cNvSpPr/>
+          <p:nvPr/>
+        </p:nvSpPr>
+        <p:spPr>
+          <a:xfrm>
+            <a:off x="502920" y="4846320"/>
+            <a:ext cx="11155680" cy="713232"/>
+          </a:xfrm>
+          <a:prstGeom prst="roundRect">
+            <a:avLst>
+              <a:gd name="adj" fmla="val 8000"/>
+            </a:avLst>
+          </a:prstGeom>
+          <a:solidFill>
+            <a:srgbClr val="334155"/>
+          </a:solidFill>
+          <a:ln>
+            <a:noFill/>
+          </a:ln>
+          <a:effectLst/>
+        </p:spPr>
+        <p:style>
+          <a:lnRef idx="1">
+            <a:schemeClr val="accent1"/>
+          </a:lnRef>
+          <a:fillRef idx="3">
+            <a:schemeClr val="accent1"/>
+          </a:fillRef>
+          <a:effectRef idx="2">
+            <a:schemeClr val="accent1"/>
+          </a:effectRef>
+          <a:fontRef idx="minor">
+            <a:schemeClr val="lt1"/>
+          </a:fontRef>
+        </p:style>
+        <p:txBody>
+          <a:bodyPr rtlCol="0" anchor="ctr" wrap="square" lIns="228600"/>
+          <a:lstStyle/>
+          <a:p>
+            <a:pPr algn="ctr"/>
+            <a:r>
+              <a:rPr sz="1300" b="1">
+                <a:solidFill>
+                  <a:srgbClr val="FFFFFF"/>
+                </a:solidFill>
+                <a:latin typeface="Microsoft YaHei"/>
+                <a:ea typeface="Microsoft YaHei"/>
+              </a:rPr>
+              <a:t>连接器契约层  </a:t>
+            </a:r>
+            <a:r>
+              <a:rPr sz="1050" b="0">
+                <a:solidFill>
+                  <a:srgbClr val="FFFFFF"/>
+                </a:solidFill>
+                <a:latin typeface="Microsoft YaHei"/>
+                <a:ea typeface="Microsoft YaHei"/>
+              </a:rPr>
+              <a:t>DirectLLM / Mock / 导入解析 / 导出（MCP 等价契约）</a:t>
+            </a:r>
+          </a:p>
+        </p:txBody>
+      </p:sp>
+      <p:sp>
+        <p:nvSpPr>
+          <p:cNvPr id="11" name="Rounded Rectangle 10"/>
+          <p:cNvSpPr/>
+          <p:nvPr/>
+        </p:nvSpPr>
+        <p:spPr>
+          <a:xfrm>
+            <a:off x="502920" y="5669280"/>
+            <a:ext cx="11155680" cy="713232"/>
+          </a:xfrm>
+          <a:prstGeom prst="roundRect">
+            <a:avLst>
+              <a:gd name="adj" fmla="val 8000"/>
+            </a:avLst>
+          </a:prstGeom>
+          <a:solidFill>
+            <a:srgbClr val="64748B"/>
+          </a:solidFill>
+          <a:ln>
+            <a:noFill/>
+          </a:ln>
+          <a:effectLst/>
+        </p:spPr>
+        <p:style>
+          <a:lnRef idx="1">
+            <a:schemeClr val="accent1"/>
+          </a:lnRef>
+          <a:fillRef idx="3">
+            <a:schemeClr val="accent1"/>
+          </a:fillRef>
+          <a:effectRef idx="2">
+            <a:schemeClr val="accent1"/>
+          </a:effectRef>
+          <a:fontRef idx="minor">
+            <a:schemeClr val="lt1"/>
+          </a:fontRef>
+        </p:style>
+        <p:txBody>
+          <a:bodyPr rtlCol="0" anchor="ctr" wrap="square" lIns="228600"/>
+          <a:lstStyle/>
+          <a:p>
+            <a:pPr algn="ctr"/>
+            <a:r>
+              <a:rPr sz="1300" b="1">
+                <a:solidFill>
+                  <a:srgbClr val="FFFFFF"/>
+                </a:solidFill>
+                <a:latin typeface="Microsoft YaHei"/>
+                <a:ea typeface="Microsoft YaHei"/>
+              </a:rPr>
+              <a:t>证据治理层  </a:t>
+            </a:r>
+            <a:r>
+              <a:rPr sz="1050" b="0">
+                <a:solidFill>
+                  <a:srgbClr val="FFFFFF"/>
+                </a:solidFill>
+                <a:latin typeface="Microsoft YaHei"/>
+                <a:ea typeface="Microsoft YaHei"/>
+              </a:rPr>
+              <a:t>共享状态 + Studio Trace + Zod 校验 + 评测集</a:t>
             </a:r>
           </a:p>
         </p:txBody>
@@ -6156,8 +8707,8 @@
         </p:nvSpPr>
         <p:spPr>
           <a:xfrm>
-            <a:off x="548640" y="384048"/>
-            <a:ext cx="11064240" cy="548640"/>
+            <a:off x="502920" y="365760"/>
+            <a:ext cx="10972800" cy="548640"/>
           </a:xfrm>
           <a:prstGeom prst="rect">
             <a:avLst/>
@@ -6172,11 +8723,11 @@
           <a:p>
             <a:pPr algn="l">
               <a:spcAft>
-                <a:spcPts val="600"/>
+                <a:spcPts val="400"/>
               </a:spcAft>
             </a:pPr>
             <a:r>
-              <a:rPr sz="2600" b="1">
+              <a:rPr sz="2400" b="1">
                 <a:solidFill>
                   <a:srgbClr val="0F172A"/>
                 </a:solidFill>
@@ -6196,14 +8747,14 @@
         </p:nvSpPr>
         <p:spPr>
           <a:xfrm>
-            <a:off x="548640" y="1115568"/>
+            <a:off x="502920" y="1078992"/>
             <a:ext cx="1371600" cy="64008"/>
           </a:xfrm>
           <a:prstGeom prst="rect">
             <a:avLst/>
           </a:prstGeom>
           <a:solidFill>
-            <a:srgbClr val="0EA5E9"/>
+            <a:srgbClr val="1F3A93"/>
           </a:solidFill>
           <a:ln>
             <a:noFill/>
@@ -6240,8 +8791,8 @@
         </p:nvSpPr>
         <p:spPr>
           <a:xfrm>
-            <a:off x="11338560" y="6446520"/>
-            <a:ext cx="640080" cy="365760"/>
+            <a:off x="11430000" y="6446520"/>
+            <a:ext cx="548640" cy="365760"/>
           </a:xfrm>
           <a:prstGeom prst="rect">
             <a:avLst/>
@@ -6256,11 +8807,11 @@
           <a:p>
             <a:pPr algn="r">
               <a:spcAft>
-                <a:spcPts val="600"/>
+                <a:spcPts val="400"/>
               </a:spcAft>
             </a:pPr>
             <a:r>
-              <a:rPr sz="1000" b="0">
+              <a:rPr sz="900" b="0">
                 <a:solidFill>
                   <a:srgbClr val="64748B"/>
                 </a:solidFill>
@@ -6274,14 +8825,673 @@
       </p:sp>
       <p:sp>
         <p:nvSpPr>
-          <p:cNvPr id="6" name="TextBox 5"/>
+          <p:cNvPr id="6" name="Rounded Rectangle 5"/>
+          <p:cNvSpPr/>
+          <p:nvPr/>
+        </p:nvSpPr>
+        <p:spPr>
+          <a:xfrm>
+            <a:off x="801471" y="2011680"/>
+            <a:ext cx="1371600" cy="822960"/>
+          </a:xfrm>
+          <a:prstGeom prst="roundRect">
+            <a:avLst>
+              <a:gd name="adj" fmla="val 8000"/>
+            </a:avLst>
+          </a:prstGeom>
+          <a:solidFill>
+            <a:srgbClr val="FFFFFF"/>
+          </a:solidFill>
+          <a:ln w="19050">
+            <a:solidFill>
+              <a:srgbClr val="3F6FCC"/>
+            </a:solidFill>
+          </a:ln>
+          <a:effectLst/>
+        </p:spPr>
+        <p:style>
+          <a:lnRef idx="1">
+            <a:schemeClr val="accent1"/>
+          </a:lnRef>
+          <a:fillRef idx="3">
+            <a:schemeClr val="accent1"/>
+          </a:fillRef>
+          <a:effectRef idx="2">
+            <a:schemeClr val="accent1"/>
+          </a:effectRef>
+          <a:fontRef idx="minor">
+            <a:schemeClr val="lt1"/>
+          </a:fontRef>
+        </p:style>
+        <p:txBody>
+          <a:bodyPr rtlCol="0" anchor="ctr" wrap="square"/>
+          <a:lstStyle/>
+          <a:p>
+            <a:pPr algn="ctr"/>
+            <a:r>
+              <a:rPr sz="1200" b="1">
+                <a:solidFill>
+                  <a:srgbClr val="0F172A"/>
+                </a:solidFill>
+                <a:latin typeface="Microsoft YaHei"/>
+                <a:ea typeface="Microsoft YaHei"/>
+              </a:rPr>
+              <a:t>JD 解析</a:t>
+            </a:r>
+          </a:p>
+        </p:txBody>
+      </p:sp>
+      <p:sp>
+        <p:nvSpPr>
+          <p:cNvPr id="7" name="TextBox 6"/>
           <p:cNvSpPr txBox="1"/>
           <p:nvPr/>
         </p:nvSpPr>
         <p:spPr>
           <a:xfrm>
-            <a:off x="640080" y="1737360"/>
-            <a:ext cx="10972800" cy="731520"/>
+            <a:off x="2173071" y="2240280"/>
+            <a:ext cx="164592" cy="457200"/>
+          </a:xfrm>
+          <a:prstGeom prst="rect">
+            <a:avLst/>
+          </a:prstGeom>
+          <a:noFill/>
+        </p:spPr>
+        <p:txBody>
+          <a:bodyPr wrap="square" anchor="ctr">
+            <a:spAutoFit/>
+          </a:bodyPr>
+          <a:lstStyle/>
+          <a:p>
+            <a:pPr algn="ctr">
+              <a:spcAft>
+                <a:spcPts val="400"/>
+              </a:spcAft>
+            </a:pPr>
+            <a:r>
+              <a:rPr sz="1600" b="1">
+                <a:solidFill>
+                  <a:srgbClr val="3F6FCC"/>
+                </a:solidFill>
+                <a:latin typeface="Microsoft YaHei"/>
+                <a:ea typeface="Microsoft YaHei"/>
+              </a:rPr>
+              <a:t>→</a:t>
+            </a:r>
+          </a:p>
+        </p:txBody>
+      </p:sp>
+      <p:sp>
+        <p:nvSpPr>
+          <p:cNvPr id="8" name="Rounded Rectangle 7"/>
+          <p:cNvSpPr/>
+          <p:nvPr/>
+        </p:nvSpPr>
+        <p:spPr>
+          <a:xfrm>
+            <a:off x="2337663" y="2011680"/>
+            <a:ext cx="1371600" cy="822960"/>
+          </a:xfrm>
+          <a:prstGeom prst="roundRect">
+            <a:avLst>
+              <a:gd name="adj" fmla="val 8000"/>
+            </a:avLst>
+          </a:prstGeom>
+          <a:solidFill>
+            <a:srgbClr val="FFFFFF"/>
+          </a:solidFill>
+          <a:ln w="19050">
+            <a:solidFill>
+              <a:srgbClr val="3F6FCC"/>
+            </a:solidFill>
+          </a:ln>
+          <a:effectLst/>
+        </p:spPr>
+        <p:style>
+          <a:lnRef idx="1">
+            <a:schemeClr val="accent1"/>
+          </a:lnRef>
+          <a:fillRef idx="3">
+            <a:schemeClr val="accent1"/>
+          </a:fillRef>
+          <a:effectRef idx="2">
+            <a:schemeClr val="accent1"/>
+          </a:effectRef>
+          <a:fontRef idx="minor">
+            <a:schemeClr val="lt1"/>
+          </a:fontRef>
+        </p:style>
+        <p:txBody>
+          <a:bodyPr rtlCol="0" anchor="ctr" wrap="square"/>
+          <a:lstStyle/>
+          <a:p>
+            <a:pPr algn="ctr"/>
+            <a:r>
+              <a:rPr sz="1200" b="1">
+                <a:solidFill>
+                  <a:srgbClr val="0F172A"/>
+                </a:solidFill>
+                <a:latin typeface="Microsoft YaHei"/>
+                <a:ea typeface="Microsoft YaHei"/>
+              </a:rPr>
+              <a:t>确认需求地图</a:t>
+            </a:r>
+          </a:p>
+          <a:p>
+            <a:pPr algn="ctr"/>
+            <a:r>
+              <a:rPr sz="800" b="0">
+                <a:solidFill>
+                  <a:srgbClr val="64748B"/>
+                </a:solidFill>
+                <a:latin typeface="Microsoft YaHei"/>
+                <a:ea typeface="Microsoft YaHei"/>
+              </a:rPr>
+              <a:t>人工</a:t>
+            </a:r>
+          </a:p>
+        </p:txBody>
+      </p:sp>
+      <p:sp>
+        <p:nvSpPr>
+          <p:cNvPr id="9" name="TextBox 8"/>
+          <p:cNvSpPr txBox="1"/>
+          <p:nvPr/>
+        </p:nvSpPr>
+        <p:spPr>
+          <a:xfrm>
+            <a:off x="3709263" y="2240280"/>
+            <a:ext cx="164592" cy="457200"/>
+          </a:xfrm>
+          <a:prstGeom prst="rect">
+            <a:avLst/>
+          </a:prstGeom>
+          <a:noFill/>
+        </p:spPr>
+        <p:txBody>
+          <a:bodyPr wrap="square" anchor="ctr">
+            <a:spAutoFit/>
+          </a:bodyPr>
+          <a:lstStyle/>
+          <a:p>
+            <a:pPr algn="ctr">
+              <a:spcAft>
+                <a:spcPts val="400"/>
+              </a:spcAft>
+            </a:pPr>
+            <a:r>
+              <a:rPr sz="1600" b="1">
+                <a:solidFill>
+                  <a:srgbClr val="3F6FCC"/>
+                </a:solidFill>
+                <a:latin typeface="Microsoft YaHei"/>
+                <a:ea typeface="Microsoft YaHei"/>
+              </a:rPr>
+              <a:t>→</a:t>
+            </a:r>
+          </a:p>
+        </p:txBody>
+      </p:sp>
+      <p:sp>
+        <p:nvSpPr>
+          <p:cNvPr id="10" name="Rounded Rectangle 9"/>
+          <p:cNvSpPr/>
+          <p:nvPr/>
+        </p:nvSpPr>
+        <p:spPr>
+          <a:xfrm>
+            <a:off x="3873855" y="2011680"/>
+            <a:ext cx="1371600" cy="822960"/>
+          </a:xfrm>
+          <a:prstGeom prst="roundRect">
+            <a:avLst>
+              <a:gd name="adj" fmla="val 8000"/>
+            </a:avLst>
+          </a:prstGeom>
+          <a:solidFill>
+            <a:srgbClr val="FFFFFF"/>
+          </a:solidFill>
+          <a:ln w="19050">
+            <a:solidFill>
+              <a:srgbClr val="3F6FCC"/>
+            </a:solidFill>
+          </a:ln>
+          <a:effectLst/>
+        </p:spPr>
+        <p:style>
+          <a:lnRef idx="1">
+            <a:schemeClr val="accent1"/>
+          </a:lnRef>
+          <a:fillRef idx="3">
+            <a:schemeClr val="accent1"/>
+          </a:fillRef>
+          <a:effectRef idx="2">
+            <a:schemeClr val="accent1"/>
+          </a:effectRef>
+          <a:fontRef idx="minor">
+            <a:schemeClr val="lt1"/>
+          </a:fontRef>
+        </p:style>
+        <p:txBody>
+          <a:bodyPr rtlCol="0" anchor="ctr" wrap="square"/>
+          <a:lstStyle/>
+          <a:p>
+            <a:pPr algn="ctr"/>
+            <a:r>
+              <a:rPr sz="1200" b="1">
+                <a:solidFill>
+                  <a:srgbClr val="0F172A"/>
+                </a:solidFill>
+                <a:latin typeface="Microsoft YaHei"/>
+                <a:ea typeface="Microsoft YaHei"/>
+              </a:rPr>
+              <a:t>事实匹配</a:t>
+            </a:r>
+          </a:p>
+        </p:txBody>
+      </p:sp>
+      <p:sp>
+        <p:nvSpPr>
+          <p:cNvPr id="11" name="TextBox 10"/>
+          <p:cNvSpPr txBox="1"/>
+          <p:nvPr/>
+        </p:nvSpPr>
+        <p:spPr>
+          <a:xfrm>
+            <a:off x="5245455" y="2240280"/>
+            <a:ext cx="164592" cy="457200"/>
+          </a:xfrm>
+          <a:prstGeom prst="rect">
+            <a:avLst/>
+          </a:prstGeom>
+          <a:noFill/>
+        </p:spPr>
+        <p:txBody>
+          <a:bodyPr wrap="square" anchor="ctr">
+            <a:spAutoFit/>
+          </a:bodyPr>
+          <a:lstStyle/>
+          <a:p>
+            <a:pPr algn="ctr">
+              <a:spcAft>
+                <a:spcPts val="400"/>
+              </a:spcAft>
+            </a:pPr>
+            <a:r>
+              <a:rPr sz="1600" b="1">
+                <a:solidFill>
+                  <a:srgbClr val="3F6FCC"/>
+                </a:solidFill>
+                <a:latin typeface="Microsoft YaHei"/>
+                <a:ea typeface="Microsoft YaHei"/>
+              </a:rPr>
+              <a:t>→</a:t>
+            </a:r>
+          </a:p>
+        </p:txBody>
+      </p:sp>
+      <p:sp>
+        <p:nvSpPr>
+          <p:cNvPr id="12" name="Rounded Rectangle 11"/>
+          <p:cNvSpPr/>
+          <p:nvPr/>
+        </p:nvSpPr>
+        <p:spPr>
+          <a:xfrm>
+            <a:off x="5410047" y="2011680"/>
+            <a:ext cx="1371600" cy="822960"/>
+          </a:xfrm>
+          <a:prstGeom prst="roundRect">
+            <a:avLst>
+              <a:gd name="adj" fmla="val 8000"/>
+            </a:avLst>
+          </a:prstGeom>
+          <a:solidFill>
+            <a:srgbClr val="FFFFFF"/>
+          </a:solidFill>
+          <a:ln w="19050">
+            <a:solidFill>
+              <a:srgbClr val="3F6FCC"/>
+            </a:solidFill>
+          </a:ln>
+          <a:effectLst/>
+        </p:spPr>
+        <p:style>
+          <a:lnRef idx="1">
+            <a:schemeClr val="accent1"/>
+          </a:lnRef>
+          <a:fillRef idx="3">
+            <a:schemeClr val="accent1"/>
+          </a:fillRef>
+          <a:effectRef idx="2">
+            <a:schemeClr val="accent1"/>
+          </a:effectRef>
+          <a:fontRef idx="minor">
+            <a:schemeClr val="lt1"/>
+          </a:fontRef>
+        </p:style>
+        <p:txBody>
+          <a:bodyPr rtlCol="0" anchor="ctr" wrap="square"/>
+          <a:lstStyle/>
+          <a:p>
+            <a:pPr algn="ctr"/>
+            <a:r>
+              <a:rPr sz="1200" b="1">
+                <a:solidFill>
+                  <a:srgbClr val="0F172A"/>
+                </a:solidFill>
+                <a:latin typeface="Microsoft YaHei"/>
+                <a:ea typeface="Microsoft YaHei"/>
+              </a:rPr>
+              <a:t>准备度/缺口</a:t>
+            </a:r>
+          </a:p>
+        </p:txBody>
+      </p:sp>
+      <p:sp>
+        <p:nvSpPr>
+          <p:cNvPr id="13" name="TextBox 12"/>
+          <p:cNvSpPr txBox="1"/>
+          <p:nvPr/>
+        </p:nvSpPr>
+        <p:spPr>
+          <a:xfrm>
+            <a:off x="6781647" y="2240280"/>
+            <a:ext cx="164592" cy="457200"/>
+          </a:xfrm>
+          <a:prstGeom prst="rect">
+            <a:avLst/>
+          </a:prstGeom>
+          <a:noFill/>
+        </p:spPr>
+        <p:txBody>
+          <a:bodyPr wrap="square" anchor="ctr">
+            <a:spAutoFit/>
+          </a:bodyPr>
+          <a:lstStyle/>
+          <a:p>
+            <a:pPr algn="ctr">
+              <a:spcAft>
+                <a:spcPts val="400"/>
+              </a:spcAft>
+            </a:pPr>
+            <a:r>
+              <a:rPr sz="1600" b="1">
+                <a:solidFill>
+                  <a:srgbClr val="3F6FCC"/>
+                </a:solidFill>
+                <a:latin typeface="Microsoft YaHei"/>
+                <a:ea typeface="Microsoft YaHei"/>
+              </a:rPr>
+              <a:t>→</a:t>
+            </a:r>
+          </a:p>
+        </p:txBody>
+      </p:sp>
+      <p:sp>
+        <p:nvSpPr>
+          <p:cNvPr id="14" name="Rounded Rectangle 13"/>
+          <p:cNvSpPr/>
+          <p:nvPr/>
+        </p:nvSpPr>
+        <p:spPr>
+          <a:xfrm>
+            <a:off x="6946239" y="2011680"/>
+            <a:ext cx="1371600" cy="822960"/>
+          </a:xfrm>
+          <a:prstGeom prst="roundRect">
+            <a:avLst>
+              <a:gd name="adj" fmla="val 8000"/>
+            </a:avLst>
+          </a:prstGeom>
+          <a:solidFill>
+            <a:srgbClr val="FFFFFF"/>
+          </a:solidFill>
+          <a:ln w="19050">
+            <a:solidFill>
+              <a:srgbClr val="3F6FCC"/>
+            </a:solidFill>
+          </a:ln>
+          <a:effectLst/>
+        </p:spPr>
+        <p:style>
+          <a:lnRef idx="1">
+            <a:schemeClr val="accent1"/>
+          </a:lnRef>
+          <a:fillRef idx="3">
+            <a:schemeClr val="accent1"/>
+          </a:fillRef>
+          <a:effectRef idx="2">
+            <a:schemeClr val="accent1"/>
+          </a:effectRef>
+          <a:fontRef idx="minor">
+            <a:schemeClr val="lt1"/>
+          </a:fontRef>
+        </p:style>
+        <p:txBody>
+          <a:bodyPr rtlCol="0" anchor="ctr" wrap="square"/>
+          <a:lstStyle/>
+          <a:p>
+            <a:pPr algn="ctr"/>
+            <a:r>
+              <a:rPr sz="1200" b="1">
+                <a:solidFill>
+                  <a:srgbClr val="0F172A"/>
+                </a:solidFill>
+                <a:latin typeface="Microsoft YaHei"/>
+                <a:ea typeface="Microsoft YaHei"/>
+              </a:rPr>
+              <a:t>定向补证</a:t>
+            </a:r>
+          </a:p>
+        </p:txBody>
+      </p:sp>
+      <p:sp>
+        <p:nvSpPr>
+          <p:cNvPr id="15" name="TextBox 14"/>
+          <p:cNvSpPr txBox="1"/>
+          <p:nvPr/>
+        </p:nvSpPr>
+        <p:spPr>
+          <a:xfrm>
+            <a:off x="8317839" y="2240280"/>
+            <a:ext cx="164592" cy="457200"/>
+          </a:xfrm>
+          <a:prstGeom prst="rect">
+            <a:avLst/>
+          </a:prstGeom>
+          <a:noFill/>
+        </p:spPr>
+        <p:txBody>
+          <a:bodyPr wrap="square" anchor="ctr">
+            <a:spAutoFit/>
+          </a:bodyPr>
+          <a:lstStyle/>
+          <a:p>
+            <a:pPr algn="ctr">
+              <a:spcAft>
+                <a:spcPts val="400"/>
+              </a:spcAft>
+            </a:pPr>
+            <a:r>
+              <a:rPr sz="1600" b="1">
+                <a:solidFill>
+                  <a:srgbClr val="3F6FCC"/>
+                </a:solidFill>
+                <a:latin typeface="Microsoft YaHei"/>
+                <a:ea typeface="Microsoft YaHei"/>
+              </a:rPr>
+              <a:t>→</a:t>
+            </a:r>
+          </a:p>
+        </p:txBody>
+      </p:sp>
+      <p:sp>
+        <p:nvSpPr>
+          <p:cNvPr id="16" name="Rounded Rectangle 15"/>
+          <p:cNvSpPr/>
+          <p:nvPr/>
+        </p:nvSpPr>
+        <p:spPr>
+          <a:xfrm>
+            <a:off x="8482431" y="2011680"/>
+            <a:ext cx="1371600" cy="822960"/>
+          </a:xfrm>
+          <a:prstGeom prst="roundRect">
+            <a:avLst>
+              <a:gd name="adj" fmla="val 8000"/>
+            </a:avLst>
+          </a:prstGeom>
+          <a:solidFill>
+            <a:srgbClr val="FFFFFF"/>
+          </a:solidFill>
+          <a:ln w="19050">
+            <a:solidFill>
+              <a:srgbClr val="3F6FCC"/>
+            </a:solidFill>
+          </a:ln>
+          <a:effectLst/>
+        </p:spPr>
+        <p:style>
+          <a:lnRef idx="1">
+            <a:schemeClr val="accent1"/>
+          </a:lnRef>
+          <a:fillRef idx="3">
+            <a:schemeClr val="accent1"/>
+          </a:fillRef>
+          <a:effectRef idx="2">
+            <a:schemeClr val="accent1"/>
+          </a:effectRef>
+          <a:fontRef idx="minor">
+            <a:schemeClr val="lt1"/>
+          </a:fontRef>
+        </p:style>
+        <p:txBody>
+          <a:bodyPr rtlCol="0" anchor="ctr" wrap="square"/>
+          <a:lstStyle/>
+          <a:p>
+            <a:pPr algn="ctr"/>
+            <a:r>
+              <a:rPr sz="1200" b="1">
+                <a:solidFill>
+                  <a:srgbClr val="0F172A"/>
+                </a:solidFill>
+                <a:latin typeface="Microsoft YaHei"/>
+                <a:ea typeface="Microsoft YaHei"/>
+              </a:rPr>
+              <a:t>优化制作</a:t>
+            </a:r>
+          </a:p>
+        </p:txBody>
+      </p:sp>
+      <p:sp>
+        <p:nvSpPr>
+          <p:cNvPr id="17" name="TextBox 16"/>
+          <p:cNvSpPr txBox="1"/>
+          <p:nvPr/>
+        </p:nvSpPr>
+        <p:spPr>
+          <a:xfrm>
+            <a:off x="9854031" y="2240280"/>
+            <a:ext cx="164592" cy="457200"/>
+          </a:xfrm>
+          <a:prstGeom prst="rect">
+            <a:avLst/>
+          </a:prstGeom>
+          <a:noFill/>
+        </p:spPr>
+        <p:txBody>
+          <a:bodyPr wrap="square" anchor="ctr">
+            <a:spAutoFit/>
+          </a:bodyPr>
+          <a:lstStyle/>
+          <a:p>
+            <a:pPr algn="ctr">
+              <a:spcAft>
+                <a:spcPts val="400"/>
+              </a:spcAft>
+            </a:pPr>
+            <a:r>
+              <a:rPr sz="1600" b="1">
+                <a:solidFill>
+                  <a:srgbClr val="3F6FCC"/>
+                </a:solidFill>
+                <a:latin typeface="Microsoft YaHei"/>
+                <a:ea typeface="Microsoft YaHei"/>
+              </a:rPr>
+              <a:t>→</a:t>
+            </a:r>
+          </a:p>
+        </p:txBody>
+      </p:sp>
+      <p:sp>
+        <p:nvSpPr>
+          <p:cNvPr id="18" name="Rounded Rectangle 17"/>
+          <p:cNvSpPr/>
+          <p:nvPr/>
+        </p:nvSpPr>
+        <p:spPr>
+          <a:xfrm>
+            <a:off x="10018623" y="2011680"/>
+            <a:ext cx="1371600" cy="822960"/>
+          </a:xfrm>
+          <a:prstGeom prst="roundRect">
+            <a:avLst>
+              <a:gd name="adj" fmla="val 8000"/>
+            </a:avLst>
+          </a:prstGeom>
+          <a:solidFill>
+            <a:srgbClr val="FFFFFF"/>
+          </a:solidFill>
+          <a:ln w="19050">
+            <a:solidFill>
+              <a:srgbClr val="3F6FCC"/>
+            </a:solidFill>
+          </a:ln>
+          <a:effectLst/>
+        </p:spPr>
+        <p:style>
+          <a:lnRef idx="1">
+            <a:schemeClr val="accent1"/>
+          </a:lnRef>
+          <a:fillRef idx="3">
+            <a:schemeClr val="accent1"/>
+          </a:fillRef>
+          <a:effectRef idx="2">
+            <a:schemeClr val="accent1"/>
+          </a:effectRef>
+          <a:fontRef idx="minor">
+            <a:schemeClr val="lt1"/>
+          </a:fontRef>
+        </p:style>
+        <p:txBody>
+          <a:bodyPr rtlCol="0" anchor="ctr" wrap="square"/>
+          <a:lstStyle/>
+          <a:p>
+            <a:pPr algn="ctr"/>
+            <a:r>
+              <a:rPr sz="1200" b="1">
+                <a:solidFill>
+                  <a:srgbClr val="0F172A"/>
+                </a:solidFill>
+                <a:latin typeface="Microsoft YaHei"/>
+                <a:ea typeface="Microsoft YaHei"/>
+              </a:rPr>
+              <a:t>交付导出</a:t>
+            </a:r>
+          </a:p>
+        </p:txBody>
+      </p:sp>
+      <p:sp>
+        <p:nvSpPr>
+          <p:cNvPr id="19" name="TextBox 18"/>
+          <p:cNvSpPr txBox="1"/>
+          <p:nvPr/>
+        </p:nvSpPr>
+        <p:spPr>
+          <a:xfrm>
+            <a:off x="502920" y="3657600"/>
+            <a:ext cx="11155680" cy="457200"/>
           </a:xfrm>
           <a:prstGeom prst="rect">
             <a:avLst/>
@@ -6294,34 +9504,74 @@
           </a:bodyPr>
           <a:lstStyle/>
           <a:p>
+            <a:pPr algn="ctr">
+              <a:spcAft>
+                <a:spcPts val="400"/>
+              </a:spcAft>
+            </a:pPr>
+            <a:r>
+              <a:rPr sz="1200" b="0">
+                <a:solidFill>
+                  <a:srgbClr val="F59E0B"/>
+                </a:solidFill>
+                <a:latin typeface="Microsoft YaHei"/>
+                <a:ea typeface="Microsoft YaHei"/>
+              </a:rPr>
+              <a:t>缺口 → 补证 → 重匹配 构成回流</a:t>
+            </a:r>
+          </a:p>
+        </p:txBody>
+      </p:sp>
+      <p:sp>
+        <p:nvSpPr>
+          <p:cNvPr id="20" name="TextBox 19"/>
+          <p:cNvSpPr txBox="1"/>
+          <p:nvPr/>
+        </p:nvSpPr>
+        <p:spPr>
+          <a:xfrm>
+            <a:off x="502920" y="4297680"/>
+            <a:ext cx="11155680" cy="457200"/>
+          </a:xfrm>
+          <a:prstGeom prst="rect">
+            <a:avLst/>
+          </a:prstGeom>
+          <a:noFill/>
+        </p:spPr>
+        <p:txBody>
+          <a:bodyPr wrap="square" anchor="t">
+            <a:spAutoFit/>
+          </a:bodyPr>
+          <a:lstStyle/>
+          <a:p>
             <a:pPr algn="l">
               <a:spcAft>
-                <a:spcPts val="600"/>
+                <a:spcPts val="400"/>
               </a:spcAft>
             </a:pPr>
             <a:r>
-              <a:rPr sz="1600" b="1">
-                <a:solidFill>
-                  <a:srgbClr val="0EA5E9"/>
-                </a:solidFill>
-                <a:latin typeface="Microsoft YaHei"/>
-                <a:ea typeface="Microsoft YaHei"/>
-              </a:rPr>
-              <a:t>JD 解析 → 人工确认需求地图 → 事实匹配 → 准备度/缺口 → 定向补证 → 优化制作 → 交付导出</a:t>
-            </a:r>
-          </a:p>
-        </p:txBody>
-      </p:sp>
-      <p:sp>
-        <p:nvSpPr>
-          <p:cNvPr id="7" name="TextBox 6"/>
+              <a:rPr sz="1300" b="0">
+                <a:solidFill>
+                  <a:srgbClr val="334155"/>
+                </a:solidFill>
+                <a:latin typeface="Microsoft YaHei"/>
+                <a:ea typeface="Microsoft YaHei"/>
+              </a:rPr>
+              <a:t>●  依赖变化 → 结果置为过期，禁止导出旧结果</a:t>
+            </a:r>
+          </a:p>
+        </p:txBody>
+      </p:sp>
+      <p:sp>
+        <p:nvSpPr>
+          <p:cNvPr id="21" name="TextBox 20"/>
           <p:cNvSpPr txBox="1"/>
           <p:nvPr/>
         </p:nvSpPr>
         <p:spPr>
           <a:xfrm>
-            <a:off x="640080" y="2743200"/>
-            <a:ext cx="10972800" cy="3657600"/>
+            <a:off x="502920" y="4846320"/>
+            <a:ext cx="11155680" cy="457200"/>
           </a:xfrm>
           <a:prstGeom prst="rect">
             <a:avLst/>
@@ -6329,71 +9579,20 @@
           <a:noFill/>
         </p:spPr>
         <p:txBody>
-          <a:bodyPr wrap="square">
+          <a:bodyPr wrap="square" anchor="t">
             <a:spAutoFit/>
           </a:bodyPr>
           <a:lstStyle/>
           <a:p>
-            <a:pPr>
+            <a:pPr algn="l">
               <a:spcAft>
-                <a:spcPts val="900"/>
+                <a:spcPts val="400"/>
               </a:spcAft>
             </a:pPr>
             <a:r>
-              <a:rPr sz="1500" b="0">
+              <a:rPr sz="1300" b="0">
                 <a:solidFill>
                   <a:srgbClr val="334155"/>
-                </a:solidFill>
-                <a:latin typeface="Microsoft YaHei"/>
-                <a:ea typeface="Microsoft YaHei"/>
-              </a:rPr>
-              <a:t>●  缺口 → 补证 → 重匹配 构成回流，事实确认后重新参与匹配</a:t>
-            </a:r>
-          </a:p>
-          <a:p>
-            <a:pPr>
-              <a:spcAft>
-                <a:spcPts val="900"/>
-              </a:spcAft>
-            </a:pPr>
-            <a:r>
-              <a:rPr sz="1500" b="0">
-                <a:solidFill>
-                  <a:srgbClr val="64748B"/>
-                </a:solidFill>
-                <a:latin typeface="Microsoft YaHei"/>
-                <a:ea typeface="Microsoft YaHei"/>
-              </a:rPr>
-              <a:t>●  面试准备 / 复盘为辅助流程，不阻塞简历交付</a:t>
-            </a:r>
-          </a:p>
-          <a:p>
-            <a:pPr>
-              <a:spcAft>
-                <a:spcPts val="900"/>
-              </a:spcAft>
-            </a:pPr>
-            <a:r>
-              <a:rPr sz="1500" b="0">
-                <a:solidFill>
-                  <a:srgbClr val="F59E0B"/>
-                </a:solidFill>
-                <a:latin typeface="Microsoft YaHei"/>
-                <a:ea typeface="Microsoft YaHei"/>
-              </a:rPr>
-              <a:t>●  依赖变化（JD/材料/事实/风格）→ 结果置为过期，禁止导出旧结果</a:t>
-            </a:r>
-          </a:p>
-          <a:p>
-            <a:pPr>
-              <a:spcAft>
-                <a:spcPts val="900"/>
-              </a:spcAft>
-            </a:pPr>
-            <a:r>
-              <a:rPr sz="1500" b="0">
-                <a:solidFill>
-                  <a:srgbClr val="0D9488"/>
                 </a:solidFill>
                 <a:latin typeface="Microsoft YaHei"/>
                 <a:ea typeface="Microsoft YaHei"/>
@@ -6473,8 +9672,8 @@
         </p:nvSpPr>
         <p:spPr>
           <a:xfrm>
-            <a:off x="548640" y="384048"/>
-            <a:ext cx="11064240" cy="548640"/>
+            <a:off x="502920" y="365760"/>
+            <a:ext cx="10972800" cy="548640"/>
           </a:xfrm>
           <a:prstGeom prst="rect">
             <a:avLst/>
@@ -6489,11 +9688,11 @@
           <a:p>
             <a:pPr algn="l">
               <a:spcAft>
-                <a:spcPts val="600"/>
+                <a:spcPts val="400"/>
               </a:spcAft>
             </a:pPr>
             <a:r>
-              <a:rPr sz="2600" b="1">
+              <a:rPr sz="2400" b="1">
                 <a:solidFill>
                   <a:srgbClr val="0F172A"/>
                 </a:solidFill>
@@ -6513,7 +9712,7 @@
         </p:nvSpPr>
         <p:spPr>
           <a:xfrm>
-            <a:off x="548640" y="1115568"/>
+            <a:off x="502920" y="1078992"/>
             <a:ext cx="1371600" cy="64008"/>
           </a:xfrm>
           <a:prstGeom prst="rect">
@@ -6557,8 +9756,8 @@
         </p:nvSpPr>
         <p:spPr>
           <a:xfrm>
-            <a:off x="11338560" y="6446520"/>
-            <a:ext cx="640080" cy="365760"/>
+            <a:off x="11430000" y="6446520"/>
+            <a:ext cx="548640" cy="365760"/>
           </a:xfrm>
           <a:prstGeom prst="rect">
             <a:avLst/>
@@ -6573,11 +9772,11 @@
           <a:p>
             <a:pPr algn="r">
               <a:spcAft>
-                <a:spcPts val="600"/>
+                <a:spcPts val="400"/>
               </a:spcAft>
             </a:pPr>
             <a:r>
-              <a:rPr sz="1000" b="0">
+              <a:rPr sz="900" b="0">
                 <a:solidFill>
                   <a:srgbClr val="64748B"/>
                 </a:solidFill>
@@ -6591,14 +9790,58 @@
       </p:sp>
       <p:sp>
         <p:nvSpPr>
-          <p:cNvPr id="6" name="TextBox 5"/>
+          <p:cNvPr id="6" name="Rectangle 5"/>
+          <p:cNvSpPr/>
+          <p:nvPr/>
+        </p:nvSpPr>
+        <p:spPr>
+          <a:xfrm>
+            <a:off x="502920" y="1554480"/>
+            <a:ext cx="11155680" cy="457200"/>
+          </a:xfrm>
+          <a:prstGeom prst="rect">
+            <a:avLst/>
+          </a:prstGeom>
+          <a:solidFill>
+            <a:srgbClr val="F8FAFC"/>
+          </a:solidFill>
+          <a:ln>
+            <a:noFill/>
+          </a:ln>
+          <a:effectLst/>
+        </p:spPr>
+        <p:style>
+          <a:lnRef idx="1">
+            <a:schemeClr val="accent1"/>
+          </a:lnRef>
+          <a:fillRef idx="3">
+            <a:schemeClr val="accent1"/>
+          </a:fillRef>
+          <a:effectRef idx="2">
+            <a:schemeClr val="accent1"/>
+          </a:effectRef>
+          <a:fontRef idx="minor">
+            <a:schemeClr val="lt1"/>
+          </a:fontRef>
+        </p:style>
+        <p:txBody>
+          <a:bodyPr rtlCol="0" anchor="ctr"/>
+          <a:lstStyle/>
+          <a:p>
+            <a:pPr algn="ctr"/>
+          </a:p>
+        </p:txBody>
+      </p:sp>
+      <p:sp>
+        <p:nvSpPr>
+          <p:cNvPr id="7" name="TextBox 6"/>
           <p:cNvSpPr txBox="1"/>
           <p:nvPr/>
         </p:nvSpPr>
         <p:spPr>
           <a:xfrm>
-            <a:off x="640080" y="1737360"/>
-            <a:ext cx="2743200" cy="731520"/>
+            <a:off x="640080" y="1627632"/>
+            <a:ext cx="2743200" cy="457200"/>
           </a:xfrm>
           <a:prstGeom prst="rect">
             <a:avLst/>
@@ -6613,7 +9856,7 @@
           <a:p>
             <a:pPr algn="l">
               <a:spcAft>
-                <a:spcPts val="600"/>
+                <a:spcPts val="400"/>
               </a:spcAft>
             </a:pPr>
             <a:r>
@@ -6631,14 +9874,14 @@
       </p:sp>
       <p:sp>
         <p:nvSpPr>
-          <p:cNvPr id="7" name="TextBox 6"/>
+          <p:cNvPr id="8" name="TextBox 7"/>
           <p:cNvSpPr txBox="1"/>
           <p:nvPr/>
         </p:nvSpPr>
         <p:spPr>
           <a:xfrm>
-            <a:off x="3474720" y="1737360"/>
-            <a:ext cx="4572000" cy="731520"/>
+            <a:off x="3566160" y="1627632"/>
+            <a:ext cx="4572000" cy="457200"/>
           </a:xfrm>
           <a:prstGeom prst="rect">
             <a:avLst/>
@@ -6653,11 +9896,11 @@
           <a:p>
             <a:pPr algn="l">
               <a:spcAft>
-                <a:spcPts val="600"/>
+                <a:spcPts val="400"/>
               </a:spcAft>
             </a:pPr>
             <a:r>
-              <a:rPr sz="1300" b="1">
+              <a:rPr sz="1250" b="1">
                 <a:solidFill>
                   <a:srgbClr val="0F172A"/>
                 </a:solidFill>
@@ -6671,14 +9914,14 @@
       </p:sp>
       <p:sp>
         <p:nvSpPr>
-          <p:cNvPr id="8" name="TextBox 7"/>
+          <p:cNvPr id="9" name="TextBox 8"/>
           <p:cNvSpPr txBox="1"/>
           <p:nvPr/>
         </p:nvSpPr>
         <p:spPr>
           <a:xfrm>
-            <a:off x="8138160" y="1737360"/>
-            <a:ext cx="3291840" cy="731520"/>
+            <a:off x="8138160" y="1627632"/>
+            <a:ext cx="3291840" cy="457200"/>
           </a:xfrm>
           <a:prstGeom prst="rect">
             <a:avLst/>
@@ -6693,7 +9936,7 @@
           <a:p>
             <a:pPr algn="l">
               <a:spcAft>
-                <a:spcPts val="600"/>
+                <a:spcPts val="400"/>
               </a:spcAft>
             </a:pPr>
             <a:r>
@@ -6711,14 +9954,14 @@
       </p:sp>
       <p:sp>
         <p:nvSpPr>
-          <p:cNvPr id="9" name="TextBox 8"/>
+          <p:cNvPr id="10" name="TextBox 9"/>
           <p:cNvSpPr txBox="1"/>
           <p:nvPr/>
         </p:nvSpPr>
         <p:spPr>
           <a:xfrm>
-            <a:off x="640080" y="2514600"/>
-            <a:ext cx="2743200" cy="731520"/>
+            <a:off x="640080" y="2340864"/>
+            <a:ext cx="2743200" cy="457200"/>
           </a:xfrm>
           <a:prstGeom prst="rect">
             <a:avLst/>
@@ -6733,13 +9976,13 @@
           <a:p>
             <a:pPr algn="l">
               <a:spcAft>
-                <a:spcPts val="600"/>
+                <a:spcPts val="400"/>
               </a:spcAft>
             </a:pPr>
             <a:r>
               <a:rPr sz="1300" b="0">
                 <a:solidFill>
-                  <a:srgbClr val="4F46E5"/>
+                  <a:srgbClr val="1F3A93"/>
                 </a:solidFill>
                 <a:latin typeface="Microsoft YaHei"/>
                 <a:ea typeface="Microsoft YaHei"/>
@@ -6751,14 +9994,14 @@
       </p:sp>
       <p:sp>
         <p:nvSpPr>
-          <p:cNvPr id="10" name="TextBox 9"/>
+          <p:cNvPr id="11" name="TextBox 10"/>
           <p:cNvSpPr txBox="1"/>
           <p:nvPr/>
         </p:nvSpPr>
         <p:spPr>
           <a:xfrm>
-            <a:off x="3474720" y="2514600"/>
-            <a:ext cx="4572000" cy="731520"/>
+            <a:off x="3566160" y="2340864"/>
+            <a:ext cx="4572000" cy="457200"/>
           </a:xfrm>
           <a:prstGeom prst="rect">
             <a:avLst/>
@@ -6773,11 +10016,11 @@
           <a:p>
             <a:pPr algn="l">
               <a:spcAft>
-                <a:spcPts val="600"/>
+                <a:spcPts val="400"/>
               </a:spcAft>
             </a:pPr>
             <a:r>
-              <a:rPr sz="1300" b="0">
+              <a:rPr sz="1250" b="0">
                 <a:solidFill>
                   <a:srgbClr val="334155"/>
                 </a:solidFill>
@@ -6791,14 +10034,14 @@
       </p:sp>
       <p:sp>
         <p:nvSpPr>
-          <p:cNvPr id="11" name="TextBox 10"/>
+          <p:cNvPr id="12" name="TextBox 11"/>
           <p:cNvSpPr txBox="1"/>
           <p:nvPr/>
         </p:nvSpPr>
         <p:spPr>
           <a:xfrm>
-            <a:off x="8138160" y="2514600"/>
-            <a:ext cx="3291840" cy="731520"/>
+            <a:off x="8138160" y="2340864"/>
+            <a:ext cx="3291840" cy="457200"/>
           </a:xfrm>
           <a:prstGeom prst="rect">
             <a:avLst/>
@@ -6813,7 +10056,7 @@
           <a:p>
             <a:pPr algn="l">
               <a:spcAft>
-                <a:spcPts val="600"/>
+                <a:spcPts val="400"/>
               </a:spcAft>
             </a:pPr>
             <a:r>
@@ -6831,14 +10074,14 @@
       </p:sp>
       <p:sp>
         <p:nvSpPr>
-          <p:cNvPr id="12" name="TextBox 11"/>
+          <p:cNvPr id="13" name="TextBox 12"/>
           <p:cNvSpPr txBox="1"/>
           <p:nvPr/>
         </p:nvSpPr>
         <p:spPr>
           <a:xfrm>
-            <a:off x="640080" y="3291840"/>
-            <a:ext cx="2743200" cy="731520"/>
+            <a:off x="640080" y="3054096"/>
+            <a:ext cx="2743200" cy="457200"/>
           </a:xfrm>
           <a:prstGeom prst="rect">
             <a:avLst/>
@@ -6853,13 +10096,13 @@
           <a:p>
             <a:pPr algn="l">
               <a:spcAft>
-                <a:spcPts val="600"/>
+                <a:spcPts val="400"/>
               </a:spcAft>
             </a:pPr>
             <a:r>
               <a:rPr sz="1300" b="0">
                 <a:solidFill>
-                  <a:srgbClr val="4F46E5"/>
+                  <a:srgbClr val="1F3A93"/>
                 </a:solidFill>
                 <a:latin typeface="Microsoft YaHei"/>
                 <a:ea typeface="Microsoft YaHei"/>
@@ -6871,14 +10114,14 @@
       </p:sp>
       <p:sp>
         <p:nvSpPr>
-          <p:cNvPr id="13" name="TextBox 12"/>
+          <p:cNvPr id="14" name="TextBox 13"/>
           <p:cNvSpPr txBox="1"/>
           <p:nvPr/>
         </p:nvSpPr>
         <p:spPr>
           <a:xfrm>
-            <a:off x="3474720" y="3291840"/>
-            <a:ext cx="4572000" cy="731520"/>
+            <a:off x="3566160" y="3054096"/>
+            <a:ext cx="4572000" cy="457200"/>
           </a:xfrm>
           <a:prstGeom prst="rect">
             <a:avLst/>
@@ -6893,11 +10136,11 @@
           <a:p>
             <a:pPr algn="l">
               <a:spcAft>
-                <a:spcPts val="600"/>
+                <a:spcPts val="400"/>
               </a:spcAft>
             </a:pPr>
             <a:r>
-              <a:rPr sz="1300" b="0">
+              <a:rPr sz="1250" b="0">
                 <a:solidFill>
                   <a:srgbClr val="334155"/>
                 </a:solidFill>
@@ -6911,14 +10154,14 @@
       </p:sp>
       <p:sp>
         <p:nvSpPr>
-          <p:cNvPr id="14" name="TextBox 13"/>
+          <p:cNvPr id="15" name="TextBox 14"/>
           <p:cNvSpPr txBox="1"/>
           <p:nvPr/>
         </p:nvSpPr>
         <p:spPr>
           <a:xfrm>
-            <a:off x="8138160" y="3291840"/>
-            <a:ext cx="3291840" cy="731520"/>
+            <a:off x="8138160" y="3054096"/>
+            <a:ext cx="3291840" cy="457200"/>
           </a:xfrm>
           <a:prstGeom prst="rect">
             <a:avLst/>
@@ -6933,7 +10176,7 @@
           <a:p>
             <a:pPr algn="l">
               <a:spcAft>
-                <a:spcPts val="600"/>
+                <a:spcPts val="400"/>
               </a:spcAft>
             </a:pPr>
             <a:r>
@@ -6951,14 +10194,14 @@
       </p:sp>
       <p:sp>
         <p:nvSpPr>
-          <p:cNvPr id="15" name="TextBox 14"/>
+          <p:cNvPr id="16" name="TextBox 15"/>
           <p:cNvSpPr txBox="1"/>
           <p:nvPr/>
         </p:nvSpPr>
         <p:spPr>
           <a:xfrm>
-            <a:off x="640080" y="4069080"/>
-            <a:ext cx="2743200" cy="731520"/>
+            <a:off x="640080" y="3767328"/>
+            <a:ext cx="2743200" cy="457200"/>
           </a:xfrm>
           <a:prstGeom prst="rect">
             <a:avLst/>
@@ -6973,13 +10216,13 @@
           <a:p>
             <a:pPr algn="l">
               <a:spcAft>
-                <a:spcPts val="600"/>
+                <a:spcPts val="400"/>
               </a:spcAft>
             </a:pPr>
             <a:r>
               <a:rPr sz="1300" b="0">
                 <a:solidFill>
-                  <a:srgbClr val="4F46E5"/>
+                  <a:srgbClr val="1F3A93"/>
                 </a:solidFill>
                 <a:latin typeface="Microsoft YaHei"/>
                 <a:ea typeface="Microsoft YaHei"/>
@@ -6991,14 +10234,14 @@
       </p:sp>
       <p:sp>
         <p:nvSpPr>
-          <p:cNvPr id="16" name="TextBox 15"/>
+          <p:cNvPr id="17" name="TextBox 16"/>
           <p:cNvSpPr txBox="1"/>
           <p:nvPr/>
         </p:nvSpPr>
         <p:spPr>
           <a:xfrm>
-            <a:off x="3474720" y="4069080"/>
-            <a:ext cx="4572000" cy="731520"/>
+            <a:off x="3566160" y="3767328"/>
+            <a:ext cx="4572000" cy="457200"/>
           </a:xfrm>
           <a:prstGeom prst="rect">
             <a:avLst/>
@@ -7013,11 +10256,11 @@
           <a:p>
             <a:pPr algn="l">
               <a:spcAft>
-                <a:spcPts val="600"/>
+                <a:spcPts val="400"/>
               </a:spcAft>
             </a:pPr>
             <a:r>
-              <a:rPr sz="1300" b="0">
+              <a:rPr sz="1250" b="0">
                 <a:solidFill>
                   <a:srgbClr val="334155"/>
                 </a:solidFill>
@@ -7031,14 +10274,14 @@
       </p:sp>
       <p:sp>
         <p:nvSpPr>
-          <p:cNvPr id="17" name="TextBox 16"/>
+          <p:cNvPr id="18" name="TextBox 17"/>
           <p:cNvSpPr txBox="1"/>
           <p:nvPr/>
         </p:nvSpPr>
         <p:spPr>
           <a:xfrm>
-            <a:off x="8138160" y="4069080"/>
-            <a:ext cx="3291840" cy="731520"/>
+            <a:off x="8138160" y="3767328"/>
+            <a:ext cx="3291840" cy="457200"/>
           </a:xfrm>
           <a:prstGeom prst="rect">
             <a:avLst/>
@@ -7053,7 +10296,7 @@
           <a:p>
             <a:pPr algn="l">
               <a:spcAft>
-                <a:spcPts val="600"/>
+                <a:spcPts val="400"/>
               </a:spcAft>
             </a:pPr>
             <a:r>
@@ -7071,14 +10314,14 @@
       </p:sp>
       <p:sp>
         <p:nvSpPr>
-          <p:cNvPr id="18" name="TextBox 17"/>
+          <p:cNvPr id="19" name="TextBox 18"/>
           <p:cNvSpPr txBox="1"/>
           <p:nvPr/>
         </p:nvSpPr>
         <p:spPr>
           <a:xfrm>
-            <a:off x="640080" y="4846320"/>
-            <a:ext cx="2743200" cy="731520"/>
+            <a:off x="640080" y="4480560"/>
+            <a:ext cx="2743200" cy="457200"/>
           </a:xfrm>
           <a:prstGeom prst="rect">
             <a:avLst/>
@@ -7093,13 +10336,13 @@
           <a:p>
             <a:pPr algn="l">
               <a:spcAft>
-                <a:spcPts val="600"/>
+                <a:spcPts val="400"/>
               </a:spcAft>
             </a:pPr>
             <a:r>
               <a:rPr sz="1300" b="0">
                 <a:solidFill>
-                  <a:srgbClr val="4F46E5"/>
+                  <a:srgbClr val="1F3A93"/>
                 </a:solidFill>
                 <a:latin typeface="Microsoft YaHei"/>
                 <a:ea typeface="Microsoft YaHei"/>
@@ -7111,14 +10354,14 @@
       </p:sp>
       <p:sp>
         <p:nvSpPr>
-          <p:cNvPr id="19" name="TextBox 18"/>
+          <p:cNvPr id="20" name="TextBox 19"/>
           <p:cNvSpPr txBox="1"/>
           <p:nvPr/>
         </p:nvSpPr>
         <p:spPr>
           <a:xfrm>
-            <a:off x="3474720" y="4846320"/>
-            <a:ext cx="4572000" cy="731520"/>
+            <a:off x="3566160" y="4480560"/>
+            <a:ext cx="4572000" cy="457200"/>
           </a:xfrm>
           <a:prstGeom prst="rect">
             <a:avLst/>
@@ -7133,11 +10376,11 @@
           <a:p>
             <a:pPr algn="l">
               <a:spcAft>
-                <a:spcPts val="600"/>
+                <a:spcPts val="400"/>
               </a:spcAft>
             </a:pPr>
             <a:r>
-              <a:rPr sz="1300" b="0">
+              <a:rPr sz="1250" b="0">
                 <a:solidFill>
                   <a:srgbClr val="334155"/>
                 </a:solidFill>
@@ -7151,14 +10394,14 @@
       </p:sp>
       <p:sp>
         <p:nvSpPr>
-          <p:cNvPr id="20" name="TextBox 19"/>
+          <p:cNvPr id="21" name="TextBox 20"/>
           <p:cNvSpPr txBox="1"/>
           <p:nvPr/>
         </p:nvSpPr>
         <p:spPr>
           <a:xfrm>
-            <a:off x="8138160" y="4846320"/>
-            <a:ext cx="3291840" cy="731520"/>
+            <a:off x="8138160" y="4480560"/>
+            <a:ext cx="3291840" cy="457200"/>
           </a:xfrm>
           <a:prstGeom prst="rect">
             <a:avLst/>
@@ -7173,7 +10416,7 @@
           <a:p>
             <a:pPr algn="l">
               <a:spcAft>
-                <a:spcPts val="600"/>
+                <a:spcPts val="400"/>
               </a:spcAft>
             </a:pPr>
             <a:r>
@@ -7185,6 +10428,46 @@
                 <a:ea typeface="Microsoft YaHei"/>
               </a:rPr>
               <a:t>仅已确认且非过期可导出</a:t>
+            </a:r>
+          </a:p>
+        </p:txBody>
+      </p:sp>
+      <p:sp>
+        <p:nvSpPr>
+          <p:cNvPr id="22" name="TextBox 21"/>
+          <p:cNvSpPr txBox="1"/>
+          <p:nvPr/>
+        </p:nvSpPr>
+        <p:spPr>
+          <a:xfrm>
+            <a:off x="502920" y="5760720"/>
+            <a:ext cx="11155680" cy="457200"/>
+          </a:xfrm>
+          <a:prstGeom prst="rect">
+            <a:avLst/>
+          </a:prstGeom>
+          <a:noFill/>
+        </p:spPr>
+        <p:txBody>
+          <a:bodyPr wrap="square" anchor="t">
+            <a:spAutoFit/>
+          </a:bodyPr>
+          <a:lstStyle/>
+          <a:p>
+            <a:pPr algn="l">
+              <a:spcAft>
+                <a:spcPts val="400"/>
+              </a:spcAft>
+            </a:pPr>
+            <a:r>
+              <a:rPr sz="1200" b="0">
+                <a:solidFill>
+                  <a:srgbClr val="64748B"/>
+                </a:solidFill>
+                <a:latin typeface="Microsoft YaHei"/>
+                <a:ea typeface="Microsoft YaHei"/>
+              </a:rPr>
+              <a:t>主控只做路由与编排，不直接写简历/事实/导出；高风险写入与最终导出上抛人工确认。</a:t>
             </a:r>
           </a:p>
         </p:txBody>
@@ -7259,8 +10542,8 @@
         </p:nvSpPr>
         <p:spPr>
           <a:xfrm>
-            <a:off x="548640" y="384048"/>
-            <a:ext cx="11064240" cy="548640"/>
+            <a:off x="502920" y="365760"/>
+            <a:ext cx="10972800" cy="548640"/>
           </a:xfrm>
           <a:prstGeom prst="rect">
             <a:avLst/>
@@ -7275,11 +10558,11 @@
           <a:p>
             <a:pPr algn="l">
               <a:spcAft>
-                <a:spcPts val="600"/>
+                <a:spcPts val="400"/>
               </a:spcAft>
             </a:pPr>
             <a:r>
-              <a:rPr sz="2600" b="1">
+              <a:rPr sz="2400" b="1">
                 <a:solidFill>
                   <a:srgbClr val="0F172A"/>
                 </a:solidFill>
@@ -7299,7 +10582,7 @@
         </p:nvSpPr>
         <p:spPr>
           <a:xfrm>
-            <a:off x="548640" y="1115568"/>
+            <a:off x="502920" y="1078992"/>
             <a:ext cx="1371600" cy="64008"/>
           </a:xfrm>
           <a:prstGeom prst="rect">
@@ -7343,8 +10626,8 @@
         </p:nvSpPr>
         <p:spPr>
           <a:xfrm>
-            <a:off x="11338560" y="6446520"/>
-            <a:ext cx="640080" cy="365760"/>
+            <a:off x="11430000" y="6446520"/>
+            <a:ext cx="548640" cy="365760"/>
           </a:xfrm>
           <a:prstGeom prst="rect">
             <a:avLst/>
@@ -7359,11 +10642,11 @@
           <a:p>
             <a:pPr algn="r">
               <a:spcAft>
-                <a:spcPts val="600"/>
+                <a:spcPts val="400"/>
               </a:spcAft>
             </a:pPr>
             <a:r>
-              <a:rPr sz="1000" b="0">
+              <a:rPr sz="900" b="0">
                 <a:solidFill>
                   <a:srgbClr val="64748B"/>
                 </a:solidFill>
@@ -7377,14 +10660,62 @@
       </p:sp>
       <p:sp>
         <p:nvSpPr>
-          <p:cNvPr id="6" name="TextBox 5"/>
+          <p:cNvPr id="6" name="Rounded Rectangle 5"/>
+          <p:cNvSpPr/>
+          <p:nvPr/>
+        </p:nvSpPr>
+        <p:spPr>
+          <a:xfrm>
+            <a:off x="502920" y="1554480"/>
+            <a:ext cx="5394960" cy="1234440"/>
+          </a:xfrm>
+          <a:prstGeom prst="roundRect">
+            <a:avLst>
+              <a:gd name="adj" fmla="val 8000"/>
+            </a:avLst>
+          </a:prstGeom>
+          <a:solidFill>
+            <a:srgbClr val="F8FAFC"/>
+          </a:solidFill>
+          <a:ln w="19050">
+            <a:solidFill>
+              <a:srgbClr val="E2E8F0"/>
+            </a:solidFill>
+          </a:ln>
+          <a:effectLst/>
+        </p:spPr>
+        <p:style>
+          <a:lnRef idx="1">
+            <a:schemeClr val="accent1"/>
+          </a:lnRef>
+          <a:fillRef idx="3">
+            <a:schemeClr val="accent1"/>
+          </a:fillRef>
+          <a:effectRef idx="2">
+            <a:schemeClr val="accent1"/>
+          </a:effectRef>
+          <a:fontRef idx="minor">
+            <a:schemeClr val="lt1"/>
+          </a:fontRef>
+        </p:style>
+        <p:txBody>
+          <a:bodyPr rtlCol="0" anchor="ctr"/>
+          <a:lstStyle/>
+          <a:p>
+            <a:pPr algn="ctr"/>
+          </a:p>
+        </p:txBody>
+      </p:sp>
+      <p:sp>
+        <p:nvSpPr>
+          <p:cNvPr id="7" name="TextBox 6"/>
           <p:cNvSpPr txBox="1"/>
           <p:nvPr/>
         </p:nvSpPr>
         <p:spPr>
           <a:xfrm>
-            <a:off x="640080" y="1737360"/>
-            <a:ext cx="10972800" cy="4754880"/>
+            <a:off x="640080" y="1645920"/>
+            <a:ext cx="5120640" cy="1051560"/>
           </a:xfrm>
           <a:prstGeom prst="rect">
             <a:avLst/>
@@ -7397,122 +10728,572 @@
           </a:bodyPr>
           <a:lstStyle/>
           <a:p>
+            <a:r>
+              <a:rPr sz="1200" b="1">
+                <a:solidFill>
+                  <a:srgbClr val="0D9488"/>
+                </a:solidFill>
+                <a:latin typeface="Microsoft YaHei"/>
+                <a:ea typeface="Microsoft YaHei"/>
+              </a:rPr>
+              <a:t>material-validation</a:t>
+            </a:r>
+          </a:p>
+          <a:p>
             <a:pPr>
+              <a:spcBef>
+                <a:spcPts val="400"/>
+              </a:spcBef>
+            </a:pPr>
+            <a:r>
+              <a:rPr sz="1050" b="0">
+                <a:solidFill>
+                  <a:srgbClr val="334155"/>
+                </a:solidFill>
+                <a:latin typeface="Microsoft YaHei"/>
+                <a:ea typeface="Microsoft YaHei"/>
+              </a:rPr>
+              <a:t>材料校验 → 主控前置门禁</a:t>
+            </a:r>
+          </a:p>
+        </p:txBody>
+      </p:sp>
+      <p:sp>
+        <p:nvSpPr>
+          <p:cNvPr id="8" name="Rounded Rectangle 7"/>
+          <p:cNvSpPr/>
+          <p:nvPr/>
+        </p:nvSpPr>
+        <p:spPr>
+          <a:xfrm>
+            <a:off x="6126480" y="1554480"/>
+            <a:ext cx="5394960" cy="1234440"/>
+          </a:xfrm>
+          <a:prstGeom prst="roundRect">
+            <a:avLst>
+              <a:gd name="adj" fmla="val 8000"/>
+            </a:avLst>
+          </a:prstGeom>
+          <a:solidFill>
+            <a:srgbClr val="F8FAFC"/>
+          </a:solidFill>
+          <a:ln w="19050">
+            <a:solidFill>
+              <a:srgbClr val="E2E8F0"/>
+            </a:solidFill>
+          </a:ln>
+          <a:effectLst/>
+        </p:spPr>
+        <p:style>
+          <a:lnRef idx="1">
+            <a:schemeClr val="accent1"/>
+          </a:lnRef>
+          <a:fillRef idx="3">
+            <a:schemeClr val="accent1"/>
+          </a:fillRef>
+          <a:effectRef idx="2">
+            <a:schemeClr val="accent1"/>
+          </a:effectRef>
+          <a:fontRef idx="minor">
+            <a:schemeClr val="lt1"/>
+          </a:fontRef>
+        </p:style>
+        <p:txBody>
+          <a:bodyPr rtlCol="0" anchor="ctr"/>
+          <a:lstStyle/>
+          <a:p>
+            <a:pPr algn="ctr"/>
+          </a:p>
+        </p:txBody>
+      </p:sp>
+      <p:sp>
+        <p:nvSpPr>
+          <p:cNvPr id="9" name="TextBox 8"/>
+          <p:cNvSpPr txBox="1"/>
+          <p:nvPr/>
+        </p:nvSpPr>
+        <p:spPr>
+          <a:xfrm>
+            <a:off x="6263640" y="1645920"/>
+            <a:ext cx="5120640" cy="1051560"/>
+          </a:xfrm>
+          <a:prstGeom prst="rect">
+            <a:avLst/>
+          </a:prstGeom>
+          <a:noFill/>
+        </p:spPr>
+        <p:txBody>
+          <a:bodyPr wrap="square">
+            <a:spAutoFit/>
+          </a:bodyPr>
+          <a:lstStyle/>
+          <a:p>
+            <a:r>
+              <a:rPr sz="1200" b="1">
+                <a:solidFill>
+                  <a:srgbClr val="0D9488"/>
+                </a:solidFill>
+                <a:latin typeface="Microsoft YaHei"/>
+                <a:ea typeface="Microsoft YaHei"/>
+              </a:rPr>
+              <a:t>jd-decision-map</a:t>
+            </a:r>
+          </a:p>
+          <a:p>
+            <a:pPr>
+              <a:spcBef>
+                <a:spcPts val="400"/>
+              </a:spcBef>
+            </a:pPr>
+            <a:r>
+              <a:rPr sz="1050" b="0">
+                <a:solidFill>
+                  <a:srgbClr val="334155"/>
+                </a:solidFill>
+                <a:latin typeface="Microsoft YaHei"/>
+                <a:ea typeface="Microsoft YaHei"/>
+              </a:rPr>
+              <a:t>JD 决策地图 → 需求分析</a:t>
+            </a:r>
+          </a:p>
+        </p:txBody>
+      </p:sp>
+      <p:sp>
+        <p:nvSpPr>
+          <p:cNvPr id="10" name="Rounded Rectangle 9"/>
+          <p:cNvSpPr/>
+          <p:nvPr/>
+        </p:nvSpPr>
+        <p:spPr>
+          <a:xfrm>
+            <a:off x="502920" y="3017520"/>
+            <a:ext cx="5394960" cy="1234440"/>
+          </a:xfrm>
+          <a:prstGeom prst="roundRect">
+            <a:avLst>
+              <a:gd name="adj" fmla="val 8000"/>
+            </a:avLst>
+          </a:prstGeom>
+          <a:solidFill>
+            <a:srgbClr val="F8FAFC"/>
+          </a:solidFill>
+          <a:ln w="19050">
+            <a:solidFill>
+              <a:srgbClr val="E2E8F0"/>
+            </a:solidFill>
+          </a:ln>
+          <a:effectLst/>
+        </p:spPr>
+        <p:style>
+          <a:lnRef idx="1">
+            <a:schemeClr val="accent1"/>
+          </a:lnRef>
+          <a:fillRef idx="3">
+            <a:schemeClr val="accent1"/>
+          </a:fillRef>
+          <a:effectRef idx="2">
+            <a:schemeClr val="accent1"/>
+          </a:effectRef>
+          <a:fontRef idx="minor">
+            <a:schemeClr val="lt1"/>
+          </a:fontRef>
+        </p:style>
+        <p:txBody>
+          <a:bodyPr rtlCol="0" anchor="ctr"/>
+          <a:lstStyle/>
+          <a:p>
+            <a:pPr algn="ctr"/>
+          </a:p>
+        </p:txBody>
+      </p:sp>
+      <p:sp>
+        <p:nvSpPr>
+          <p:cNvPr id="11" name="TextBox 10"/>
+          <p:cNvSpPr txBox="1"/>
+          <p:nvPr/>
+        </p:nvSpPr>
+        <p:spPr>
+          <a:xfrm>
+            <a:off x="640080" y="3108960"/>
+            <a:ext cx="5120640" cy="1051560"/>
+          </a:xfrm>
+          <a:prstGeom prst="rect">
+            <a:avLst/>
+          </a:prstGeom>
+          <a:noFill/>
+        </p:spPr>
+        <p:txBody>
+          <a:bodyPr wrap="square">
+            <a:spAutoFit/>
+          </a:bodyPr>
+          <a:lstStyle/>
+          <a:p>
+            <a:r>
+              <a:rPr sz="1200" b="1">
+                <a:solidFill>
+                  <a:srgbClr val="0D9488"/>
+                </a:solidFill>
+                <a:latin typeface="Microsoft YaHei"/>
+                <a:ea typeface="Microsoft YaHei"/>
+              </a:rPr>
+              <a:t>fact-retrieval / evidence-curation</a:t>
+            </a:r>
+          </a:p>
+          <a:p>
+            <a:pPr>
+              <a:spcBef>
+                <a:spcPts val="400"/>
+              </a:spcBef>
+            </a:pPr>
+            <a:r>
+              <a:rPr sz="1050" b="0">
+                <a:solidFill>
+                  <a:srgbClr val="334155"/>
+                </a:solidFill>
+                <a:latin typeface="Microsoft YaHei"/>
+                <a:ea typeface="Microsoft YaHei"/>
+              </a:rPr>
+              <a:t>事实检索与补证 → 事实策展</a:t>
+            </a:r>
+          </a:p>
+        </p:txBody>
+      </p:sp>
+      <p:sp>
+        <p:nvSpPr>
+          <p:cNvPr id="12" name="Rounded Rectangle 11"/>
+          <p:cNvSpPr/>
+          <p:nvPr/>
+        </p:nvSpPr>
+        <p:spPr>
+          <a:xfrm>
+            <a:off x="6126480" y="3017520"/>
+            <a:ext cx="5394960" cy="1234440"/>
+          </a:xfrm>
+          <a:prstGeom prst="roundRect">
+            <a:avLst>
+              <a:gd name="adj" fmla="val 8000"/>
+            </a:avLst>
+          </a:prstGeom>
+          <a:solidFill>
+            <a:srgbClr val="F8FAFC"/>
+          </a:solidFill>
+          <a:ln w="19050">
+            <a:solidFill>
+              <a:srgbClr val="E2E8F0"/>
+            </a:solidFill>
+          </a:ln>
+          <a:effectLst/>
+        </p:spPr>
+        <p:style>
+          <a:lnRef idx="1">
+            <a:schemeClr val="accent1"/>
+          </a:lnRef>
+          <a:fillRef idx="3">
+            <a:schemeClr val="accent1"/>
+          </a:fillRef>
+          <a:effectRef idx="2">
+            <a:schemeClr val="accent1"/>
+          </a:effectRef>
+          <a:fontRef idx="minor">
+            <a:schemeClr val="lt1"/>
+          </a:fontRef>
+        </p:style>
+        <p:txBody>
+          <a:bodyPr rtlCol="0" anchor="ctr"/>
+          <a:lstStyle/>
+          <a:p>
+            <a:pPr algn="ctr"/>
+          </a:p>
+        </p:txBody>
+      </p:sp>
+      <p:sp>
+        <p:nvSpPr>
+          <p:cNvPr id="13" name="TextBox 12"/>
+          <p:cNvSpPr txBox="1"/>
+          <p:nvPr/>
+        </p:nvSpPr>
+        <p:spPr>
+          <a:xfrm>
+            <a:off x="6263640" y="3108960"/>
+            <a:ext cx="5120640" cy="1051560"/>
+          </a:xfrm>
+          <a:prstGeom prst="rect">
+            <a:avLst/>
+          </a:prstGeom>
+          <a:noFill/>
+        </p:spPr>
+        <p:txBody>
+          <a:bodyPr wrap="square">
+            <a:spAutoFit/>
+          </a:bodyPr>
+          <a:lstStyle/>
+          <a:p>
+            <a:r>
+              <a:rPr sz="1200" b="1">
+                <a:solidFill>
+                  <a:srgbClr val="0D9488"/>
+                </a:solidFill>
+                <a:latin typeface="Microsoft YaHei"/>
+                <a:ea typeface="Microsoft YaHei"/>
+              </a:rPr>
+              <a:t>trusted-rewrite</a:t>
+            </a:r>
+          </a:p>
+          <a:p>
+            <a:pPr>
+              <a:spcBef>
+                <a:spcPts val="400"/>
+              </a:spcBef>
+            </a:pPr>
+            <a:r>
+              <a:rPr sz="1050" b="0">
+                <a:solidFill>
+                  <a:srgbClr val="334155"/>
+                </a:solidFill>
+                <a:latin typeface="Microsoft YaHei"/>
+                <a:ea typeface="Microsoft YaHei"/>
+              </a:rPr>
+              <a:t>可信改写 → 简历策略</a:t>
+            </a:r>
+          </a:p>
+        </p:txBody>
+      </p:sp>
+      <p:sp>
+        <p:nvSpPr>
+          <p:cNvPr id="14" name="Rounded Rectangle 13"/>
+          <p:cNvSpPr/>
+          <p:nvPr/>
+        </p:nvSpPr>
+        <p:spPr>
+          <a:xfrm>
+            <a:off x="502920" y="4480560"/>
+            <a:ext cx="5394960" cy="1234440"/>
+          </a:xfrm>
+          <a:prstGeom prst="roundRect">
+            <a:avLst>
+              <a:gd name="adj" fmla="val 8000"/>
+            </a:avLst>
+          </a:prstGeom>
+          <a:solidFill>
+            <a:srgbClr val="F8FAFC"/>
+          </a:solidFill>
+          <a:ln w="19050">
+            <a:solidFill>
+              <a:srgbClr val="E2E8F0"/>
+            </a:solidFill>
+          </a:ln>
+          <a:effectLst/>
+        </p:spPr>
+        <p:style>
+          <a:lnRef idx="1">
+            <a:schemeClr val="accent1"/>
+          </a:lnRef>
+          <a:fillRef idx="3">
+            <a:schemeClr val="accent1"/>
+          </a:fillRef>
+          <a:effectRef idx="2">
+            <a:schemeClr val="accent1"/>
+          </a:effectRef>
+          <a:fontRef idx="minor">
+            <a:schemeClr val="lt1"/>
+          </a:fontRef>
+        </p:style>
+        <p:txBody>
+          <a:bodyPr rtlCol="0" anchor="ctr"/>
+          <a:lstStyle/>
+          <a:p>
+            <a:pPr algn="ctr"/>
+          </a:p>
+        </p:txBody>
+      </p:sp>
+      <p:sp>
+        <p:nvSpPr>
+          <p:cNvPr id="15" name="TextBox 14"/>
+          <p:cNvSpPr txBox="1"/>
+          <p:nvPr/>
+        </p:nvSpPr>
+        <p:spPr>
+          <a:xfrm>
+            <a:off x="640080" y="4572000"/>
+            <a:ext cx="5120640" cy="1051560"/>
+          </a:xfrm>
+          <a:prstGeom prst="rect">
+            <a:avLst/>
+          </a:prstGeom>
+          <a:noFill/>
+        </p:spPr>
+        <p:txBody>
+          <a:bodyPr wrap="square">
+            <a:spAutoFit/>
+          </a:bodyPr>
+          <a:lstStyle/>
+          <a:p>
+            <a:r>
+              <a:rPr sz="1200" b="1">
+                <a:solidFill>
+                  <a:srgbClr val="0D9488"/>
+                </a:solidFill>
+                <a:latin typeface="Microsoft YaHei"/>
+                <a:ea typeface="Microsoft YaHei"/>
+              </a:rPr>
+              <a:t>delivery-gate</a:t>
+            </a:r>
+          </a:p>
+          <a:p>
+            <a:pPr>
+              <a:spcBef>
+                <a:spcPts val="400"/>
+              </a:spcBef>
+            </a:pPr>
+            <a:r>
+              <a:rPr sz="1050" b="0">
+                <a:solidFill>
+                  <a:srgbClr val="334155"/>
+                </a:solidFill>
+                <a:latin typeface="Microsoft YaHei"/>
+                <a:ea typeface="Microsoft YaHei"/>
+              </a:rPr>
+              <a:t>交付门禁 → 质量守护</a:t>
+            </a:r>
+          </a:p>
+        </p:txBody>
+      </p:sp>
+      <p:sp>
+        <p:nvSpPr>
+          <p:cNvPr id="16" name="Rounded Rectangle 15"/>
+          <p:cNvSpPr/>
+          <p:nvPr/>
+        </p:nvSpPr>
+        <p:spPr>
+          <a:xfrm>
+            <a:off x="6126480" y="4480560"/>
+            <a:ext cx="5394960" cy="1234440"/>
+          </a:xfrm>
+          <a:prstGeom prst="roundRect">
+            <a:avLst>
+              <a:gd name="adj" fmla="val 8000"/>
+            </a:avLst>
+          </a:prstGeom>
+          <a:solidFill>
+            <a:srgbClr val="F8FAFC"/>
+          </a:solidFill>
+          <a:ln w="19050">
+            <a:solidFill>
+              <a:srgbClr val="E2E8F0"/>
+            </a:solidFill>
+          </a:ln>
+          <a:effectLst/>
+        </p:spPr>
+        <p:style>
+          <a:lnRef idx="1">
+            <a:schemeClr val="accent1"/>
+          </a:lnRef>
+          <a:fillRef idx="3">
+            <a:schemeClr val="accent1"/>
+          </a:fillRef>
+          <a:effectRef idx="2">
+            <a:schemeClr val="accent1"/>
+          </a:effectRef>
+          <a:fontRef idx="minor">
+            <a:schemeClr val="lt1"/>
+          </a:fontRef>
+        </p:style>
+        <p:txBody>
+          <a:bodyPr rtlCol="0" anchor="ctr"/>
+          <a:lstStyle/>
+          <a:p>
+            <a:pPr algn="ctr"/>
+          </a:p>
+        </p:txBody>
+      </p:sp>
+      <p:sp>
+        <p:nvSpPr>
+          <p:cNvPr id="17" name="TextBox 16"/>
+          <p:cNvSpPr txBox="1"/>
+          <p:nvPr/>
+        </p:nvSpPr>
+        <p:spPr>
+          <a:xfrm>
+            <a:off x="6263640" y="4572000"/>
+            <a:ext cx="5120640" cy="1051560"/>
+          </a:xfrm>
+          <a:prstGeom prst="rect">
+            <a:avLst/>
+          </a:prstGeom>
+          <a:noFill/>
+        </p:spPr>
+        <p:txBody>
+          <a:bodyPr wrap="square">
+            <a:spAutoFit/>
+          </a:bodyPr>
+          <a:lstStyle/>
+          <a:p>
+            <a:r>
+              <a:rPr sz="1200" b="1">
+                <a:solidFill>
+                  <a:srgbClr val="0D9488"/>
+                </a:solidFill>
+                <a:latin typeface="Microsoft YaHei"/>
+                <a:ea typeface="Microsoft YaHei"/>
+              </a:rPr>
+              <a:t>trace-observability / mock-evaluation</a:t>
+            </a:r>
+          </a:p>
+          <a:p>
+            <a:pPr>
+              <a:spcBef>
+                <a:spcPts val="400"/>
+              </a:spcBef>
+            </a:pPr>
+            <a:r>
+              <a:rPr sz="1050" b="0">
+                <a:solidFill>
+                  <a:srgbClr val="334155"/>
+                </a:solidFill>
+                <a:latin typeface="Microsoft YaHei"/>
+                <a:ea typeface="Microsoft YaHei"/>
+              </a:rPr>
+              <a:t>可观测与评测 → 全部</a:t>
+            </a:r>
+          </a:p>
+        </p:txBody>
+      </p:sp>
+      <p:sp>
+        <p:nvSpPr>
+          <p:cNvPr id="18" name="TextBox 17"/>
+          <p:cNvSpPr txBox="1"/>
+          <p:nvPr/>
+        </p:nvSpPr>
+        <p:spPr>
+          <a:xfrm>
+            <a:off x="502920" y="5760720"/>
+            <a:ext cx="11155680" cy="457200"/>
+          </a:xfrm>
+          <a:prstGeom prst="rect">
+            <a:avLst/>
+          </a:prstGeom>
+          <a:noFill/>
+        </p:spPr>
+        <p:txBody>
+          <a:bodyPr wrap="square" anchor="t">
+            <a:spAutoFit/>
+          </a:bodyPr>
+          <a:lstStyle/>
+          <a:p>
+            <a:pPr algn="l">
               <a:spcAft>
-                <a:spcPts val="900"/>
+                <a:spcPts val="400"/>
               </a:spcAft>
             </a:pPr>
             <a:r>
-              <a:rPr sz="1500" b="0">
-                <a:solidFill>
-                  <a:srgbClr val="334155"/>
-                </a:solidFill>
-                <a:latin typeface="Microsoft YaHei"/>
-                <a:ea typeface="Microsoft YaHei"/>
-              </a:rPr>
-              <a:t>●  material-validation 材料校验 → 主控前置门禁</a:t>
-            </a:r>
-          </a:p>
-          <a:p>
-            <a:pPr>
-              <a:spcAft>
-                <a:spcPts val="900"/>
-              </a:spcAft>
-            </a:pPr>
-            <a:r>
-              <a:rPr sz="1500" b="0">
-                <a:solidFill>
-                  <a:srgbClr val="334155"/>
-                </a:solidFill>
-                <a:latin typeface="Microsoft YaHei"/>
-                <a:ea typeface="Microsoft YaHei"/>
-              </a:rPr>
-              <a:t>●  jd-decision-map JD 决策地图 → JobRequirementAnalyst</a:t>
-            </a:r>
-          </a:p>
-          <a:p>
-            <a:pPr>
-              <a:spcAft>
-                <a:spcPts val="900"/>
-              </a:spcAft>
-            </a:pPr>
-            <a:r>
-              <a:rPr sz="1500" b="0">
-                <a:solidFill>
-                  <a:srgbClr val="334155"/>
-                </a:solidFill>
-                <a:latin typeface="Microsoft YaHei"/>
-                <a:ea typeface="Microsoft YaHei"/>
-              </a:rPr>
-              <a:t>●  fact-retrieval / evidence-curation 事实检索与补证 → EvidenceCurator</a:t>
-            </a:r>
-          </a:p>
-          <a:p>
-            <a:pPr>
-              <a:spcAft>
-                <a:spcPts val="900"/>
-              </a:spcAft>
-            </a:pPr>
-            <a:r>
-              <a:rPr sz="1500" b="0">
-                <a:solidFill>
-                  <a:srgbClr val="334155"/>
-                </a:solidFill>
-                <a:latin typeface="Microsoft YaHei"/>
-                <a:ea typeface="Microsoft YaHei"/>
-              </a:rPr>
-              <a:t>●  trusted-rewrite 可信改写 → ResumeStrategist</a:t>
-            </a:r>
-          </a:p>
-          <a:p>
-            <a:pPr>
-              <a:spcAft>
-                <a:spcPts val="900"/>
-              </a:spcAft>
-            </a:pPr>
-            <a:r>
-              <a:rPr sz="1500" b="0">
-                <a:solidFill>
-                  <a:srgbClr val="334155"/>
-                </a:solidFill>
-                <a:latin typeface="Microsoft YaHei"/>
-                <a:ea typeface="Microsoft YaHei"/>
-              </a:rPr>
-              <a:t>●  delivery-gate 交付门禁 → QualityDeliveryGuardian</a:t>
-            </a:r>
-          </a:p>
-          <a:p>
-            <a:pPr>
-              <a:spcAft>
-                <a:spcPts val="900"/>
-              </a:spcAft>
-            </a:pPr>
-            <a:r>
-              <a:rPr sz="1500" b="0">
-                <a:solidFill>
-                  <a:srgbClr val="334155"/>
-                </a:solidFill>
-                <a:latin typeface="Microsoft YaHei"/>
-                <a:ea typeface="Microsoft YaHei"/>
-              </a:rPr>
-              <a:t>●  trace-observability / mock-evaluation 可观测与评测 → 全部</a:t>
-            </a:r>
-          </a:p>
-          <a:p>
-            <a:pPr>
-              <a:spcAft>
-                <a:spcPts val="900"/>
-              </a:spcAft>
-            </a:pPr>
-            <a:r>
-              <a:rPr sz="1500" b="1">
+              <a:rPr sz="1200" b="0">
                 <a:solidFill>
                   <a:srgbClr val="F59E0B"/>
                 </a:solidFill>
                 <a:latin typeface="Microsoft YaHei"/>
                 <a:ea typeface="Microsoft YaHei"/>
               </a:rPr>
-              <a:t>●  统一披露：输入输出 / 调用条件 / 依赖 / 失败处理 / 权限安全 / 复用价值（见材料 04）</a:t>
+              <a:t>统一披露：输入输出 / 调用条件 / 依赖 / 失败处理 / 权限安全 / 复用价值（见材料 04）。</a:t>
             </a:r>
           </a:p>
         </p:txBody>
@@ -7587,8 +11368,8 @@
         </p:nvSpPr>
         <p:spPr>
           <a:xfrm>
-            <a:off x="548640" y="384048"/>
-            <a:ext cx="11064240" cy="548640"/>
+            <a:off x="502920" y="365760"/>
+            <a:ext cx="10972800" cy="548640"/>
           </a:xfrm>
           <a:prstGeom prst="rect">
             <a:avLst/>
@@ -7603,11 +11384,11 @@
           <a:p>
             <a:pPr algn="l">
               <a:spcAft>
-                <a:spcPts val="600"/>
+                <a:spcPts val="400"/>
               </a:spcAft>
             </a:pPr>
             <a:r>
-              <a:rPr sz="2600" b="1">
+              <a:rPr sz="2400" b="1">
                 <a:solidFill>
                   <a:srgbClr val="0F172A"/>
                 </a:solidFill>
@@ -7627,7 +11408,7 @@
         </p:nvSpPr>
         <p:spPr>
           <a:xfrm>
-            <a:off x="548640" y="1115568"/>
+            <a:off x="502920" y="1078992"/>
             <a:ext cx="1371600" cy="64008"/>
           </a:xfrm>
           <a:prstGeom prst="rect">
@@ -7671,8 +11452,8 @@
         </p:nvSpPr>
         <p:spPr>
           <a:xfrm>
-            <a:off x="11338560" y="6446520"/>
-            <a:ext cx="640080" cy="365760"/>
+            <a:off x="11430000" y="6446520"/>
+            <a:ext cx="548640" cy="365760"/>
           </a:xfrm>
           <a:prstGeom prst="rect">
             <a:avLst/>
@@ -7687,11 +11468,11 @@
           <a:p>
             <a:pPr algn="r">
               <a:spcAft>
-                <a:spcPts val="600"/>
+                <a:spcPts val="400"/>
               </a:spcAft>
             </a:pPr>
             <a:r>
-              <a:rPr sz="1000" b="0">
+              <a:rPr sz="900" b="0">
                 <a:solidFill>
                   <a:srgbClr val="64748B"/>
                 </a:solidFill>
@@ -7705,14 +11486,355 @@
       </p:sp>
       <p:sp>
         <p:nvSpPr>
-          <p:cNvPr id="6" name="TextBox 5"/>
+          <p:cNvPr id="6" name="Rounded Rectangle 5"/>
+          <p:cNvSpPr/>
+          <p:nvPr/>
+        </p:nvSpPr>
+        <p:spPr>
+          <a:xfrm>
+            <a:off x="3078327" y="1737360"/>
+            <a:ext cx="1645920" cy="822960"/>
+          </a:xfrm>
+          <a:prstGeom prst="roundRect">
+            <a:avLst>
+              <a:gd name="adj" fmla="val 8000"/>
+            </a:avLst>
+          </a:prstGeom>
+          <a:solidFill>
+            <a:srgbClr val="FFFFFF"/>
+          </a:solidFill>
+          <a:ln w="19050">
+            <a:solidFill>
+              <a:srgbClr val="3F6FCC"/>
+            </a:solidFill>
+          </a:ln>
+          <a:effectLst/>
+        </p:spPr>
+        <p:style>
+          <a:lnRef idx="1">
+            <a:schemeClr val="accent1"/>
+          </a:lnRef>
+          <a:fillRef idx="3">
+            <a:schemeClr val="accent1"/>
+          </a:fillRef>
+          <a:effectRef idx="2">
+            <a:schemeClr val="accent1"/>
+          </a:effectRef>
+          <a:fontRef idx="minor">
+            <a:schemeClr val="lt1"/>
+          </a:fontRef>
+        </p:style>
+        <p:txBody>
+          <a:bodyPr rtlCol="0" anchor="ctr" wrap="square"/>
+          <a:lstStyle/>
+          <a:p>
+            <a:pPr algn="ctr"/>
+            <a:r>
+              <a:rPr sz="1200" b="1">
+                <a:solidFill>
+                  <a:srgbClr val="0F172A"/>
+                </a:solidFill>
+                <a:latin typeface="Microsoft YaHei"/>
+                <a:ea typeface="Microsoft YaHei"/>
+              </a:rPr>
+              <a:t>候选</a:t>
+            </a:r>
+          </a:p>
+          <a:p>
+            <a:pPr algn="ctr"/>
+            <a:r>
+              <a:rPr sz="800" b="0">
+                <a:solidFill>
+                  <a:srgbClr val="64748B"/>
+                </a:solidFill>
+                <a:latin typeface="Microsoft YaHei"/>
+                <a:ea typeface="Microsoft YaHei"/>
+              </a:rPr>
+              <a:t>AI 生成</a:t>
+            </a:r>
+          </a:p>
+        </p:txBody>
+      </p:sp>
+      <p:sp>
+        <p:nvSpPr>
+          <p:cNvPr id="7" name="TextBox 6"/>
           <p:cNvSpPr txBox="1"/>
           <p:nvPr/>
         </p:nvSpPr>
         <p:spPr>
           <a:xfrm>
-            <a:off x="640080" y="1737360"/>
-            <a:ext cx="10972800" cy="4754880"/>
+            <a:off x="4724247" y="1965960"/>
+            <a:ext cx="548640" cy="457200"/>
+          </a:xfrm>
+          <a:prstGeom prst="rect">
+            <a:avLst/>
+          </a:prstGeom>
+          <a:noFill/>
+        </p:spPr>
+        <p:txBody>
+          <a:bodyPr wrap="square" anchor="ctr">
+            <a:spAutoFit/>
+          </a:bodyPr>
+          <a:lstStyle/>
+          <a:p>
+            <a:pPr algn="ctr">
+              <a:spcAft>
+                <a:spcPts val="400"/>
+              </a:spcAft>
+            </a:pPr>
+            <a:r>
+              <a:rPr sz="1600" b="1">
+                <a:solidFill>
+                  <a:srgbClr val="3F6FCC"/>
+                </a:solidFill>
+                <a:latin typeface="Microsoft YaHei"/>
+                <a:ea typeface="Microsoft YaHei"/>
+              </a:rPr>
+              <a:t>→</a:t>
+            </a:r>
+          </a:p>
+        </p:txBody>
+      </p:sp>
+      <p:sp>
+        <p:nvSpPr>
+          <p:cNvPr id="8" name="Rounded Rectangle 7"/>
+          <p:cNvSpPr/>
+          <p:nvPr/>
+        </p:nvSpPr>
+        <p:spPr>
+          <a:xfrm>
+            <a:off x="5272887" y="1737360"/>
+            <a:ext cx="1645920" cy="822960"/>
+          </a:xfrm>
+          <a:prstGeom prst="roundRect">
+            <a:avLst>
+              <a:gd name="adj" fmla="val 8000"/>
+            </a:avLst>
+          </a:prstGeom>
+          <a:solidFill>
+            <a:srgbClr val="FFFFFF"/>
+          </a:solidFill>
+          <a:ln w="19050">
+            <a:solidFill>
+              <a:srgbClr val="3F6FCC"/>
+            </a:solidFill>
+          </a:ln>
+          <a:effectLst/>
+        </p:spPr>
+        <p:style>
+          <a:lnRef idx="1">
+            <a:schemeClr val="accent1"/>
+          </a:lnRef>
+          <a:fillRef idx="3">
+            <a:schemeClr val="accent1"/>
+          </a:fillRef>
+          <a:effectRef idx="2">
+            <a:schemeClr val="accent1"/>
+          </a:effectRef>
+          <a:fontRef idx="minor">
+            <a:schemeClr val="lt1"/>
+          </a:fontRef>
+        </p:style>
+        <p:txBody>
+          <a:bodyPr rtlCol="0" anchor="ctr" wrap="square"/>
+          <a:lstStyle/>
+          <a:p>
+            <a:pPr algn="ctr"/>
+            <a:r>
+              <a:rPr sz="1200" b="1">
+                <a:solidFill>
+                  <a:srgbClr val="0F172A"/>
+                </a:solidFill>
+                <a:latin typeface="Microsoft YaHei"/>
+                <a:ea typeface="Microsoft YaHei"/>
+              </a:rPr>
+              <a:t>待复核</a:t>
+            </a:r>
+          </a:p>
+          <a:p>
+            <a:pPr algn="ctr"/>
+            <a:r>
+              <a:rPr sz="800" b="0">
+                <a:solidFill>
+                  <a:srgbClr val="64748B"/>
+                </a:solidFill>
+                <a:latin typeface="Microsoft YaHei"/>
+                <a:ea typeface="Microsoft YaHei"/>
+              </a:rPr>
+              <a:t>人工核对</a:t>
+            </a:r>
+          </a:p>
+        </p:txBody>
+      </p:sp>
+      <p:sp>
+        <p:nvSpPr>
+          <p:cNvPr id="9" name="TextBox 8"/>
+          <p:cNvSpPr txBox="1"/>
+          <p:nvPr/>
+        </p:nvSpPr>
+        <p:spPr>
+          <a:xfrm>
+            <a:off x="6918807" y="1965960"/>
+            <a:ext cx="548640" cy="457200"/>
+          </a:xfrm>
+          <a:prstGeom prst="rect">
+            <a:avLst/>
+          </a:prstGeom>
+          <a:noFill/>
+        </p:spPr>
+        <p:txBody>
+          <a:bodyPr wrap="square" anchor="ctr">
+            <a:spAutoFit/>
+          </a:bodyPr>
+          <a:lstStyle/>
+          <a:p>
+            <a:pPr algn="ctr">
+              <a:spcAft>
+                <a:spcPts val="400"/>
+              </a:spcAft>
+            </a:pPr>
+            <a:r>
+              <a:rPr sz="1600" b="1">
+                <a:solidFill>
+                  <a:srgbClr val="3F6FCC"/>
+                </a:solidFill>
+                <a:latin typeface="Microsoft YaHei"/>
+                <a:ea typeface="Microsoft YaHei"/>
+              </a:rPr>
+              <a:t>→</a:t>
+            </a:r>
+          </a:p>
+        </p:txBody>
+      </p:sp>
+      <p:sp>
+        <p:nvSpPr>
+          <p:cNvPr id="10" name="Rounded Rectangle 9"/>
+          <p:cNvSpPr/>
+          <p:nvPr/>
+        </p:nvSpPr>
+        <p:spPr>
+          <a:xfrm>
+            <a:off x="7467447" y="1737360"/>
+            <a:ext cx="1645920" cy="822960"/>
+          </a:xfrm>
+          <a:prstGeom prst="roundRect">
+            <a:avLst>
+              <a:gd name="adj" fmla="val 8000"/>
+            </a:avLst>
+          </a:prstGeom>
+          <a:solidFill>
+            <a:srgbClr val="FFFFFF"/>
+          </a:solidFill>
+          <a:ln w="19050">
+            <a:solidFill>
+              <a:srgbClr val="3F6FCC"/>
+            </a:solidFill>
+          </a:ln>
+          <a:effectLst/>
+        </p:spPr>
+        <p:style>
+          <a:lnRef idx="1">
+            <a:schemeClr val="accent1"/>
+          </a:lnRef>
+          <a:fillRef idx="3">
+            <a:schemeClr val="accent1"/>
+          </a:fillRef>
+          <a:effectRef idx="2">
+            <a:schemeClr val="accent1"/>
+          </a:effectRef>
+          <a:fontRef idx="minor">
+            <a:schemeClr val="lt1"/>
+          </a:fontRef>
+        </p:style>
+        <p:txBody>
+          <a:bodyPr rtlCol="0" anchor="ctr" wrap="square"/>
+          <a:lstStyle/>
+          <a:p>
+            <a:pPr algn="ctr"/>
+            <a:r>
+              <a:rPr sz="1200" b="1">
+                <a:solidFill>
+                  <a:srgbClr val="0F172A"/>
+                </a:solidFill>
+                <a:latin typeface="Microsoft YaHei"/>
+                <a:ea typeface="Microsoft YaHei"/>
+              </a:rPr>
+              <a:t>已确认</a:t>
+            </a:r>
+          </a:p>
+          <a:p>
+            <a:pPr algn="ctr"/>
+            <a:r>
+              <a:rPr sz="800" b="0">
+                <a:solidFill>
+                  <a:srgbClr val="64748B"/>
+                </a:solidFill>
+                <a:latin typeface="Microsoft YaHei"/>
+                <a:ea typeface="Microsoft YaHei"/>
+              </a:rPr>
+              <a:t>参与交付</a:t>
+            </a:r>
+          </a:p>
+        </p:txBody>
+      </p:sp>
+      <p:sp>
+        <p:nvSpPr>
+          <p:cNvPr id="11" name="Rounded Rectangle 10"/>
+          <p:cNvSpPr/>
+          <p:nvPr/>
+        </p:nvSpPr>
+        <p:spPr>
+          <a:xfrm>
+            <a:off x="502920" y="3200400"/>
+            <a:ext cx="5394960" cy="1234440"/>
+          </a:xfrm>
+          <a:prstGeom prst="roundRect">
+            <a:avLst>
+              <a:gd name="adj" fmla="val 8000"/>
+            </a:avLst>
+          </a:prstGeom>
+          <a:solidFill>
+            <a:srgbClr val="F8FAFC"/>
+          </a:solidFill>
+          <a:ln w="19050">
+            <a:solidFill>
+              <a:srgbClr val="E2E8F0"/>
+            </a:solidFill>
+          </a:ln>
+          <a:effectLst/>
+        </p:spPr>
+        <p:style>
+          <a:lnRef idx="1">
+            <a:schemeClr val="accent1"/>
+          </a:lnRef>
+          <a:fillRef idx="3">
+            <a:schemeClr val="accent1"/>
+          </a:fillRef>
+          <a:effectRef idx="2">
+            <a:schemeClr val="accent1"/>
+          </a:effectRef>
+          <a:fontRef idx="minor">
+            <a:schemeClr val="lt1"/>
+          </a:fontRef>
+        </p:style>
+        <p:txBody>
+          <a:bodyPr rtlCol="0" anchor="ctr"/>
+          <a:lstStyle/>
+          <a:p>
+            <a:pPr algn="ctr"/>
+          </a:p>
+        </p:txBody>
+      </p:sp>
+      <p:sp>
+        <p:nvSpPr>
+          <p:cNvPr id="12" name="TextBox 11"/>
+          <p:cNvSpPr txBox="1"/>
+          <p:nvPr/>
+        </p:nvSpPr>
+        <p:spPr>
+          <a:xfrm>
+            <a:off x="640080" y="3291840"/>
+            <a:ext cx="5120640" cy="1051560"/>
           </a:xfrm>
           <a:prstGeom prst="rect">
             <a:avLst/>
@@ -7725,88 +11847,332 @@
           </a:bodyPr>
           <a:lstStyle/>
           <a:p>
+            <a:r>
+              <a:rPr sz="1200" b="1">
+                <a:solidFill>
+                  <a:srgbClr val="0D9488"/>
+                </a:solidFill>
+                <a:latin typeface="Microsoft YaHei"/>
+                <a:ea typeface="Microsoft YaHei"/>
+              </a:rPr>
+              <a:t>过期传播</a:t>
+            </a:r>
+          </a:p>
+          <a:p>
             <a:pPr>
-              <a:spcAft>
-                <a:spcPts val="900"/>
-              </a:spcAft>
+              <a:spcBef>
+                <a:spcPts val="400"/>
+              </a:spcBef>
             </a:pPr>
             <a:r>
-              <a:rPr sz="1500" b="0">
+              <a:rPr sz="1050" b="0">
+                <a:solidFill>
+                  <a:srgbClr val="334155"/>
+                </a:solidFill>
+                <a:latin typeface="Microsoft YaHei"/>
+                <a:ea typeface="Microsoft YaHei"/>
+              </a:rPr>
+              <a:t>依赖变化后下游结果置为已过期并锁定</a:t>
+            </a:r>
+          </a:p>
+        </p:txBody>
+      </p:sp>
+      <p:sp>
+        <p:nvSpPr>
+          <p:cNvPr id="13" name="Rounded Rectangle 12"/>
+          <p:cNvSpPr/>
+          <p:nvPr/>
+        </p:nvSpPr>
+        <p:spPr>
+          <a:xfrm>
+            <a:off x="6126480" y="3200400"/>
+            <a:ext cx="5394960" cy="1234440"/>
+          </a:xfrm>
+          <a:prstGeom prst="roundRect">
+            <a:avLst>
+              <a:gd name="adj" fmla="val 8000"/>
+            </a:avLst>
+          </a:prstGeom>
+          <a:solidFill>
+            <a:srgbClr val="F8FAFC"/>
+          </a:solidFill>
+          <a:ln w="19050">
+            <a:solidFill>
+              <a:srgbClr val="E2E8F0"/>
+            </a:solidFill>
+          </a:ln>
+          <a:effectLst/>
+        </p:spPr>
+        <p:style>
+          <a:lnRef idx="1">
+            <a:schemeClr val="accent1"/>
+          </a:lnRef>
+          <a:fillRef idx="3">
+            <a:schemeClr val="accent1"/>
+          </a:fillRef>
+          <a:effectRef idx="2">
+            <a:schemeClr val="accent1"/>
+          </a:effectRef>
+          <a:fontRef idx="minor">
+            <a:schemeClr val="lt1"/>
+          </a:fontRef>
+        </p:style>
+        <p:txBody>
+          <a:bodyPr rtlCol="0" anchor="ctr"/>
+          <a:lstStyle/>
+          <a:p>
+            <a:pPr algn="ctr"/>
+          </a:p>
+        </p:txBody>
+      </p:sp>
+      <p:sp>
+        <p:nvSpPr>
+          <p:cNvPr id="14" name="TextBox 13"/>
+          <p:cNvSpPr txBox="1"/>
+          <p:nvPr/>
+        </p:nvSpPr>
+        <p:spPr>
+          <a:xfrm>
+            <a:off x="6263640" y="3291840"/>
+            <a:ext cx="5120640" cy="1051560"/>
+          </a:xfrm>
+          <a:prstGeom prst="rect">
+            <a:avLst/>
+          </a:prstGeom>
+          <a:noFill/>
+        </p:spPr>
+        <p:txBody>
+          <a:bodyPr wrap="square">
+            <a:spAutoFit/>
+          </a:bodyPr>
+          <a:lstStyle/>
+          <a:p>
+            <a:r>
+              <a:rPr sz="1200" b="1">
                 <a:solidFill>
                   <a:srgbClr val="0D9488"/>
                 </a:solidFill>
                 <a:latin typeface="Microsoft YaHei"/>
                 <a:ea typeface="Microsoft YaHei"/>
               </a:rPr>
-              <a:t>●  来源引用：JD 原子要求锚定原文 span；事实带原文引用；简历 bullet 关联 claimId</a:t>
+              <a:t>四道人工门禁</a:t>
             </a:r>
           </a:p>
           <a:p>
             <a:pPr>
-              <a:spcAft>
-                <a:spcPts val="900"/>
-              </a:spcAft>
+              <a:spcBef>
+                <a:spcPts val="400"/>
+              </a:spcBef>
             </a:pPr>
             <a:r>
-              <a:rPr sz="1500" b="0">
-                <a:solidFill>
-                  <a:srgbClr val="0EA5E9"/>
-                </a:solidFill>
-                <a:latin typeface="Microsoft YaHei"/>
-                <a:ea typeface="Microsoft YaHei"/>
-              </a:rPr>
-              <a:t>●  三级可信状态：候选 → 待复核 → 已确认；已确认才参与交付</a:t>
+              <a:rPr sz="1050" b="0">
+                <a:solidFill>
+                  <a:srgbClr val="334155"/>
+                </a:solidFill>
+                <a:latin typeface="Microsoft YaHei"/>
+                <a:ea typeface="Microsoft YaHei"/>
+              </a:rPr>
+              <a:t>需求确认·证据确认·优化采用·最终导出</a:t>
+            </a:r>
+          </a:p>
+        </p:txBody>
+      </p:sp>
+      <p:sp>
+        <p:nvSpPr>
+          <p:cNvPr id="15" name="Rounded Rectangle 14"/>
+          <p:cNvSpPr/>
+          <p:nvPr/>
+        </p:nvSpPr>
+        <p:spPr>
+          <a:xfrm>
+            <a:off x="502920" y="4663440"/>
+            <a:ext cx="5394960" cy="1234440"/>
+          </a:xfrm>
+          <a:prstGeom prst="roundRect">
+            <a:avLst>
+              <a:gd name="adj" fmla="val 8000"/>
+            </a:avLst>
+          </a:prstGeom>
+          <a:solidFill>
+            <a:srgbClr val="F8FAFC"/>
+          </a:solidFill>
+          <a:ln w="19050">
+            <a:solidFill>
+              <a:srgbClr val="E2E8F0"/>
+            </a:solidFill>
+          </a:ln>
+          <a:effectLst/>
+        </p:spPr>
+        <p:style>
+          <a:lnRef idx="1">
+            <a:schemeClr val="accent1"/>
+          </a:lnRef>
+          <a:fillRef idx="3">
+            <a:schemeClr val="accent1"/>
+          </a:fillRef>
+          <a:effectRef idx="2">
+            <a:schemeClr val="accent1"/>
+          </a:effectRef>
+          <a:fontRef idx="minor">
+            <a:schemeClr val="lt1"/>
+          </a:fontRef>
+        </p:style>
+        <p:txBody>
+          <a:bodyPr rtlCol="0" anchor="ctr"/>
+          <a:lstStyle/>
+          <a:p>
+            <a:pPr algn="ctr"/>
+          </a:p>
+        </p:txBody>
+      </p:sp>
+      <p:sp>
+        <p:nvSpPr>
+          <p:cNvPr id="16" name="TextBox 15"/>
+          <p:cNvSpPr txBox="1"/>
+          <p:nvPr/>
+        </p:nvSpPr>
+        <p:spPr>
+          <a:xfrm>
+            <a:off x="640080" y="4754880"/>
+            <a:ext cx="5120640" cy="1051560"/>
+          </a:xfrm>
+          <a:prstGeom prst="rect">
+            <a:avLst/>
+          </a:prstGeom>
+          <a:noFill/>
+        </p:spPr>
+        <p:txBody>
+          <a:bodyPr wrap="square">
+            <a:spAutoFit/>
+          </a:bodyPr>
+          <a:lstStyle/>
+          <a:p>
+            <a:r>
+              <a:rPr sz="1200" b="1">
+                <a:solidFill>
+                  <a:srgbClr val="0D9488"/>
+                </a:solidFill>
+                <a:latin typeface="Microsoft YaHei"/>
+                <a:ea typeface="Microsoft YaHei"/>
+              </a:rPr>
+              <a:t>确定性评分</a:t>
             </a:r>
           </a:p>
           <a:p>
             <a:pPr>
-              <a:spcAft>
-                <a:spcPts val="900"/>
-              </a:spcAft>
+              <a:spcBef>
+                <a:spcPts val="400"/>
+              </a:spcBef>
             </a:pPr>
             <a:r>
-              <a:rPr sz="1500" b="0">
-                <a:solidFill>
-                  <a:srgbClr val="F59E0B"/>
-                </a:solidFill>
-                <a:latin typeface="Microsoft YaHei"/>
-                <a:ea typeface="Microsoft YaHei"/>
-              </a:rPr>
-              <a:t>●  过期传播：JD/材料/事实/风格变化后，下游结果置为已过期并锁定</a:t>
+              <a:rPr sz="1050" b="0">
+                <a:solidFill>
+                  <a:srgbClr val="334155"/>
+                </a:solidFill>
+                <a:latin typeface="Microsoft YaHei"/>
+                <a:ea typeface="Microsoft YaHei"/>
+              </a:rPr>
+              <a:t>准备度由 TypeScript 按证据强度计算，非模型自报</a:t>
+            </a:r>
+          </a:p>
+        </p:txBody>
+      </p:sp>
+      <p:sp>
+        <p:nvSpPr>
+          <p:cNvPr id="17" name="Rounded Rectangle 16"/>
+          <p:cNvSpPr/>
+          <p:nvPr/>
+        </p:nvSpPr>
+        <p:spPr>
+          <a:xfrm>
+            <a:off x="6126480" y="4663440"/>
+            <a:ext cx="5394960" cy="1234440"/>
+          </a:xfrm>
+          <a:prstGeom prst="roundRect">
+            <a:avLst>
+              <a:gd name="adj" fmla="val 8000"/>
+            </a:avLst>
+          </a:prstGeom>
+          <a:solidFill>
+            <a:srgbClr val="F8FAFC"/>
+          </a:solidFill>
+          <a:ln w="19050">
+            <a:solidFill>
+              <a:srgbClr val="E2E8F0"/>
+            </a:solidFill>
+          </a:ln>
+          <a:effectLst/>
+        </p:spPr>
+        <p:style>
+          <a:lnRef idx="1">
+            <a:schemeClr val="accent1"/>
+          </a:lnRef>
+          <a:fillRef idx="3">
+            <a:schemeClr val="accent1"/>
+          </a:fillRef>
+          <a:effectRef idx="2">
+            <a:schemeClr val="accent1"/>
+          </a:effectRef>
+          <a:fontRef idx="minor">
+            <a:schemeClr val="lt1"/>
+          </a:fontRef>
+        </p:style>
+        <p:txBody>
+          <a:bodyPr rtlCol="0" anchor="ctr"/>
+          <a:lstStyle/>
+          <a:p>
+            <a:pPr algn="ctr"/>
+          </a:p>
+        </p:txBody>
+      </p:sp>
+      <p:sp>
+        <p:nvSpPr>
+          <p:cNvPr id="18" name="TextBox 17"/>
+          <p:cNvSpPr txBox="1"/>
+          <p:nvPr/>
+        </p:nvSpPr>
+        <p:spPr>
+          <a:xfrm>
+            <a:off x="6263640" y="4754880"/>
+            <a:ext cx="5120640" cy="1051560"/>
+          </a:xfrm>
+          <a:prstGeom prst="rect">
+            <a:avLst/>
+          </a:prstGeom>
+          <a:noFill/>
+        </p:spPr>
+        <p:txBody>
+          <a:bodyPr wrap="square">
+            <a:spAutoFit/>
+          </a:bodyPr>
+          <a:lstStyle/>
+          <a:p>
+            <a:r>
+              <a:rPr sz="1200" b="1">
+                <a:solidFill>
+                  <a:srgbClr val="0D9488"/>
+                </a:solidFill>
+                <a:latin typeface="Microsoft YaHei"/>
+                <a:ea typeface="Microsoft YaHei"/>
+              </a:rPr>
+              <a:t>全程可审计</a:t>
             </a:r>
           </a:p>
           <a:p>
             <a:pPr>
-              <a:spcAft>
-                <a:spcPts val="900"/>
-              </a:spcAft>
+              <a:spcBef>
+                <a:spcPts val="400"/>
+              </a:spcBef>
             </a:pPr>
             <a:r>
-              <a:rPr sz="1500" b="0">
-                <a:solidFill>
-                  <a:srgbClr val="F59E0B"/>
-                </a:solidFill>
-                <a:latin typeface="Microsoft YaHei"/>
-                <a:ea typeface="Microsoft YaHei"/>
-              </a:rPr>
-              <a:t>●  人工审批：需求地图确认、证据确认、优化项采用、最终导出四道人工门禁</a:t>
-            </a:r>
-          </a:p>
-          <a:p>
-            <a:pPr>
-              <a:spcAft>
-                <a:spcPts val="900"/>
-              </a:spcAft>
-            </a:pPr>
-            <a:r>
-              <a:rPr sz="1500" b="0">
-                <a:solidFill>
-                  <a:srgbClr val="0D9488"/>
-                </a:solidFill>
-                <a:latin typeface="Microsoft YaHei"/>
-                <a:ea typeface="Microsoft YaHei"/>
-              </a:rPr>
-              <a:t>●  确定性评分：岗位准备度由 TypeScript 按优先级与证据强度计算，非模型自报</a:t>
+              <a:rPr sz="1050" b="0">
+                <a:solidFill>
+                  <a:srgbClr val="334155"/>
+                </a:solidFill>
+                <a:latin typeface="Microsoft YaHei"/>
+                <a:ea typeface="Microsoft YaHei"/>
+              </a:rPr>
+              <a:t>引用链 + Trace 可回放</a:t>
             </a:r>
           </a:p>
         </p:txBody>

--- a/competition/initial/01-solution-deck.pptx
+++ b/competition/initial/01-solution-deck.pptx
@@ -3115,7 +3115,7 @@
             <a:avLst/>
           </a:prstGeom>
           <a:solidFill>
-            <a:srgbClr val="FFFFFF"/>
+            <a:srgbClr val="0A192F"/>
           </a:solidFill>
           <a:ln>
             <a:noFill/>
@@ -3146,20 +3146,140 @@
       </p:sp>
       <p:sp>
         <p:nvSpPr>
-          <p:cNvPr id="3" name="Rectangle 2"/>
+          <p:cNvPr id="3" name="TextBox 2"/>
+          <p:cNvSpPr txBox="1"/>
+          <p:nvPr/>
+        </p:nvSpPr>
+        <p:spPr>
+          <a:xfrm>
+            <a:off x="822960" y="1828800"/>
+            <a:ext cx="10058400" cy="457200"/>
+          </a:xfrm>
+          <a:prstGeom prst="rect">
+            <a:avLst/>
+          </a:prstGeom>
+          <a:noFill/>
+        </p:spPr>
+        <p:txBody>
+          <a:bodyPr wrap="square" anchor="t">
+            <a:spAutoFit/>
+          </a:bodyPr>
+          <a:lstStyle/>
+          <a:p>
+            <a:pPr algn="l">
+              <a:spcAft>
+                <a:spcPts val="400"/>
+              </a:spcAft>
+            </a:pPr>
+            <a:r>
+              <a:rPr sz="1300" b="0">
+                <a:solidFill>
+                  <a:srgbClr val="64FFDA"/>
+                </a:solidFill>
+                <a:latin typeface="Consolas"/>
+                <a:ea typeface="Microsoft YaHei"/>
+              </a:rPr>
+              <a:t>01 · GOAI AGENT INFRA</a:t>
+            </a:r>
+          </a:p>
+        </p:txBody>
+      </p:sp>
+      <p:sp>
+        <p:nvSpPr>
+          <p:cNvPr id="4" name="TextBox 3"/>
+          <p:cNvSpPr txBox="1"/>
+          <p:nvPr/>
+        </p:nvSpPr>
+        <p:spPr>
+          <a:xfrm>
+            <a:off x="822960" y="2240280"/>
+            <a:ext cx="10515600" cy="1097280"/>
+          </a:xfrm>
+          <a:prstGeom prst="rect">
+            <a:avLst/>
+          </a:prstGeom>
+          <a:noFill/>
+        </p:spPr>
+        <p:txBody>
+          <a:bodyPr wrap="square" anchor="t">
+            <a:spAutoFit/>
+          </a:bodyPr>
+          <a:lstStyle/>
+          <a:p>
+            <a:pPr algn="l">
+              <a:spcAft>
+                <a:spcPts val="400"/>
+              </a:spcAft>
+            </a:pPr>
+            <a:r>
+              <a:rPr sz="4500" b="1">
+                <a:solidFill>
+                  <a:srgbClr val="E6F1FF"/>
+                </a:solidFill>
+                <a:latin typeface="Microsoft YaHei"/>
+                <a:ea typeface="Microsoft YaHei"/>
+              </a:rPr>
+              <a:t>职途智策 AgentTeam</a:t>
+            </a:r>
+          </a:p>
+        </p:txBody>
+      </p:sp>
+      <p:sp>
+        <p:nvSpPr>
+          <p:cNvPr id="5" name="TextBox 4"/>
+          <p:cNvSpPr txBox="1"/>
+          <p:nvPr/>
+        </p:nvSpPr>
+        <p:spPr>
+          <a:xfrm>
+            <a:off x="822960" y="3200400"/>
+            <a:ext cx="10515600" cy="548640"/>
+          </a:xfrm>
+          <a:prstGeom prst="rect">
+            <a:avLst/>
+          </a:prstGeom>
+          <a:noFill/>
+        </p:spPr>
+        <p:txBody>
+          <a:bodyPr wrap="square" anchor="t">
+            <a:spAutoFit/>
+          </a:bodyPr>
+          <a:lstStyle/>
+          <a:p>
+            <a:pPr algn="l">
+              <a:spcAft>
+                <a:spcPts val="400"/>
+              </a:spcAft>
+            </a:pPr>
+            <a:r>
+              <a:rPr sz="2000" b="0">
+                <a:solidFill>
+                  <a:srgbClr val="8892B0"/>
+                </a:solidFill>
+                <a:latin typeface="Microsoft YaHei"/>
+                <a:ea typeface="Microsoft YaHei"/>
+              </a:rPr>
+              <a:t>面向求职决策的可信多 Agent 协作系统</a:t>
+            </a:r>
+          </a:p>
+        </p:txBody>
+      </p:sp>
+      <p:sp>
+        <p:nvSpPr>
+          <p:cNvPr id="6" name="Rectangle 5"/>
           <p:cNvSpPr/>
           <p:nvPr/>
         </p:nvSpPr>
         <p:spPr>
           <a:xfrm>
-            <a:off x="0" y="0"/>
-            <a:ext cx="12191695" cy="274320"/>
+            <a:off x="822960" y="3886200"/>
+            <a:ext cx="2194560" cy="36576"/>
           </a:xfrm>
           <a:prstGeom prst="rect">
             <a:avLst/>
           </a:prstGeom>
           <a:solidFill>
-            <a:srgbClr val="1F3A93"/>
+            <a:srgbClr val="64FFDA"/>
           </a:solidFill>
           <a:ln>
             <a:noFill/>
@@ -3190,13 +3310,13 @@
       </p:sp>
       <p:sp>
         <p:nvSpPr>
-          <p:cNvPr id="4" name="TextBox 3"/>
+          <p:cNvPr id="7" name="TextBox 6"/>
           <p:cNvSpPr txBox="1"/>
           <p:nvPr/>
         </p:nvSpPr>
         <p:spPr>
           <a:xfrm>
-            <a:off x="822960" y="1737360"/>
+            <a:off x="822960" y="4206240"/>
             <a:ext cx="10515600" cy="457200"/>
           </a:xfrm>
           <a:prstGeom prst="rect">
@@ -3218,26 +3338,26 @@
             <a:r>
               <a:rPr sz="1300" b="0">
                 <a:solidFill>
-                  <a:srgbClr val="64748B"/>
-                </a:solidFill>
-                <a:latin typeface="Microsoft YaHei"/>
-                <a:ea typeface="Microsoft YaHei"/>
-              </a:rPr>
-              <a:t>GOAI 新智基座｜Agent Infra · 复杂任务多 Agent 自主协同</a:t>
-            </a:r>
-          </a:p>
-        </p:txBody>
-      </p:sp>
-      <p:sp>
-        <p:nvSpPr>
-          <p:cNvPr id="5" name="TextBox 4"/>
+                  <a:srgbClr val="5A7A9E"/>
+                </a:solidFill>
+                <a:latin typeface="Microsoft YaHei"/>
+                <a:ea typeface="Microsoft YaHei"/>
+              </a:rPr>
+              <a:t>参赛者：张英超 · 个人参赛 · 初赛 V0.1</a:t>
+            </a:r>
+          </a:p>
+        </p:txBody>
+      </p:sp>
+      <p:sp>
+        <p:nvSpPr>
+          <p:cNvPr id="8" name="TextBox 7"/>
           <p:cNvSpPr txBox="1"/>
           <p:nvPr/>
         </p:nvSpPr>
         <p:spPr>
           <a:xfrm>
-            <a:off x="822960" y="2194560"/>
-            <a:ext cx="10515600" cy="1097280"/>
+            <a:off x="822960" y="5029200"/>
+            <a:ext cx="10515600" cy="457200"/>
           </a:xfrm>
           <a:prstGeom prst="rect">
             <a:avLst/>
@@ -3256,175 +3376,11 @@
               </a:spcAft>
             </a:pPr>
             <a:r>
-              <a:rPr sz="4600" b="1">
-                <a:solidFill>
-                  <a:srgbClr val="0F172A"/>
-                </a:solidFill>
-                <a:latin typeface="Microsoft YaHei"/>
-                <a:ea typeface="Microsoft YaHei"/>
-              </a:rPr>
-              <a:t>职途智策 AgentTeam</a:t>
-            </a:r>
-          </a:p>
-        </p:txBody>
-      </p:sp>
-      <p:sp>
-        <p:nvSpPr>
-          <p:cNvPr id="6" name="TextBox 5"/>
-          <p:cNvSpPr txBox="1"/>
-          <p:nvPr/>
-        </p:nvSpPr>
-        <p:spPr>
-          <a:xfrm>
-            <a:off x="822960" y="3154680"/>
-            <a:ext cx="10515600" cy="640080"/>
-          </a:xfrm>
-          <a:prstGeom prst="rect">
-            <a:avLst/>
-          </a:prstGeom>
-          <a:noFill/>
-        </p:spPr>
-        <p:txBody>
-          <a:bodyPr wrap="square" anchor="t">
-            <a:spAutoFit/>
-          </a:bodyPr>
-          <a:lstStyle/>
-          <a:p>
-            <a:pPr algn="l">
-              <a:spcAft>
-                <a:spcPts val="400"/>
-              </a:spcAft>
-            </a:pPr>
-            <a:r>
-              <a:rPr sz="2100" b="1">
-                <a:solidFill>
-                  <a:srgbClr val="1F3A93"/>
-                </a:solidFill>
-                <a:latin typeface="Microsoft YaHei"/>
-                <a:ea typeface="Microsoft YaHei"/>
-              </a:rPr>
-              <a:t>面向求职决策的可信多 Agent 协作系统</a:t>
-            </a:r>
-          </a:p>
-        </p:txBody>
-      </p:sp>
-      <p:sp>
-        <p:nvSpPr>
-          <p:cNvPr id="7" name="Rectangle 6"/>
-          <p:cNvSpPr/>
-          <p:nvPr/>
-        </p:nvSpPr>
-        <p:spPr>
-          <a:xfrm>
-            <a:off x="822960" y="3931920"/>
-            <a:ext cx="2194560" cy="45720"/>
-          </a:xfrm>
-          <a:prstGeom prst="rect">
-            <a:avLst/>
-          </a:prstGeom>
-          <a:solidFill>
-            <a:srgbClr val="1F3A93"/>
-          </a:solidFill>
-          <a:ln>
-            <a:noFill/>
-          </a:ln>
-          <a:effectLst/>
-        </p:spPr>
-        <p:style>
-          <a:lnRef idx="1">
-            <a:schemeClr val="accent1"/>
-          </a:lnRef>
-          <a:fillRef idx="3">
-            <a:schemeClr val="accent1"/>
-          </a:fillRef>
-          <a:effectRef idx="2">
-            <a:schemeClr val="accent1"/>
-          </a:effectRef>
-          <a:fontRef idx="minor">
-            <a:schemeClr val="lt1"/>
-          </a:fontRef>
-        </p:style>
-        <p:txBody>
-          <a:bodyPr rtlCol="0" anchor="ctr"/>
-          <a:lstStyle/>
-          <a:p>
-            <a:pPr algn="ctr"/>
-          </a:p>
-        </p:txBody>
-      </p:sp>
-      <p:sp>
-        <p:nvSpPr>
-          <p:cNvPr id="8" name="TextBox 7"/>
-          <p:cNvSpPr txBox="1"/>
-          <p:nvPr/>
-        </p:nvSpPr>
-        <p:spPr>
-          <a:xfrm>
-            <a:off x="822960" y="4297680"/>
-            <a:ext cx="10515600" cy="457200"/>
-          </a:xfrm>
-          <a:prstGeom prst="rect">
-            <a:avLst/>
-          </a:prstGeom>
-          <a:noFill/>
-        </p:spPr>
-        <p:txBody>
-          <a:bodyPr wrap="square" anchor="t">
-            <a:spAutoFit/>
-          </a:bodyPr>
-          <a:lstStyle/>
-          <a:p>
-            <a:pPr algn="l">
-              <a:spcAft>
-                <a:spcPts val="400"/>
-              </a:spcAft>
-            </a:pPr>
-            <a:r>
-              <a:rPr sz="1400" b="0">
-                <a:solidFill>
-                  <a:srgbClr val="334155"/>
-                </a:solidFill>
-                <a:latin typeface="Microsoft YaHei"/>
-                <a:ea typeface="Microsoft YaHei"/>
-              </a:rPr>
-              <a:t>参赛者：张英超 · 个人参赛 · 初赛 V0.1</a:t>
-            </a:r>
-          </a:p>
-        </p:txBody>
-      </p:sp>
-      <p:sp>
-        <p:nvSpPr>
-          <p:cNvPr id="9" name="TextBox 8"/>
-          <p:cNvSpPr txBox="1"/>
-          <p:nvPr/>
-        </p:nvSpPr>
-        <p:spPr>
-          <a:xfrm>
-            <a:off x="822960" y="5120640"/>
-            <a:ext cx="10515600" cy="457200"/>
-          </a:xfrm>
-          <a:prstGeom prst="rect">
-            <a:avLst/>
-          </a:prstGeom>
-          <a:noFill/>
-        </p:spPr>
-        <p:txBody>
-          <a:bodyPr wrap="square" anchor="t">
-            <a:spAutoFit/>
-          </a:bodyPr>
-          <a:lstStyle/>
-          <a:p>
-            <a:pPr algn="l">
-              <a:spcAft>
-                <a:spcPts val="400"/>
-              </a:spcAft>
-            </a:pPr>
-            <a:r>
-              <a:rPr sz="1300" b="0">
-                <a:solidFill>
-                  <a:srgbClr val="F59E0B"/>
-                </a:solidFill>
-                <a:latin typeface="Microsoft YaHei"/>
+              <a:rPr sz="1200" b="0">
+                <a:solidFill>
+                  <a:srgbClr val="64FFDA"/>
+                </a:solidFill>
+                <a:latin typeface="Consolas"/>
                 <a:ea typeface="Microsoft YaHei"/>
               </a:rPr>
               <a:t>AgentTeams   Skill   可信门禁   可观测   可回放</a:t>
@@ -3465,7 +3421,7 @@
             <a:avLst/>
           </a:prstGeom>
           <a:solidFill>
-            <a:srgbClr val="FFFFFF"/>
+            <a:srgbClr val="0A192F"/>
           </a:solidFill>
           <a:ln>
             <a:noFill/>
@@ -3502,8 +3458,8 @@
         </p:nvSpPr>
         <p:spPr>
           <a:xfrm>
-            <a:off x="502920" y="365760"/>
-            <a:ext cx="10972800" cy="548640"/>
+            <a:off x="502920" y="384048"/>
+            <a:ext cx="1828800" cy="457200"/>
           </a:xfrm>
           <a:prstGeom prst="rect">
             <a:avLst/>
@@ -3522,34 +3478,74 @@
               </a:spcAft>
             </a:pPr>
             <a:r>
-              <a:rPr sz="2400" b="1">
-                <a:solidFill>
-                  <a:srgbClr val="0F172A"/>
-                </a:solidFill>
-                <a:latin typeface="Microsoft YaHei"/>
-                <a:ea typeface="Microsoft YaHei"/>
-              </a:rPr>
-              <a:t>工程与可观测</a:t>
-            </a:r>
-          </a:p>
-        </p:txBody>
-      </p:sp>
-      <p:sp>
-        <p:nvSpPr>
-          <p:cNvPr id="4" name="Rectangle 3"/>
+              <a:rPr sz="1400" b="1">
+                <a:solidFill>
+                  <a:srgbClr val="64FFDA"/>
+                </a:solidFill>
+                <a:latin typeface="Consolas"/>
+                <a:ea typeface="Microsoft YaHei"/>
+              </a:rPr>
+              <a:t>10</a:t>
+            </a:r>
+          </a:p>
+        </p:txBody>
+      </p:sp>
+      <p:sp>
+        <p:nvSpPr>
+          <p:cNvPr id="4" name="TextBox 3"/>
+          <p:cNvSpPr txBox="1"/>
+          <p:nvPr/>
+        </p:nvSpPr>
+        <p:spPr>
+          <a:xfrm>
+            <a:off x="502920" y="365760"/>
+            <a:ext cx="10972800" cy="548640"/>
+          </a:xfrm>
+          <a:prstGeom prst="rect">
+            <a:avLst/>
+          </a:prstGeom>
+          <a:noFill/>
+        </p:spPr>
+        <p:txBody>
+          <a:bodyPr wrap="square" anchor="t">
+            <a:spAutoFit/>
+          </a:bodyPr>
+          <a:lstStyle/>
+          <a:p>
+            <a:pPr algn="l">
+              <a:spcAft>
+                <a:spcPts val="400"/>
+              </a:spcAft>
+            </a:pPr>
+            <a:r>
+              <a:rPr sz="2300" b="1">
+                <a:solidFill>
+                  <a:srgbClr val="E6F1FF"/>
+                </a:solidFill>
+                <a:latin typeface="Microsoft YaHei"/>
+                <a:ea typeface="Microsoft YaHei"/>
+              </a:rPr>
+              <a:t>  工程与可观测</a:t>
+            </a:r>
+          </a:p>
+        </p:txBody>
+      </p:sp>
+      <p:sp>
+        <p:nvSpPr>
+          <p:cNvPr id="5" name="Rectangle 4"/>
           <p:cNvSpPr/>
           <p:nvPr/>
         </p:nvSpPr>
         <p:spPr>
           <a:xfrm>
-            <a:off x="502920" y="1078992"/>
-            <a:ext cx="1371600" cy="64008"/>
+            <a:off x="502920" y="1051560"/>
+            <a:ext cx="1280160" cy="45720"/>
           </a:xfrm>
           <a:prstGeom prst="rect">
             <a:avLst/>
           </a:prstGeom>
           <a:solidFill>
-            <a:srgbClr val="1F3A93"/>
+            <a:srgbClr val="64FFDA"/>
           </a:solidFill>
           <a:ln>
             <a:noFill/>
@@ -3580,14 +3576,14 @@
       </p:sp>
       <p:sp>
         <p:nvSpPr>
-          <p:cNvPr id="5" name="TextBox 4"/>
+          <p:cNvPr id="6" name="TextBox 5"/>
           <p:cNvSpPr txBox="1"/>
           <p:nvPr/>
         </p:nvSpPr>
         <p:spPr>
           <a:xfrm>
-            <a:off x="11430000" y="6446520"/>
-            <a:ext cx="548640" cy="365760"/>
+            <a:off x="10881360" y="411480"/>
+            <a:ext cx="822960" cy="365760"/>
           </a:xfrm>
           <a:prstGeom prst="rect">
             <a:avLst/>
@@ -3608,25 +3604,25 @@
             <a:r>
               <a:rPr sz="900" b="0">
                 <a:solidFill>
-                  <a:srgbClr val="64748B"/>
-                </a:solidFill>
-                <a:latin typeface="Microsoft YaHei"/>
-                <a:ea typeface="Microsoft YaHei"/>
-              </a:rPr>
-              <a:t>10/13</a:t>
-            </a:r>
-          </a:p>
-        </p:txBody>
-      </p:sp>
-      <p:sp>
-        <p:nvSpPr>
-          <p:cNvPr id="6" name="Rounded Rectangle 5"/>
+                  <a:srgbClr val="5A7A9E"/>
+                </a:solidFill>
+                <a:latin typeface="Consolas"/>
+                <a:ea typeface="Microsoft YaHei"/>
+              </a:rPr>
+              <a:t>10 / 13</a:t>
+            </a:r>
+          </a:p>
+        </p:txBody>
+      </p:sp>
+      <p:sp>
+        <p:nvSpPr>
+          <p:cNvPr id="7" name="Rounded Rectangle 6"/>
           <p:cNvSpPr/>
           <p:nvPr/>
         </p:nvSpPr>
         <p:spPr>
           <a:xfrm>
-            <a:off x="502920" y="1554480"/>
+            <a:off x="502920" y="1508760"/>
             <a:ext cx="5394960" cy="1234440"/>
           </a:xfrm>
           <a:prstGeom prst="roundRect">
@@ -3635,11 +3631,11 @@
             </a:avLst>
           </a:prstGeom>
           <a:solidFill>
-            <a:srgbClr val="F8FAFC"/>
+            <a:srgbClr val="112240"/>
           </a:solidFill>
-          <a:ln w="19050">
+          <a:ln w="15240">
             <a:solidFill>
-              <a:srgbClr val="E2E8F0"/>
+              <a:srgbClr val="1E3A5F"/>
             </a:solidFill>
           </a:ln>
           <a:effectLst/>
@@ -3668,14 +3664,14 @@
       </p:sp>
       <p:sp>
         <p:nvSpPr>
-          <p:cNvPr id="7" name="TextBox 6"/>
+          <p:cNvPr id="8" name="TextBox 7"/>
           <p:cNvSpPr txBox="1"/>
           <p:nvPr/>
         </p:nvSpPr>
         <p:spPr>
           <a:xfrm>
-            <a:off x="640080" y="1645920"/>
-            <a:ext cx="5120640" cy="1051560"/>
+            <a:off x="649224" y="1591056"/>
+            <a:ext cx="5102352" cy="1069848"/>
           </a:xfrm>
           <a:prstGeom prst="rect">
             <a:avLst/>
@@ -3691,7 +3687,7 @@
             <a:r>
               <a:rPr sz="1200" b="1">
                 <a:solidFill>
-                  <a:srgbClr val="1F3A93"/>
+                  <a:srgbClr val="E6F1FF"/>
                 </a:solidFill>
                 <a:latin typeface="Microsoft YaHei"/>
                 <a:ea typeface="Microsoft YaHei"/>
@@ -3702,13 +3698,13 @@
           <a:p>
             <a:pPr>
               <a:spcBef>
-                <a:spcPts val="400"/>
+                <a:spcPts val="300"/>
               </a:spcBef>
             </a:pPr>
             <a:r>
               <a:rPr sz="1050" b="0">
                 <a:solidFill>
-                  <a:srgbClr val="334155"/>
+                  <a:srgbClr val="8892B0"/>
                 </a:solidFill>
                 <a:latin typeface="Microsoft YaHei"/>
                 <a:ea typeface="Microsoft YaHei"/>
@@ -3720,13 +3716,13 @@
       </p:sp>
       <p:sp>
         <p:nvSpPr>
-          <p:cNvPr id="8" name="Rounded Rectangle 7"/>
+          <p:cNvPr id="9" name="Rounded Rectangle 8"/>
           <p:cNvSpPr/>
           <p:nvPr/>
         </p:nvSpPr>
         <p:spPr>
           <a:xfrm>
-            <a:off x="6126480" y="1554480"/>
+            <a:off x="6126480" y="1508760"/>
             <a:ext cx="5394960" cy="1234440"/>
           </a:xfrm>
           <a:prstGeom prst="roundRect">
@@ -3735,11 +3731,11 @@
             </a:avLst>
           </a:prstGeom>
           <a:solidFill>
-            <a:srgbClr val="F8FAFC"/>
+            <a:srgbClr val="112240"/>
           </a:solidFill>
-          <a:ln w="19050">
+          <a:ln w="15240">
             <a:solidFill>
-              <a:srgbClr val="E2E8F0"/>
+              <a:srgbClr val="1E3A5F"/>
             </a:solidFill>
           </a:ln>
           <a:effectLst/>
@@ -3768,14 +3764,14 @@
       </p:sp>
       <p:sp>
         <p:nvSpPr>
-          <p:cNvPr id="9" name="TextBox 8"/>
+          <p:cNvPr id="10" name="TextBox 9"/>
           <p:cNvSpPr txBox="1"/>
           <p:nvPr/>
         </p:nvSpPr>
         <p:spPr>
           <a:xfrm>
-            <a:off x="6263640" y="1645920"/>
-            <a:ext cx="5120640" cy="1051560"/>
+            <a:off x="6272784" y="1591056"/>
+            <a:ext cx="5102352" cy="1069848"/>
           </a:xfrm>
           <a:prstGeom prst="rect">
             <a:avLst/>
@@ -3791,7 +3787,7 @@
             <a:r>
               <a:rPr sz="1200" b="1">
                 <a:solidFill>
-                  <a:srgbClr val="1F3A93"/>
+                  <a:srgbClr val="E6F1FF"/>
                 </a:solidFill>
                 <a:latin typeface="Microsoft YaHei"/>
                 <a:ea typeface="Microsoft YaHei"/>
@@ -3802,13 +3798,13 @@
           <a:p>
             <a:pPr>
               <a:spcBef>
-                <a:spcPts val="400"/>
+                <a:spcPts val="300"/>
               </a:spcBef>
             </a:pPr>
             <a:r>
               <a:rPr sz="1050" b="0">
                 <a:solidFill>
-                  <a:srgbClr val="334155"/>
+                  <a:srgbClr val="8892B0"/>
                 </a:solidFill>
                 <a:latin typeface="Microsoft YaHei"/>
                 <a:ea typeface="Microsoft YaHei"/>
@@ -3820,13 +3816,13 @@
       </p:sp>
       <p:sp>
         <p:nvSpPr>
-          <p:cNvPr id="10" name="Rounded Rectangle 9"/>
+          <p:cNvPr id="11" name="Rounded Rectangle 10"/>
           <p:cNvSpPr/>
           <p:nvPr/>
         </p:nvSpPr>
         <p:spPr>
           <a:xfrm>
-            <a:off x="502920" y="3017520"/>
+            <a:off x="502920" y="2971800"/>
             <a:ext cx="5394960" cy="1234440"/>
           </a:xfrm>
           <a:prstGeom prst="roundRect">
@@ -3835,11 +3831,11 @@
             </a:avLst>
           </a:prstGeom>
           <a:solidFill>
-            <a:srgbClr val="F8FAFC"/>
+            <a:srgbClr val="112240"/>
           </a:solidFill>
-          <a:ln w="19050">
+          <a:ln w="15240">
             <a:solidFill>
-              <a:srgbClr val="E2E8F0"/>
+              <a:srgbClr val="1E3A5F"/>
             </a:solidFill>
           </a:ln>
           <a:effectLst/>
@@ -3868,14 +3864,14 @@
       </p:sp>
       <p:sp>
         <p:nvSpPr>
-          <p:cNvPr id="11" name="TextBox 10"/>
+          <p:cNvPr id="12" name="TextBox 11"/>
           <p:cNvSpPr txBox="1"/>
           <p:nvPr/>
         </p:nvSpPr>
         <p:spPr>
           <a:xfrm>
-            <a:off x="640080" y="3108960"/>
-            <a:ext cx="5120640" cy="1051560"/>
+            <a:off x="649224" y="3054096"/>
+            <a:ext cx="5102352" cy="1069848"/>
           </a:xfrm>
           <a:prstGeom prst="rect">
             <a:avLst/>
@@ -3891,7 +3887,7 @@
             <a:r>
               <a:rPr sz="1200" b="1">
                 <a:solidFill>
-                  <a:srgbClr val="1F3A93"/>
+                  <a:srgbClr val="E6F1FF"/>
                 </a:solidFill>
                 <a:latin typeface="Microsoft YaHei"/>
                 <a:ea typeface="Microsoft YaHei"/>
@@ -3902,13 +3898,13 @@
           <a:p>
             <a:pPr>
               <a:spcBef>
-                <a:spcPts val="400"/>
+                <a:spcPts val="300"/>
               </a:spcBef>
             </a:pPr>
             <a:r>
               <a:rPr sz="1050" b="0">
                 <a:solidFill>
-                  <a:srgbClr val="334155"/>
+                  <a:srgbClr val="8892B0"/>
                 </a:solidFill>
                 <a:latin typeface="Microsoft YaHei"/>
                 <a:ea typeface="Microsoft YaHei"/>
@@ -3920,13 +3916,13 @@
       </p:sp>
       <p:sp>
         <p:nvSpPr>
-          <p:cNvPr id="12" name="Rounded Rectangle 11"/>
+          <p:cNvPr id="13" name="Rounded Rectangle 12"/>
           <p:cNvSpPr/>
           <p:nvPr/>
         </p:nvSpPr>
         <p:spPr>
           <a:xfrm>
-            <a:off x="6126480" y="3017520"/>
+            <a:off x="6126480" y="2971800"/>
             <a:ext cx="5394960" cy="1234440"/>
           </a:xfrm>
           <a:prstGeom prst="roundRect">
@@ -3935,11 +3931,11 @@
             </a:avLst>
           </a:prstGeom>
           <a:solidFill>
-            <a:srgbClr val="F8FAFC"/>
+            <a:srgbClr val="112240"/>
           </a:solidFill>
-          <a:ln w="19050">
+          <a:ln w="15240">
             <a:solidFill>
-              <a:srgbClr val="E2E8F0"/>
+              <a:srgbClr val="1E3A5F"/>
             </a:solidFill>
           </a:ln>
           <a:effectLst/>
@@ -3968,14 +3964,14 @@
       </p:sp>
       <p:sp>
         <p:nvSpPr>
-          <p:cNvPr id="13" name="TextBox 12"/>
+          <p:cNvPr id="14" name="TextBox 13"/>
           <p:cNvSpPr txBox="1"/>
           <p:nvPr/>
         </p:nvSpPr>
         <p:spPr>
           <a:xfrm>
-            <a:off x="6263640" y="3108960"/>
-            <a:ext cx="5120640" cy="1051560"/>
+            <a:off x="6272784" y="3054096"/>
+            <a:ext cx="5102352" cy="1069848"/>
           </a:xfrm>
           <a:prstGeom prst="rect">
             <a:avLst/>
@@ -3991,7 +3987,7 @@
             <a:r>
               <a:rPr sz="1200" b="1">
                 <a:solidFill>
-                  <a:srgbClr val="1F3A93"/>
+                  <a:srgbClr val="E6F1FF"/>
                 </a:solidFill>
                 <a:latin typeface="Microsoft YaHei"/>
                 <a:ea typeface="Microsoft YaHei"/>
@@ -4002,13 +3998,13 @@
           <a:p>
             <a:pPr>
               <a:spcBef>
-                <a:spcPts val="400"/>
+                <a:spcPts val="300"/>
               </a:spcBef>
             </a:pPr>
             <a:r>
               <a:rPr sz="1050" b="0">
                 <a:solidFill>
-                  <a:srgbClr val="334155"/>
+                  <a:srgbClr val="8892B0"/>
                 </a:solidFill>
                 <a:latin typeface="Microsoft YaHei"/>
                 <a:ea typeface="Microsoft YaHei"/>
@@ -4020,13 +4016,13 @@
       </p:sp>
       <p:sp>
         <p:nvSpPr>
-          <p:cNvPr id="14" name="TextBox 13"/>
+          <p:cNvPr id="15" name="TextBox 14"/>
           <p:cNvSpPr txBox="1"/>
           <p:nvPr/>
         </p:nvSpPr>
         <p:spPr>
           <a:xfrm>
-            <a:off x="502920" y="4389120"/>
+            <a:off x="502920" y="4297680"/>
             <a:ext cx="11155680" cy="548640"/>
           </a:xfrm>
           <a:prstGeom prst="rect">
@@ -4048,7 +4044,7 @@
             <a:r>
               <a:rPr sz="1300" b="1">
                 <a:solidFill>
-                  <a:srgbClr val="0D9488"/>
+                  <a:srgbClr val="64FFDA"/>
                 </a:solidFill>
                 <a:latin typeface="Microsoft YaHei"/>
                 <a:ea typeface="Microsoft YaHei"/>
@@ -4091,7 +4087,7 @@
             <a:avLst/>
           </a:prstGeom>
           <a:solidFill>
-            <a:srgbClr val="FFFFFF"/>
+            <a:srgbClr val="0A192F"/>
           </a:solidFill>
           <a:ln>
             <a:noFill/>
@@ -4128,8 +4124,8 @@
         </p:nvSpPr>
         <p:spPr>
           <a:xfrm>
-            <a:off x="502920" y="365760"/>
-            <a:ext cx="10972800" cy="548640"/>
+            <a:off x="502920" y="384048"/>
+            <a:ext cx="1828800" cy="457200"/>
           </a:xfrm>
           <a:prstGeom prst="rect">
             <a:avLst/>
@@ -4148,34 +4144,74 @@
               </a:spcAft>
             </a:pPr>
             <a:r>
-              <a:rPr sz="2400" b="1">
-                <a:solidFill>
-                  <a:srgbClr val="0F172A"/>
-                </a:solidFill>
-                <a:latin typeface="Microsoft YaHei"/>
-                <a:ea typeface="Microsoft YaHei"/>
-              </a:rPr>
-              <a:t>当前 Demo：合成材料的可信闭环</a:t>
-            </a:r>
-          </a:p>
-        </p:txBody>
-      </p:sp>
-      <p:sp>
-        <p:nvSpPr>
-          <p:cNvPr id="4" name="Rectangle 3"/>
+              <a:rPr sz="1400" b="1">
+                <a:solidFill>
+                  <a:srgbClr val="64FFDA"/>
+                </a:solidFill>
+                <a:latin typeface="Consolas"/>
+                <a:ea typeface="Microsoft YaHei"/>
+              </a:rPr>
+              <a:t>11</a:t>
+            </a:r>
+          </a:p>
+        </p:txBody>
+      </p:sp>
+      <p:sp>
+        <p:nvSpPr>
+          <p:cNvPr id="4" name="TextBox 3"/>
+          <p:cNvSpPr txBox="1"/>
+          <p:nvPr/>
+        </p:nvSpPr>
+        <p:spPr>
+          <a:xfrm>
+            <a:off x="502920" y="365760"/>
+            <a:ext cx="10972800" cy="548640"/>
+          </a:xfrm>
+          <a:prstGeom prst="rect">
+            <a:avLst/>
+          </a:prstGeom>
+          <a:noFill/>
+        </p:spPr>
+        <p:txBody>
+          <a:bodyPr wrap="square" anchor="t">
+            <a:spAutoFit/>
+          </a:bodyPr>
+          <a:lstStyle/>
+          <a:p>
+            <a:pPr algn="l">
+              <a:spcAft>
+                <a:spcPts val="400"/>
+              </a:spcAft>
+            </a:pPr>
+            <a:r>
+              <a:rPr sz="2300" b="1">
+                <a:solidFill>
+                  <a:srgbClr val="E6F1FF"/>
+                </a:solidFill>
+                <a:latin typeface="Microsoft YaHei"/>
+                <a:ea typeface="Microsoft YaHei"/>
+              </a:rPr>
+              <a:t>  当前 Demo：合成材料的可信闭环</a:t>
+            </a:r>
+          </a:p>
+        </p:txBody>
+      </p:sp>
+      <p:sp>
+        <p:nvSpPr>
+          <p:cNvPr id="5" name="Rectangle 4"/>
           <p:cNvSpPr/>
           <p:nvPr/>
         </p:nvSpPr>
         <p:spPr>
           <a:xfrm>
-            <a:off x="502920" y="1078992"/>
-            <a:ext cx="1371600" cy="64008"/>
+            <a:off x="502920" y="1051560"/>
+            <a:ext cx="1280160" cy="45720"/>
           </a:xfrm>
           <a:prstGeom prst="rect">
             <a:avLst/>
           </a:prstGeom>
           <a:solidFill>
-            <a:srgbClr val="1F3A93"/>
+            <a:srgbClr val="64FFDA"/>
           </a:solidFill>
           <a:ln>
             <a:noFill/>
@@ -4206,14 +4242,14 @@
       </p:sp>
       <p:sp>
         <p:nvSpPr>
-          <p:cNvPr id="5" name="TextBox 4"/>
+          <p:cNvPr id="6" name="TextBox 5"/>
           <p:cNvSpPr txBox="1"/>
           <p:nvPr/>
         </p:nvSpPr>
         <p:spPr>
           <a:xfrm>
-            <a:off x="11430000" y="6446520"/>
-            <a:ext cx="548640" cy="365760"/>
+            <a:off x="10881360" y="411480"/>
+            <a:ext cx="822960" cy="365760"/>
           </a:xfrm>
           <a:prstGeom prst="rect">
             <a:avLst/>
@@ -4234,19 +4270,19 @@
             <a:r>
               <a:rPr sz="900" b="0">
                 <a:solidFill>
-                  <a:srgbClr val="64748B"/>
-                </a:solidFill>
-                <a:latin typeface="Microsoft YaHei"/>
-                <a:ea typeface="Microsoft YaHei"/>
-              </a:rPr>
-              <a:t>11/13</a:t>
+                  <a:srgbClr val="5A7A9E"/>
+                </a:solidFill>
+                <a:latin typeface="Consolas"/>
+                <a:ea typeface="Microsoft YaHei"/>
+              </a:rPr>
+              <a:t>11 / 13</a:t>
             </a:r>
           </a:p>
         </p:txBody>
       </p:sp>
       <p:pic>
         <p:nvPicPr>
-          <p:cNvPr id="6" name="Picture 5" descr="01-materials.png"/>
+          <p:cNvPr id="7" name="Picture 6" descr="01-materials.png"/>
           <p:cNvPicPr>
             <a:picLocks noChangeAspect="1"/>
           </p:cNvPicPr>
@@ -4260,7 +4296,7 @@
         </p:blipFill>
         <p:spPr>
           <a:xfrm>
-            <a:off x="502920" y="1737360"/>
+            <a:off x="502920" y="1691640"/>
             <a:ext cx="3657600" cy="2286000"/>
           </a:xfrm>
           <a:prstGeom prst="rect">
@@ -4270,13 +4306,13 @@
       </p:pic>
       <p:sp>
         <p:nvSpPr>
-          <p:cNvPr id="7" name="TextBox 6"/>
+          <p:cNvPr id="8" name="TextBox 7"/>
           <p:cNvSpPr txBox="1"/>
           <p:nvPr/>
         </p:nvSpPr>
         <p:spPr>
           <a:xfrm>
-            <a:off x="502920" y="4572000"/>
+            <a:off x="502920" y="4526280"/>
             <a:ext cx="3657600" cy="365760"/>
           </a:xfrm>
           <a:prstGeom prst="rect">
@@ -4298,9 +4334,9 @@
             <a:r>
               <a:rPr sz="1100" b="0">
                 <a:solidFill>
-                  <a:srgbClr val="64748B"/>
-                </a:solidFill>
-                <a:latin typeface="Microsoft YaHei"/>
+                  <a:srgbClr val="5A7A9E"/>
+                </a:solidFill>
+                <a:latin typeface="Consolas"/>
                 <a:ea typeface="Microsoft YaHei"/>
               </a:rPr>
               <a:t>材料</a:t>
@@ -4310,7 +4346,7 @@
       </p:sp>
       <p:pic>
         <p:nvPicPr>
-          <p:cNvPr id="8" name="Picture 7" descr="02-requirement-map.png"/>
+          <p:cNvPr id="9" name="Picture 8" descr="02-requirement-map.png"/>
           <p:cNvPicPr>
             <a:picLocks noChangeAspect="1"/>
           </p:cNvPicPr>
@@ -4324,7 +4360,7 @@
         </p:blipFill>
         <p:spPr>
           <a:xfrm>
-            <a:off x="4297680" y="1737360"/>
+            <a:off x="4297680" y="1691640"/>
             <a:ext cx="3657600" cy="2286000"/>
           </a:xfrm>
           <a:prstGeom prst="rect">
@@ -4334,13 +4370,13 @@
       </p:pic>
       <p:sp>
         <p:nvSpPr>
-          <p:cNvPr id="9" name="TextBox 8"/>
+          <p:cNvPr id="10" name="TextBox 9"/>
           <p:cNvSpPr txBox="1"/>
           <p:nvPr/>
         </p:nvSpPr>
         <p:spPr>
           <a:xfrm>
-            <a:off x="4297680" y="4572000"/>
+            <a:off x="4297680" y="4526280"/>
             <a:ext cx="3657600" cy="365760"/>
           </a:xfrm>
           <a:prstGeom prst="rect">
@@ -4362,9 +4398,9 @@
             <a:r>
               <a:rPr sz="1100" b="0">
                 <a:solidFill>
-                  <a:srgbClr val="64748B"/>
-                </a:solidFill>
-                <a:latin typeface="Microsoft YaHei"/>
+                  <a:srgbClr val="5A7A9E"/>
+                </a:solidFill>
+                <a:latin typeface="Consolas"/>
                 <a:ea typeface="Microsoft YaHei"/>
               </a:rPr>
               <a:t>需求地图确认</a:t>
@@ -4374,7 +4410,7 @@
       </p:sp>
       <p:pic>
         <p:nvPicPr>
-          <p:cNvPr id="10" name="Picture 9" descr="03-fact-match.png"/>
+          <p:cNvPr id="11" name="Picture 10" descr="03-fact-match.png"/>
           <p:cNvPicPr>
             <a:picLocks noChangeAspect="1"/>
           </p:cNvPicPr>
@@ -4388,7 +4424,7 @@
         </p:blipFill>
         <p:spPr>
           <a:xfrm>
-            <a:off x="8092440" y="1737360"/>
+            <a:off x="8092440" y="1691640"/>
             <a:ext cx="3657600" cy="2286000"/>
           </a:xfrm>
           <a:prstGeom prst="rect">
@@ -4398,13 +4434,13 @@
       </p:pic>
       <p:sp>
         <p:nvSpPr>
-          <p:cNvPr id="11" name="TextBox 10"/>
+          <p:cNvPr id="12" name="TextBox 11"/>
           <p:cNvSpPr txBox="1"/>
           <p:nvPr/>
         </p:nvSpPr>
         <p:spPr>
           <a:xfrm>
-            <a:off x="8092440" y="4572000"/>
+            <a:off x="8092440" y="4526280"/>
             <a:ext cx="3657600" cy="365760"/>
           </a:xfrm>
           <a:prstGeom prst="rect">
@@ -4426,9 +4462,9 @@
             <a:r>
               <a:rPr sz="1100" b="0">
                 <a:solidFill>
-                  <a:srgbClr val="64748B"/>
-                </a:solidFill>
-                <a:latin typeface="Microsoft YaHei"/>
+                  <a:srgbClr val="5A7A9E"/>
+                </a:solidFill>
+                <a:latin typeface="Consolas"/>
                 <a:ea typeface="Microsoft YaHei"/>
               </a:rPr>
               <a:t>事实匹配</a:t>
@@ -4438,13 +4474,13 @@
       </p:sp>
       <p:sp>
         <p:nvSpPr>
-          <p:cNvPr id="12" name="TextBox 11"/>
+          <p:cNvPr id="13" name="TextBox 12"/>
           <p:cNvSpPr txBox="1"/>
           <p:nvPr/>
         </p:nvSpPr>
         <p:spPr>
           <a:xfrm>
-            <a:off x="502920" y="5212080"/>
+            <a:off x="502920" y="5166360"/>
             <a:ext cx="11155680" cy="548640"/>
           </a:xfrm>
           <a:prstGeom prst="rect">
@@ -4466,7 +4502,7 @@
             <a:r>
               <a:rPr sz="1300" b="0">
                 <a:solidFill>
-                  <a:srgbClr val="334155"/>
+                  <a:srgbClr val="8892B0"/>
                 </a:solidFill>
                 <a:latin typeface="Microsoft YaHei"/>
                 <a:ea typeface="Microsoft YaHei"/>
@@ -4509,7 +4545,7 @@
             <a:avLst/>
           </a:prstGeom>
           <a:solidFill>
-            <a:srgbClr val="FFFFFF"/>
+            <a:srgbClr val="0A192F"/>
           </a:solidFill>
           <a:ln>
             <a:noFill/>
@@ -4546,8 +4582,8 @@
         </p:nvSpPr>
         <p:spPr>
           <a:xfrm>
-            <a:off x="502920" y="365760"/>
-            <a:ext cx="10972800" cy="548640"/>
+            <a:off x="502920" y="384048"/>
+            <a:ext cx="1828800" cy="457200"/>
           </a:xfrm>
           <a:prstGeom prst="rect">
             <a:avLst/>
@@ -4566,34 +4602,74 @@
               </a:spcAft>
             </a:pPr>
             <a:r>
-              <a:rPr sz="2400" b="1">
-                <a:solidFill>
-                  <a:srgbClr val="0F172A"/>
-                </a:solidFill>
-                <a:latin typeface="Microsoft YaHei"/>
-                <a:ea typeface="Microsoft YaHei"/>
-              </a:rPr>
-              <a:t>安全、开放与合规</a:t>
-            </a:r>
-          </a:p>
-        </p:txBody>
-      </p:sp>
-      <p:sp>
-        <p:nvSpPr>
-          <p:cNvPr id="4" name="Rectangle 3"/>
+              <a:rPr sz="1400" b="1">
+                <a:solidFill>
+                  <a:srgbClr val="64FFDA"/>
+                </a:solidFill>
+                <a:latin typeface="Consolas"/>
+                <a:ea typeface="Microsoft YaHei"/>
+              </a:rPr>
+              <a:t>12</a:t>
+            </a:r>
+          </a:p>
+        </p:txBody>
+      </p:sp>
+      <p:sp>
+        <p:nvSpPr>
+          <p:cNvPr id="4" name="TextBox 3"/>
+          <p:cNvSpPr txBox="1"/>
+          <p:nvPr/>
+        </p:nvSpPr>
+        <p:spPr>
+          <a:xfrm>
+            <a:off x="502920" y="365760"/>
+            <a:ext cx="10972800" cy="548640"/>
+          </a:xfrm>
+          <a:prstGeom prst="rect">
+            <a:avLst/>
+          </a:prstGeom>
+          <a:noFill/>
+        </p:spPr>
+        <p:txBody>
+          <a:bodyPr wrap="square" anchor="t">
+            <a:spAutoFit/>
+          </a:bodyPr>
+          <a:lstStyle/>
+          <a:p>
+            <a:pPr algn="l">
+              <a:spcAft>
+                <a:spcPts val="400"/>
+              </a:spcAft>
+            </a:pPr>
+            <a:r>
+              <a:rPr sz="2300" b="1">
+                <a:solidFill>
+                  <a:srgbClr val="E6F1FF"/>
+                </a:solidFill>
+                <a:latin typeface="Microsoft YaHei"/>
+                <a:ea typeface="Microsoft YaHei"/>
+              </a:rPr>
+              <a:t>  安全、开放与合规</a:t>
+            </a:r>
+          </a:p>
+        </p:txBody>
+      </p:sp>
+      <p:sp>
+        <p:nvSpPr>
+          <p:cNvPr id="5" name="Rectangle 4"/>
           <p:cNvSpPr/>
           <p:nvPr/>
         </p:nvSpPr>
         <p:spPr>
           <a:xfrm>
-            <a:off x="502920" y="1078992"/>
-            <a:ext cx="1371600" cy="64008"/>
+            <a:off x="502920" y="1051560"/>
+            <a:ext cx="1280160" cy="45720"/>
           </a:xfrm>
           <a:prstGeom prst="rect">
             <a:avLst/>
           </a:prstGeom>
           <a:solidFill>
-            <a:srgbClr val="0D9488"/>
+            <a:srgbClr val="64FFDA"/>
           </a:solidFill>
           <a:ln>
             <a:noFill/>
@@ -4624,14 +4700,14 @@
       </p:sp>
       <p:sp>
         <p:nvSpPr>
-          <p:cNvPr id="5" name="TextBox 4"/>
+          <p:cNvPr id="6" name="TextBox 5"/>
           <p:cNvSpPr txBox="1"/>
           <p:nvPr/>
         </p:nvSpPr>
         <p:spPr>
           <a:xfrm>
-            <a:off x="11430000" y="6446520"/>
-            <a:ext cx="548640" cy="365760"/>
+            <a:off x="10881360" y="411480"/>
+            <a:ext cx="822960" cy="365760"/>
           </a:xfrm>
           <a:prstGeom prst="rect">
             <a:avLst/>
@@ -4652,25 +4728,25 @@
             <a:r>
               <a:rPr sz="900" b="0">
                 <a:solidFill>
-                  <a:srgbClr val="64748B"/>
-                </a:solidFill>
-                <a:latin typeface="Microsoft YaHei"/>
-                <a:ea typeface="Microsoft YaHei"/>
-              </a:rPr>
-              <a:t>12/13</a:t>
-            </a:r>
-          </a:p>
-        </p:txBody>
-      </p:sp>
-      <p:sp>
-        <p:nvSpPr>
-          <p:cNvPr id="6" name="Rounded Rectangle 5"/>
+                  <a:srgbClr val="5A7A9E"/>
+                </a:solidFill>
+                <a:latin typeface="Consolas"/>
+                <a:ea typeface="Microsoft YaHei"/>
+              </a:rPr>
+              <a:t>12 / 13</a:t>
+            </a:r>
+          </a:p>
+        </p:txBody>
+      </p:sp>
+      <p:sp>
+        <p:nvSpPr>
+          <p:cNvPr id="7" name="Rounded Rectangle 6"/>
           <p:cNvSpPr/>
           <p:nvPr/>
         </p:nvSpPr>
         <p:spPr>
           <a:xfrm>
-            <a:off x="502920" y="1554480"/>
+            <a:off x="502920" y="1508760"/>
             <a:ext cx="5394960" cy="1234440"/>
           </a:xfrm>
           <a:prstGeom prst="roundRect">
@@ -4679,11 +4755,11 @@
             </a:avLst>
           </a:prstGeom>
           <a:solidFill>
-            <a:srgbClr val="F8FAFC"/>
+            <a:srgbClr val="112240"/>
           </a:solidFill>
-          <a:ln w="19050">
+          <a:ln w="15240">
             <a:solidFill>
-              <a:srgbClr val="E2E8F0"/>
+              <a:srgbClr val="1E3A5F"/>
             </a:solidFill>
           </a:ln>
           <a:effectLst/>
@@ -4712,14 +4788,14 @@
       </p:sp>
       <p:sp>
         <p:nvSpPr>
-          <p:cNvPr id="7" name="TextBox 6"/>
+          <p:cNvPr id="8" name="TextBox 7"/>
           <p:cNvSpPr txBox="1"/>
           <p:nvPr/>
         </p:nvSpPr>
         <p:spPr>
           <a:xfrm>
-            <a:off x="640080" y="1645920"/>
-            <a:ext cx="5120640" cy="1051560"/>
+            <a:off x="649224" y="1591056"/>
+            <a:ext cx="5102352" cy="1069848"/>
           </a:xfrm>
           <a:prstGeom prst="rect">
             <a:avLst/>
@@ -4735,7 +4811,7 @@
             <a:r>
               <a:rPr sz="1200" b="1">
                 <a:solidFill>
-                  <a:srgbClr val="0D9488"/>
+                  <a:srgbClr val="E6F1FF"/>
                 </a:solidFill>
                 <a:latin typeface="Microsoft YaHei"/>
                 <a:ea typeface="Microsoft YaHei"/>
@@ -4746,13 +4822,13 @@
           <a:p>
             <a:pPr>
               <a:spcBef>
-                <a:spcPts val="400"/>
+                <a:spcPts val="300"/>
               </a:spcBef>
             </a:pPr>
             <a:r>
               <a:rPr sz="1050" b="0">
                 <a:solidFill>
-                  <a:srgbClr val="334155"/>
+                  <a:srgbClr val="8892B0"/>
                 </a:solidFill>
                 <a:latin typeface="Microsoft YaHei"/>
                 <a:ea typeface="Microsoft YaHei"/>
@@ -4764,13 +4840,13 @@
       </p:sp>
       <p:sp>
         <p:nvSpPr>
-          <p:cNvPr id="8" name="Rounded Rectangle 7"/>
+          <p:cNvPr id="9" name="Rounded Rectangle 8"/>
           <p:cNvSpPr/>
           <p:nvPr/>
         </p:nvSpPr>
         <p:spPr>
           <a:xfrm>
-            <a:off x="6126480" y="1554480"/>
+            <a:off x="6126480" y="1508760"/>
             <a:ext cx="5394960" cy="1234440"/>
           </a:xfrm>
           <a:prstGeom prst="roundRect">
@@ -4779,11 +4855,11 @@
             </a:avLst>
           </a:prstGeom>
           <a:solidFill>
-            <a:srgbClr val="F8FAFC"/>
+            <a:srgbClr val="112240"/>
           </a:solidFill>
-          <a:ln w="19050">
+          <a:ln w="15240">
             <a:solidFill>
-              <a:srgbClr val="E2E8F0"/>
+              <a:srgbClr val="1E3A5F"/>
             </a:solidFill>
           </a:ln>
           <a:effectLst/>
@@ -4812,14 +4888,14 @@
       </p:sp>
       <p:sp>
         <p:nvSpPr>
-          <p:cNvPr id="9" name="TextBox 8"/>
+          <p:cNvPr id="10" name="TextBox 9"/>
           <p:cNvSpPr txBox="1"/>
           <p:nvPr/>
         </p:nvSpPr>
         <p:spPr>
           <a:xfrm>
-            <a:off x="6263640" y="1645920"/>
-            <a:ext cx="5120640" cy="1051560"/>
+            <a:off x="6272784" y="1591056"/>
+            <a:ext cx="5102352" cy="1069848"/>
           </a:xfrm>
           <a:prstGeom prst="rect">
             <a:avLst/>
@@ -4835,7 +4911,7 @@
             <a:r>
               <a:rPr sz="1200" b="1">
                 <a:solidFill>
-                  <a:srgbClr val="0D9488"/>
+                  <a:srgbClr val="E6F1FF"/>
                 </a:solidFill>
                 <a:latin typeface="Microsoft YaHei"/>
                 <a:ea typeface="Microsoft YaHei"/>
@@ -4846,13 +4922,13 @@
           <a:p>
             <a:pPr>
               <a:spcBef>
-                <a:spcPts val="400"/>
+                <a:spcPts val="300"/>
               </a:spcBef>
             </a:pPr>
             <a:r>
               <a:rPr sz="1050" b="0">
                 <a:solidFill>
-                  <a:srgbClr val="334155"/>
+                  <a:srgbClr val="8892B0"/>
                 </a:solidFill>
                 <a:latin typeface="Microsoft YaHei"/>
                 <a:ea typeface="Microsoft YaHei"/>
@@ -4864,13 +4940,13 @@
       </p:sp>
       <p:sp>
         <p:nvSpPr>
-          <p:cNvPr id="10" name="Rounded Rectangle 9"/>
+          <p:cNvPr id="11" name="Rounded Rectangle 10"/>
           <p:cNvSpPr/>
           <p:nvPr/>
         </p:nvSpPr>
         <p:spPr>
           <a:xfrm>
-            <a:off x="502920" y="3017520"/>
+            <a:off x="502920" y="2971800"/>
             <a:ext cx="5394960" cy="1234440"/>
           </a:xfrm>
           <a:prstGeom prst="roundRect">
@@ -4879,11 +4955,11 @@
             </a:avLst>
           </a:prstGeom>
           <a:solidFill>
-            <a:srgbClr val="F8FAFC"/>
+            <a:srgbClr val="112240"/>
           </a:solidFill>
-          <a:ln w="19050">
+          <a:ln w="15240">
             <a:solidFill>
-              <a:srgbClr val="E2E8F0"/>
+              <a:srgbClr val="1E3A5F"/>
             </a:solidFill>
           </a:ln>
           <a:effectLst/>
@@ -4912,14 +4988,14 @@
       </p:sp>
       <p:sp>
         <p:nvSpPr>
-          <p:cNvPr id="11" name="TextBox 10"/>
+          <p:cNvPr id="12" name="TextBox 11"/>
           <p:cNvSpPr txBox="1"/>
           <p:nvPr/>
         </p:nvSpPr>
         <p:spPr>
           <a:xfrm>
-            <a:off x="640080" y="3108960"/>
-            <a:ext cx="5120640" cy="1051560"/>
+            <a:off x="649224" y="3054096"/>
+            <a:ext cx="5102352" cy="1069848"/>
           </a:xfrm>
           <a:prstGeom prst="rect">
             <a:avLst/>
@@ -4935,7 +5011,7 @@
             <a:r>
               <a:rPr sz="1200" b="1">
                 <a:solidFill>
-                  <a:srgbClr val="0D9488"/>
+                  <a:srgbClr val="E6F1FF"/>
                 </a:solidFill>
                 <a:latin typeface="Microsoft YaHei"/>
                 <a:ea typeface="Microsoft YaHei"/>
@@ -4946,13 +5022,13 @@
           <a:p>
             <a:pPr>
               <a:spcBef>
-                <a:spcPts val="400"/>
+                <a:spcPts val="300"/>
               </a:spcBef>
             </a:pPr>
             <a:r>
               <a:rPr sz="1050" b="0">
                 <a:solidFill>
-                  <a:srgbClr val="334155"/>
+                  <a:srgbClr val="8892B0"/>
                 </a:solidFill>
                 <a:latin typeface="Microsoft YaHei"/>
                 <a:ea typeface="Microsoft YaHei"/>
@@ -4964,13 +5040,13 @@
       </p:sp>
       <p:sp>
         <p:nvSpPr>
-          <p:cNvPr id="12" name="Rounded Rectangle 11"/>
+          <p:cNvPr id="13" name="Rounded Rectangle 12"/>
           <p:cNvSpPr/>
           <p:nvPr/>
         </p:nvSpPr>
         <p:spPr>
           <a:xfrm>
-            <a:off x="6126480" y="3017520"/>
+            <a:off x="6126480" y="2971800"/>
             <a:ext cx="5394960" cy="1234440"/>
           </a:xfrm>
           <a:prstGeom prst="roundRect">
@@ -4979,11 +5055,11 @@
             </a:avLst>
           </a:prstGeom>
           <a:solidFill>
-            <a:srgbClr val="F8FAFC"/>
+            <a:srgbClr val="112240"/>
           </a:solidFill>
-          <a:ln w="19050">
+          <a:ln w="15240">
             <a:solidFill>
-              <a:srgbClr val="E2E8F0"/>
+              <a:srgbClr val="1E3A5F"/>
             </a:solidFill>
           </a:ln>
           <a:effectLst/>
@@ -5012,14 +5088,14 @@
       </p:sp>
       <p:sp>
         <p:nvSpPr>
-          <p:cNvPr id="13" name="TextBox 12"/>
+          <p:cNvPr id="14" name="TextBox 13"/>
           <p:cNvSpPr txBox="1"/>
           <p:nvPr/>
         </p:nvSpPr>
         <p:spPr>
           <a:xfrm>
-            <a:off x="6263640" y="3108960"/>
-            <a:ext cx="5120640" cy="1051560"/>
+            <a:off x="6272784" y="3054096"/>
+            <a:ext cx="5102352" cy="1069848"/>
           </a:xfrm>
           <a:prstGeom prst="rect">
             <a:avLst/>
@@ -5035,7 +5111,7 @@
             <a:r>
               <a:rPr sz="1200" b="1">
                 <a:solidFill>
-                  <a:srgbClr val="0D9488"/>
+                  <a:srgbClr val="E6F1FF"/>
                 </a:solidFill>
                 <a:latin typeface="Microsoft YaHei"/>
                 <a:ea typeface="Microsoft YaHei"/>
@@ -5046,13 +5122,13 @@
           <a:p>
             <a:pPr>
               <a:spcBef>
-                <a:spcPts val="400"/>
+                <a:spcPts val="300"/>
               </a:spcBef>
             </a:pPr>
             <a:r>
               <a:rPr sz="1050" b="0">
                 <a:solidFill>
-                  <a:srgbClr val="334155"/>
+                  <a:srgbClr val="8892B0"/>
                 </a:solidFill>
                 <a:latin typeface="Microsoft YaHei"/>
                 <a:ea typeface="Microsoft YaHei"/>
@@ -5064,13 +5140,13 @@
       </p:sp>
       <p:sp>
         <p:nvSpPr>
-          <p:cNvPr id="14" name="TextBox 13"/>
+          <p:cNvPr id="15" name="TextBox 14"/>
           <p:cNvSpPr txBox="1"/>
           <p:nvPr/>
         </p:nvSpPr>
         <p:spPr>
           <a:xfrm>
-            <a:off x="502920" y="4297680"/>
+            <a:off x="502920" y="4251960"/>
             <a:ext cx="11155680" cy="457200"/>
           </a:xfrm>
           <a:prstGeom prst="rect">
@@ -5092,7 +5168,7 @@
             <a:r>
               <a:rPr sz="1200" b="0">
                 <a:solidFill>
-                  <a:srgbClr val="334155"/>
+                  <a:srgbClr val="8892B0"/>
                 </a:solidFill>
                 <a:latin typeface="Microsoft YaHei"/>
                 <a:ea typeface="Microsoft YaHei"/>
@@ -5104,13 +5180,13 @@
       </p:sp>
       <p:sp>
         <p:nvSpPr>
-          <p:cNvPr id="15" name="TextBox 14"/>
+          <p:cNvPr id="16" name="TextBox 15"/>
           <p:cNvSpPr txBox="1"/>
           <p:nvPr/>
         </p:nvSpPr>
         <p:spPr>
           <a:xfrm>
-            <a:off x="502920" y="4846320"/>
+            <a:off x="502920" y="4800600"/>
             <a:ext cx="11155680" cy="457200"/>
           </a:xfrm>
           <a:prstGeom prst="rect">
@@ -5132,7 +5208,7 @@
             <a:r>
               <a:rPr sz="1200" b="0">
                 <a:solidFill>
-                  <a:srgbClr val="334155"/>
+                  <a:srgbClr val="8892B0"/>
                 </a:solidFill>
                 <a:latin typeface="Microsoft YaHei"/>
                 <a:ea typeface="Microsoft YaHei"/>
@@ -5175,7 +5251,7 @@
             <a:avLst/>
           </a:prstGeom>
           <a:solidFill>
-            <a:srgbClr val="FFFFFF"/>
+            <a:srgbClr val="0A192F"/>
           </a:solidFill>
           <a:ln>
             <a:noFill/>
@@ -5212,8 +5288,8 @@
         </p:nvSpPr>
         <p:spPr>
           <a:xfrm>
-            <a:off x="502920" y="365760"/>
-            <a:ext cx="10972800" cy="548640"/>
+            <a:off x="502920" y="384048"/>
+            <a:ext cx="1828800" cy="457200"/>
           </a:xfrm>
           <a:prstGeom prst="rect">
             <a:avLst/>
@@ -5232,34 +5308,74 @@
               </a:spcAft>
             </a:pPr>
             <a:r>
-              <a:rPr sz="2400" b="1">
-                <a:solidFill>
-                  <a:srgbClr val="0F172A"/>
-                </a:solidFill>
-                <a:latin typeface="Microsoft YaHei"/>
-                <a:ea typeface="Microsoft YaHei"/>
-              </a:rPr>
-              <a:t>复赛路线：从方案到可运行系统</a:t>
-            </a:r>
-          </a:p>
-        </p:txBody>
-      </p:sp>
-      <p:sp>
-        <p:nvSpPr>
-          <p:cNvPr id="4" name="Rectangle 3"/>
+              <a:rPr sz="1400" b="1">
+                <a:solidFill>
+                  <a:srgbClr val="64FFDA"/>
+                </a:solidFill>
+                <a:latin typeface="Consolas"/>
+                <a:ea typeface="Microsoft YaHei"/>
+              </a:rPr>
+              <a:t>13</a:t>
+            </a:r>
+          </a:p>
+        </p:txBody>
+      </p:sp>
+      <p:sp>
+        <p:nvSpPr>
+          <p:cNvPr id="4" name="TextBox 3"/>
+          <p:cNvSpPr txBox="1"/>
+          <p:nvPr/>
+        </p:nvSpPr>
+        <p:spPr>
+          <a:xfrm>
+            <a:off x="502920" y="365760"/>
+            <a:ext cx="10972800" cy="548640"/>
+          </a:xfrm>
+          <a:prstGeom prst="rect">
+            <a:avLst/>
+          </a:prstGeom>
+          <a:noFill/>
+        </p:spPr>
+        <p:txBody>
+          <a:bodyPr wrap="square" anchor="t">
+            <a:spAutoFit/>
+          </a:bodyPr>
+          <a:lstStyle/>
+          <a:p>
+            <a:pPr algn="l">
+              <a:spcAft>
+                <a:spcPts val="400"/>
+              </a:spcAft>
+            </a:pPr>
+            <a:r>
+              <a:rPr sz="2300" b="1">
+                <a:solidFill>
+                  <a:srgbClr val="E6F1FF"/>
+                </a:solidFill>
+                <a:latin typeface="Microsoft YaHei"/>
+                <a:ea typeface="Microsoft YaHei"/>
+              </a:rPr>
+              <a:t>  复赛路线：从方案到可运行系统</a:t>
+            </a:r>
+          </a:p>
+        </p:txBody>
+      </p:sp>
+      <p:sp>
+        <p:nvSpPr>
+          <p:cNvPr id="5" name="Rectangle 4"/>
           <p:cNvSpPr/>
           <p:nvPr/>
         </p:nvSpPr>
         <p:spPr>
           <a:xfrm>
-            <a:off x="502920" y="1078992"/>
-            <a:ext cx="1371600" cy="64008"/>
+            <a:off x="502920" y="1051560"/>
+            <a:ext cx="1280160" cy="45720"/>
           </a:xfrm>
           <a:prstGeom prst="rect">
             <a:avLst/>
           </a:prstGeom>
           <a:solidFill>
-            <a:srgbClr val="1F3A93"/>
+            <a:srgbClr val="64FFDA"/>
           </a:solidFill>
           <a:ln>
             <a:noFill/>
@@ -5290,14 +5406,14 @@
       </p:sp>
       <p:sp>
         <p:nvSpPr>
-          <p:cNvPr id="5" name="TextBox 4"/>
+          <p:cNvPr id="6" name="TextBox 5"/>
           <p:cNvSpPr txBox="1"/>
           <p:nvPr/>
         </p:nvSpPr>
         <p:spPr>
           <a:xfrm>
-            <a:off x="11430000" y="6446520"/>
-            <a:ext cx="548640" cy="365760"/>
+            <a:off x="10881360" y="411480"/>
+            <a:ext cx="822960" cy="365760"/>
           </a:xfrm>
           <a:prstGeom prst="rect">
             <a:avLst/>
@@ -5318,19 +5434,19 @@
             <a:r>
               <a:rPr sz="900" b="0">
                 <a:solidFill>
-                  <a:srgbClr val="64748B"/>
-                </a:solidFill>
-                <a:latin typeface="Microsoft YaHei"/>
-                <a:ea typeface="Microsoft YaHei"/>
-              </a:rPr>
-              <a:t>13/13</a:t>
-            </a:r>
-          </a:p>
-        </p:txBody>
-      </p:sp>
-      <p:sp>
-        <p:nvSpPr>
-          <p:cNvPr id="6" name="Rounded Rectangle 5"/>
+                  <a:srgbClr val="5A7A9E"/>
+                </a:solidFill>
+                <a:latin typeface="Consolas"/>
+                <a:ea typeface="Microsoft YaHei"/>
+              </a:rPr>
+              <a:t>13 / 13</a:t>
+            </a:r>
+          </a:p>
+        </p:txBody>
+      </p:sp>
+      <p:sp>
+        <p:nvSpPr>
+          <p:cNvPr id="7" name="Rounded Rectangle 6"/>
           <p:cNvSpPr/>
           <p:nvPr/>
         </p:nvSpPr>
@@ -5345,11 +5461,11 @@
             </a:avLst>
           </a:prstGeom>
           <a:solidFill>
-            <a:srgbClr val="F8FAFC"/>
+            <a:srgbClr val="112240"/>
           </a:solidFill>
-          <a:ln w="19050">
+          <a:ln w="15240">
             <a:solidFill>
-              <a:srgbClr val="E2E8F0"/>
+              <a:srgbClr val="1E3A5F"/>
             </a:solidFill>
           </a:ln>
           <a:effectLst/>
@@ -5378,13 +5494,13 @@
       </p:sp>
       <p:sp>
         <p:nvSpPr>
-          <p:cNvPr id="7" name="TextBox 6"/>
+          <p:cNvPr id="8" name="TextBox 7"/>
           <p:cNvSpPr txBox="1"/>
           <p:nvPr/>
         </p:nvSpPr>
         <p:spPr>
           <a:xfrm>
-            <a:off x="502920" y="2286000"/>
+            <a:off x="502920" y="2240280"/>
             <a:ext cx="2103120" cy="457200"/>
           </a:xfrm>
           <a:prstGeom prst="rect">
@@ -5404,11 +5520,11 @@
               </a:spcAft>
             </a:pPr>
             <a:r>
-              <a:rPr sz="2000" b="1">
-                <a:solidFill>
-                  <a:srgbClr val="1F3A93"/>
-                </a:solidFill>
-                <a:latin typeface="Microsoft YaHei"/>
+              <a:rPr sz="1900" b="1">
+                <a:solidFill>
+                  <a:srgbClr val="64FFDA"/>
+                </a:solidFill>
+                <a:latin typeface="Consolas"/>
                 <a:ea typeface="Microsoft YaHei"/>
               </a:rPr>
               <a:t>01</a:t>
@@ -5418,13 +5534,13 @@
       </p:sp>
       <p:sp>
         <p:nvSpPr>
-          <p:cNvPr id="8" name="TextBox 7"/>
+          <p:cNvPr id="9" name="TextBox 8"/>
           <p:cNvSpPr txBox="1"/>
           <p:nvPr/>
         </p:nvSpPr>
         <p:spPr>
           <a:xfrm>
-            <a:off x="502920" y="2834640"/>
+            <a:off x="502920" y="2743200"/>
             <a:ext cx="2103120" cy="1280160"/>
           </a:xfrm>
           <a:prstGeom prst="rect">
@@ -5444,9 +5560,9 @@
               </a:spcAft>
             </a:pPr>
             <a:r>
-              <a:rPr sz="1100" b="0">
-                <a:solidFill>
-                  <a:srgbClr val="334155"/>
+              <a:rPr sz="1050" b="0">
+                <a:solidFill>
+                  <a:srgbClr val="8892B0"/>
                 </a:solidFill>
                 <a:latin typeface="Microsoft YaHei"/>
                 <a:ea typeface="Microsoft YaHei"/>
@@ -5461,21 +5577,21 @@
               </a:spcAft>
             </a:pPr>
             <a:r>
-              <a:rPr sz="1100" b="0">
-                <a:solidFill>
-                  <a:srgbClr val="334155"/>
-                </a:solidFill>
-                <a:latin typeface="Microsoft YaHei"/>
-                <a:ea typeface="Microsoft YaHei"/>
-              </a:rPr>
-              <a:t>主控 + 4 Agent 可执行协同层</a:t>
-            </a:r>
-          </a:p>
-        </p:txBody>
-      </p:sp>
-      <p:sp>
-        <p:nvSpPr>
-          <p:cNvPr id="9" name="Rounded Rectangle 8"/>
+              <a:rPr sz="1050" b="0">
+                <a:solidFill>
+                  <a:srgbClr val="8892B0"/>
+                </a:solidFill>
+                <a:latin typeface="Microsoft YaHei"/>
+                <a:ea typeface="Microsoft YaHei"/>
+              </a:rPr>
+              <a:t>主控 + 4 Agent 协同层</a:t>
+            </a:r>
+          </a:p>
+        </p:txBody>
+      </p:sp>
+      <p:sp>
+        <p:nvSpPr>
+          <p:cNvPr id="10" name="Rounded Rectangle 9"/>
           <p:cNvSpPr/>
           <p:nvPr/>
         </p:nvSpPr>
@@ -5490,11 +5606,11 @@
             </a:avLst>
           </a:prstGeom>
           <a:solidFill>
-            <a:srgbClr val="F8FAFC"/>
+            <a:srgbClr val="112240"/>
           </a:solidFill>
-          <a:ln w="19050">
+          <a:ln w="15240">
             <a:solidFill>
-              <a:srgbClr val="E2E8F0"/>
+              <a:srgbClr val="1E3A5F"/>
             </a:solidFill>
           </a:ln>
           <a:effectLst/>
@@ -5523,13 +5639,13 @@
       </p:sp>
       <p:sp>
         <p:nvSpPr>
-          <p:cNvPr id="10" name="TextBox 9"/>
+          <p:cNvPr id="11" name="TextBox 10"/>
           <p:cNvSpPr txBox="1"/>
           <p:nvPr/>
         </p:nvSpPr>
         <p:spPr>
           <a:xfrm>
-            <a:off x="2770632" y="2286000"/>
+            <a:off x="2770632" y="2240280"/>
             <a:ext cx="2103120" cy="457200"/>
           </a:xfrm>
           <a:prstGeom prst="rect">
@@ -5549,11 +5665,11 @@
               </a:spcAft>
             </a:pPr>
             <a:r>
-              <a:rPr sz="2000" b="1">
-                <a:solidFill>
-                  <a:srgbClr val="1F3A93"/>
-                </a:solidFill>
-                <a:latin typeface="Microsoft YaHei"/>
+              <a:rPr sz="1900" b="1">
+                <a:solidFill>
+                  <a:srgbClr val="64FFDA"/>
+                </a:solidFill>
+                <a:latin typeface="Consolas"/>
                 <a:ea typeface="Microsoft YaHei"/>
               </a:rPr>
               <a:t>02</a:t>
@@ -5563,13 +5679,13 @@
       </p:sp>
       <p:sp>
         <p:nvSpPr>
-          <p:cNvPr id="11" name="TextBox 10"/>
+          <p:cNvPr id="12" name="TextBox 11"/>
           <p:cNvSpPr txBox="1"/>
           <p:nvPr/>
         </p:nvSpPr>
         <p:spPr>
           <a:xfrm>
-            <a:off x="2770632" y="2834640"/>
+            <a:off x="2770632" y="2743200"/>
             <a:ext cx="2103120" cy="1280160"/>
           </a:xfrm>
           <a:prstGeom prst="rect">
@@ -5589,9 +5705,9 @@
               </a:spcAft>
             </a:pPr>
             <a:r>
-              <a:rPr sz="1100" b="0">
-                <a:solidFill>
-                  <a:srgbClr val="334155"/>
+              <a:rPr sz="1050" b="0">
+                <a:solidFill>
+                  <a:srgbClr val="8892B0"/>
                 </a:solidFill>
                 <a:latin typeface="Microsoft YaHei"/>
                 <a:ea typeface="Microsoft YaHei"/>
@@ -5606,21 +5722,21 @@
               </a:spcAft>
             </a:pPr>
             <a:r>
-              <a:rPr sz="1100" b="0">
-                <a:solidFill>
-                  <a:srgbClr val="334155"/>
-                </a:solidFill>
-                <a:latin typeface="Microsoft YaHei"/>
-                <a:ea typeface="Microsoft YaHei"/>
-              </a:rPr>
-              <a:t>版本/发布/回滚/评估/分发</a:t>
-            </a:r>
-          </a:p>
-        </p:txBody>
-      </p:sp>
-      <p:sp>
-        <p:nvSpPr>
-          <p:cNvPr id="12" name="Rounded Rectangle 11"/>
+              <a:rPr sz="1050" b="0">
+                <a:solidFill>
+                  <a:srgbClr val="8892B0"/>
+                </a:solidFill>
+                <a:latin typeface="Microsoft YaHei"/>
+                <a:ea typeface="Microsoft YaHei"/>
+              </a:rPr>
+              <a:t>版本/发布/回滚/评估</a:t>
+            </a:r>
+          </a:p>
+        </p:txBody>
+      </p:sp>
+      <p:sp>
+        <p:nvSpPr>
+          <p:cNvPr id="13" name="Rounded Rectangle 12"/>
           <p:cNvSpPr/>
           <p:nvPr/>
         </p:nvSpPr>
@@ -5635,11 +5751,11 @@
             </a:avLst>
           </a:prstGeom>
           <a:solidFill>
-            <a:srgbClr val="F8FAFC"/>
+            <a:srgbClr val="112240"/>
           </a:solidFill>
-          <a:ln w="19050">
+          <a:ln w="15240">
             <a:solidFill>
-              <a:srgbClr val="E2E8F0"/>
+              <a:srgbClr val="1E3A5F"/>
             </a:solidFill>
           </a:ln>
           <a:effectLst/>
@@ -5668,13 +5784,13 @@
       </p:sp>
       <p:sp>
         <p:nvSpPr>
-          <p:cNvPr id="13" name="TextBox 12"/>
+          <p:cNvPr id="14" name="TextBox 13"/>
           <p:cNvSpPr txBox="1"/>
           <p:nvPr/>
         </p:nvSpPr>
         <p:spPr>
           <a:xfrm>
-            <a:off x="5038344" y="2286000"/>
+            <a:off x="5038344" y="2240280"/>
             <a:ext cx="2103120" cy="457200"/>
           </a:xfrm>
           <a:prstGeom prst="rect">
@@ -5694,11 +5810,11 @@
               </a:spcAft>
             </a:pPr>
             <a:r>
-              <a:rPr sz="2000" b="1">
-                <a:solidFill>
-                  <a:srgbClr val="1F3A93"/>
-                </a:solidFill>
-                <a:latin typeface="Microsoft YaHei"/>
+              <a:rPr sz="1900" b="1">
+                <a:solidFill>
+                  <a:srgbClr val="64FFDA"/>
+                </a:solidFill>
+                <a:latin typeface="Consolas"/>
                 <a:ea typeface="Microsoft YaHei"/>
               </a:rPr>
               <a:t>03</a:t>
@@ -5708,13 +5824,13 @@
       </p:sp>
       <p:sp>
         <p:nvSpPr>
-          <p:cNvPr id="14" name="TextBox 13"/>
+          <p:cNvPr id="15" name="TextBox 14"/>
           <p:cNvSpPr txBox="1"/>
           <p:nvPr/>
         </p:nvSpPr>
         <p:spPr>
           <a:xfrm>
-            <a:off x="5038344" y="2834640"/>
+            <a:off x="5038344" y="2743200"/>
             <a:ext cx="2103120" cy="1280160"/>
           </a:xfrm>
           <a:prstGeom prst="rect">
@@ -5734,9 +5850,9 @@
               </a:spcAft>
             </a:pPr>
             <a:r>
-              <a:rPr sz="1100" b="0">
-                <a:solidFill>
-                  <a:srgbClr val="334155"/>
+              <a:rPr sz="1050" b="0">
+                <a:solidFill>
+                  <a:srgbClr val="8892B0"/>
                 </a:solidFill>
                 <a:latin typeface="Microsoft YaHei"/>
                 <a:ea typeface="Microsoft YaHei"/>
@@ -5751,21 +5867,21 @@
               </a:spcAft>
             </a:pPr>
             <a:r>
-              <a:rPr sz="1100" b="0">
-                <a:solidFill>
-                  <a:srgbClr val="334155"/>
-                </a:solidFill>
-                <a:latin typeface="Microsoft YaHei"/>
-                <a:ea typeface="Microsoft YaHei"/>
-              </a:rPr>
-              <a:t>完整链路 + 日志/Trace/指标</a:t>
-            </a:r>
-          </a:p>
-        </p:txBody>
-      </p:sp>
-      <p:sp>
-        <p:nvSpPr>
-          <p:cNvPr id="15" name="Rounded Rectangle 14"/>
+              <a:rPr sz="1050" b="0">
+                <a:solidFill>
+                  <a:srgbClr val="8892B0"/>
+                </a:solidFill>
+                <a:latin typeface="Microsoft YaHei"/>
+                <a:ea typeface="Microsoft YaHei"/>
+              </a:rPr>
+              <a:t>链路 + 日志/Trace/指标</a:t>
+            </a:r>
+          </a:p>
+        </p:txBody>
+      </p:sp>
+      <p:sp>
+        <p:nvSpPr>
+          <p:cNvPr id="16" name="Rounded Rectangle 15"/>
           <p:cNvSpPr/>
           <p:nvPr/>
         </p:nvSpPr>
@@ -5780,11 +5896,11 @@
             </a:avLst>
           </a:prstGeom>
           <a:solidFill>
-            <a:srgbClr val="F8FAFC"/>
+            <a:srgbClr val="112240"/>
           </a:solidFill>
-          <a:ln w="19050">
+          <a:ln w="15240">
             <a:solidFill>
-              <a:srgbClr val="E2E8F0"/>
+              <a:srgbClr val="1E3A5F"/>
             </a:solidFill>
           </a:ln>
           <a:effectLst/>
@@ -5813,13 +5929,13 @@
       </p:sp>
       <p:sp>
         <p:nvSpPr>
-          <p:cNvPr id="16" name="TextBox 15"/>
+          <p:cNvPr id="17" name="TextBox 16"/>
           <p:cNvSpPr txBox="1"/>
           <p:nvPr/>
         </p:nvSpPr>
         <p:spPr>
           <a:xfrm>
-            <a:off x="7306056" y="2286000"/>
+            <a:off x="7306056" y="2240280"/>
             <a:ext cx="2103120" cy="457200"/>
           </a:xfrm>
           <a:prstGeom prst="rect">
@@ -5839,11 +5955,11 @@
               </a:spcAft>
             </a:pPr>
             <a:r>
-              <a:rPr sz="2000" b="1">
-                <a:solidFill>
-                  <a:srgbClr val="1F3A93"/>
-                </a:solidFill>
-                <a:latin typeface="Microsoft YaHei"/>
+              <a:rPr sz="1900" b="1">
+                <a:solidFill>
+                  <a:srgbClr val="64FFDA"/>
+                </a:solidFill>
+                <a:latin typeface="Consolas"/>
                 <a:ea typeface="Microsoft YaHei"/>
               </a:rPr>
               <a:t>04</a:t>
@@ -5853,13 +5969,13 @@
       </p:sp>
       <p:sp>
         <p:nvSpPr>
-          <p:cNvPr id="17" name="TextBox 16"/>
+          <p:cNvPr id="18" name="TextBox 17"/>
           <p:cNvSpPr txBox="1"/>
           <p:nvPr/>
         </p:nvSpPr>
         <p:spPr>
           <a:xfrm>
-            <a:off x="7306056" y="2834640"/>
+            <a:off x="7306056" y="2743200"/>
             <a:ext cx="2103120" cy="1280160"/>
           </a:xfrm>
           <a:prstGeom prst="rect">
@@ -5879,9 +5995,9 @@
               </a:spcAft>
             </a:pPr>
             <a:r>
-              <a:rPr sz="1100" b="0">
-                <a:solidFill>
-                  <a:srgbClr val="334155"/>
+              <a:rPr sz="1050" b="0">
+                <a:solidFill>
+                  <a:srgbClr val="8892B0"/>
                 </a:solidFill>
                 <a:latin typeface="Microsoft YaHei"/>
                 <a:ea typeface="Microsoft YaHei"/>
@@ -5896,9 +6012,9 @@
               </a:spcAft>
             </a:pPr>
             <a:r>
-              <a:rPr sz="1100" b="0">
-                <a:solidFill>
-                  <a:srgbClr val="334155"/>
+              <a:rPr sz="1050" b="0">
+                <a:solidFill>
+                  <a:srgbClr val="8892B0"/>
                 </a:solidFill>
                 <a:latin typeface="Microsoft YaHei"/>
                 <a:ea typeface="Microsoft YaHei"/>
@@ -5910,7 +6026,7 @@
       </p:sp>
       <p:sp>
         <p:nvSpPr>
-          <p:cNvPr id="18" name="Rounded Rectangle 17"/>
+          <p:cNvPr id="19" name="Rounded Rectangle 18"/>
           <p:cNvSpPr/>
           <p:nvPr/>
         </p:nvSpPr>
@@ -5925,11 +6041,11 @@
             </a:avLst>
           </a:prstGeom>
           <a:solidFill>
-            <a:srgbClr val="F8FAFC"/>
+            <a:srgbClr val="112240"/>
           </a:solidFill>
-          <a:ln w="19050">
+          <a:ln w="15240">
             <a:solidFill>
-              <a:srgbClr val="E2E8F0"/>
+              <a:srgbClr val="1E3A5F"/>
             </a:solidFill>
           </a:ln>
           <a:effectLst/>
@@ -5958,13 +6074,13 @@
       </p:sp>
       <p:sp>
         <p:nvSpPr>
-          <p:cNvPr id="19" name="TextBox 18"/>
+          <p:cNvPr id="20" name="TextBox 19"/>
           <p:cNvSpPr txBox="1"/>
           <p:nvPr/>
         </p:nvSpPr>
         <p:spPr>
           <a:xfrm>
-            <a:off x="9573768" y="2286000"/>
+            <a:off x="9573768" y="2240280"/>
             <a:ext cx="2103120" cy="457200"/>
           </a:xfrm>
           <a:prstGeom prst="rect">
@@ -5984,11 +6100,11 @@
               </a:spcAft>
             </a:pPr>
             <a:r>
-              <a:rPr sz="2000" b="1">
-                <a:solidFill>
-                  <a:srgbClr val="1F3A93"/>
-                </a:solidFill>
-                <a:latin typeface="Microsoft YaHei"/>
+              <a:rPr sz="1900" b="1">
+                <a:solidFill>
+                  <a:srgbClr val="64FFDA"/>
+                </a:solidFill>
+                <a:latin typeface="Consolas"/>
                 <a:ea typeface="Microsoft YaHei"/>
               </a:rPr>
               <a:t>05</a:t>
@@ -5998,13 +6114,13 @@
       </p:sp>
       <p:sp>
         <p:nvSpPr>
-          <p:cNvPr id="20" name="TextBox 19"/>
+          <p:cNvPr id="21" name="TextBox 20"/>
           <p:cNvSpPr txBox="1"/>
           <p:nvPr/>
         </p:nvSpPr>
         <p:spPr>
           <a:xfrm>
-            <a:off x="9573768" y="2834640"/>
+            <a:off x="9573768" y="2743200"/>
             <a:ext cx="2103120" cy="1280160"/>
           </a:xfrm>
           <a:prstGeom prst="rect">
@@ -6024,9 +6140,9 @@
               </a:spcAft>
             </a:pPr>
             <a:r>
-              <a:rPr sz="1100" b="0">
-                <a:solidFill>
-                  <a:srgbClr val="334155"/>
+              <a:rPr sz="1050" b="0">
+                <a:solidFill>
+                  <a:srgbClr val="8892B0"/>
                 </a:solidFill>
                 <a:latin typeface="Microsoft YaHei"/>
                 <a:ea typeface="Microsoft YaHei"/>
@@ -6041,27 +6157,27 @@
               </a:spcAft>
             </a:pPr>
             <a:r>
-              <a:rPr sz="1100" b="0">
-                <a:solidFill>
-                  <a:srgbClr val="334155"/>
-                </a:solidFill>
-                <a:latin typeface="Microsoft YaHei"/>
-                <a:ea typeface="Microsoft YaHei"/>
-              </a:rPr>
-              <a:t>LICENSE/依赖/部署/贡献规范</a:t>
-            </a:r>
-          </a:p>
-        </p:txBody>
-      </p:sp>
-      <p:sp>
-        <p:nvSpPr>
-          <p:cNvPr id="21" name="TextBox 20"/>
+              <a:rPr sz="1050" b="0">
+                <a:solidFill>
+                  <a:srgbClr val="8892B0"/>
+                </a:solidFill>
+                <a:latin typeface="Microsoft YaHei"/>
+                <a:ea typeface="Microsoft YaHei"/>
+              </a:rPr>
+              <a:t>LICENSE/依赖/部署规范</a:t>
+            </a:r>
+          </a:p>
+        </p:txBody>
+      </p:sp>
+      <p:sp>
+        <p:nvSpPr>
+          <p:cNvPr id="22" name="TextBox 21"/>
           <p:cNvSpPr txBox="1"/>
           <p:nvPr/>
         </p:nvSpPr>
         <p:spPr>
           <a:xfrm>
-            <a:off x="502920" y="5394960"/>
+            <a:off x="502920" y="5349240"/>
             <a:ext cx="11155680" cy="548640"/>
           </a:xfrm>
           <a:prstGeom prst="rect">
@@ -6083,7 +6199,7 @@
             <a:r>
               <a:rPr sz="1500" b="1">
                 <a:solidFill>
-                  <a:srgbClr val="F59E0B"/>
+                  <a:srgbClr val="FFC864"/>
                 </a:solidFill>
                 <a:latin typeface="Microsoft YaHei"/>
                 <a:ea typeface="Microsoft YaHei"/>
@@ -6126,7 +6242,7 @@
             <a:avLst/>
           </a:prstGeom>
           <a:solidFill>
-            <a:srgbClr val="FFFFFF"/>
+            <a:srgbClr val="0A192F"/>
           </a:solidFill>
           <a:ln>
             <a:noFill/>
@@ -6163,8 +6279,8 @@
         </p:nvSpPr>
         <p:spPr>
           <a:xfrm>
-            <a:off x="502920" y="365760"/>
-            <a:ext cx="10972800" cy="548640"/>
+            <a:off x="502920" y="384048"/>
+            <a:ext cx="1828800" cy="457200"/>
           </a:xfrm>
           <a:prstGeom prst="rect">
             <a:avLst/>
@@ -6183,34 +6299,74 @@
               </a:spcAft>
             </a:pPr>
             <a:r>
-              <a:rPr sz="2400" b="1">
-                <a:solidFill>
-                  <a:srgbClr val="0F172A"/>
-                </a:solidFill>
-                <a:latin typeface="Microsoft YaHei"/>
-                <a:ea typeface="Microsoft YaHei"/>
-              </a:rPr>
-              <a:t>场景：可信求职决策是普遍且真实的问题</a:t>
-            </a:r>
-          </a:p>
-        </p:txBody>
-      </p:sp>
-      <p:sp>
-        <p:nvSpPr>
-          <p:cNvPr id="4" name="Rectangle 3"/>
+              <a:rPr sz="1400" b="1">
+                <a:solidFill>
+                  <a:srgbClr val="64FFDA"/>
+                </a:solidFill>
+                <a:latin typeface="Consolas"/>
+                <a:ea typeface="Microsoft YaHei"/>
+              </a:rPr>
+              <a:t>02</a:t>
+            </a:r>
+          </a:p>
+        </p:txBody>
+      </p:sp>
+      <p:sp>
+        <p:nvSpPr>
+          <p:cNvPr id="4" name="TextBox 3"/>
+          <p:cNvSpPr txBox="1"/>
+          <p:nvPr/>
+        </p:nvSpPr>
+        <p:spPr>
+          <a:xfrm>
+            <a:off x="502920" y="365760"/>
+            <a:ext cx="10972800" cy="548640"/>
+          </a:xfrm>
+          <a:prstGeom prst="rect">
+            <a:avLst/>
+          </a:prstGeom>
+          <a:noFill/>
+        </p:spPr>
+        <p:txBody>
+          <a:bodyPr wrap="square" anchor="t">
+            <a:spAutoFit/>
+          </a:bodyPr>
+          <a:lstStyle/>
+          <a:p>
+            <a:pPr algn="l">
+              <a:spcAft>
+                <a:spcPts val="400"/>
+              </a:spcAft>
+            </a:pPr>
+            <a:r>
+              <a:rPr sz="2300" b="1">
+                <a:solidFill>
+                  <a:srgbClr val="E6F1FF"/>
+                </a:solidFill>
+                <a:latin typeface="Microsoft YaHei"/>
+                <a:ea typeface="Microsoft YaHei"/>
+              </a:rPr>
+              <a:t>  场景：可信求职决策是普遍且真实的问题</a:t>
+            </a:r>
+          </a:p>
+        </p:txBody>
+      </p:sp>
+      <p:sp>
+        <p:nvSpPr>
+          <p:cNvPr id="5" name="Rectangle 4"/>
           <p:cNvSpPr/>
           <p:nvPr/>
         </p:nvSpPr>
         <p:spPr>
           <a:xfrm>
-            <a:off x="502920" y="1078992"/>
-            <a:ext cx="1371600" cy="64008"/>
+            <a:off x="502920" y="1051560"/>
+            <a:ext cx="1280160" cy="45720"/>
           </a:xfrm>
           <a:prstGeom prst="rect">
             <a:avLst/>
           </a:prstGeom>
           <a:solidFill>
-            <a:srgbClr val="1F3A93"/>
+            <a:srgbClr val="64FFDA"/>
           </a:solidFill>
           <a:ln>
             <a:noFill/>
@@ -6241,14 +6397,14 @@
       </p:sp>
       <p:sp>
         <p:nvSpPr>
-          <p:cNvPr id="5" name="TextBox 4"/>
+          <p:cNvPr id="6" name="TextBox 5"/>
           <p:cNvSpPr txBox="1"/>
           <p:nvPr/>
         </p:nvSpPr>
         <p:spPr>
           <a:xfrm>
-            <a:off x="11430000" y="6446520"/>
-            <a:ext cx="548640" cy="365760"/>
+            <a:off x="10881360" y="411480"/>
+            <a:ext cx="822960" cy="365760"/>
           </a:xfrm>
           <a:prstGeom prst="rect">
             <a:avLst/>
@@ -6269,25 +6425,25 @@
             <a:r>
               <a:rPr sz="900" b="0">
                 <a:solidFill>
-                  <a:srgbClr val="64748B"/>
-                </a:solidFill>
-                <a:latin typeface="Microsoft YaHei"/>
-                <a:ea typeface="Microsoft YaHei"/>
-              </a:rPr>
-              <a:t>02/13</a:t>
-            </a:r>
-          </a:p>
-        </p:txBody>
-      </p:sp>
-      <p:sp>
-        <p:nvSpPr>
-          <p:cNvPr id="6" name="Rounded Rectangle 5"/>
+                  <a:srgbClr val="5A7A9E"/>
+                </a:solidFill>
+                <a:latin typeface="Consolas"/>
+                <a:ea typeface="Microsoft YaHei"/>
+              </a:rPr>
+              <a:t>02 / 13</a:t>
+            </a:r>
+          </a:p>
+        </p:txBody>
+      </p:sp>
+      <p:sp>
+        <p:nvSpPr>
+          <p:cNvPr id="7" name="Rounded Rectangle 6"/>
           <p:cNvSpPr/>
           <p:nvPr/>
         </p:nvSpPr>
         <p:spPr>
           <a:xfrm>
-            <a:off x="502920" y="1554480"/>
+            <a:off x="502920" y="1508760"/>
             <a:ext cx="5394960" cy="1234440"/>
           </a:xfrm>
           <a:prstGeom prst="roundRect">
@@ -6296,11 +6452,11 @@
             </a:avLst>
           </a:prstGeom>
           <a:solidFill>
-            <a:srgbClr val="F8FAFC"/>
+            <a:srgbClr val="112240"/>
           </a:solidFill>
-          <a:ln w="19050">
+          <a:ln w="15240">
             <a:solidFill>
-              <a:srgbClr val="E2E8F0"/>
+              <a:srgbClr val="1E3A5F"/>
             </a:solidFill>
           </a:ln>
           <a:effectLst/>
@@ -6329,14 +6485,14 @@
       </p:sp>
       <p:sp>
         <p:nvSpPr>
-          <p:cNvPr id="7" name="TextBox 6"/>
+          <p:cNvPr id="8" name="TextBox 7"/>
           <p:cNvSpPr txBox="1"/>
           <p:nvPr/>
         </p:nvSpPr>
         <p:spPr>
           <a:xfrm>
-            <a:off x="640080" y="1645920"/>
-            <a:ext cx="5120640" cy="1051560"/>
+            <a:off x="649224" y="1591056"/>
+            <a:ext cx="5102352" cy="1069848"/>
           </a:xfrm>
           <a:prstGeom prst="rect">
             <a:avLst/>
@@ -6352,7 +6508,7 @@
             <a:r>
               <a:rPr sz="1200" b="1">
                 <a:solidFill>
-                  <a:srgbClr val="1F3A93"/>
+                  <a:srgbClr val="E6F1FF"/>
                 </a:solidFill>
                 <a:latin typeface="Microsoft YaHei"/>
                 <a:ea typeface="Microsoft YaHei"/>
@@ -6363,13 +6519,13 @@
           <a:p>
             <a:pPr>
               <a:spcBef>
-                <a:spcPts val="400"/>
+                <a:spcPts val="300"/>
               </a:spcBef>
             </a:pPr>
             <a:r>
               <a:rPr sz="1050" b="0">
                 <a:solidFill>
-                  <a:srgbClr val="334155"/>
+                  <a:srgbClr val="8892B0"/>
                 </a:solidFill>
                 <a:latin typeface="Microsoft YaHei"/>
                 <a:ea typeface="Microsoft YaHei"/>
@@ -6381,13 +6537,13 @@
       </p:sp>
       <p:sp>
         <p:nvSpPr>
-          <p:cNvPr id="8" name="Rounded Rectangle 7"/>
+          <p:cNvPr id="9" name="Rounded Rectangle 8"/>
           <p:cNvSpPr/>
           <p:nvPr/>
         </p:nvSpPr>
         <p:spPr>
           <a:xfrm>
-            <a:off x="6126480" y="1554480"/>
+            <a:off x="6126480" y="1508760"/>
             <a:ext cx="5394960" cy="1234440"/>
           </a:xfrm>
           <a:prstGeom prst="roundRect">
@@ -6396,11 +6552,11 @@
             </a:avLst>
           </a:prstGeom>
           <a:solidFill>
-            <a:srgbClr val="F8FAFC"/>
+            <a:srgbClr val="112240"/>
           </a:solidFill>
-          <a:ln w="19050">
+          <a:ln w="15240">
             <a:solidFill>
-              <a:srgbClr val="E2E8F0"/>
+              <a:srgbClr val="1E3A5F"/>
             </a:solidFill>
           </a:ln>
           <a:effectLst/>
@@ -6429,14 +6585,14 @@
       </p:sp>
       <p:sp>
         <p:nvSpPr>
-          <p:cNvPr id="9" name="TextBox 8"/>
+          <p:cNvPr id="10" name="TextBox 9"/>
           <p:cNvSpPr txBox="1"/>
           <p:nvPr/>
         </p:nvSpPr>
         <p:spPr>
           <a:xfrm>
-            <a:off x="6263640" y="1645920"/>
-            <a:ext cx="5120640" cy="1051560"/>
+            <a:off x="6272784" y="1591056"/>
+            <a:ext cx="5102352" cy="1069848"/>
           </a:xfrm>
           <a:prstGeom prst="rect">
             <a:avLst/>
@@ -6452,7 +6608,7 @@
             <a:r>
               <a:rPr sz="1200" b="1">
                 <a:solidFill>
-                  <a:srgbClr val="1F3A93"/>
+                  <a:srgbClr val="E6F1FF"/>
                 </a:solidFill>
                 <a:latin typeface="Microsoft YaHei"/>
                 <a:ea typeface="Microsoft YaHei"/>
@@ -6463,13 +6619,13 @@
           <a:p>
             <a:pPr>
               <a:spcBef>
-                <a:spcPts val="400"/>
+                <a:spcPts val="300"/>
               </a:spcBef>
             </a:pPr>
             <a:r>
               <a:rPr sz="1050" b="0">
                 <a:solidFill>
-                  <a:srgbClr val="334155"/>
+                  <a:srgbClr val="8892B0"/>
                 </a:solidFill>
                 <a:latin typeface="Microsoft YaHei"/>
                 <a:ea typeface="Microsoft YaHei"/>
@@ -6481,13 +6637,13 @@
       </p:sp>
       <p:sp>
         <p:nvSpPr>
-          <p:cNvPr id="10" name="Rounded Rectangle 9"/>
+          <p:cNvPr id="11" name="Rounded Rectangle 10"/>
           <p:cNvSpPr/>
           <p:nvPr/>
         </p:nvSpPr>
         <p:spPr>
           <a:xfrm>
-            <a:off x="502920" y="3017520"/>
+            <a:off x="502920" y="2971800"/>
             <a:ext cx="5394960" cy="1234440"/>
           </a:xfrm>
           <a:prstGeom prst="roundRect">
@@ -6496,11 +6652,11 @@
             </a:avLst>
           </a:prstGeom>
           <a:solidFill>
-            <a:srgbClr val="F8FAFC"/>
+            <a:srgbClr val="112240"/>
           </a:solidFill>
-          <a:ln w="19050">
+          <a:ln w="15240">
             <a:solidFill>
-              <a:srgbClr val="E2E8F0"/>
+              <a:srgbClr val="1E3A5F"/>
             </a:solidFill>
           </a:ln>
           <a:effectLst/>
@@ -6529,14 +6685,14 @@
       </p:sp>
       <p:sp>
         <p:nvSpPr>
-          <p:cNvPr id="11" name="TextBox 10"/>
+          <p:cNvPr id="12" name="TextBox 11"/>
           <p:cNvSpPr txBox="1"/>
           <p:nvPr/>
         </p:nvSpPr>
         <p:spPr>
           <a:xfrm>
-            <a:off x="640080" y="3108960"/>
-            <a:ext cx="5120640" cy="1051560"/>
+            <a:off x="649224" y="3054096"/>
+            <a:ext cx="5102352" cy="1069848"/>
           </a:xfrm>
           <a:prstGeom prst="rect">
             <a:avLst/>
@@ -6552,7 +6708,7 @@
             <a:r>
               <a:rPr sz="1200" b="1">
                 <a:solidFill>
-                  <a:srgbClr val="1F3A93"/>
+                  <a:srgbClr val="E6F1FF"/>
                 </a:solidFill>
                 <a:latin typeface="Microsoft YaHei"/>
                 <a:ea typeface="Microsoft YaHei"/>
@@ -6563,13 +6719,13 @@
           <a:p>
             <a:pPr>
               <a:spcBef>
-                <a:spcPts val="400"/>
+                <a:spcPts val="300"/>
               </a:spcBef>
             </a:pPr>
             <a:r>
               <a:rPr sz="1050" b="0">
                 <a:solidFill>
-                  <a:srgbClr val="334155"/>
+                  <a:srgbClr val="8892B0"/>
                 </a:solidFill>
                 <a:latin typeface="Microsoft YaHei"/>
                 <a:ea typeface="Microsoft YaHei"/>
@@ -6581,13 +6737,13 @@
       </p:sp>
       <p:sp>
         <p:nvSpPr>
-          <p:cNvPr id="12" name="Rounded Rectangle 11"/>
+          <p:cNvPr id="13" name="Rounded Rectangle 12"/>
           <p:cNvSpPr/>
           <p:nvPr/>
         </p:nvSpPr>
         <p:spPr>
           <a:xfrm>
-            <a:off x="6126480" y="3017520"/>
+            <a:off x="6126480" y="2971800"/>
             <a:ext cx="5394960" cy="1234440"/>
           </a:xfrm>
           <a:prstGeom prst="roundRect">
@@ -6596,11 +6752,11 @@
             </a:avLst>
           </a:prstGeom>
           <a:solidFill>
-            <a:srgbClr val="F8FAFC"/>
+            <a:srgbClr val="112240"/>
           </a:solidFill>
-          <a:ln w="19050">
+          <a:ln w="15240">
             <a:solidFill>
-              <a:srgbClr val="E2E8F0"/>
+              <a:srgbClr val="1E3A5F"/>
             </a:solidFill>
           </a:ln>
           <a:effectLst/>
@@ -6629,14 +6785,14 @@
       </p:sp>
       <p:sp>
         <p:nvSpPr>
-          <p:cNvPr id="13" name="TextBox 12"/>
+          <p:cNvPr id="14" name="TextBox 13"/>
           <p:cNvSpPr txBox="1"/>
           <p:nvPr/>
         </p:nvSpPr>
         <p:spPr>
           <a:xfrm>
-            <a:off x="6263640" y="3108960"/>
-            <a:ext cx="5120640" cy="1051560"/>
+            <a:off x="6272784" y="3054096"/>
+            <a:ext cx="5102352" cy="1069848"/>
           </a:xfrm>
           <a:prstGeom prst="rect">
             <a:avLst/>
@@ -6652,7 +6808,7 @@
             <a:r>
               <a:rPr sz="1200" b="1">
                 <a:solidFill>
-                  <a:srgbClr val="1F3A93"/>
+                  <a:srgbClr val="E6F1FF"/>
                 </a:solidFill>
                 <a:latin typeface="Microsoft YaHei"/>
                 <a:ea typeface="Microsoft YaHei"/>
@@ -6663,13 +6819,13 @@
           <a:p>
             <a:pPr>
               <a:spcBef>
-                <a:spcPts val="400"/>
+                <a:spcPts val="300"/>
               </a:spcBef>
             </a:pPr>
             <a:r>
               <a:rPr sz="1050" b="0">
                 <a:solidFill>
-                  <a:srgbClr val="334155"/>
+                  <a:srgbClr val="8892B0"/>
                 </a:solidFill>
                 <a:latin typeface="Microsoft YaHei"/>
                 <a:ea typeface="Microsoft YaHei"/>
@@ -6681,14 +6837,14 @@
       </p:sp>
       <p:sp>
         <p:nvSpPr>
-          <p:cNvPr id="14" name="TextBox 13"/>
+          <p:cNvPr id="15" name="TextBox 14"/>
           <p:cNvSpPr txBox="1"/>
           <p:nvPr/>
         </p:nvSpPr>
         <p:spPr>
           <a:xfrm>
-            <a:off x="502920" y="4297680"/>
-            <a:ext cx="11155680" cy="548640"/>
+            <a:off x="502920" y="4206240"/>
+            <a:ext cx="11155680" cy="457200"/>
           </a:xfrm>
           <a:prstGeom prst="rect">
             <a:avLst/>
@@ -6709,7 +6865,7 @@
             <a:r>
               <a:rPr sz="1300" b="1">
                 <a:solidFill>
-                  <a:srgbClr val="1F3A93"/>
+                  <a:srgbClr val="64FFDA"/>
                 </a:solidFill>
                 <a:latin typeface="Microsoft YaHei"/>
                 <a:ea typeface="Microsoft YaHei"/>
@@ -6721,14 +6877,14 @@
       </p:sp>
       <p:sp>
         <p:nvSpPr>
-          <p:cNvPr id="15" name="TextBox 14"/>
+          <p:cNvPr id="16" name="TextBox 15"/>
           <p:cNvSpPr txBox="1"/>
           <p:nvPr/>
         </p:nvSpPr>
         <p:spPr>
           <a:xfrm>
-            <a:off x="502920" y="4937760"/>
-            <a:ext cx="11155680" cy="548640"/>
+            <a:off x="502920" y="4800600"/>
+            <a:ext cx="11155680" cy="457200"/>
           </a:xfrm>
           <a:prstGeom prst="rect">
             <a:avLst/>
@@ -6749,7 +6905,7 @@
             <a:r>
               <a:rPr sz="1300" b="1">
                 <a:solidFill>
-                  <a:srgbClr val="0D9488"/>
+                  <a:srgbClr val="64FFDA"/>
                 </a:solidFill>
                 <a:latin typeface="Microsoft YaHei"/>
                 <a:ea typeface="Microsoft YaHei"/>
@@ -6792,7 +6948,7 @@
             <a:avLst/>
           </a:prstGeom>
           <a:solidFill>
-            <a:srgbClr val="FFFFFF"/>
+            <a:srgbClr val="0A192F"/>
           </a:solidFill>
           <a:ln>
             <a:noFill/>
@@ -6829,8 +6985,8 @@
         </p:nvSpPr>
         <p:spPr>
           <a:xfrm>
-            <a:off x="502920" y="365760"/>
-            <a:ext cx="10972800" cy="548640"/>
+            <a:off x="502920" y="384048"/>
+            <a:ext cx="1828800" cy="457200"/>
           </a:xfrm>
           <a:prstGeom prst="rect">
             <a:avLst/>
@@ -6849,34 +7005,74 @@
               </a:spcAft>
             </a:pPr>
             <a:r>
-              <a:rPr sz="2400" b="1">
-                <a:solidFill>
-                  <a:srgbClr val="0F172A"/>
-                </a:solidFill>
-                <a:latin typeface="Microsoft YaHei"/>
-                <a:ea typeface="Microsoft YaHei"/>
-              </a:rPr>
-              <a:t>痛点：四个高频失真的来源</a:t>
-            </a:r>
-          </a:p>
-        </p:txBody>
-      </p:sp>
-      <p:sp>
-        <p:nvSpPr>
-          <p:cNvPr id="4" name="Rectangle 3"/>
+              <a:rPr sz="1400" b="1">
+                <a:solidFill>
+                  <a:srgbClr val="64FFDA"/>
+                </a:solidFill>
+                <a:latin typeface="Consolas"/>
+                <a:ea typeface="Microsoft YaHei"/>
+              </a:rPr>
+              <a:t>03</a:t>
+            </a:r>
+          </a:p>
+        </p:txBody>
+      </p:sp>
+      <p:sp>
+        <p:nvSpPr>
+          <p:cNvPr id="4" name="TextBox 3"/>
+          <p:cNvSpPr txBox="1"/>
+          <p:nvPr/>
+        </p:nvSpPr>
+        <p:spPr>
+          <a:xfrm>
+            <a:off x="502920" y="365760"/>
+            <a:ext cx="10972800" cy="548640"/>
+          </a:xfrm>
+          <a:prstGeom prst="rect">
+            <a:avLst/>
+          </a:prstGeom>
+          <a:noFill/>
+        </p:spPr>
+        <p:txBody>
+          <a:bodyPr wrap="square" anchor="t">
+            <a:spAutoFit/>
+          </a:bodyPr>
+          <a:lstStyle/>
+          <a:p>
+            <a:pPr algn="l">
+              <a:spcAft>
+                <a:spcPts val="400"/>
+              </a:spcAft>
+            </a:pPr>
+            <a:r>
+              <a:rPr sz="2300" b="1">
+                <a:solidFill>
+                  <a:srgbClr val="E6F1FF"/>
+                </a:solidFill>
+                <a:latin typeface="Microsoft YaHei"/>
+                <a:ea typeface="Microsoft YaHei"/>
+              </a:rPr>
+              <a:t>  痛点：四个高频失真的来源</a:t>
+            </a:r>
+          </a:p>
+        </p:txBody>
+      </p:sp>
+      <p:sp>
+        <p:nvSpPr>
+          <p:cNvPr id="5" name="Rectangle 4"/>
           <p:cNvSpPr/>
           <p:nvPr/>
         </p:nvSpPr>
         <p:spPr>
           <a:xfrm>
-            <a:off x="502920" y="1078992"/>
-            <a:ext cx="1371600" cy="64008"/>
+            <a:off x="502920" y="1051560"/>
+            <a:ext cx="1280160" cy="45720"/>
           </a:xfrm>
           <a:prstGeom prst="rect">
             <a:avLst/>
           </a:prstGeom>
           <a:solidFill>
-            <a:srgbClr val="E11D48"/>
+            <a:srgbClr val="64FFDA"/>
           </a:solidFill>
           <a:ln>
             <a:noFill/>
@@ -6907,14 +7103,14 @@
       </p:sp>
       <p:sp>
         <p:nvSpPr>
-          <p:cNvPr id="5" name="TextBox 4"/>
+          <p:cNvPr id="6" name="TextBox 5"/>
           <p:cNvSpPr txBox="1"/>
           <p:nvPr/>
         </p:nvSpPr>
         <p:spPr>
           <a:xfrm>
-            <a:off x="11430000" y="6446520"/>
-            <a:ext cx="548640" cy="365760"/>
+            <a:off x="10881360" y="411480"/>
+            <a:ext cx="822960" cy="365760"/>
           </a:xfrm>
           <a:prstGeom prst="rect">
             <a:avLst/>
@@ -6935,25 +7131,25 @@
             <a:r>
               <a:rPr sz="900" b="0">
                 <a:solidFill>
-                  <a:srgbClr val="64748B"/>
-                </a:solidFill>
-                <a:latin typeface="Microsoft YaHei"/>
-                <a:ea typeface="Microsoft YaHei"/>
-              </a:rPr>
-              <a:t>03/13</a:t>
-            </a:r>
-          </a:p>
-        </p:txBody>
-      </p:sp>
-      <p:sp>
-        <p:nvSpPr>
-          <p:cNvPr id="6" name="Rounded Rectangle 5"/>
+                  <a:srgbClr val="5A7A9E"/>
+                </a:solidFill>
+                <a:latin typeface="Consolas"/>
+                <a:ea typeface="Microsoft YaHei"/>
+              </a:rPr>
+              <a:t>03 / 13</a:t>
+            </a:r>
+          </a:p>
+        </p:txBody>
+      </p:sp>
+      <p:sp>
+        <p:nvSpPr>
+          <p:cNvPr id="7" name="Rounded Rectangle 6"/>
           <p:cNvSpPr/>
           <p:nvPr/>
         </p:nvSpPr>
         <p:spPr>
           <a:xfrm>
-            <a:off x="502920" y="1554480"/>
+            <a:off x="502920" y="1508760"/>
             <a:ext cx="5394960" cy="1234440"/>
           </a:xfrm>
           <a:prstGeom prst="roundRect">
@@ -6962,11 +7158,11 @@
             </a:avLst>
           </a:prstGeom>
           <a:solidFill>
-            <a:srgbClr val="F8FAFC"/>
+            <a:srgbClr val="112240"/>
           </a:solidFill>
-          <a:ln w="19050">
+          <a:ln w="15240">
             <a:solidFill>
-              <a:srgbClr val="E2E8F0"/>
+              <a:srgbClr val="1E3A5F"/>
             </a:solidFill>
           </a:ln>
           <a:effectLst/>
@@ -6995,14 +7191,14 @@
       </p:sp>
       <p:sp>
         <p:nvSpPr>
-          <p:cNvPr id="7" name="TextBox 6"/>
+          <p:cNvPr id="8" name="TextBox 7"/>
           <p:cNvSpPr txBox="1"/>
           <p:nvPr/>
         </p:nvSpPr>
         <p:spPr>
           <a:xfrm>
-            <a:off x="640080" y="1645920"/>
-            <a:ext cx="5120640" cy="1051560"/>
+            <a:off x="649224" y="1591056"/>
+            <a:ext cx="5102352" cy="1069848"/>
           </a:xfrm>
           <a:prstGeom prst="rect">
             <a:avLst/>
@@ -7018,7 +7214,7 @@
             <a:r>
               <a:rPr sz="1200" b="1">
                 <a:solidFill>
-                  <a:srgbClr val="E11D48"/>
+                  <a:srgbClr val="E6F1FF"/>
                 </a:solidFill>
                 <a:latin typeface="Microsoft YaHei"/>
                 <a:ea typeface="Microsoft YaHei"/>
@@ -7029,13 +7225,13 @@
           <a:p>
             <a:pPr>
               <a:spcBef>
-                <a:spcPts val="400"/>
+                <a:spcPts val="300"/>
               </a:spcBef>
             </a:pPr>
             <a:r>
               <a:rPr sz="1050" b="0">
                 <a:solidFill>
-                  <a:srgbClr val="334155"/>
+                  <a:srgbClr val="8892B0"/>
                 </a:solidFill>
                 <a:latin typeface="Microsoft YaHei"/>
                 <a:ea typeface="Microsoft YaHei"/>
@@ -7047,13 +7243,13 @@
       </p:sp>
       <p:sp>
         <p:nvSpPr>
-          <p:cNvPr id="8" name="Rounded Rectangle 7"/>
+          <p:cNvPr id="9" name="Rounded Rectangle 8"/>
           <p:cNvSpPr/>
           <p:nvPr/>
         </p:nvSpPr>
         <p:spPr>
           <a:xfrm>
-            <a:off x="6126480" y="1554480"/>
+            <a:off x="6126480" y="1508760"/>
             <a:ext cx="5394960" cy="1234440"/>
           </a:xfrm>
           <a:prstGeom prst="roundRect">
@@ -7062,11 +7258,11 @@
             </a:avLst>
           </a:prstGeom>
           <a:solidFill>
-            <a:srgbClr val="F8FAFC"/>
+            <a:srgbClr val="112240"/>
           </a:solidFill>
-          <a:ln w="19050">
+          <a:ln w="15240">
             <a:solidFill>
-              <a:srgbClr val="E2E8F0"/>
+              <a:srgbClr val="1E3A5F"/>
             </a:solidFill>
           </a:ln>
           <a:effectLst/>
@@ -7095,14 +7291,14 @@
       </p:sp>
       <p:sp>
         <p:nvSpPr>
-          <p:cNvPr id="9" name="TextBox 8"/>
+          <p:cNvPr id="10" name="TextBox 9"/>
           <p:cNvSpPr txBox="1"/>
           <p:nvPr/>
         </p:nvSpPr>
         <p:spPr>
           <a:xfrm>
-            <a:off x="6263640" y="1645920"/>
-            <a:ext cx="5120640" cy="1051560"/>
+            <a:off x="6272784" y="1591056"/>
+            <a:ext cx="5102352" cy="1069848"/>
           </a:xfrm>
           <a:prstGeom prst="rect">
             <a:avLst/>
@@ -7118,7 +7314,7 @@
             <a:r>
               <a:rPr sz="1200" b="1">
                 <a:solidFill>
-                  <a:srgbClr val="E11D48"/>
+                  <a:srgbClr val="E6F1FF"/>
                 </a:solidFill>
                 <a:latin typeface="Microsoft YaHei"/>
                 <a:ea typeface="Microsoft YaHei"/>
@@ -7129,13 +7325,13 @@
           <a:p>
             <a:pPr>
               <a:spcBef>
-                <a:spcPts val="400"/>
+                <a:spcPts val="300"/>
               </a:spcBef>
             </a:pPr>
             <a:r>
               <a:rPr sz="1050" b="0">
                 <a:solidFill>
-                  <a:srgbClr val="334155"/>
+                  <a:srgbClr val="8892B0"/>
                 </a:solidFill>
                 <a:latin typeface="Microsoft YaHei"/>
                 <a:ea typeface="Microsoft YaHei"/>
@@ -7147,13 +7343,13 @@
       </p:sp>
       <p:sp>
         <p:nvSpPr>
-          <p:cNvPr id="10" name="Rounded Rectangle 9"/>
+          <p:cNvPr id="11" name="Rounded Rectangle 10"/>
           <p:cNvSpPr/>
           <p:nvPr/>
         </p:nvSpPr>
         <p:spPr>
           <a:xfrm>
-            <a:off x="502920" y="3017520"/>
+            <a:off x="502920" y="2971800"/>
             <a:ext cx="5394960" cy="1234440"/>
           </a:xfrm>
           <a:prstGeom prst="roundRect">
@@ -7162,11 +7358,11 @@
             </a:avLst>
           </a:prstGeom>
           <a:solidFill>
-            <a:srgbClr val="F8FAFC"/>
+            <a:srgbClr val="112240"/>
           </a:solidFill>
-          <a:ln w="19050">
+          <a:ln w="15240">
             <a:solidFill>
-              <a:srgbClr val="E2E8F0"/>
+              <a:srgbClr val="1E3A5F"/>
             </a:solidFill>
           </a:ln>
           <a:effectLst/>
@@ -7195,14 +7391,14 @@
       </p:sp>
       <p:sp>
         <p:nvSpPr>
-          <p:cNvPr id="11" name="TextBox 10"/>
+          <p:cNvPr id="12" name="TextBox 11"/>
           <p:cNvSpPr txBox="1"/>
           <p:nvPr/>
         </p:nvSpPr>
         <p:spPr>
           <a:xfrm>
-            <a:off x="640080" y="3108960"/>
-            <a:ext cx="5120640" cy="1051560"/>
+            <a:off x="649224" y="3054096"/>
+            <a:ext cx="5102352" cy="1069848"/>
           </a:xfrm>
           <a:prstGeom prst="rect">
             <a:avLst/>
@@ -7218,7 +7414,7 @@
             <a:r>
               <a:rPr sz="1200" b="1">
                 <a:solidFill>
-                  <a:srgbClr val="E11D48"/>
+                  <a:srgbClr val="E6F1FF"/>
                 </a:solidFill>
                 <a:latin typeface="Microsoft YaHei"/>
                 <a:ea typeface="Microsoft YaHei"/>
@@ -7229,13 +7425,13 @@
           <a:p>
             <a:pPr>
               <a:spcBef>
-                <a:spcPts val="400"/>
+                <a:spcPts val="300"/>
               </a:spcBef>
             </a:pPr>
             <a:r>
               <a:rPr sz="1050" b="0">
                 <a:solidFill>
-                  <a:srgbClr val="334155"/>
+                  <a:srgbClr val="8892B0"/>
                 </a:solidFill>
                 <a:latin typeface="Microsoft YaHei"/>
                 <a:ea typeface="Microsoft YaHei"/>
@@ -7247,13 +7443,13 @@
       </p:sp>
       <p:sp>
         <p:nvSpPr>
-          <p:cNvPr id="12" name="Rounded Rectangle 11"/>
+          <p:cNvPr id="13" name="Rounded Rectangle 12"/>
           <p:cNvSpPr/>
           <p:nvPr/>
         </p:nvSpPr>
         <p:spPr>
           <a:xfrm>
-            <a:off x="6126480" y="3017520"/>
+            <a:off x="6126480" y="2971800"/>
             <a:ext cx="5394960" cy="1234440"/>
           </a:xfrm>
           <a:prstGeom prst="roundRect">
@@ -7262,11 +7458,11 @@
             </a:avLst>
           </a:prstGeom>
           <a:solidFill>
-            <a:srgbClr val="F8FAFC"/>
+            <a:srgbClr val="112240"/>
           </a:solidFill>
-          <a:ln w="19050">
+          <a:ln w="15240">
             <a:solidFill>
-              <a:srgbClr val="E2E8F0"/>
+              <a:srgbClr val="1E3A5F"/>
             </a:solidFill>
           </a:ln>
           <a:effectLst/>
@@ -7295,14 +7491,14 @@
       </p:sp>
       <p:sp>
         <p:nvSpPr>
-          <p:cNvPr id="13" name="TextBox 12"/>
+          <p:cNvPr id="14" name="TextBox 13"/>
           <p:cNvSpPr txBox="1"/>
           <p:nvPr/>
         </p:nvSpPr>
         <p:spPr>
           <a:xfrm>
-            <a:off x="6263640" y="3108960"/>
-            <a:ext cx="5120640" cy="1051560"/>
+            <a:off x="6272784" y="3054096"/>
+            <a:ext cx="5102352" cy="1069848"/>
           </a:xfrm>
           <a:prstGeom prst="rect">
             <a:avLst/>
@@ -7318,7 +7514,7 @@
             <a:r>
               <a:rPr sz="1200" b="1">
                 <a:solidFill>
-                  <a:srgbClr val="E11D48"/>
+                  <a:srgbClr val="E6F1FF"/>
                 </a:solidFill>
                 <a:latin typeface="Microsoft YaHei"/>
                 <a:ea typeface="Microsoft YaHei"/>
@@ -7329,13 +7525,13 @@
           <a:p>
             <a:pPr>
               <a:spcBef>
-                <a:spcPts val="400"/>
+                <a:spcPts val="300"/>
               </a:spcBef>
             </a:pPr>
             <a:r>
               <a:rPr sz="1050" b="0">
                 <a:solidFill>
-                  <a:srgbClr val="334155"/>
+                  <a:srgbClr val="8892B0"/>
                 </a:solidFill>
                 <a:latin typeface="Microsoft YaHei"/>
                 <a:ea typeface="Microsoft YaHei"/>
@@ -7378,7 +7574,7 @@
             <a:avLst/>
           </a:prstGeom>
           <a:solidFill>
-            <a:srgbClr val="FFFFFF"/>
+            <a:srgbClr val="0A192F"/>
           </a:solidFill>
           <a:ln>
             <a:noFill/>
@@ -7415,8 +7611,8 @@
         </p:nvSpPr>
         <p:spPr>
           <a:xfrm>
-            <a:off x="502920" y="365760"/>
-            <a:ext cx="10972800" cy="548640"/>
+            <a:off x="502920" y="384048"/>
+            <a:ext cx="1828800" cy="457200"/>
           </a:xfrm>
           <a:prstGeom prst="rect">
             <a:avLst/>
@@ -7435,34 +7631,74 @@
               </a:spcAft>
             </a:pPr>
             <a:r>
-              <a:rPr sz="2400" b="1">
-                <a:solidFill>
-                  <a:srgbClr val="0F172A"/>
-                </a:solidFill>
-                <a:latin typeface="Microsoft YaHei"/>
-                <a:ea typeface="Microsoft YaHei"/>
-              </a:rPr>
-              <a:t>方案总览：从材料到交付的可信闭环</a:t>
-            </a:r>
-          </a:p>
-        </p:txBody>
-      </p:sp>
-      <p:sp>
-        <p:nvSpPr>
-          <p:cNvPr id="4" name="Rectangle 3"/>
+              <a:rPr sz="1400" b="1">
+                <a:solidFill>
+                  <a:srgbClr val="64FFDA"/>
+                </a:solidFill>
+                <a:latin typeface="Consolas"/>
+                <a:ea typeface="Microsoft YaHei"/>
+              </a:rPr>
+              <a:t>04</a:t>
+            </a:r>
+          </a:p>
+        </p:txBody>
+      </p:sp>
+      <p:sp>
+        <p:nvSpPr>
+          <p:cNvPr id="4" name="TextBox 3"/>
+          <p:cNvSpPr txBox="1"/>
+          <p:nvPr/>
+        </p:nvSpPr>
+        <p:spPr>
+          <a:xfrm>
+            <a:off x="502920" y="365760"/>
+            <a:ext cx="10972800" cy="548640"/>
+          </a:xfrm>
+          <a:prstGeom prst="rect">
+            <a:avLst/>
+          </a:prstGeom>
+          <a:noFill/>
+        </p:spPr>
+        <p:txBody>
+          <a:bodyPr wrap="square" anchor="t">
+            <a:spAutoFit/>
+          </a:bodyPr>
+          <a:lstStyle/>
+          <a:p>
+            <a:pPr algn="l">
+              <a:spcAft>
+                <a:spcPts val="400"/>
+              </a:spcAft>
+            </a:pPr>
+            <a:r>
+              <a:rPr sz="2300" b="1">
+                <a:solidFill>
+                  <a:srgbClr val="E6F1FF"/>
+                </a:solidFill>
+                <a:latin typeface="Microsoft YaHei"/>
+                <a:ea typeface="Microsoft YaHei"/>
+              </a:rPr>
+              <a:t>  方案总览：从材料到交付的可信闭环</a:t>
+            </a:r>
+          </a:p>
+        </p:txBody>
+      </p:sp>
+      <p:sp>
+        <p:nvSpPr>
+          <p:cNvPr id="5" name="Rectangle 4"/>
           <p:cNvSpPr/>
           <p:nvPr/>
         </p:nvSpPr>
         <p:spPr>
           <a:xfrm>
-            <a:off x="502920" y="1078992"/>
-            <a:ext cx="1371600" cy="64008"/>
+            <a:off x="502920" y="1051560"/>
+            <a:ext cx="1280160" cy="45720"/>
           </a:xfrm>
           <a:prstGeom prst="rect">
             <a:avLst/>
           </a:prstGeom>
           <a:solidFill>
-            <a:srgbClr val="1F3A93"/>
+            <a:srgbClr val="64FFDA"/>
           </a:solidFill>
           <a:ln>
             <a:noFill/>
@@ -7493,14 +7729,14 @@
       </p:sp>
       <p:sp>
         <p:nvSpPr>
-          <p:cNvPr id="5" name="TextBox 4"/>
+          <p:cNvPr id="6" name="TextBox 5"/>
           <p:cNvSpPr txBox="1"/>
           <p:nvPr/>
         </p:nvSpPr>
         <p:spPr>
           <a:xfrm>
-            <a:off x="11430000" y="6446520"/>
-            <a:ext cx="548640" cy="365760"/>
+            <a:off x="10881360" y="411480"/>
+            <a:ext cx="822960" cy="365760"/>
           </a:xfrm>
           <a:prstGeom prst="rect">
             <a:avLst/>
@@ -7521,19 +7757,19 @@
             <a:r>
               <a:rPr sz="900" b="0">
                 <a:solidFill>
-                  <a:srgbClr val="64748B"/>
-                </a:solidFill>
-                <a:latin typeface="Microsoft YaHei"/>
-                <a:ea typeface="Microsoft YaHei"/>
-              </a:rPr>
-              <a:t>04/13</a:t>
-            </a:r>
-          </a:p>
-        </p:txBody>
-      </p:sp>
-      <p:sp>
-        <p:nvSpPr>
-          <p:cNvPr id="6" name="Rounded Rectangle 5"/>
+                  <a:srgbClr val="5A7A9E"/>
+                </a:solidFill>
+                <a:latin typeface="Consolas"/>
+                <a:ea typeface="Microsoft YaHei"/>
+              </a:rPr>
+              <a:t>04 / 13</a:t>
+            </a:r>
+          </a:p>
+        </p:txBody>
+      </p:sp>
+      <p:sp>
+        <p:nvSpPr>
+          <p:cNvPr id="7" name="Rounded Rectangle 6"/>
           <p:cNvSpPr/>
           <p:nvPr/>
         </p:nvSpPr>
@@ -7548,9 +7784,9 @@
             </a:avLst>
           </a:prstGeom>
           <a:solidFill>
-            <a:srgbClr val="FFFFFF"/>
+            <a:srgbClr val="112240"/>
           </a:solidFill>
-          <a:ln w="19050">
+          <a:ln w="15240">
             <a:solidFill>
               <a:srgbClr val="3F6FCC"/>
             </a:solidFill>
@@ -7577,9 +7813,9 @@
           <a:p>
             <a:pPr algn="ctr"/>
             <a:r>
-              <a:rPr sz="1200" b="1">
-                <a:solidFill>
-                  <a:srgbClr val="0F172A"/>
+              <a:rPr sz="1150" b="1">
+                <a:solidFill>
+                  <a:srgbClr val="E6F1FF"/>
                 </a:solidFill>
                 <a:latin typeface="Microsoft YaHei"/>
                 <a:ea typeface="Microsoft YaHei"/>
@@ -7592,7 +7828,7 @@
             <a:r>
               <a:rPr sz="800" b="0">
                 <a:solidFill>
-                  <a:srgbClr val="64748B"/>
+                  <a:srgbClr val="5A7A9E"/>
                 </a:solidFill>
                 <a:latin typeface="Microsoft YaHei"/>
                 <a:ea typeface="Microsoft YaHei"/>
@@ -7604,7 +7840,7 @@
       </p:sp>
       <p:sp>
         <p:nvSpPr>
-          <p:cNvPr id="7" name="TextBox 6"/>
+          <p:cNvPr id="8" name="TextBox 7"/>
           <p:cNvSpPr txBox="1"/>
           <p:nvPr/>
         </p:nvSpPr>
@@ -7630,9 +7866,9 @@
               </a:spcAft>
             </a:pPr>
             <a:r>
-              <a:rPr sz="1600" b="1">
-                <a:solidFill>
-                  <a:srgbClr val="3F6FCC"/>
+              <a:rPr sz="1500" b="1">
+                <a:solidFill>
+                  <a:srgbClr val="64FFDA"/>
                 </a:solidFill>
                 <a:latin typeface="Microsoft YaHei"/>
                 <a:ea typeface="Microsoft YaHei"/>
@@ -7644,7 +7880,7 @@
       </p:sp>
       <p:sp>
         <p:nvSpPr>
-          <p:cNvPr id="8" name="Rounded Rectangle 7"/>
+          <p:cNvPr id="9" name="Rounded Rectangle 8"/>
           <p:cNvSpPr/>
           <p:nvPr/>
         </p:nvSpPr>
@@ -7659,9 +7895,9 @@
             </a:avLst>
           </a:prstGeom>
           <a:solidFill>
-            <a:srgbClr val="FFFFFF"/>
+            <a:srgbClr val="112240"/>
           </a:solidFill>
-          <a:ln w="19050">
+          <a:ln w="15240">
             <a:solidFill>
               <a:srgbClr val="3F6FCC"/>
             </a:solidFill>
@@ -7688,9 +7924,9 @@
           <a:p>
             <a:pPr algn="ctr"/>
             <a:r>
-              <a:rPr sz="1200" b="1">
-                <a:solidFill>
-                  <a:srgbClr val="0F172A"/>
+              <a:rPr sz="1150" b="1">
+                <a:solidFill>
+                  <a:srgbClr val="E6F1FF"/>
                 </a:solidFill>
                 <a:latin typeface="Microsoft YaHei"/>
                 <a:ea typeface="Microsoft YaHei"/>
@@ -7703,7 +7939,7 @@
             <a:r>
               <a:rPr sz="800" b="0">
                 <a:solidFill>
-                  <a:srgbClr val="64748B"/>
+                  <a:srgbClr val="5A7A9E"/>
                 </a:solidFill>
                 <a:latin typeface="Microsoft YaHei"/>
                 <a:ea typeface="Microsoft YaHei"/>
@@ -7715,7 +7951,7 @@
       </p:sp>
       <p:sp>
         <p:nvSpPr>
-          <p:cNvPr id="9" name="TextBox 8"/>
+          <p:cNvPr id="10" name="TextBox 9"/>
           <p:cNvSpPr txBox="1"/>
           <p:nvPr/>
         </p:nvSpPr>
@@ -7741,9 +7977,9 @@
               </a:spcAft>
             </a:pPr>
             <a:r>
-              <a:rPr sz="1600" b="1">
-                <a:solidFill>
-                  <a:srgbClr val="3F6FCC"/>
+              <a:rPr sz="1500" b="1">
+                <a:solidFill>
+                  <a:srgbClr val="64FFDA"/>
                 </a:solidFill>
                 <a:latin typeface="Microsoft YaHei"/>
                 <a:ea typeface="Microsoft YaHei"/>
@@ -7755,7 +7991,7 @@
       </p:sp>
       <p:sp>
         <p:nvSpPr>
-          <p:cNvPr id="10" name="Rounded Rectangle 9"/>
+          <p:cNvPr id="11" name="Rounded Rectangle 10"/>
           <p:cNvSpPr/>
           <p:nvPr/>
         </p:nvSpPr>
@@ -7770,9 +8006,9 @@
             </a:avLst>
           </a:prstGeom>
           <a:solidFill>
-            <a:srgbClr val="FFFFFF"/>
+            <a:srgbClr val="112240"/>
           </a:solidFill>
-          <a:ln w="19050">
+          <a:ln w="15240">
             <a:solidFill>
               <a:srgbClr val="3F6FCC"/>
             </a:solidFill>
@@ -7799,9 +8035,9 @@
           <a:p>
             <a:pPr algn="ctr"/>
             <a:r>
-              <a:rPr sz="1200" b="1">
-                <a:solidFill>
-                  <a:srgbClr val="0F172A"/>
+              <a:rPr sz="1150" b="1">
+                <a:solidFill>
+                  <a:srgbClr val="E6F1FF"/>
                 </a:solidFill>
                 <a:latin typeface="Microsoft YaHei"/>
                 <a:ea typeface="Microsoft YaHei"/>
@@ -7814,7 +8050,7 @@
             <a:r>
               <a:rPr sz="800" b="0">
                 <a:solidFill>
-                  <a:srgbClr val="64748B"/>
+                  <a:srgbClr val="5A7A9E"/>
                 </a:solidFill>
                 <a:latin typeface="Microsoft YaHei"/>
                 <a:ea typeface="Microsoft YaHei"/>
@@ -7826,7 +8062,7 @@
       </p:sp>
       <p:sp>
         <p:nvSpPr>
-          <p:cNvPr id="11" name="TextBox 10"/>
+          <p:cNvPr id="12" name="TextBox 11"/>
           <p:cNvSpPr txBox="1"/>
           <p:nvPr/>
         </p:nvSpPr>
@@ -7852,9 +8088,9 @@
               </a:spcAft>
             </a:pPr>
             <a:r>
-              <a:rPr sz="1600" b="1">
-                <a:solidFill>
-                  <a:srgbClr val="3F6FCC"/>
+              <a:rPr sz="1500" b="1">
+                <a:solidFill>
+                  <a:srgbClr val="64FFDA"/>
                 </a:solidFill>
                 <a:latin typeface="Microsoft YaHei"/>
                 <a:ea typeface="Microsoft YaHei"/>
@@ -7866,7 +8102,7 @@
       </p:sp>
       <p:sp>
         <p:nvSpPr>
-          <p:cNvPr id="12" name="Rounded Rectangle 11"/>
+          <p:cNvPr id="13" name="Rounded Rectangle 12"/>
           <p:cNvSpPr/>
           <p:nvPr/>
         </p:nvSpPr>
@@ -7881,9 +8117,9 @@
             </a:avLst>
           </a:prstGeom>
           <a:solidFill>
-            <a:srgbClr val="FFFFFF"/>
+            <a:srgbClr val="112240"/>
           </a:solidFill>
-          <a:ln w="19050">
+          <a:ln w="15240">
             <a:solidFill>
               <a:srgbClr val="3F6FCC"/>
             </a:solidFill>
@@ -7910,9 +8146,9 @@
           <a:p>
             <a:pPr algn="ctr"/>
             <a:r>
-              <a:rPr sz="1200" b="1">
-                <a:solidFill>
-                  <a:srgbClr val="0F172A"/>
+              <a:rPr sz="1150" b="1">
+                <a:solidFill>
+                  <a:srgbClr val="E6F1FF"/>
                 </a:solidFill>
                 <a:latin typeface="Microsoft YaHei"/>
                 <a:ea typeface="Microsoft YaHei"/>
@@ -7925,7 +8161,7 @@
             <a:r>
               <a:rPr sz="800" b="0">
                 <a:solidFill>
-                  <a:srgbClr val="64748B"/>
+                  <a:srgbClr val="5A7A9E"/>
                 </a:solidFill>
                 <a:latin typeface="Microsoft YaHei"/>
                 <a:ea typeface="Microsoft YaHei"/>
@@ -7937,14 +8173,14 @@
       </p:sp>
       <p:sp>
         <p:nvSpPr>
-          <p:cNvPr id="13" name="TextBox 12"/>
+          <p:cNvPr id="14" name="TextBox 13"/>
           <p:cNvSpPr txBox="1"/>
           <p:nvPr/>
         </p:nvSpPr>
         <p:spPr>
           <a:xfrm>
-            <a:off x="502920" y="3566160"/>
-            <a:ext cx="11155680" cy="548640"/>
+            <a:off x="502920" y="3474720"/>
+            <a:ext cx="11155680" cy="457200"/>
           </a:xfrm>
           <a:prstGeom prst="rect">
             <a:avLst/>
@@ -7965,7 +8201,7 @@
             <a:r>
               <a:rPr sz="1400" b="1">
                 <a:solidFill>
-                  <a:srgbClr val="F59E0B"/>
+                  <a:srgbClr val="FFC864"/>
                 </a:solidFill>
                 <a:latin typeface="Microsoft YaHei"/>
                 <a:ea typeface="Microsoft YaHei"/>
@@ -7977,14 +8213,14 @@
       </p:sp>
       <p:sp>
         <p:nvSpPr>
-          <p:cNvPr id="14" name="TextBox 13"/>
+          <p:cNvPr id="15" name="TextBox 14"/>
           <p:cNvSpPr txBox="1"/>
           <p:nvPr/>
         </p:nvSpPr>
         <p:spPr>
           <a:xfrm>
-            <a:off x="502920" y="4389120"/>
-            <a:ext cx="11155680" cy="457200"/>
+            <a:off x="640080" y="4206240"/>
+            <a:ext cx="10515600" cy="365760"/>
           </a:xfrm>
           <a:prstGeom prst="rect">
             <a:avLst/>
@@ -8005,7 +8241,7 @@
             <a:r>
               <a:rPr sz="1300" b="0">
                 <a:solidFill>
-                  <a:srgbClr val="334155"/>
+                  <a:srgbClr val="8892B0"/>
                 </a:solidFill>
                 <a:latin typeface="Microsoft YaHei"/>
                 <a:ea typeface="Microsoft YaHei"/>
@@ -8017,14 +8253,14 @@
       </p:sp>
       <p:sp>
         <p:nvSpPr>
-          <p:cNvPr id="15" name="TextBox 14"/>
+          <p:cNvPr id="16" name="TextBox 15"/>
           <p:cNvSpPr txBox="1"/>
           <p:nvPr/>
         </p:nvSpPr>
         <p:spPr>
           <a:xfrm>
-            <a:off x="502920" y="4937760"/>
-            <a:ext cx="11155680" cy="457200"/>
+            <a:off x="640080" y="4709160"/>
+            <a:ext cx="10515600" cy="365760"/>
           </a:xfrm>
           <a:prstGeom prst="rect">
             <a:avLst/>
@@ -8045,7 +8281,7 @@
             <a:r>
               <a:rPr sz="1300" b="0">
                 <a:solidFill>
-                  <a:srgbClr val="334155"/>
+                  <a:srgbClr val="8892B0"/>
                 </a:solidFill>
                 <a:latin typeface="Microsoft YaHei"/>
                 <a:ea typeface="Microsoft YaHei"/>
@@ -8088,7 +8324,7 @@
             <a:avLst/>
           </a:prstGeom>
           <a:solidFill>
-            <a:srgbClr val="FFFFFF"/>
+            <a:srgbClr val="0A192F"/>
           </a:solidFill>
           <a:ln>
             <a:noFill/>
@@ -8125,8 +8361,8 @@
         </p:nvSpPr>
         <p:spPr>
           <a:xfrm>
-            <a:off x="502920" y="365760"/>
-            <a:ext cx="10972800" cy="548640"/>
+            <a:off x="502920" y="384048"/>
+            <a:ext cx="1828800" cy="457200"/>
           </a:xfrm>
           <a:prstGeom prst="rect">
             <a:avLst/>
@@ -8145,34 +8381,74 @@
               </a:spcAft>
             </a:pPr>
             <a:r>
-              <a:rPr sz="2400" b="1">
-                <a:solidFill>
-                  <a:srgbClr val="0F172A"/>
-                </a:solidFill>
-                <a:latin typeface="Microsoft YaHei"/>
-                <a:ea typeface="Microsoft YaHei"/>
-              </a:rPr>
-              <a:t>AgentTeams 架构：分层 + 主控路由</a:t>
-            </a:r>
-          </a:p>
-        </p:txBody>
-      </p:sp>
-      <p:sp>
-        <p:nvSpPr>
-          <p:cNvPr id="4" name="Rectangle 3"/>
+              <a:rPr sz="1400" b="1">
+                <a:solidFill>
+                  <a:srgbClr val="64FFDA"/>
+                </a:solidFill>
+                <a:latin typeface="Consolas"/>
+                <a:ea typeface="Microsoft YaHei"/>
+              </a:rPr>
+              <a:t>05</a:t>
+            </a:r>
+          </a:p>
+        </p:txBody>
+      </p:sp>
+      <p:sp>
+        <p:nvSpPr>
+          <p:cNvPr id="4" name="TextBox 3"/>
+          <p:cNvSpPr txBox="1"/>
+          <p:nvPr/>
+        </p:nvSpPr>
+        <p:spPr>
+          <a:xfrm>
+            <a:off x="502920" y="365760"/>
+            <a:ext cx="10972800" cy="548640"/>
+          </a:xfrm>
+          <a:prstGeom prst="rect">
+            <a:avLst/>
+          </a:prstGeom>
+          <a:noFill/>
+        </p:spPr>
+        <p:txBody>
+          <a:bodyPr wrap="square" anchor="t">
+            <a:spAutoFit/>
+          </a:bodyPr>
+          <a:lstStyle/>
+          <a:p>
+            <a:pPr algn="l">
+              <a:spcAft>
+                <a:spcPts val="400"/>
+              </a:spcAft>
+            </a:pPr>
+            <a:r>
+              <a:rPr sz="2300" b="1">
+                <a:solidFill>
+                  <a:srgbClr val="E6F1FF"/>
+                </a:solidFill>
+                <a:latin typeface="Microsoft YaHei"/>
+                <a:ea typeface="Microsoft YaHei"/>
+              </a:rPr>
+              <a:t>  AgentTeams 架构：分层 + 主控路由</a:t>
+            </a:r>
+          </a:p>
+        </p:txBody>
+      </p:sp>
+      <p:sp>
+        <p:nvSpPr>
+          <p:cNvPr id="5" name="Rectangle 4"/>
           <p:cNvSpPr/>
           <p:nvPr/>
         </p:nvSpPr>
         <p:spPr>
           <a:xfrm>
-            <a:off x="502920" y="1078992"/>
-            <a:ext cx="1371600" cy="64008"/>
+            <a:off x="502920" y="1051560"/>
+            <a:ext cx="1280160" cy="45720"/>
           </a:xfrm>
           <a:prstGeom prst="rect">
             <a:avLst/>
           </a:prstGeom>
           <a:solidFill>
-            <a:srgbClr val="1F3A93"/>
+            <a:srgbClr val="64FFDA"/>
           </a:solidFill>
           <a:ln>
             <a:noFill/>
@@ -8203,14 +8479,14 @@
       </p:sp>
       <p:sp>
         <p:nvSpPr>
-          <p:cNvPr id="5" name="TextBox 4"/>
+          <p:cNvPr id="6" name="TextBox 5"/>
           <p:cNvSpPr txBox="1"/>
           <p:nvPr/>
         </p:nvSpPr>
         <p:spPr>
           <a:xfrm>
-            <a:off x="11430000" y="6446520"/>
-            <a:ext cx="548640" cy="365760"/>
+            <a:off x="10881360" y="411480"/>
+            <a:ext cx="822960" cy="365760"/>
           </a:xfrm>
           <a:prstGeom prst="rect">
             <a:avLst/>
@@ -8231,25 +8507,25 @@
             <a:r>
               <a:rPr sz="900" b="0">
                 <a:solidFill>
-                  <a:srgbClr val="64748B"/>
-                </a:solidFill>
-                <a:latin typeface="Microsoft YaHei"/>
-                <a:ea typeface="Microsoft YaHei"/>
-              </a:rPr>
-              <a:t>05/13</a:t>
-            </a:r>
-          </a:p>
-        </p:txBody>
-      </p:sp>
-      <p:sp>
-        <p:nvSpPr>
-          <p:cNvPr id="6" name="Rounded Rectangle 5"/>
+                  <a:srgbClr val="5A7A9E"/>
+                </a:solidFill>
+                <a:latin typeface="Consolas"/>
+                <a:ea typeface="Microsoft YaHei"/>
+              </a:rPr>
+              <a:t>05 / 13</a:t>
+            </a:r>
+          </a:p>
+        </p:txBody>
+      </p:sp>
+      <p:sp>
+        <p:nvSpPr>
+          <p:cNvPr id="7" name="Rounded Rectangle 6"/>
           <p:cNvSpPr/>
           <p:nvPr/>
         </p:nvSpPr>
         <p:spPr>
           <a:xfrm>
-            <a:off x="502920" y="1554480"/>
+            <a:off x="502920" y="1508760"/>
             <a:ext cx="11155680" cy="713232"/>
           </a:xfrm>
           <a:prstGeom prst="roundRect">
@@ -8258,7 +8534,7 @@
             </a:avLst>
           </a:prstGeom>
           <a:solidFill>
-            <a:srgbClr val="1F3A93"/>
+            <a:srgbClr val="1F3A6B"/>
           </a:solidFill>
           <a:ln>
             <a:noFill/>
@@ -8280,14 +8556,14 @@
           </a:fontRef>
         </p:style>
         <p:txBody>
-          <a:bodyPr rtlCol="0" anchor="ctr" wrap="square" lIns="228600"/>
+          <a:bodyPr rtlCol="0" anchor="ctr" wrap="square" lIns="201168"/>
           <a:lstStyle/>
           <a:p>
             <a:pPr algn="ctr"/>
             <a:r>
-              <a:rPr sz="1300" b="1">
-                <a:solidFill>
-                  <a:srgbClr val="FFFFFF"/>
+              <a:rPr sz="1250" b="1">
+                <a:solidFill>
+                  <a:srgbClr val="E6F1FF"/>
                 </a:solidFill>
                 <a:latin typeface="Microsoft YaHei"/>
                 <a:ea typeface="Microsoft YaHei"/>
@@ -8295,9 +8571,9 @@
               <a:t>入口层  </a:t>
             </a:r>
             <a:r>
-              <a:rPr sz="1050" b="0">
-                <a:solidFill>
-                  <a:srgbClr val="FFFFFF"/>
+              <a:rPr sz="1000" b="0">
+                <a:solidFill>
+                  <a:srgbClr val="A8B2D1"/>
                 </a:solidFill>
                 <a:latin typeface="Microsoft YaHei"/>
                 <a:ea typeface="Microsoft YaHei"/>
@@ -8309,13 +8585,13 @@
       </p:sp>
       <p:sp>
         <p:nvSpPr>
-          <p:cNvPr id="7" name="Rounded Rectangle 6"/>
+          <p:cNvPr id="8" name="Rounded Rectangle 7"/>
           <p:cNvSpPr/>
           <p:nvPr/>
         </p:nvSpPr>
         <p:spPr>
           <a:xfrm>
-            <a:off x="502920" y="2377440"/>
+            <a:off x="502920" y="2313432"/>
             <a:ext cx="11155680" cy="713232"/>
           </a:xfrm>
           <a:prstGeom prst="roundRect">
@@ -8324,7 +8600,7 @@
             </a:avLst>
           </a:prstGeom>
           <a:solidFill>
-            <a:srgbClr val="3F6FCC"/>
+            <a:srgbClr val="1C4A5E"/>
           </a:solidFill>
           <a:ln>
             <a:noFill/>
@@ -8346,14 +8622,14 @@
           </a:fontRef>
         </p:style>
         <p:txBody>
-          <a:bodyPr rtlCol="0" anchor="ctr" wrap="square" lIns="228600"/>
+          <a:bodyPr rtlCol="0" anchor="ctr" wrap="square" lIns="201168"/>
           <a:lstStyle/>
           <a:p>
             <a:pPr algn="ctr"/>
             <a:r>
-              <a:rPr sz="1300" b="1">
-                <a:solidFill>
-                  <a:srgbClr val="FFFFFF"/>
+              <a:rPr sz="1250" b="1">
+                <a:solidFill>
+                  <a:srgbClr val="E6F1FF"/>
                 </a:solidFill>
                 <a:latin typeface="Microsoft YaHei"/>
                 <a:ea typeface="Microsoft YaHei"/>
@@ -8361,9 +8637,9 @@
               <a:t>AgentTeams 编排层  </a:t>
             </a:r>
             <a:r>
-              <a:rPr sz="1050" b="0">
-                <a:solidFill>
-                  <a:srgbClr val="FFFFFF"/>
+              <a:rPr sz="1000" b="0">
+                <a:solidFill>
+                  <a:srgbClr val="A8B2D1"/>
                 </a:solidFill>
                 <a:latin typeface="Microsoft YaHei"/>
                 <a:ea typeface="Microsoft YaHei"/>
@@ -8375,13 +8651,13 @@
       </p:sp>
       <p:sp>
         <p:nvSpPr>
-          <p:cNvPr id="8" name="Rounded Rectangle 7"/>
+          <p:cNvPr id="9" name="Rounded Rectangle 8"/>
           <p:cNvSpPr/>
           <p:nvPr/>
         </p:nvSpPr>
         <p:spPr>
           <a:xfrm>
-            <a:off x="502920" y="3200400"/>
+            <a:off x="502920" y="3118104"/>
             <a:ext cx="11155680" cy="713232"/>
           </a:xfrm>
           <a:prstGeom prst="roundRect">
@@ -8390,7 +8666,7 @@
             </a:avLst>
           </a:prstGeom>
           <a:solidFill>
-            <a:srgbClr val="7C3AED"/>
+            <a:srgbClr val="3A2E6B"/>
           </a:solidFill>
           <a:ln>
             <a:noFill/>
@@ -8412,14 +8688,14 @@
           </a:fontRef>
         </p:style>
         <p:txBody>
-          <a:bodyPr rtlCol="0" anchor="ctr" wrap="square" lIns="228600"/>
+          <a:bodyPr rtlCol="0" anchor="ctr" wrap="square" lIns="201168"/>
           <a:lstStyle/>
           <a:p>
             <a:pPr algn="ctr"/>
             <a:r>
-              <a:rPr sz="1300" b="1">
-                <a:solidFill>
-                  <a:srgbClr val="FFFFFF"/>
+              <a:rPr sz="1250" b="1">
+                <a:solidFill>
+                  <a:srgbClr val="E6F1FF"/>
                 </a:solidFill>
                 <a:latin typeface="Microsoft YaHei"/>
                 <a:ea typeface="Microsoft YaHei"/>
@@ -8427,9 +8703,9 @@
               <a:t>多 Agent 层  </a:t>
             </a:r>
             <a:r>
-              <a:rPr sz="1050" b="0">
-                <a:solidFill>
-                  <a:srgbClr val="FFFFFF"/>
+              <a:rPr sz="1000" b="0">
+                <a:solidFill>
+                  <a:srgbClr val="A8B2D1"/>
                 </a:solidFill>
                 <a:latin typeface="Microsoft YaHei"/>
                 <a:ea typeface="Microsoft YaHei"/>
@@ -8441,13 +8717,13 @@
       </p:sp>
       <p:sp>
         <p:nvSpPr>
-          <p:cNvPr id="9" name="Rounded Rectangle 8"/>
+          <p:cNvPr id="10" name="Rounded Rectangle 9"/>
           <p:cNvSpPr/>
           <p:nvPr/>
         </p:nvSpPr>
         <p:spPr>
           <a:xfrm>
-            <a:off x="502920" y="4023360"/>
+            <a:off x="502920" y="3922776"/>
             <a:ext cx="11155680" cy="713232"/>
           </a:xfrm>
           <a:prstGeom prst="roundRect">
@@ -8456,7 +8732,7 @@
             </a:avLst>
           </a:prstGeom>
           <a:solidFill>
-            <a:srgbClr val="0D9488"/>
+            <a:srgbClr val="164E4A"/>
           </a:solidFill>
           <a:ln>
             <a:noFill/>
@@ -8478,14 +8754,14 @@
           </a:fontRef>
         </p:style>
         <p:txBody>
-          <a:bodyPr rtlCol="0" anchor="ctr" wrap="square" lIns="228600"/>
+          <a:bodyPr rtlCol="0" anchor="ctr" wrap="square" lIns="201168"/>
           <a:lstStyle/>
           <a:p>
             <a:pPr algn="ctr"/>
             <a:r>
-              <a:rPr sz="1300" b="1">
-                <a:solidFill>
-                  <a:srgbClr val="FFFFFF"/>
+              <a:rPr sz="1250" b="1">
+                <a:solidFill>
+                  <a:srgbClr val="E6F1FF"/>
                 </a:solidFill>
                 <a:latin typeface="Microsoft YaHei"/>
                 <a:ea typeface="Microsoft YaHei"/>
@@ -8493,9 +8769,9 @@
               <a:t>Skill 能力层  </a:t>
             </a:r>
             <a:r>
-              <a:rPr sz="1050" b="0">
-                <a:solidFill>
-                  <a:srgbClr val="FFFFFF"/>
+              <a:rPr sz="1000" b="0">
+                <a:solidFill>
+                  <a:srgbClr val="A8B2D1"/>
                 </a:solidFill>
                 <a:latin typeface="Microsoft YaHei"/>
                 <a:ea typeface="Microsoft YaHei"/>
@@ -8507,13 +8783,13 @@
       </p:sp>
       <p:sp>
         <p:nvSpPr>
-          <p:cNvPr id="10" name="Rounded Rectangle 9"/>
+          <p:cNvPr id="11" name="Rounded Rectangle 10"/>
           <p:cNvSpPr/>
           <p:nvPr/>
         </p:nvSpPr>
         <p:spPr>
           <a:xfrm>
-            <a:off x="502920" y="4846320"/>
+            <a:off x="502920" y="4727448"/>
             <a:ext cx="11155680" cy="713232"/>
           </a:xfrm>
           <a:prstGeom prst="roundRect">
@@ -8522,7 +8798,7 @@
             </a:avLst>
           </a:prstGeom>
           <a:solidFill>
-            <a:srgbClr val="334155"/>
+            <a:srgbClr val="2A3550"/>
           </a:solidFill>
           <a:ln>
             <a:noFill/>
@@ -8544,14 +8820,14 @@
           </a:fontRef>
         </p:style>
         <p:txBody>
-          <a:bodyPr rtlCol="0" anchor="ctr" wrap="square" lIns="228600"/>
+          <a:bodyPr rtlCol="0" anchor="ctr" wrap="square" lIns="201168"/>
           <a:lstStyle/>
           <a:p>
             <a:pPr algn="ctr"/>
             <a:r>
-              <a:rPr sz="1300" b="1">
-                <a:solidFill>
-                  <a:srgbClr val="FFFFFF"/>
+              <a:rPr sz="1250" b="1">
+                <a:solidFill>
+                  <a:srgbClr val="E6F1FF"/>
                 </a:solidFill>
                 <a:latin typeface="Microsoft YaHei"/>
                 <a:ea typeface="Microsoft YaHei"/>
@@ -8559,9 +8835,9 @@
               <a:t>连接器契约层  </a:t>
             </a:r>
             <a:r>
-              <a:rPr sz="1050" b="0">
-                <a:solidFill>
-                  <a:srgbClr val="FFFFFF"/>
+              <a:rPr sz="1000" b="0">
+                <a:solidFill>
+                  <a:srgbClr val="A8B2D1"/>
                 </a:solidFill>
                 <a:latin typeface="Microsoft YaHei"/>
                 <a:ea typeface="Microsoft YaHei"/>
@@ -8573,13 +8849,13 @@
       </p:sp>
       <p:sp>
         <p:nvSpPr>
-          <p:cNvPr id="11" name="Rounded Rectangle 10"/>
+          <p:cNvPr id="12" name="Rounded Rectangle 11"/>
           <p:cNvSpPr/>
           <p:nvPr/>
         </p:nvSpPr>
         <p:spPr>
           <a:xfrm>
-            <a:off x="502920" y="5669280"/>
+            <a:off x="502920" y="5532120"/>
             <a:ext cx="11155680" cy="713232"/>
           </a:xfrm>
           <a:prstGeom prst="roundRect">
@@ -8588,7 +8864,7 @@
             </a:avLst>
           </a:prstGeom>
           <a:solidFill>
-            <a:srgbClr val="64748B"/>
+            <a:srgbClr val="20293D"/>
           </a:solidFill>
           <a:ln>
             <a:noFill/>
@@ -8610,14 +8886,14 @@
           </a:fontRef>
         </p:style>
         <p:txBody>
-          <a:bodyPr rtlCol="0" anchor="ctr" wrap="square" lIns="228600"/>
+          <a:bodyPr rtlCol="0" anchor="ctr" wrap="square" lIns="201168"/>
           <a:lstStyle/>
           <a:p>
             <a:pPr algn="ctr"/>
             <a:r>
-              <a:rPr sz="1300" b="1">
-                <a:solidFill>
-                  <a:srgbClr val="FFFFFF"/>
+              <a:rPr sz="1250" b="1">
+                <a:solidFill>
+                  <a:srgbClr val="E6F1FF"/>
                 </a:solidFill>
                 <a:latin typeface="Microsoft YaHei"/>
                 <a:ea typeface="Microsoft YaHei"/>
@@ -8625,9 +8901,9 @@
               <a:t>证据治理层  </a:t>
             </a:r>
             <a:r>
-              <a:rPr sz="1050" b="0">
-                <a:solidFill>
-                  <a:srgbClr val="FFFFFF"/>
+              <a:rPr sz="1000" b="0">
+                <a:solidFill>
+                  <a:srgbClr val="A8B2D1"/>
                 </a:solidFill>
                 <a:latin typeface="Microsoft YaHei"/>
                 <a:ea typeface="Microsoft YaHei"/>
@@ -8670,7 +8946,7 @@
             <a:avLst/>
           </a:prstGeom>
           <a:solidFill>
-            <a:srgbClr val="FFFFFF"/>
+            <a:srgbClr val="0A192F"/>
           </a:solidFill>
           <a:ln>
             <a:noFill/>
@@ -8707,8 +8983,8 @@
         </p:nvSpPr>
         <p:spPr>
           <a:xfrm>
-            <a:off x="502920" y="365760"/>
-            <a:ext cx="10972800" cy="548640"/>
+            <a:off x="502920" y="384048"/>
+            <a:ext cx="1828800" cy="457200"/>
           </a:xfrm>
           <a:prstGeom prst="rect">
             <a:avLst/>
@@ -8727,34 +9003,74 @@
               </a:spcAft>
             </a:pPr>
             <a:r>
-              <a:rPr sz="2400" b="1">
-                <a:solidFill>
-                  <a:srgbClr val="0F172A"/>
-                </a:solidFill>
-                <a:latin typeface="Microsoft YaHei"/>
-                <a:ea typeface="Microsoft YaHei"/>
-              </a:rPr>
-              <a:t>完整任务链路：一条可追溯闭环</a:t>
-            </a:r>
-          </a:p>
-        </p:txBody>
-      </p:sp>
-      <p:sp>
-        <p:nvSpPr>
-          <p:cNvPr id="4" name="Rectangle 3"/>
+              <a:rPr sz="1400" b="1">
+                <a:solidFill>
+                  <a:srgbClr val="64FFDA"/>
+                </a:solidFill>
+                <a:latin typeface="Consolas"/>
+                <a:ea typeface="Microsoft YaHei"/>
+              </a:rPr>
+              <a:t>06</a:t>
+            </a:r>
+          </a:p>
+        </p:txBody>
+      </p:sp>
+      <p:sp>
+        <p:nvSpPr>
+          <p:cNvPr id="4" name="TextBox 3"/>
+          <p:cNvSpPr txBox="1"/>
+          <p:nvPr/>
+        </p:nvSpPr>
+        <p:spPr>
+          <a:xfrm>
+            <a:off x="502920" y="365760"/>
+            <a:ext cx="10972800" cy="548640"/>
+          </a:xfrm>
+          <a:prstGeom prst="rect">
+            <a:avLst/>
+          </a:prstGeom>
+          <a:noFill/>
+        </p:spPr>
+        <p:txBody>
+          <a:bodyPr wrap="square" anchor="t">
+            <a:spAutoFit/>
+          </a:bodyPr>
+          <a:lstStyle/>
+          <a:p>
+            <a:pPr algn="l">
+              <a:spcAft>
+                <a:spcPts val="400"/>
+              </a:spcAft>
+            </a:pPr>
+            <a:r>
+              <a:rPr sz="2300" b="1">
+                <a:solidFill>
+                  <a:srgbClr val="E6F1FF"/>
+                </a:solidFill>
+                <a:latin typeface="Microsoft YaHei"/>
+                <a:ea typeface="Microsoft YaHei"/>
+              </a:rPr>
+              <a:t>  完整任务链路：一条可追溯闭环</a:t>
+            </a:r>
+          </a:p>
+        </p:txBody>
+      </p:sp>
+      <p:sp>
+        <p:nvSpPr>
+          <p:cNvPr id="5" name="Rectangle 4"/>
           <p:cNvSpPr/>
           <p:nvPr/>
         </p:nvSpPr>
         <p:spPr>
           <a:xfrm>
-            <a:off x="502920" y="1078992"/>
-            <a:ext cx="1371600" cy="64008"/>
+            <a:off x="502920" y="1051560"/>
+            <a:ext cx="1280160" cy="45720"/>
           </a:xfrm>
           <a:prstGeom prst="rect">
             <a:avLst/>
           </a:prstGeom>
           <a:solidFill>
-            <a:srgbClr val="1F3A93"/>
+            <a:srgbClr val="64FFDA"/>
           </a:solidFill>
           <a:ln>
             <a:noFill/>
@@ -8785,14 +9101,14 @@
       </p:sp>
       <p:sp>
         <p:nvSpPr>
-          <p:cNvPr id="5" name="TextBox 4"/>
+          <p:cNvPr id="6" name="TextBox 5"/>
           <p:cNvSpPr txBox="1"/>
           <p:nvPr/>
         </p:nvSpPr>
         <p:spPr>
           <a:xfrm>
-            <a:off x="11430000" y="6446520"/>
-            <a:ext cx="548640" cy="365760"/>
+            <a:off x="10881360" y="411480"/>
+            <a:ext cx="822960" cy="365760"/>
           </a:xfrm>
           <a:prstGeom prst="rect">
             <a:avLst/>
@@ -8813,26 +9129,26 @@
             <a:r>
               <a:rPr sz="900" b="0">
                 <a:solidFill>
-                  <a:srgbClr val="64748B"/>
-                </a:solidFill>
-                <a:latin typeface="Microsoft YaHei"/>
-                <a:ea typeface="Microsoft YaHei"/>
-              </a:rPr>
-              <a:t>06/13</a:t>
-            </a:r>
-          </a:p>
-        </p:txBody>
-      </p:sp>
-      <p:sp>
-        <p:nvSpPr>
-          <p:cNvPr id="6" name="Rounded Rectangle 5"/>
+                  <a:srgbClr val="5A7A9E"/>
+                </a:solidFill>
+                <a:latin typeface="Consolas"/>
+                <a:ea typeface="Microsoft YaHei"/>
+              </a:rPr>
+              <a:t>06 / 13</a:t>
+            </a:r>
+          </a:p>
+        </p:txBody>
+      </p:sp>
+      <p:sp>
+        <p:nvSpPr>
+          <p:cNvPr id="7" name="Rounded Rectangle 6"/>
           <p:cNvSpPr/>
           <p:nvPr/>
         </p:nvSpPr>
         <p:spPr>
           <a:xfrm>
-            <a:off x="801471" y="2011680"/>
-            <a:ext cx="1371600" cy="822960"/>
+            <a:off x="1016355" y="1920240"/>
+            <a:ext cx="1325880" cy="822960"/>
           </a:xfrm>
           <a:prstGeom prst="roundRect">
             <a:avLst>
@@ -8840,9 +9156,9 @@
             </a:avLst>
           </a:prstGeom>
           <a:solidFill>
-            <a:srgbClr val="FFFFFF"/>
+            <a:srgbClr val="112240"/>
           </a:solidFill>
-          <a:ln w="19050">
+          <a:ln w="15240">
             <a:solidFill>
               <a:srgbClr val="3F6FCC"/>
             </a:solidFill>
@@ -8869,9 +9185,9 @@
           <a:p>
             <a:pPr algn="ctr"/>
             <a:r>
-              <a:rPr sz="1200" b="1">
-                <a:solidFill>
-                  <a:srgbClr val="0F172A"/>
+              <a:rPr sz="1150" b="1">
+                <a:solidFill>
+                  <a:srgbClr val="E6F1FF"/>
                 </a:solidFill>
                 <a:latin typeface="Microsoft YaHei"/>
                 <a:ea typeface="Microsoft YaHei"/>
@@ -8883,14 +9199,14 @@
       </p:sp>
       <p:sp>
         <p:nvSpPr>
-          <p:cNvPr id="7" name="TextBox 6"/>
+          <p:cNvPr id="8" name="TextBox 7"/>
           <p:cNvSpPr txBox="1"/>
           <p:nvPr/>
         </p:nvSpPr>
         <p:spPr>
           <a:xfrm>
-            <a:off x="2173071" y="2240280"/>
-            <a:ext cx="164592" cy="457200"/>
+            <a:off x="2342235" y="2148840"/>
+            <a:ext cx="146304" cy="457200"/>
           </a:xfrm>
           <a:prstGeom prst="rect">
             <a:avLst/>
@@ -8909,9 +9225,9 @@
               </a:spcAft>
             </a:pPr>
             <a:r>
-              <a:rPr sz="1600" b="1">
-                <a:solidFill>
-                  <a:srgbClr val="3F6FCC"/>
+              <a:rPr sz="1500" b="1">
+                <a:solidFill>
+                  <a:srgbClr val="64FFDA"/>
                 </a:solidFill>
                 <a:latin typeface="Microsoft YaHei"/>
                 <a:ea typeface="Microsoft YaHei"/>
@@ -8923,14 +9239,14 @@
       </p:sp>
       <p:sp>
         <p:nvSpPr>
-          <p:cNvPr id="8" name="Rounded Rectangle 7"/>
+          <p:cNvPr id="9" name="Rounded Rectangle 8"/>
           <p:cNvSpPr/>
           <p:nvPr/>
         </p:nvSpPr>
         <p:spPr>
           <a:xfrm>
-            <a:off x="2337663" y="2011680"/>
-            <a:ext cx="1371600" cy="822960"/>
+            <a:off x="2488539" y="1920240"/>
+            <a:ext cx="1325880" cy="822960"/>
           </a:xfrm>
           <a:prstGeom prst="roundRect">
             <a:avLst>
@@ -8938,9 +9254,9 @@
             </a:avLst>
           </a:prstGeom>
           <a:solidFill>
-            <a:srgbClr val="FFFFFF"/>
+            <a:srgbClr val="112240"/>
           </a:solidFill>
-          <a:ln w="19050">
+          <a:ln w="15240">
             <a:solidFill>
               <a:srgbClr val="3F6FCC"/>
             </a:solidFill>
@@ -8967,9 +9283,9 @@
           <a:p>
             <a:pPr algn="ctr"/>
             <a:r>
-              <a:rPr sz="1200" b="1">
-                <a:solidFill>
-                  <a:srgbClr val="0F172A"/>
+              <a:rPr sz="1150" b="1">
+                <a:solidFill>
+                  <a:srgbClr val="E6F1FF"/>
                 </a:solidFill>
                 <a:latin typeface="Microsoft YaHei"/>
                 <a:ea typeface="Microsoft YaHei"/>
@@ -8982,7 +9298,7 @@
             <a:r>
               <a:rPr sz="800" b="0">
                 <a:solidFill>
-                  <a:srgbClr val="64748B"/>
+                  <a:srgbClr val="5A7A9E"/>
                 </a:solidFill>
                 <a:latin typeface="Microsoft YaHei"/>
                 <a:ea typeface="Microsoft YaHei"/>
@@ -8994,14 +9310,14 @@
       </p:sp>
       <p:sp>
         <p:nvSpPr>
-          <p:cNvPr id="9" name="TextBox 8"/>
+          <p:cNvPr id="10" name="TextBox 9"/>
           <p:cNvSpPr txBox="1"/>
           <p:nvPr/>
         </p:nvSpPr>
         <p:spPr>
           <a:xfrm>
-            <a:off x="3709263" y="2240280"/>
-            <a:ext cx="164592" cy="457200"/>
+            <a:off x="3814419" y="2148840"/>
+            <a:ext cx="146304" cy="457200"/>
           </a:xfrm>
           <a:prstGeom prst="rect">
             <a:avLst/>
@@ -9020,9 +9336,9 @@
               </a:spcAft>
             </a:pPr>
             <a:r>
-              <a:rPr sz="1600" b="1">
-                <a:solidFill>
-                  <a:srgbClr val="3F6FCC"/>
+              <a:rPr sz="1500" b="1">
+                <a:solidFill>
+                  <a:srgbClr val="64FFDA"/>
                 </a:solidFill>
                 <a:latin typeface="Microsoft YaHei"/>
                 <a:ea typeface="Microsoft YaHei"/>
@@ -9034,14 +9350,14 @@
       </p:sp>
       <p:sp>
         <p:nvSpPr>
-          <p:cNvPr id="10" name="Rounded Rectangle 9"/>
+          <p:cNvPr id="11" name="Rounded Rectangle 10"/>
           <p:cNvSpPr/>
           <p:nvPr/>
         </p:nvSpPr>
         <p:spPr>
           <a:xfrm>
-            <a:off x="3873855" y="2011680"/>
-            <a:ext cx="1371600" cy="822960"/>
+            <a:off x="3960723" y="1920240"/>
+            <a:ext cx="1325880" cy="822960"/>
           </a:xfrm>
           <a:prstGeom prst="roundRect">
             <a:avLst>
@@ -9049,9 +9365,9 @@
             </a:avLst>
           </a:prstGeom>
           <a:solidFill>
-            <a:srgbClr val="FFFFFF"/>
+            <a:srgbClr val="112240"/>
           </a:solidFill>
-          <a:ln w="19050">
+          <a:ln w="15240">
             <a:solidFill>
               <a:srgbClr val="3F6FCC"/>
             </a:solidFill>
@@ -9078,9 +9394,9 @@
           <a:p>
             <a:pPr algn="ctr"/>
             <a:r>
-              <a:rPr sz="1200" b="1">
-                <a:solidFill>
-                  <a:srgbClr val="0F172A"/>
+              <a:rPr sz="1150" b="1">
+                <a:solidFill>
+                  <a:srgbClr val="E6F1FF"/>
                 </a:solidFill>
                 <a:latin typeface="Microsoft YaHei"/>
                 <a:ea typeface="Microsoft YaHei"/>
@@ -9092,14 +9408,14 @@
       </p:sp>
       <p:sp>
         <p:nvSpPr>
-          <p:cNvPr id="11" name="TextBox 10"/>
+          <p:cNvPr id="12" name="TextBox 11"/>
           <p:cNvSpPr txBox="1"/>
           <p:nvPr/>
         </p:nvSpPr>
         <p:spPr>
           <a:xfrm>
-            <a:off x="5245455" y="2240280"/>
-            <a:ext cx="164592" cy="457200"/>
+            <a:off x="5286603" y="2148840"/>
+            <a:ext cx="146304" cy="457200"/>
           </a:xfrm>
           <a:prstGeom prst="rect">
             <a:avLst/>
@@ -9118,9 +9434,9 @@
               </a:spcAft>
             </a:pPr>
             <a:r>
-              <a:rPr sz="1600" b="1">
-                <a:solidFill>
-                  <a:srgbClr val="3F6FCC"/>
+              <a:rPr sz="1500" b="1">
+                <a:solidFill>
+                  <a:srgbClr val="64FFDA"/>
                 </a:solidFill>
                 <a:latin typeface="Microsoft YaHei"/>
                 <a:ea typeface="Microsoft YaHei"/>
@@ -9132,14 +9448,14 @@
       </p:sp>
       <p:sp>
         <p:nvSpPr>
-          <p:cNvPr id="12" name="Rounded Rectangle 11"/>
+          <p:cNvPr id="13" name="Rounded Rectangle 12"/>
           <p:cNvSpPr/>
           <p:nvPr/>
         </p:nvSpPr>
         <p:spPr>
           <a:xfrm>
-            <a:off x="5410047" y="2011680"/>
-            <a:ext cx="1371600" cy="822960"/>
+            <a:off x="5432907" y="1920240"/>
+            <a:ext cx="1325880" cy="822960"/>
           </a:xfrm>
           <a:prstGeom prst="roundRect">
             <a:avLst>
@@ -9147,9 +9463,9 @@
             </a:avLst>
           </a:prstGeom>
           <a:solidFill>
-            <a:srgbClr val="FFFFFF"/>
+            <a:srgbClr val="112240"/>
           </a:solidFill>
-          <a:ln w="19050">
+          <a:ln w="15240">
             <a:solidFill>
               <a:srgbClr val="3F6FCC"/>
             </a:solidFill>
@@ -9176,9 +9492,9 @@
           <a:p>
             <a:pPr algn="ctr"/>
             <a:r>
-              <a:rPr sz="1200" b="1">
-                <a:solidFill>
-                  <a:srgbClr val="0F172A"/>
+              <a:rPr sz="1150" b="1">
+                <a:solidFill>
+                  <a:srgbClr val="E6F1FF"/>
                 </a:solidFill>
                 <a:latin typeface="Microsoft YaHei"/>
                 <a:ea typeface="Microsoft YaHei"/>
@@ -9190,14 +9506,14 @@
       </p:sp>
       <p:sp>
         <p:nvSpPr>
-          <p:cNvPr id="13" name="TextBox 12"/>
+          <p:cNvPr id="14" name="TextBox 13"/>
           <p:cNvSpPr txBox="1"/>
           <p:nvPr/>
         </p:nvSpPr>
         <p:spPr>
           <a:xfrm>
-            <a:off x="6781647" y="2240280"/>
-            <a:ext cx="164592" cy="457200"/>
+            <a:off x="6758787" y="2148840"/>
+            <a:ext cx="146304" cy="457200"/>
           </a:xfrm>
           <a:prstGeom prst="rect">
             <a:avLst/>
@@ -9216,9 +9532,9 @@
               </a:spcAft>
             </a:pPr>
             <a:r>
-              <a:rPr sz="1600" b="1">
-                <a:solidFill>
-                  <a:srgbClr val="3F6FCC"/>
+              <a:rPr sz="1500" b="1">
+                <a:solidFill>
+                  <a:srgbClr val="64FFDA"/>
                 </a:solidFill>
                 <a:latin typeface="Microsoft YaHei"/>
                 <a:ea typeface="Microsoft YaHei"/>
@@ -9230,14 +9546,14 @@
       </p:sp>
       <p:sp>
         <p:nvSpPr>
-          <p:cNvPr id="14" name="Rounded Rectangle 13"/>
+          <p:cNvPr id="15" name="Rounded Rectangle 14"/>
           <p:cNvSpPr/>
           <p:nvPr/>
         </p:nvSpPr>
         <p:spPr>
           <a:xfrm>
-            <a:off x="6946239" y="2011680"/>
-            <a:ext cx="1371600" cy="822960"/>
+            <a:off x="6905091" y="1920240"/>
+            <a:ext cx="1325880" cy="822960"/>
           </a:xfrm>
           <a:prstGeom prst="roundRect">
             <a:avLst>
@@ -9245,9 +9561,9 @@
             </a:avLst>
           </a:prstGeom>
           <a:solidFill>
-            <a:srgbClr val="FFFFFF"/>
+            <a:srgbClr val="112240"/>
           </a:solidFill>
-          <a:ln w="19050">
+          <a:ln w="15240">
             <a:solidFill>
               <a:srgbClr val="3F6FCC"/>
             </a:solidFill>
@@ -9274,9 +9590,9 @@
           <a:p>
             <a:pPr algn="ctr"/>
             <a:r>
-              <a:rPr sz="1200" b="1">
-                <a:solidFill>
-                  <a:srgbClr val="0F172A"/>
+              <a:rPr sz="1150" b="1">
+                <a:solidFill>
+                  <a:srgbClr val="E6F1FF"/>
                 </a:solidFill>
                 <a:latin typeface="Microsoft YaHei"/>
                 <a:ea typeface="Microsoft YaHei"/>
@@ -9288,14 +9604,14 @@
       </p:sp>
       <p:sp>
         <p:nvSpPr>
-          <p:cNvPr id="15" name="TextBox 14"/>
+          <p:cNvPr id="16" name="TextBox 15"/>
           <p:cNvSpPr txBox="1"/>
           <p:nvPr/>
         </p:nvSpPr>
         <p:spPr>
           <a:xfrm>
-            <a:off x="8317839" y="2240280"/>
-            <a:ext cx="164592" cy="457200"/>
+            <a:off x="8230971" y="2148840"/>
+            <a:ext cx="146304" cy="457200"/>
           </a:xfrm>
           <a:prstGeom prst="rect">
             <a:avLst/>
@@ -9314,9 +9630,9 @@
               </a:spcAft>
             </a:pPr>
             <a:r>
-              <a:rPr sz="1600" b="1">
-                <a:solidFill>
-                  <a:srgbClr val="3F6FCC"/>
+              <a:rPr sz="1500" b="1">
+                <a:solidFill>
+                  <a:srgbClr val="64FFDA"/>
                 </a:solidFill>
                 <a:latin typeface="Microsoft YaHei"/>
                 <a:ea typeface="Microsoft YaHei"/>
@@ -9328,14 +9644,14 @@
       </p:sp>
       <p:sp>
         <p:nvSpPr>
-          <p:cNvPr id="16" name="Rounded Rectangle 15"/>
+          <p:cNvPr id="17" name="Rounded Rectangle 16"/>
           <p:cNvSpPr/>
           <p:nvPr/>
         </p:nvSpPr>
         <p:spPr>
           <a:xfrm>
-            <a:off x="8482431" y="2011680"/>
-            <a:ext cx="1371600" cy="822960"/>
+            <a:off x="8377275" y="1920240"/>
+            <a:ext cx="1325880" cy="822960"/>
           </a:xfrm>
           <a:prstGeom prst="roundRect">
             <a:avLst>
@@ -9343,9 +9659,9 @@
             </a:avLst>
           </a:prstGeom>
           <a:solidFill>
-            <a:srgbClr val="FFFFFF"/>
+            <a:srgbClr val="112240"/>
           </a:solidFill>
-          <a:ln w="19050">
+          <a:ln w="15240">
             <a:solidFill>
               <a:srgbClr val="3F6FCC"/>
             </a:solidFill>
@@ -9372,9 +9688,9 @@
           <a:p>
             <a:pPr algn="ctr"/>
             <a:r>
-              <a:rPr sz="1200" b="1">
-                <a:solidFill>
-                  <a:srgbClr val="0F172A"/>
+              <a:rPr sz="1150" b="1">
+                <a:solidFill>
+                  <a:srgbClr val="E6F1FF"/>
                 </a:solidFill>
                 <a:latin typeface="Microsoft YaHei"/>
                 <a:ea typeface="Microsoft YaHei"/>
@@ -9386,14 +9702,14 @@
       </p:sp>
       <p:sp>
         <p:nvSpPr>
-          <p:cNvPr id="17" name="TextBox 16"/>
+          <p:cNvPr id="18" name="TextBox 17"/>
           <p:cNvSpPr txBox="1"/>
           <p:nvPr/>
         </p:nvSpPr>
         <p:spPr>
           <a:xfrm>
-            <a:off x="9854031" y="2240280"/>
-            <a:ext cx="164592" cy="457200"/>
+            <a:off x="9703155" y="2148840"/>
+            <a:ext cx="146304" cy="457200"/>
           </a:xfrm>
           <a:prstGeom prst="rect">
             <a:avLst/>
@@ -9412,9 +9728,9 @@
               </a:spcAft>
             </a:pPr>
             <a:r>
-              <a:rPr sz="1600" b="1">
-                <a:solidFill>
-                  <a:srgbClr val="3F6FCC"/>
+              <a:rPr sz="1500" b="1">
+                <a:solidFill>
+                  <a:srgbClr val="64FFDA"/>
                 </a:solidFill>
                 <a:latin typeface="Microsoft YaHei"/>
                 <a:ea typeface="Microsoft YaHei"/>
@@ -9426,14 +9742,14 @@
       </p:sp>
       <p:sp>
         <p:nvSpPr>
-          <p:cNvPr id="18" name="Rounded Rectangle 17"/>
+          <p:cNvPr id="19" name="Rounded Rectangle 18"/>
           <p:cNvSpPr/>
           <p:nvPr/>
         </p:nvSpPr>
         <p:spPr>
           <a:xfrm>
-            <a:off x="10018623" y="2011680"/>
-            <a:ext cx="1371600" cy="822960"/>
+            <a:off x="9849459" y="1920240"/>
+            <a:ext cx="1325880" cy="822960"/>
           </a:xfrm>
           <a:prstGeom prst="roundRect">
             <a:avLst>
@@ -9441,9 +9757,9 @@
             </a:avLst>
           </a:prstGeom>
           <a:solidFill>
-            <a:srgbClr val="FFFFFF"/>
+            <a:srgbClr val="112240"/>
           </a:solidFill>
-          <a:ln w="19050">
+          <a:ln w="15240">
             <a:solidFill>
               <a:srgbClr val="3F6FCC"/>
             </a:solidFill>
@@ -9470,9 +9786,9 @@
           <a:p>
             <a:pPr algn="ctr"/>
             <a:r>
-              <a:rPr sz="1200" b="1">
-                <a:solidFill>
-                  <a:srgbClr val="0F172A"/>
+              <a:rPr sz="1150" b="1">
+                <a:solidFill>
+                  <a:srgbClr val="E6F1FF"/>
                 </a:solidFill>
                 <a:latin typeface="Microsoft YaHei"/>
                 <a:ea typeface="Microsoft YaHei"/>
@@ -9484,13 +9800,13 @@
       </p:sp>
       <p:sp>
         <p:nvSpPr>
-          <p:cNvPr id="19" name="TextBox 18"/>
+          <p:cNvPr id="20" name="TextBox 19"/>
           <p:cNvSpPr txBox="1"/>
           <p:nvPr/>
         </p:nvSpPr>
         <p:spPr>
           <a:xfrm>
-            <a:off x="502920" y="3657600"/>
+            <a:off x="502920" y="3566160"/>
             <a:ext cx="11155680" cy="457200"/>
           </a:xfrm>
           <a:prstGeom prst="rect">
@@ -9512,7 +9828,7 @@
             <a:r>
               <a:rPr sz="1200" b="0">
                 <a:solidFill>
-                  <a:srgbClr val="F59E0B"/>
+                  <a:srgbClr val="FFC864"/>
                 </a:solidFill>
                 <a:latin typeface="Microsoft YaHei"/>
                 <a:ea typeface="Microsoft YaHei"/>
@@ -9524,14 +9840,14 @@
       </p:sp>
       <p:sp>
         <p:nvSpPr>
-          <p:cNvPr id="20" name="TextBox 19"/>
+          <p:cNvPr id="21" name="TextBox 20"/>
           <p:cNvSpPr txBox="1"/>
           <p:nvPr/>
         </p:nvSpPr>
         <p:spPr>
           <a:xfrm>
-            <a:off x="502920" y="4297680"/>
-            <a:ext cx="11155680" cy="457200"/>
+            <a:off x="640080" y="4160520"/>
+            <a:ext cx="10515600" cy="365760"/>
           </a:xfrm>
           <a:prstGeom prst="rect">
             <a:avLst/>
@@ -9552,7 +9868,7 @@
             <a:r>
               <a:rPr sz="1300" b="0">
                 <a:solidFill>
-                  <a:srgbClr val="334155"/>
+                  <a:srgbClr val="8892B0"/>
                 </a:solidFill>
                 <a:latin typeface="Microsoft YaHei"/>
                 <a:ea typeface="Microsoft YaHei"/>
@@ -9564,14 +9880,14 @@
       </p:sp>
       <p:sp>
         <p:nvSpPr>
-          <p:cNvPr id="21" name="TextBox 20"/>
+          <p:cNvPr id="22" name="TextBox 21"/>
           <p:cNvSpPr txBox="1"/>
           <p:nvPr/>
         </p:nvSpPr>
         <p:spPr>
           <a:xfrm>
-            <a:off x="502920" y="4846320"/>
-            <a:ext cx="11155680" cy="457200"/>
+            <a:off x="640080" y="4663440"/>
+            <a:ext cx="10515600" cy="365760"/>
           </a:xfrm>
           <a:prstGeom prst="rect">
             <a:avLst/>
@@ -9592,7 +9908,7 @@
             <a:r>
               <a:rPr sz="1300" b="0">
                 <a:solidFill>
-                  <a:srgbClr val="334155"/>
+                  <a:srgbClr val="8892B0"/>
                 </a:solidFill>
                 <a:latin typeface="Microsoft YaHei"/>
                 <a:ea typeface="Microsoft YaHei"/>
@@ -9635,7 +9951,7 @@
             <a:avLst/>
           </a:prstGeom>
           <a:solidFill>
-            <a:srgbClr val="FFFFFF"/>
+            <a:srgbClr val="0A192F"/>
           </a:solidFill>
           <a:ln>
             <a:noFill/>
@@ -9672,8 +9988,8 @@
         </p:nvSpPr>
         <p:spPr>
           <a:xfrm>
-            <a:off x="502920" y="365760"/>
-            <a:ext cx="10972800" cy="548640"/>
+            <a:off x="502920" y="384048"/>
+            <a:ext cx="1828800" cy="457200"/>
           </a:xfrm>
           <a:prstGeom prst="rect">
             <a:avLst/>
@@ -9692,34 +10008,74 @@
               </a:spcAft>
             </a:pPr>
             <a:r>
-              <a:rPr sz="2400" b="1">
-                <a:solidFill>
-                  <a:srgbClr val="0F172A"/>
-                </a:solidFill>
-                <a:latin typeface="Microsoft YaHei"/>
-                <a:ea typeface="Microsoft YaHei"/>
-              </a:rPr>
-              <a:t>Agent 身份与协作</a:t>
-            </a:r>
-          </a:p>
-        </p:txBody>
-      </p:sp>
-      <p:sp>
-        <p:nvSpPr>
-          <p:cNvPr id="4" name="Rectangle 3"/>
+              <a:rPr sz="1400" b="1">
+                <a:solidFill>
+                  <a:srgbClr val="64FFDA"/>
+                </a:solidFill>
+                <a:latin typeface="Consolas"/>
+                <a:ea typeface="Microsoft YaHei"/>
+              </a:rPr>
+              <a:t>07</a:t>
+            </a:r>
+          </a:p>
+        </p:txBody>
+      </p:sp>
+      <p:sp>
+        <p:nvSpPr>
+          <p:cNvPr id="4" name="TextBox 3"/>
+          <p:cNvSpPr txBox="1"/>
+          <p:nvPr/>
+        </p:nvSpPr>
+        <p:spPr>
+          <a:xfrm>
+            <a:off x="502920" y="365760"/>
+            <a:ext cx="10972800" cy="548640"/>
+          </a:xfrm>
+          <a:prstGeom prst="rect">
+            <a:avLst/>
+          </a:prstGeom>
+          <a:noFill/>
+        </p:spPr>
+        <p:txBody>
+          <a:bodyPr wrap="square" anchor="t">
+            <a:spAutoFit/>
+          </a:bodyPr>
+          <a:lstStyle/>
+          <a:p>
+            <a:pPr algn="l">
+              <a:spcAft>
+                <a:spcPts val="400"/>
+              </a:spcAft>
+            </a:pPr>
+            <a:r>
+              <a:rPr sz="2300" b="1">
+                <a:solidFill>
+                  <a:srgbClr val="E6F1FF"/>
+                </a:solidFill>
+                <a:latin typeface="Microsoft YaHei"/>
+                <a:ea typeface="Microsoft YaHei"/>
+              </a:rPr>
+              <a:t>  Agent 身份与协作</a:t>
+            </a:r>
+          </a:p>
+        </p:txBody>
+      </p:sp>
+      <p:sp>
+        <p:nvSpPr>
+          <p:cNvPr id="5" name="Rectangle 4"/>
           <p:cNvSpPr/>
           <p:nvPr/>
         </p:nvSpPr>
         <p:spPr>
           <a:xfrm>
-            <a:off x="502920" y="1078992"/>
-            <a:ext cx="1371600" cy="64008"/>
+            <a:off x="502920" y="1051560"/>
+            <a:ext cx="1280160" cy="45720"/>
           </a:xfrm>
           <a:prstGeom prst="rect">
             <a:avLst/>
           </a:prstGeom>
           <a:solidFill>
-            <a:srgbClr val="7C3AED"/>
+            <a:srgbClr val="A78BFA"/>
           </a:solidFill>
           <a:ln>
             <a:noFill/>
@@ -9750,14 +10106,14 @@
       </p:sp>
       <p:sp>
         <p:nvSpPr>
-          <p:cNvPr id="5" name="TextBox 4"/>
+          <p:cNvPr id="6" name="TextBox 5"/>
           <p:cNvSpPr txBox="1"/>
           <p:nvPr/>
         </p:nvSpPr>
         <p:spPr>
           <a:xfrm>
-            <a:off x="11430000" y="6446520"/>
-            <a:ext cx="548640" cy="365760"/>
+            <a:off x="10881360" y="411480"/>
+            <a:ext cx="822960" cy="365760"/>
           </a:xfrm>
           <a:prstGeom prst="rect">
             <a:avLst/>
@@ -9778,19 +10134,19 @@
             <a:r>
               <a:rPr sz="900" b="0">
                 <a:solidFill>
-                  <a:srgbClr val="64748B"/>
-                </a:solidFill>
-                <a:latin typeface="Microsoft YaHei"/>
-                <a:ea typeface="Microsoft YaHei"/>
-              </a:rPr>
-              <a:t>07/13</a:t>
-            </a:r>
-          </a:p>
-        </p:txBody>
-      </p:sp>
-      <p:sp>
-        <p:nvSpPr>
-          <p:cNvPr id="6" name="Rectangle 5"/>
+                  <a:srgbClr val="5A7A9E"/>
+                </a:solidFill>
+                <a:latin typeface="Consolas"/>
+                <a:ea typeface="Microsoft YaHei"/>
+              </a:rPr>
+              <a:t>07 / 13</a:t>
+            </a:r>
+          </a:p>
+        </p:txBody>
+      </p:sp>
+      <p:sp>
+        <p:nvSpPr>
+          <p:cNvPr id="7" name="Rectangle 6"/>
           <p:cNvSpPr/>
           <p:nvPr/>
         </p:nvSpPr>
@@ -9803,7 +10159,7 @@
             <a:avLst/>
           </a:prstGeom>
           <a:solidFill>
-            <a:srgbClr val="F8FAFC"/>
+            <a:srgbClr val="0F1F3D"/>
           </a:solidFill>
           <a:ln>
             <a:noFill/>
@@ -9834,14 +10190,14 @@
       </p:sp>
       <p:sp>
         <p:nvSpPr>
-          <p:cNvPr id="7" name="TextBox 6"/>
+          <p:cNvPr id="8" name="TextBox 7"/>
           <p:cNvSpPr txBox="1"/>
           <p:nvPr/>
         </p:nvSpPr>
         <p:spPr>
           <a:xfrm>
             <a:off x="640080" y="1627632"/>
-            <a:ext cx="2743200" cy="457200"/>
+            <a:ext cx="2926080" cy="457200"/>
           </a:xfrm>
           <a:prstGeom prst="rect">
             <a:avLst/>
@@ -9862,7 +10218,7 @@
             <a:r>
               <a:rPr sz="1300" b="1">
                 <a:solidFill>
-                  <a:srgbClr val="0F172A"/>
+                  <a:srgbClr val="E6F1FF"/>
                 </a:solidFill>
                 <a:latin typeface="Microsoft YaHei"/>
                 <a:ea typeface="Microsoft YaHei"/>
@@ -9874,13 +10230,13 @@
       </p:sp>
       <p:sp>
         <p:nvSpPr>
-          <p:cNvPr id="8" name="TextBox 7"/>
+          <p:cNvPr id="9" name="TextBox 8"/>
           <p:cNvSpPr txBox="1"/>
           <p:nvPr/>
         </p:nvSpPr>
         <p:spPr>
           <a:xfrm>
-            <a:off x="3566160" y="1627632"/>
+            <a:off x="3657600" y="1627632"/>
             <a:ext cx="4572000" cy="457200"/>
           </a:xfrm>
           <a:prstGeom prst="rect">
@@ -9902,7 +10258,7 @@
             <a:r>
               <a:rPr sz="1250" b="1">
                 <a:solidFill>
-                  <a:srgbClr val="0F172A"/>
+                  <a:srgbClr val="E6F1FF"/>
                 </a:solidFill>
                 <a:latin typeface="Microsoft YaHei"/>
                 <a:ea typeface="Microsoft YaHei"/>
@@ -9914,14 +10270,14 @@
       </p:sp>
       <p:sp>
         <p:nvSpPr>
-          <p:cNvPr id="9" name="TextBox 8"/>
+          <p:cNvPr id="10" name="TextBox 9"/>
           <p:cNvSpPr txBox="1"/>
           <p:nvPr/>
         </p:nvSpPr>
         <p:spPr>
           <a:xfrm>
-            <a:off x="8138160" y="1627632"/>
-            <a:ext cx="3291840" cy="457200"/>
+            <a:off x="8229600" y="1627632"/>
+            <a:ext cx="3200400" cy="457200"/>
           </a:xfrm>
           <a:prstGeom prst="rect">
             <a:avLst/>
@@ -9942,7 +10298,7 @@
             <a:r>
               <a:rPr sz="1200" b="1">
                 <a:solidFill>
-                  <a:srgbClr val="0F172A"/>
+                  <a:srgbClr val="E6F1FF"/>
                 </a:solidFill>
                 <a:latin typeface="Microsoft YaHei"/>
                 <a:ea typeface="Microsoft YaHei"/>
@@ -9954,14 +10310,14 @@
       </p:sp>
       <p:sp>
         <p:nvSpPr>
-          <p:cNvPr id="10" name="TextBox 9"/>
+          <p:cNvPr id="11" name="TextBox 10"/>
           <p:cNvSpPr txBox="1"/>
           <p:nvPr/>
         </p:nvSpPr>
         <p:spPr>
           <a:xfrm>
             <a:off x="640080" y="2340864"/>
-            <a:ext cx="2743200" cy="457200"/>
+            <a:ext cx="2926080" cy="457200"/>
           </a:xfrm>
           <a:prstGeom prst="rect">
             <a:avLst/>
@@ -9982,9 +10338,9 @@
             <a:r>
               <a:rPr sz="1300" b="0">
                 <a:solidFill>
-                  <a:srgbClr val="1F3A93"/>
-                </a:solidFill>
-                <a:latin typeface="Microsoft YaHei"/>
+                  <a:srgbClr val="64FFDA"/>
+                </a:solidFill>
+                <a:latin typeface="Consolas"/>
                 <a:ea typeface="Microsoft YaHei"/>
               </a:rPr>
               <a:t>JobRequirementAnalyst</a:t>
@@ -9994,13 +10350,13 @@
       </p:sp>
       <p:sp>
         <p:nvSpPr>
-          <p:cNvPr id="11" name="TextBox 10"/>
+          <p:cNvPr id="12" name="TextBox 11"/>
           <p:cNvSpPr txBox="1"/>
           <p:nvPr/>
         </p:nvSpPr>
         <p:spPr>
           <a:xfrm>
-            <a:off x="3566160" y="2340864"/>
+            <a:off x="3657600" y="2340864"/>
             <a:ext cx="4572000" cy="457200"/>
           </a:xfrm>
           <a:prstGeom prst="rect">
@@ -10022,7 +10378,7 @@
             <a:r>
               <a:rPr sz="1250" b="0">
                 <a:solidFill>
-                  <a:srgbClr val="334155"/>
+                  <a:srgbClr val="8892B0"/>
                 </a:solidFill>
                 <a:latin typeface="Microsoft YaHei"/>
                 <a:ea typeface="Microsoft YaHei"/>
@@ -10034,14 +10390,14 @@
       </p:sp>
       <p:sp>
         <p:nvSpPr>
-          <p:cNvPr id="12" name="TextBox 11"/>
+          <p:cNvPr id="13" name="TextBox 12"/>
           <p:cNvSpPr txBox="1"/>
           <p:nvPr/>
         </p:nvSpPr>
         <p:spPr>
           <a:xfrm>
-            <a:off x="8138160" y="2340864"/>
-            <a:ext cx="3291840" cy="457200"/>
+            <a:off x="8229600" y="2340864"/>
+            <a:ext cx="3200400" cy="457200"/>
           </a:xfrm>
           <a:prstGeom prst="rect">
             <a:avLst/>
@@ -10062,7 +10418,7 @@
             <a:r>
               <a:rPr sz="1200" b="0">
                 <a:solidFill>
-                  <a:srgbClr val="F59E0B"/>
+                  <a:srgbClr val="FFC864"/>
                 </a:solidFill>
                 <a:latin typeface="Microsoft YaHei"/>
                 <a:ea typeface="Microsoft YaHei"/>
@@ -10074,14 +10430,14 @@
       </p:sp>
       <p:sp>
         <p:nvSpPr>
-          <p:cNvPr id="13" name="TextBox 12"/>
+          <p:cNvPr id="14" name="TextBox 13"/>
           <p:cNvSpPr txBox="1"/>
           <p:nvPr/>
         </p:nvSpPr>
         <p:spPr>
           <a:xfrm>
             <a:off x="640080" y="3054096"/>
-            <a:ext cx="2743200" cy="457200"/>
+            <a:ext cx="2926080" cy="457200"/>
           </a:xfrm>
           <a:prstGeom prst="rect">
             <a:avLst/>
@@ -10102,9 +10458,9 @@
             <a:r>
               <a:rPr sz="1300" b="0">
                 <a:solidFill>
-                  <a:srgbClr val="1F3A93"/>
-                </a:solidFill>
-                <a:latin typeface="Microsoft YaHei"/>
+                  <a:srgbClr val="64FFDA"/>
+                </a:solidFill>
+                <a:latin typeface="Consolas"/>
                 <a:ea typeface="Microsoft YaHei"/>
               </a:rPr>
               <a:t>EvidenceCurator</a:t>
@@ -10114,13 +10470,13 @@
       </p:sp>
       <p:sp>
         <p:nvSpPr>
-          <p:cNvPr id="14" name="TextBox 13"/>
+          <p:cNvPr id="15" name="TextBox 14"/>
           <p:cNvSpPr txBox="1"/>
           <p:nvPr/>
         </p:nvSpPr>
         <p:spPr>
           <a:xfrm>
-            <a:off x="3566160" y="3054096"/>
+            <a:off x="3657600" y="3054096"/>
             <a:ext cx="4572000" cy="457200"/>
           </a:xfrm>
           <a:prstGeom prst="rect">
@@ -10142,7 +10498,7 @@
             <a:r>
               <a:rPr sz="1250" b="0">
                 <a:solidFill>
-                  <a:srgbClr val="334155"/>
+                  <a:srgbClr val="8892B0"/>
                 </a:solidFill>
                 <a:latin typeface="Microsoft YaHei"/>
                 <a:ea typeface="Microsoft YaHei"/>
@@ -10154,14 +10510,14 @@
       </p:sp>
       <p:sp>
         <p:nvSpPr>
-          <p:cNvPr id="15" name="TextBox 14"/>
+          <p:cNvPr id="16" name="TextBox 15"/>
           <p:cNvSpPr txBox="1"/>
           <p:nvPr/>
         </p:nvSpPr>
         <p:spPr>
           <a:xfrm>
-            <a:off x="8138160" y="3054096"/>
-            <a:ext cx="3291840" cy="457200"/>
+            <a:off x="8229600" y="3054096"/>
+            <a:ext cx="3200400" cy="457200"/>
           </a:xfrm>
           <a:prstGeom prst="rect">
             <a:avLst/>
@@ -10182,7 +10538,7 @@
             <a:r>
               <a:rPr sz="1200" b="0">
                 <a:solidFill>
-                  <a:srgbClr val="F59E0B"/>
+                  <a:srgbClr val="FFC864"/>
                 </a:solidFill>
                 <a:latin typeface="Microsoft YaHei"/>
                 <a:ea typeface="Microsoft YaHei"/>
@@ -10194,14 +10550,14 @@
       </p:sp>
       <p:sp>
         <p:nvSpPr>
-          <p:cNvPr id="16" name="TextBox 15"/>
+          <p:cNvPr id="17" name="TextBox 16"/>
           <p:cNvSpPr txBox="1"/>
           <p:nvPr/>
         </p:nvSpPr>
         <p:spPr>
           <a:xfrm>
             <a:off x="640080" y="3767328"/>
-            <a:ext cx="2743200" cy="457200"/>
+            <a:ext cx="2926080" cy="457200"/>
           </a:xfrm>
           <a:prstGeom prst="rect">
             <a:avLst/>
@@ -10222,9 +10578,9 @@
             <a:r>
               <a:rPr sz="1300" b="0">
                 <a:solidFill>
-                  <a:srgbClr val="1F3A93"/>
-                </a:solidFill>
-                <a:latin typeface="Microsoft YaHei"/>
+                  <a:srgbClr val="64FFDA"/>
+                </a:solidFill>
+                <a:latin typeface="Consolas"/>
                 <a:ea typeface="Microsoft YaHei"/>
               </a:rPr>
               <a:t>ResumeStrategist</a:t>
@@ -10234,13 +10590,13 @@
       </p:sp>
       <p:sp>
         <p:nvSpPr>
-          <p:cNvPr id="17" name="TextBox 16"/>
+          <p:cNvPr id="18" name="TextBox 17"/>
           <p:cNvSpPr txBox="1"/>
           <p:nvPr/>
         </p:nvSpPr>
         <p:spPr>
           <a:xfrm>
-            <a:off x="3566160" y="3767328"/>
+            <a:off x="3657600" y="3767328"/>
             <a:ext cx="4572000" cy="457200"/>
           </a:xfrm>
           <a:prstGeom prst="rect">
@@ -10262,7 +10618,7 @@
             <a:r>
               <a:rPr sz="1250" b="0">
                 <a:solidFill>
-                  <a:srgbClr val="334155"/>
+                  <a:srgbClr val="8892B0"/>
                 </a:solidFill>
                 <a:latin typeface="Microsoft YaHei"/>
                 <a:ea typeface="Microsoft YaHei"/>
@@ -10274,14 +10630,14 @@
       </p:sp>
       <p:sp>
         <p:nvSpPr>
-          <p:cNvPr id="18" name="TextBox 17"/>
+          <p:cNvPr id="19" name="TextBox 18"/>
           <p:cNvSpPr txBox="1"/>
           <p:nvPr/>
         </p:nvSpPr>
         <p:spPr>
           <a:xfrm>
-            <a:off x="8138160" y="3767328"/>
-            <a:ext cx="3291840" cy="457200"/>
+            <a:off x="8229600" y="3767328"/>
+            <a:ext cx="3200400" cy="457200"/>
           </a:xfrm>
           <a:prstGeom prst="rect">
             <a:avLst/>
@@ -10302,7 +10658,7 @@
             <a:r>
               <a:rPr sz="1200" b="0">
                 <a:solidFill>
-                  <a:srgbClr val="F59E0B"/>
+                  <a:srgbClr val="FFC864"/>
                 </a:solidFill>
                 <a:latin typeface="Microsoft YaHei"/>
                 <a:ea typeface="Microsoft YaHei"/>
@@ -10314,14 +10670,14 @@
       </p:sp>
       <p:sp>
         <p:nvSpPr>
-          <p:cNvPr id="19" name="TextBox 18"/>
+          <p:cNvPr id="20" name="TextBox 19"/>
           <p:cNvSpPr txBox="1"/>
           <p:nvPr/>
         </p:nvSpPr>
         <p:spPr>
           <a:xfrm>
             <a:off x="640080" y="4480560"/>
-            <a:ext cx="2743200" cy="457200"/>
+            <a:ext cx="2926080" cy="457200"/>
           </a:xfrm>
           <a:prstGeom prst="rect">
             <a:avLst/>
@@ -10342,9 +10698,9 @@
             <a:r>
               <a:rPr sz="1300" b="0">
                 <a:solidFill>
-                  <a:srgbClr val="1F3A93"/>
-                </a:solidFill>
-                <a:latin typeface="Microsoft YaHei"/>
+                  <a:srgbClr val="64FFDA"/>
+                </a:solidFill>
+                <a:latin typeface="Consolas"/>
                 <a:ea typeface="Microsoft YaHei"/>
               </a:rPr>
               <a:t>QualityDeliveryGuardian</a:t>
@@ -10354,13 +10710,13 @@
       </p:sp>
       <p:sp>
         <p:nvSpPr>
-          <p:cNvPr id="20" name="TextBox 19"/>
+          <p:cNvPr id="21" name="TextBox 20"/>
           <p:cNvSpPr txBox="1"/>
           <p:nvPr/>
         </p:nvSpPr>
         <p:spPr>
           <a:xfrm>
-            <a:off x="3566160" y="4480560"/>
+            <a:off x="3657600" y="4480560"/>
             <a:ext cx="4572000" cy="457200"/>
           </a:xfrm>
           <a:prstGeom prst="rect">
@@ -10382,7 +10738,7 @@
             <a:r>
               <a:rPr sz="1250" b="0">
                 <a:solidFill>
-                  <a:srgbClr val="334155"/>
+                  <a:srgbClr val="8892B0"/>
                 </a:solidFill>
                 <a:latin typeface="Microsoft YaHei"/>
                 <a:ea typeface="Microsoft YaHei"/>
@@ -10394,14 +10750,14 @@
       </p:sp>
       <p:sp>
         <p:nvSpPr>
-          <p:cNvPr id="21" name="TextBox 20"/>
+          <p:cNvPr id="22" name="TextBox 21"/>
           <p:cNvSpPr txBox="1"/>
           <p:nvPr/>
         </p:nvSpPr>
         <p:spPr>
           <a:xfrm>
-            <a:off x="8138160" y="4480560"/>
-            <a:ext cx="3291840" cy="457200"/>
+            <a:off x="8229600" y="4480560"/>
+            <a:ext cx="3200400" cy="457200"/>
           </a:xfrm>
           <a:prstGeom prst="rect">
             <a:avLst/>
@@ -10422,7 +10778,7 @@
             <a:r>
               <a:rPr sz="1200" b="0">
                 <a:solidFill>
-                  <a:srgbClr val="F59E0B"/>
+                  <a:srgbClr val="FFC864"/>
                 </a:solidFill>
                 <a:latin typeface="Microsoft YaHei"/>
                 <a:ea typeface="Microsoft YaHei"/>
@@ -10434,13 +10790,13 @@
       </p:sp>
       <p:sp>
         <p:nvSpPr>
-          <p:cNvPr id="22" name="TextBox 21"/>
+          <p:cNvPr id="23" name="TextBox 22"/>
           <p:cNvSpPr txBox="1"/>
           <p:nvPr/>
         </p:nvSpPr>
         <p:spPr>
           <a:xfrm>
-            <a:off x="502920" y="5760720"/>
+            <a:off x="502920" y="5715000"/>
             <a:ext cx="11155680" cy="457200"/>
           </a:xfrm>
           <a:prstGeom prst="rect">
@@ -10462,7 +10818,7 @@
             <a:r>
               <a:rPr sz="1200" b="0">
                 <a:solidFill>
-                  <a:srgbClr val="64748B"/>
+                  <a:srgbClr val="5A7A9E"/>
                 </a:solidFill>
                 <a:latin typeface="Microsoft YaHei"/>
                 <a:ea typeface="Microsoft YaHei"/>
@@ -10505,7 +10861,7 @@
             <a:avLst/>
           </a:prstGeom>
           <a:solidFill>
-            <a:srgbClr val="FFFFFF"/>
+            <a:srgbClr val="0A192F"/>
           </a:solidFill>
           <a:ln>
             <a:noFill/>
@@ -10542,8 +10898,8 @@
         </p:nvSpPr>
         <p:spPr>
           <a:xfrm>
-            <a:off x="502920" y="365760"/>
-            <a:ext cx="10972800" cy="548640"/>
+            <a:off x="502920" y="384048"/>
+            <a:ext cx="1828800" cy="457200"/>
           </a:xfrm>
           <a:prstGeom prst="rect">
             <a:avLst/>
@@ -10562,34 +10918,74 @@
               </a:spcAft>
             </a:pPr>
             <a:r>
-              <a:rPr sz="2400" b="1">
-                <a:solidFill>
-                  <a:srgbClr val="0F172A"/>
-                </a:solidFill>
-                <a:latin typeface="Microsoft YaHei"/>
-                <a:ea typeface="Microsoft YaHei"/>
-              </a:rPr>
-              <a:t>Skill 体系：能力抽象层（必选项）</a:t>
-            </a:r>
-          </a:p>
-        </p:txBody>
-      </p:sp>
-      <p:sp>
-        <p:nvSpPr>
-          <p:cNvPr id="4" name="Rectangle 3"/>
+              <a:rPr sz="1400" b="1">
+                <a:solidFill>
+                  <a:srgbClr val="64FFDA"/>
+                </a:solidFill>
+                <a:latin typeface="Consolas"/>
+                <a:ea typeface="Microsoft YaHei"/>
+              </a:rPr>
+              <a:t>08</a:t>
+            </a:r>
+          </a:p>
+        </p:txBody>
+      </p:sp>
+      <p:sp>
+        <p:nvSpPr>
+          <p:cNvPr id="4" name="TextBox 3"/>
+          <p:cNvSpPr txBox="1"/>
+          <p:nvPr/>
+        </p:nvSpPr>
+        <p:spPr>
+          <a:xfrm>
+            <a:off x="502920" y="365760"/>
+            <a:ext cx="10972800" cy="548640"/>
+          </a:xfrm>
+          <a:prstGeom prst="rect">
+            <a:avLst/>
+          </a:prstGeom>
+          <a:noFill/>
+        </p:spPr>
+        <p:txBody>
+          <a:bodyPr wrap="square" anchor="t">
+            <a:spAutoFit/>
+          </a:bodyPr>
+          <a:lstStyle/>
+          <a:p>
+            <a:pPr algn="l">
+              <a:spcAft>
+                <a:spcPts val="400"/>
+              </a:spcAft>
+            </a:pPr>
+            <a:r>
+              <a:rPr sz="2300" b="1">
+                <a:solidFill>
+                  <a:srgbClr val="E6F1FF"/>
+                </a:solidFill>
+                <a:latin typeface="Microsoft YaHei"/>
+                <a:ea typeface="Microsoft YaHei"/>
+              </a:rPr>
+              <a:t>  Skill 体系：能力抽象层（必选项）</a:t>
+            </a:r>
+          </a:p>
+        </p:txBody>
+      </p:sp>
+      <p:sp>
+        <p:nvSpPr>
+          <p:cNvPr id="5" name="Rectangle 4"/>
           <p:cNvSpPr/>
           <p:nvPr/>
         </p:nvSpPr>
         <p:spPr>
           <a:xfrm>
-            <a:off x="502920" y="1078992"/>
-            <a:ext cx="1371600" cy="64008"/>
+            <a:off x="502920" y="1051560"/>
+            <a:ext cx="1280160" cy="45720"/>
           </a:xfrm>
           <a:prstGeom prst="rect">
             <a:avLst/>
           </a:prstGeom>
           <a:solidFill>
-            <a:srgbClr val="0D9488"/>
+            <a:srgbClr val="64FFDA"/>
           </a:solidFill>
           <a:ln>
             <a:noFill/>
@@ -10620,14 +11016,14 @@
       </p:sp>
       <p:sp>
         <p:nvSpPr>
-          <p:cNvPr id="5" name="TextBox 4"/>
+          <p:cNvPr id="6" name="TextBox 5"/>
           <p:cNvSpPr txBox="1"/>
           <p:nvPr/>
         </p:nvSpPr>
         <p:spPr>
           <a:xfrm>
-            <a:off x="11430000" y="6446520"/>
-            <a:ext cx="548640" cy="365760"/>
+            <a:off x="10881360" y="411480"/>
+            <a:ext cx="822960" cy="365760"/>
           </a:xfrm>
           <a:prstGeom prst="rect">
             <a:avLst/>
@@ -10648,25 +11044,25 @@
             <a:r>
               <a:rPr sz="900" b="0">
                 <a:solidFill>
-                  <a:srgbClr val="64748B"/>
-                </a:solidFill>
-                <a:latin typeface="Microsoft YaHei"/>
-                <a:ea typeface="Microsoft YaHei"/>
-              </a:rPr>
-              <a:t>08/13</a:t>
-            </a:r>
-          </a:p>
-        </p:txBody>
-      </p:sp>
-      <p:sp>
-        <p:nvSpPr>
-          <p:cNvPr id="6" name="Rounded Rectangle 5"/>
+                  <a:srgbClr val="5A7A9E"/>
+                </a:solidFill>
+                <a:latin typeface="Consolas"/>
+                <a:ea typeface="Microsoft YaHei"/>
+              </a:rPr>
+              <a:t>08 / 13</a:t>
+            </a:r>
+          </a:p>
+        </p:txBody>
+      </p:sp>
+      <p:sp>
+        <p:nvSpPr>
+          <p:cNvPr id="7" name="Rounded Rectangle 6"/>
           <p:cNvSpPr/>
           <p:nvPr/>
         </p:nvSpPr>
         <p:spPr>
           <a:xfrm>
-            <a:off x="502920" y="1554480"/>
+            <a:off x="502920" y="1508760"/>
             <a:ext cx="5394960" cy="1234440"/>
           </a:xfrm>
           <a:prstGeom prst="roundRect">
@@ -10675,11 +11071,11 @@
             </a:avLst>
           </a:prstGeom>
           <a:solidFill>
-            <a:srgbClr val="F8FAFC"/>
+            <a:srgbClr val="112240"/>
           </a:solidFill>
-          <a:ln w="19050">
+          <a:ln w="15240">
             <a:solidFill>
-              <a:srgbClr val="E2E8F0"/>
+              <a:srgbClr val="1E3A5F"/>
             </a:solidFill>
           </a:ln>
           <a:effectLst/>
@@ -10708,14 +11104,14 @@
       </p:sp>
       <p:sp>
         <p:nvSpPr>
-          <p:cNvPr id="7" name="TextBox 6"/>
+          <p:cNvPr id="8" name="TextBox 7"/>
           <p:cNvSpPr txBox="1"/>
           <p:nvPr/>
         </p:nvSpPr>
         <p:spPr>
           <a:xfrm>
-            <a:off x="640080" y="1645920"/>
-            <a:ext cx="5120640" cy="1051560"/>
+            <a:off x="649224" y="1591056"/>
+            <a:ext cx="5102352" cy="1069848"/>
           </a:xfrm>
           <a:prstGeom prst="rect">
             <a:avLst/>
@@ -10731,7 +11127,7 @@
             <a:r>
               <a:rPr sz="1200" b="1">
                 <a:solidFill>
-                  <a:srgbClr val="0D9488"/>
+                  <a:srgbClr val="E6F1FF"/>
                 </a:solidFill>
                 <a:latin typeface="Microsoft YaHei"/>
                 <a:ea typeface="Microsoft YaHei"/>
@@ -10742,13 +11138,13 @@
           <a:p>
             <a:pPr>
               <a:spcBef>
-                <a:spcPts val="400"/>
+                <a:spcPts val="300"/>
               </a:spcBef>
             </a:pPr>
             <a:r>
               <a:rPr sz="1050" b="0">
                 <a:solidFill>
-                  <a:srgbClr val="334155"/>
+                  <a:srgbClr val="8892B0"/>
                 </a:solidFill>
                 <a:latin typeface="Microsoft YaHei"/>
                 <a:ea typeface="Microsoft YaHei"/>
@@ -10760,13 +11156,13 @@
       </p:sp>
       <p:sp>
         <p:nvSpPr>
-          <p:cNvPr id="8" name="Rounded Rectangle 7"/>
+          <p:cNvPr id="9" name="Rounded Rectangle 8"/>
           <p:cNvSpPr/>
           <p:nvPr/>
         </p:nvSpPr>
         <p:spPr>
           <a:xfrm>
-            <a:off x="6126480" y="1554480"/>
+            <a:off x="6126480" y="1508760"/>
             <a:ext cx="5394960" cy="1234440"/>
           </a:xfrm>
           <a:prstGeom prst="roundRect">
@@ -10775,11 +11171,11 @@
             </a:avLst>
           </a:prstGeom>
           <a:solidFill>
-            <a:srgbClr val="F8FAFC"/>
+            <a:srgbClr val="112240"/>
           </a:solidFill>
-          <a:ln w="19050">
+          <a:ln w="15240">
             <a:solidFill>
-              <a:srgbClr val="E2E8F0"/>
+              <a:srgbClr val="1E3A5F"/>
             </a:solidFill>
           </a:ln>
           <a:effectLst/>
@@ -10808,14 +11204,14 @@
       </p:sp>
       <p:sp>
         <p:nvSpPr>
-          <p:cNvPr id="9" name="TextBox 8"/>
+          <p:cNvPr id="10" name="TextBox 9"/>
           <p:cNvSpPr txBox="1"/>
           <p:nvPr/>
         </p:nvSpPr>
         <p:spPr>
           <a:xfrm>
-            <a:off x="6263640" y="1645920"/>
-            <a:ext cx="5120640" cy="1051560"/>
+            <a:off x="6272784" y="1591056"/>
+            <a:ext cx="5102352" cy="1069848"/>
           </a:xfrm>
           <a:prstGeom prst="rect">
             <a:avLst/>
@@ -10831,7 +11227,7 @@
             <a:r>
               <a:rPr sz="1200" b="1">
                 <a:solidFill>
-                  <a:srgbClr val="0D9488"/>
+                  <a:srgbClr val="E6F1FF"/>
                 </a:solidFill>
                 <a:latin typeface="Microsoft YaHei"/>
                 <a:ea typeface="Microsoft YaHei"/>
@@ -10842,13 +11238,13 @@
           <a:p>
             <a:pPr>
               <a:spcBef>
-                <a:spcPts val="400"/>
+                <a:spcPts val="300"/>
               </a:spcBef>
             </a:pPr>
             <a:r>
               <a:rPr sz="1050" b="0">
                 <a:solidFill>
-                  <a:srgbClr val="334155"/>
+                  <a:srgbClr val="8892B0"/>
                 </a:solidFill>
                 <a:latin typeface="Microsoft YaHei"/>
                 <a:ea typeface="Microsoft YaHei"/>
@@ -10860,13 +11256,13 @@
       </p:sp>
       <p:sp>
         <p:nvSpPr>
-          <p:cNvPr id="10" name="Rounded Rectangle 9"/>
+          <p:cNvPr id="11" name="Rounded Rectangle 10"/>
           <p:cNvSpPr/>
           <p:nvPr/>
         </p:nvSpPr>
         <p:spPr>
           <a:xfrm>
-            <a:off x="502920" y="3017520"/>
+            <a:off x="502920" y="2971800"/>
             <a:ext cx="5394960" cy="1234440"/>
           </a:xfrm>
           <a:prstGeom prst="roundRect">
@@ -10875,11 +11271,11 @@
             </a:avLst>
           </a:prstGeom>
           <a:solidFill>
-            <a:srgbClr val="F8FAFC"/>
+            <a:srgbClr val="112240"/>
           </a:solidFill>
-          <a:ln w="19050">
+          <a:ln w="15240">
             <a:solidFill>
-              <a:srgbClr val="E2E8F0"/>
+              <a:srgbClr val="1E3A5F"/>
             </a:solidFill>
           </a:ln>
           <a:effectLst/>
@@ -10908,14 +11304,14 @@
       </p:sp>
       <p:sp>
         <p:nvSpPr>
-          <p:cNvPr id="11" name="TextBox 10"/>
+          <p:cNvPr id="12" name="TextBox 11"/>
           <p:cNvSpPr txBox="1"/>
           <p:nvPr/>
         </p:nvSpPr>
         <p:spPr>
           <a:xfrm>
-            <a:off x="640080" y="3108960"/>
-            <a:ext cx="5120640" cy="1051560"/>
+            <a:off x="649224" y="3054096"/>
+            <a:ext cx="5102352" cy="1069848"/>
           </a:xfrm>
           <a:prstGeom prst="rect">
             <a:avLst/>
@@ -10931,7 +11327,7 @@
             <a:r>
               <a:rPr sz="1200" b="1">
                 <a:solidFill>
-                  <a:srgbClr val="0D9488"/>
+                  <a:srgbClr val="E6F1FF"/>
                 </a:solidFill>
                 <a:latin typeface="Microsoft YaHei"/>
                 <a:ea typeface="Microsoft YaHei"/>
@@ -10942,13 +11338,13 @@
           <a:p>
             <a:pPr>
               <a:spcBef>
-                <a:spcPts val="400"/>
+                <a:spcPts val="300"/>
               </a:spcBef>
             </a:pPr>
             <a:r>
               <a:rPr sz="1050" b="0">
                 <a:solidFill>
-                  <a:srgbClr val="334155"/>
+                  <a:srgbClr val="8892B0"/>
                 </a:solidFill>
                 <a:latin typeface="Microsoft YaHei"/>
                 <a:ea typeface="Microsoft YaHei"/>
@@ -10960,13 +11356,13 @@
       </p:sp>
       <p:sp>
         <p:nvSpPr>
-          <p:cNvPr id="12" name="Rounded Rectangle 11"/>
+          <p:cNvPr id="13" name="Rounded Rectangle 12"/>
           <p:cNvSpPr/>
           <p:nvPr/>
         </p:nvSpPr>
         <p:spPr>
           <a:xfrm>
-            <a:off x="6126480" y="3017520"/>
+            <a:off x="6126480" y="2971800"/>
             <a:ext cx="5394960" cy="1234440"/>
           </a:xfrm>
           <a:prstGeom prst="roundRect">
@@ -10975,11 +11371,11 @@
             </a:avLst>
           </a:prstGeom>
           <a:solidFill>
-            <a:srgbClr val="F8FAFC"/>
+            <a:srgbClr val="112240"/>
           </a:solidFill>
-          <a:ln w="19050">
+          <a:ln w="15240">
             <a:solidFill>
-              <a:srgbClr val="E2E8F0"/>
+              <a:srgbClr val="1E3A5F"/>
             </a:solidFill>
           </a:ln>
           <a:effectLst/>
@@ -11008,14 +11404,14 @@
       </p:sp>
       <p:sp>
         <p:nvSpPr>
-          <p:cNvPr id="13" name="TextBox 12"/>
+          <p:cNvPr id="14" name="TextBox 13"/>
           <p:cNvSpPr txBox="1"/>
           <p:nvPr/>
         </p:nvSpPr>
         <p:spPr>
           <a:xfrm>
-            <a:off x="6263640" y="3108960"/>
-            <a:ext cx="5120640" cy="1051560"/>
+            <a:off x="6272784" y="3054096"/>
+            <a:ext cx="5102352" cy="1069848"/>
           </a:xfrm>
           <a:prstGeom prst="rect">
             <a:avLst/>
@@ -11031,7 +11427,7 @@
             <a:r>
               <a:rPr sz="1200" b="1">
                 <a:solidFill>
-                  <a:srgbClr val="0D9488"/>
+                  <a:srgbClr val="E6F1FF"/>
                 </a:solidFill>
                 <a:latin typeface="Microsoft YaHei"/>
                 <a:ea typeface="Microsoft YaHei"/>
@@ -11042,13 +11438,13 @@
           <a:p>
             <a:pPr>
               <a:spcBef>
-                <a:spcPts val="400"/>
+                <a:spcPts val="300"/>
               </a:spcBef>
             </a:pPr>
             <a:r>
               <a:rPr sz="1050" b="0">
                 <a:solidFill>
-                  <a:srgbClr val="334155"/>
+                  <a:srgbClr val="8892B0"/>
                 </a:solidFill>
                 <a:latin typeface="Microsoft YaHei"/>
                 <a:ea typeface="Microsoft YaHei"/>
@@ -11060,13 +11456,13 @@
       </p:sp>
       <p:sp>
         <p:nvSpPr>
-          <p:cNvPr id="14" name="Rounded Rectangle 13"/>
+          <p:cNvPr id="15" name="Rounded Rectangle 14"/>
           <p:cNvSpPr/>
           <p:nvPr/>
         </p:nvSpPr>
         <p:spPr>
           <a:xfrm>
-            <a:off x="502920" y="4480560"/>
+            <a:off x="502920" y="4434840"/>
             <a:ext cx="5394960" cy="1234440"/>
           </a:xfrm>
           <a:prstGeom prst="roundRect">
@@ -11075,11 +11471,11 @@
             </a:avLst>
           </a:prstGeom>
           <a:solidFill>
-            <a:srgbClr val="F8FAFC"/>
+            <a:srgbClr val="112240"/>
           </a:solidFill>
-          <a:ln w="19050">
+          <a:ln w="15240">
             <a:solidFill>
-              <a:srgbClr val="E2E8F0"/>
+              <a:srgbClr val="1E3A5F"/>
             </a:solidFill>
           </a:ln>
           <a:effectLst/>
@@ -11108,14 +11504,14 @@
       </p:sp>
       <p:sp>
         <p:nvSpPr>
-          <p:cNvPr id="15" name="TextBox 14"/>
+          <p:cNvPr id="16" name="TextBox 15"/>
           <p:cNvSpPr txBox="1"/>
           <p:nvPr/>
         </p:nvSpPr>
         <p:spPr>
           <a:xfrm>
-            <a:off x="640080" y="4572000"/>
-            <a:ext cx="5120640" cy="1051560"/>
+            <a:off x="649224" y="4517136"/>
+            <a:ext cx="5102352" cy="1069848"/>
           </a:xfrm>
           <a:prstGeom prst="rect">
             <a:avLst/>
@@ -11131,7 +11527,7 @@
             <a:r>
               <a:rPr sz="1200" b="1">
                 <a:solidFill>
-                  <a:srgbClr val="0D9488"/>
+                  <a:srgbClr val="E6F1FF"/>
                 </a:solidFill>
                 <a:latin typeface="Microsoft YaHei"/>
                 <a:ea typeface="Microsoft YaHei"/>
@@ -11142,13 +11538,13 @@
           <a:p>
             <a:pPr>
               <a:spcBef>
-                <a:spcPts val="400"/>
+                <a:spcPts val="300"/>
               </a:spcBef>
             </a:pPr>
             <a:r>
               <a:rPr sz="1050" b="0">
                 <a:solidFill>
-                  <a:srgbClr val="334155"/>
+                  <a:srgbClr val="8892B0"/>
                 </a:solidFill>
                 <a:latin typeface="Microsoft YaHei"/>
                 <a:ea typeface="Microsoft YaHei"/>
@@ -11160,13 +11556,13 @@
       </p:sp>
       <p:sp>
         <p:nvSpPr>
-          <p:cNvPr id="16" name="Rounded Rectangle 15"/>
+          <p:cNvPr id="17" name="Rounded Rectangle 16"/>
           <p:cNvSpPr/>
           <p:nvPr/>
         </p:nvSpPr>
         <p:spPr>
           <a:xfrm>
-            <a:off x="6126480" y="4480560"/>
+            <a:off x="6126480" y="4434840"/>
             <a:ext cx="5394960" cy="1234440"/>
           </a:xfrm>
           <a:prstGeom prst="roundRect">
@@ -11175,11 +11571,11 @@
             </a:avLst>
           </a:prstGeom>
           <a:solidFill>
-            <a:srgbClr val="F8FAFC"/>
+            <a:srgbClr val="112240"/>
           </a:solidFill>
-          <a:ln w="19050">
+          <a:ln w="15240">
             <a:solidFill>
-              <a:srgbClr val="E2E8F0"/>
+              <a:srgbClr val="1E3A5F"/>
             </a:solidFill>
           </a:ln>
           <a:effectLst/>
@@ -11208,14 +11604,14 @@
       </p:sp>
       <p:sp>
         <p:nvSpPr>
-          <p:cNvPr id="17" name="TextBox 16"/>
+          <p:cNvPr id="18" name="TextBox 17"/>
           <p:cNvSpPr txBox="1"/>
           <p:nvPr/>
         </p:nvSpPr>
         <p:spPr>
           <a:xfrm>
-            <a:off x="6263640" y="4572000"/>
-            <a:ext cx="5120640" cy="1051560"/>
+            <a:off x="6272784" y="4517136"/>
+            <a:ext cx="5102352" cy="1069848"/>
           </a:xfrm>
           <a:prstGeom prst="rect">
             <a:avLst/>
@@ -11231,7 +11627,7 @@
             <a:r>
               <a:rPr sz="1200" b="1">
                 <a:solidFill>
-                  <a:srgbClr val="0D9488"/>
+                  <a:srgbClr val="E6F1FF"/>
                 </a:solidFill>
                 <a:latin typeface="Microsoft YaHei"/>
                 <a:ea typeface="Microsoft YaHei"/>
@@ -11242,13 +11638,13 @@
           <a:p>
             <a:pPr>
               <a:spcBef>
-                <a:spcPts val="400"/>
+                <a:spcPts val="300"/>
               </a:spcBef>
             </a:pPr>
             <a:r>
               <a:rPr sz="1050" b="0">
                 <a:solidFill>
-                  <a:srgbClr val="334155"/>
+                  <a:srgbClr val="8892B0"/>
                 </a:solidFill>
                 <a:latin typeface="Microsoft YaHei"/>
                 <a:ea typeface="Microsoft YaHei"/>
@@ -11260,13 +11656,13 @@
       </p:sp>
       <p:sp>
         <p:nvSpPr>
-          <p:cNvPr id="18" name="TextBox 17"/>
+          <p:cNvPr id="19" name="TextBox 18"/>
           <p:cNvSpPr txBox="1"/>
           <p:nvPr/>
         </p:nvSpPr>
         <p:spPr>
           <a:xfrm>
-            <a:off x="502920" y="5760720"/>
+            <a:off x="502920" y="5715000"/>
             <a:ext cx="11155680" cy="457200"/>
           </a:xfrm>
           <a:prstGeom prst="rect">
@@ -11288,7 +11684,7 @@
             <a:r>
               <a:rPr sz="1200" b="0">
                 <a:solidFill>
-                  <a:srgbClr val="F59E0B"/>
+                  <a:srgbClr val="FFC864"/>
                 </a:solidFill>
                 <a:latin typeface="Microsoft YaHei"/>
                 <a:ea typeface="Microsoft YaHei"/>
@@ -11331,7 +11727,7 @@
             <a:avLst/>
           </a:prstGeom>
           <a:solidFill>
-            <a:srgbClr val="FFFFFF"/>
+            <a:srgbClr val="0A192F"/>
           </a:solidFill>
           <a:ln>
             <a:noFill/>
@@ -11368,8 +11764,8 @@
         </p:nvSpPr>
         <p:spPr>
           <a:xfrm>
-            <a:off x="502920" y="365760"/>
-            <a:ext cx="10972800" cy="548640"/>
+            <a:off x="502920" y="384048"/>
+            <a:ext cx="1828800" cy="457200"/>
           </a:xfrm>
           <a:prstGeom prst="rect">
             <a:avLst/>
@@ -11388,34 +11784,74 @@
               </a:spcAft>
             </a:pPr>
             <a:r>
-              <a:rPr sz="2400" b="1">
-                <a:solidFill>
-                  <a:srgbClr val="0F172A"/>
-                </a:solidFill>
-                <a:latin typeface="Microsoft YaHei"/>
-                <a:ea typeface="Microsoft YaHei"/>
-              </a:rPr>
-              <a:t>数据与可信机制</a:t>
-            </a:r>
-          </a:p>
-        </p:txBody>
-      </p:sp>
-      <p:sp>
-        <p:nvSpPr>
-          <p:cNvPr id="4" name="Rectangle 3"/>
+              <a:rPr sz="1400" b="1">
+                <a:solidFill>
+                  <a:srgbClr val="64FFDA"/>
+                </a:solidFill>
+                <a:latin typeface="Consolas"/>
+                <a:ea typeface="Microsoft YaHei"/>
+              </a:rPr>
+              <a:t>09</a:t>
+            </a:r>
+          </a:p>
+        </p:txBody>
+      </p:sp>
+      <p:sp>
+        <p:nvSpPr>
+          <p:cNvPr id="4" name="TextBox 3"/>
+          <p:cNvSpPr txBox="1"/>
+          <p:nvPr/>
+        </p:nvSpPr>
+        <p:spPr>
+          <a:xfrm>
+            <a:off x="502920" y="365760"/>
+            <a:ext cx="10972800" cy="548640"/>
+          </a:xfrm>
+          <a:prstGeom prst="rect">
+            <a:avLst/>
+          </a:prstGeom>
+          <a:noFill/>
+        </p:spPr>
+        <p:txBody>
+          <a:bodyPr wrap="square" anchor="t">
+            <a:spAutoFit/>
+          </a:bodyPr>
+          <a:lstStyle/>
+          <a:p>
+            <a:pPr algn="l">
+              <a:spcAft>
+                <a:spcPts val="400"/>
+              </a:spcAft>
+            </a:pPr>
+            <a:r>
+              <a:rPr sz="2300" b="1">
+                <a:solidFill>
+                  <a:srgbClr val="E6F1FF"/>
+                </a:solidFill>
+                <a:latin typeface="Microsoft YaHei"/>
+                <a:ea typeface="Microsoft YaHei"/>
+              </a:rPr>
+              <a:t>  数据与可信机制</a:t>
+            </a:r>
+          </a:p>
+        </p:txBody>
+      </p:sp>
+      <p:sp>
+        <p:nvSpPr>
+          <p:cNvPr id="5" name="Rectangle 4"/>
           <p:cNvSpPr/>
           <p:nvPr/>
         </p:nvSpPr>
         <p:spPr>
           <a:xfrm>
-            <a:off x="502920" y="1078992"/>
-            <a:ext cx="1371600" cy="64008"/>
+            <a:off x="502920" y="1051560"/>
+            <a:ext cx="1280160" cy="45720"/>
           </a:xfrm>
           <a:prstGeom prst="rect">
             <a:avLst/>
           </a:prstGeom>
           <a:solidFill>
-            <a:srgbClr val="0D9488"/>
+            <a:srgbClr val="64FFDA"/>
           </a:solidFill>
           <a:ln>
             <a:noFill/>
@@ -11446,14 +11882,14 @@
       </p:sp>
       <p:sp>
         <p:nvSpPr>
-          <p:cNvPr id="5" name="TextBox 4"/>
+          <p:cNvPr id="6" name="TextBox 5"/>
           <p:cNvSpPr txBox="1"/>
           <p:nvPr/>
         </p:nvSpPr>
         <p:spPr>
           <a:xfrm>
-            <a:off x="11430000" y="6446520"/>
-            <a:ext cx="548640" cy="365760"/>
+            <a:off x="10881360" y="411480"/>
+            <a:ext cx="822960" cy="365760"/>
           </a:xfrm>
           <a:prstGeom prst="rect">
             <a:avLst/>
@@ -11474,25 +11910,25 @@
             <a:r>
               <a:rPr sz="900" b="0">
                 <a:solidFill>
-                  <a:srgbClr val="64748B"/>
-                </a:solidFill>
-                <a:latin typeface="Microsoft YaHei"/>
-                <a:ea typeface="Microsoft YaHei"/>
-              </a:rPr>
-              <a:t>09/13</a:t>
-            </a:r>
-          </a:p>
-        </p:txBody>
-      </p:sp>
-      <p:sp>
-        <p:nvSpPr>
-          <p:cNvPr id="6" name="Rounded Rectangle 5"/>
+                  <a:srgbClr val="5A7A9E"/>
+                </a:solidFill>
+                <a:latin typeface="Consolas"/>
+                <a:ea typeface="Microsoft YaHei"/>
+              </a:rPr>
+              <a:t>09 / 13</a:t>
+            </a:r>
+          </a:p>
+        </p:txBody>
+      </p:sp>
+      <p:sp>
+        <p:nvSpPr>
+          <p:cNvPr id="7" name="Rounded Rectangle 6"/>
           <p:cNvSpPr/>
           <p:nvPr/>
         </p:nvSpPr>
         <p:spPr>
           <a:xfrm>
-            <a:off x="3078327" y="1737360"/>
+            <a:off x="3078327" y="1691640"/>
             <a:ext cx="1645920" cy="822960"/>
           </a:xfrm>
           <a:prstGeom prst="roundRect">
@@ -11501,9 +11937,9 @@
             </a:avLst>
           </a:prstGeom>
           <a:solidFill>
-            <a:srgbClr val="FFFFFF"/>
+            <a:srgbClr val="112240"/>
           </a:solidFill>
-          <a:ln w="19050">
+          <a:ln w="15240">
             <a:solidFill>
               <a:srgbClr val="3F6FCC"/>
             </a:solidFill>
@@ -11530,9 +11966,9 @@
           <a:p>
             <a:pPr algn="ctr"/>
             <a:r>
-              <a:rPr sz="1200" b="1">
-                <a:solidFill>
-                  <a:srgbClr val="0F172A"/>
+              <a:rPr sz="1150" b="1">
+                <a:solidFill>
+                  <a:srgbClr val="E6F1FF"/>
                 </a:solidFill>
                 <a:latin typeface="Microsoft YaHei"/>
                 <a:ea typeface="Microsoft YaHei"/>
@@ -11545,7 +11981,7 @@
             <a:r>
               <a:rPr sz="800" b="0">
                 <a:solidFill>
-                  <a:srgbClr val="64748B"/>
+                  <a:srgbClr val="5A7A9E"/>
                 </a:solidFill>
                 <a:latin typeface="Microsoft YaHei"/>
                 <a:ea typeface="Microsoft YaHei"/>
@@ -11557,13 +11993,13 @@
       </p:sp>
       <p:sp>
         <p:nvSpPr>
-          <p:cNvPr id="7" name="TextBox 6"/>
+          <p:cNvPr id="8" name="TextBox 7"/>
           <p:cNvSpPr txBox="1"/>
           <p:nvPr/>
         </p:nvSpPr>
         <p:spPr>
           <a:xfrm>
-            <a:off x="4724247" y="1965960"/>
+            <a:off x="4724247" y="1920240"/>
             <a:ext cx="548640" cy="457200"/>
           </a:xfrm>
           <a:prstGeom prst="rect">
@@ -11583,9 +12019,9 @@
               </a:spcAft>
             </a:pPr>
             <a:r>
-              <a:rPr sz="1600" b="1">
-                <a:solidFill>
-                  <a:srgbClr val="3F6FCC"/>
+              <a:rPr sz="1500" b="1">
+                <a:solidFill>
+                  <a:srgbClr val="64FFDA"/>
                 </a:solidFill>
                 <a:latin typeface="Microsoft YaHei"/>
                 <a:ea typeface="Microsoft YaHei"/>
@@ -11597,13 +12033,13 @@
       </p:sp>
       <p:sp>
         <p:nvSpPr>
-          <p:cNvPr id="8" name="Rounded Rectangle 7"/>
+          <p:cNvPr id="9" name="Rounded Rectangle 8"/>
           <p:cNvSpPr/>
           <p:nvPr/>
         </p:nvSpPr>
         <p:spPr>
           <a:xfrm>
-            <a:off x="5272887" y="1737360"/>
+            <a:off x="5272887" y="1691640"/>
             <a:ext cx="1645920" cy="822960"/>
           </a:xfrm>
           <a:prstGeom prst="roundRect">
@@ -11612,9 +12048,9 @@
             </a:avLst>
           </a:prstGeom>
           <a:solidFill>
-            <a:srgbClr val="FFFFFF"/>
+            <a:srgbClr val="112240"/>
           </a:solidFill>
-          <a:ln w="19050">
+          <a:ln w="15240">
             <a:solidFill>
               <a:srgbClr val="3F6FCC"/>
             </a:solidFill>
@@ -11641,9 +12077,9 @@
           <a:p>
             <a:pPr algn="ctr"/>
             <a:r>
-              <a:rPr sz="1200" b="1">
-                <a:solidFill>
-                  <a:srgbClr val="0F172A"/>
+              <a:rPr sz="1150" b="1">
+                <a:solidFill>
+                  <a:srgbClr val="E6F1FF"/>
                 </a:solidFill>
                 <a:latin typeface="Microsoft YaHei"/>
                 <a:ea typeface="Microsoft YaHei"/>
@@ -11656,7 +12092,7 @@
             <a:r>
               <a:rPr sz="800" b="0">
                 <a:solidFill>
-                  <a:srgbClr val="64748B"/>
+                  <a:srgbClr val="5A7A9E"/>
                 </a:solidFill>
                 <a:latin typeface="Microsoft YaHei"/>
                 <a:ea typeface="Microsoft YaHei"/>
@@ -11668,13 +12104,13 @@
       </p:sp>
       <p:sp>
         <p:nvSpPr>
-          <p:cNvPr id="9" name="TextBox 8"/>
+          <p:cNvPr id="10" name="TextBox 9"/>
           <p:cNvSpPr txBox="1"/>
           <p:nvPr/>
         </p:nvSpPr>
         <p:spPr>
           <a:xfrm>
-            <a:off x="6918807" y="1965960"/>
+            <a:off x="6918807" y="1920240"/>
             <a:ext cx="548640" cy="457200"/>
           </a:xfrm>
           <a:prstGeom prst="rect">
@@ -11694,9 +12130,9 @@
               </a:spcAft>
             </a:pPr>
             <a:r>
-              <a:rPr sz="1600" b="1">
-                <a:solidFill>
-                  <a:srgbClr val="3F6FCC"/>
+              <a:rPr sz="1500" b="1">
+                <a:solidFill>
+                  <a:srgbClr val="64FFDA"/>
                 </a:solidFill>
                 <a:latin typeface="Microsoft YaHei"/>
                 <a:ea typeface="Microsoft YaHei"/>
@@ -11708,13 +12144,13 @@
       </p:sp>
       <p:sp>
         <p:nvSpPr>
-          <p:cNvPr id="10" name="Rounded Rectangle 9"/>
+          <p:cNvPr id="11" name="Rounded Rectangle 10"/>
           <p:cNvSpPr/>
           <p:nvPr/>
         </p:nvSpPr>
         <p:spPr>
           <a:xfrm>
-            <a:off x="7467447" y="1737360"/>
+            <a:off x="7467447" y="1691640"/>
             <a:ext cx="1645920" cy="822960"/>
           </a:xfrm>
           <a:prstGeom prst="roundRect">
@@ -11723,9 +12159,9 @@
             </a:avLst>
           </a:prstGeom>
           <a:solidFill>
-            <a:srgbClr val="FFFFFF"/>
+            <a:srgbClr val="112240"/>
           </a:solidFill>
-          <a:ln w="19050">
+          <a:ln w="15240">
             <a:solidFill>
               <a:srgbClr val="3F6FCC"/>
             </a:solidFill>
@@ -11752,9 +12188,9 @@
           <a:p>
             <a:pPr algn="ctr"/>
             <a:r>
-              <a:rPr sz="1200" b="1">
-                <a:solidFill>
-                  <a:srgbClr val="0F172A"/>
+              <a:rPr sz="1150" b="1">
+                <a:solidFill>
+                  <a:srgbClr val="E6F1FF"/>
                 </a:solidFill>
                 <a:latin typeface="Microsoft YaHei"/>
                 <a:ea typeface="Microsoft YaHei"/>
@@ -11767,7 +12203,7 @@
             <a:r>
               <a:rPr sz="800" b="0">
                 <a:solidFill>
-                  <a:srgbClr val="64748B"/>
+                  <a:srgbClr val="5A7A9E"/>
                 </a:solidFill>
                 <a:latin typeface="Microsoft YaHei"/>
                 <a:ea typeface="Microsoft YaHei"/>
@@ -11779,13 +12215,13 @@
       </p:sp>
       <p:sp>
         <p:nvSpPr>
-          <p:cNvPr id="11" name="Rounded Rectangle 10"/>
+          <p:cNvPr id="12" name="Rounded Rectangle 11"/>
           <p:cNvSpPr/>
           <p:nvPr/>
         </p:nvSpPr>
         <p:spPr>
           <a:xfrm>
-            <a:off x="502920" y="3200400"/>
+            <a:off x="502920" y="3108960"/>
             <a:ext cx="5394960" cy="1234440"/>
           </a:xfrm>
           <a:prstGeom prst="roundRect">
@@ -11794,11 +12230,11 @@
             </a:avLst>
           </a:prstGeom>
           <a:solidFill>
-            <a:srgbClr val="F8FAFC"/>
+            <a:srgbClr val="112240"/>
           </a:solidFill>
-          <a:ln w="19050">
+          <a:ln w="15240">
             <a:solidFill>
-              <a:srgbClr val="E2E8F0"/>
+              <a:srgbClr val="1E3A5F"/>
             </a:solidFill>
           </a:ln>
           <a:effectLst/>
@@ -11827,14 +12263,14 @@
       </p:sp>
       <p:sp>
         <p:nvSpPr>
-          <p:cNvPr id="12" name="TextBox 11"/>
+          <p:cNvPr id="13" name="TextBox 12"/>
           <p:cNvSpPr txBox="1"/>
           <p:nvPr/>
         </p:nvSpPr>
         <p:spPr>
           <a:xfrm>
-            <a:off x="640080" y="3291840"/>
-            <a:ext cx="5120640" cy="1051560"/>
+            <a:off x="649224" y="3191256"/>
+            <a:ext cx="5102352" cy="1069848"/>
           </a:xfrm>
           <a:prstGeom prst="rect">
             <a:avLst/>
@@ -11850,7 +12286,7 @@
             <a:r>
               <a:rPr sz="1200" b="1">
                 <a:solidFill>
-                  <a:srgbClr val="0D9488"/>
+                  <a:srgbClr val="E6F1FF"/>
                 </a:solidFill>
                 <a:latin typeface="Microsoft YaHei"/>
                 <a:ea typeface="Microsoft YaHei"/>
@@ -11861,13 +12297,13 @@
           <a:p>
             <a:pPr>
               <a:spcBef>
-                <a:spcPts val="400"/>
+                <a:spcPts val="300"/>
               </a:spcBef>
             </a:pPr>
             <a:r>
               <a:rPr sz="1050" b="0">
                 <a:solidFill>
-                  <a:srgbClr val="334155"/>
+                  <a:srgbClr val="8892B0"/>
                 </a:solidFill>
                 <a:latin typeface="Microsoft YaHei"/>
                 <a:ea typeface="Microsoft YaHei"/>
@@ -11879,13 +12315,13 @@
       </p:sp>
       <p:sp>
         <p:nvSpPr>
-          <p:cNvPr id="13" name="Rounded Rectangle 12"/>
+          <p:cNvPr id="14" name="Rounded Rectangle 13"/>
           <p:cNvSpPr/>
           <p:nvPr/>
         </p:nvSpPr>
         <p:spPr>
           <a:xfrm>
-            <a:off x="6126480" y="3200400"/>
+            <a:off x="6126480" y="3108960"/>
             <a:ext cx="5394960" cy="1234440"/>
           </a:xfrm>
           <a:prstGeom prst="roundRect">
@@ -11894,11 +12330,11 @@
             </a:avLst>
           </a:prstGeom>
           <a:solidFill>
-            <a:srgbClr val="F8FAFC"/>
+            <a:srgbClr val="112240"/>
           </a:solidFill>
-          <a:ln w="19050">
+          <a:ln w="15240">
             <a:solidFill>
-              <a:srgbClr val="E2E8F0"/>
+              <a:srgbClr val="1E3A5F"/>
             </a:solidFill>
           </a:ln>
           <a:effectLst/>
@@ -11927,14 +12363,14 @@
       </p:sp>
       <p:sp>
         <p:nvSpPr>
-          <p:cNvPr id="14" name="TextBox 13"/>
+          <p:cNvPr id="15" name="TextBox 14"/>
           <p:cNvSpPr txBox="1"/>
           <p:nvPr/>
         </p:nvSpPr>
         <p:spPr>
           <a:xfrm>
-            <a:off x="6263640" y="3291840"/>
-            <a:ext cx="5120640" cy="1051560"/>
+            <a:off x="6272784" y="3191256"/>
+            <a:ext cx="5102352" cy="1069848"/>
           </a:xfrm>
           <a:prstGeom prst="rect">
             <a:avLst/>
@@ -11950,7 +12386,7 @@
             <a:r>
               <a:rPr sz="1200" b="1">
                 <a:solidFill>
-                  <a:srgbClr val="0D9488"/>
+                  <a:srgbClr val="E6F1FF"/>
                 </a:solidFill>
                 <a:latin typeface="Microsoft YaHei"/>
                 <a:ea typeface="Microsoft YaHei"/>
@@ -11961,13 +12397,13 @@
           <a:p>
             <a:pPr>
               <a:spcBef>
-                <a:spcPts val="400"/>
+                <a:spcPts val="300"/>
               </a:spcBef>
             </a:pPr>
             <a:r>
               <a:rPr sz="1050" b="0">
                 <a:solidFill>
-                  <a:srgbClr val="334155"/>
+                  <a:srgbClr val="8892B0"/>
                 </a:solidFill>
                 <a:latin typeface="Microsoft YaHei"/>
                 <a:ea typeface="Microsoft YaHei"/>
@@ -11979,13 +12415,13 @@
       </p:sp>
       <p:sp>
         <p:nvSpPr>
-          <p:cNvPr id="15" name="Rounded Rectangle 14"/>
+          <p:cNvPr id="16" name="Rounded Rectangle 15"/>
           <p:cNvSpPr/>
           <p:nvPr/>
         </p:nvSpPr>
         <p:spPr>
           <a:xfrm>
-            <a:off x="502920" y="4663440"/>
+            <a:off x="502920" y="4572000"/>
             <a:ext cx="5394960" cy="1234440"/>
           </a:xfrm>
           <a:prstGeom prst="roundRect">
@@ -11994,11 +12430,11 @@
             </a:avLst>
           </a:prstGeom>
           <a:solidFill>
-            <a:srgbClr val="F8FAFC"/>
+            <a:srgbClr val="112240"/>
           </a:solidFill>
-          <a:ln w="19050">
+          <a:ln w="15240">
             <a:solidFill>
-              <a:srgbClr val="E2E8F0"/>
+              <a:srgbClr val="1E3A5F"/>
             </a:solidFill>
           </a:ln>
           <a:effectLst/>
@@ -12027,14 +12463,14 @@
       </p:sp>
       <p:sp>
         <p:nvSpPr>
-          <p:cNvPr id="16" name="TextBox 15"/>
+          <p:cNvPr id="17" name="TextBox 16"/>
           <p:cNvSpPr txBox="1"/>
           <p:nvPr/>
         </p:nvSpPr>
         <p:spPr>
           <a:xfrm>
-            <a:off x="640080" y="4754880"/>
-            <a:ext cx="5120640" cy="1051560"/>
+            <a:off x="649224" y="4654296"/>
+            <a:ext cx="5102352" cy="1069848"/>
           </a:xfrm>
           <a:prstGeom prst="rect">
             <a:avLst/>
@@ -12050,7 +12486,7 @@
             <a:r>
               <a:rPr sz="1200" b="1">
                 <a:solidFill>
-                  <a:srgbClr val="0D9488"/>
+                  <a:srgbClr val="E6F1FF"/>
                 </a:solidFill>
                 <a:latin typeface="Microsoft YaHei"/>
                 <a:ea typeface="Microsoft YaHei"/>
@@ -12061,13 +12497,13 @@
           <a:p>
             <a:pPr>
               <a:spcBef>
-                <a:spcPts val="400"/>
+                <a:spcPts val="300"/>
               </a:spcBef>
             </a:pPr>
             <a:r>
               <a:rPr sz="1050" b="0">
                 <a:solidFill>
-                  <a:srgbClr val="334155"/>
+                  <a:srgbClr val="8892B0"/>
                 </a:solidFill>
                 <a:latin typeface="Microsoft YaHei"/>
                 <a:ea typeface="Microsoft YaHei"/>
@@ -12079,13 +12515,13 @@
       </p:sp>
       <p:sp>
         <p:nvSpPr>
-          <p:cNvPr id="17" name="Rounded Rectangle 16"/>
+          <p:cNvPr id="18" name="Rounded Rectangle 17"/>
           <p:cNvSpPr/>
           <p:nvPr/>
         </p:nvSpPr>
         <p:spPr>
           <a:xfrm>
-            <a:off x="6126480" y="4663440"/>
+            <a:off x="6126480" y="4572000"/>
             <a:ext cx="5394960" cy="1234440"/>
           </a:xfrm>
           <a:prstGeom prst="roundRect">
@@ -12094,11 +12530,11 @@
             </a:avLst>
           </a:prstGeom>
           <a:solidFill>
-            <a:srgbClr val="F8FAFC"/>
+            <a:srgbClr val="112240"/>
           </a:solidFill>
-          <a:ln w="19050">
+          <a:ln w="15240">
             <a:solidFill>
-              <a:srgbClr val="E2E8F0"/>
+              <a:srgbClr val="1E3A5F"/>
             </a:solidFill>
           </a:ln>
           <a:effectLst/>
@@ -12127,14 +12563,14 @@
       </p:sp>
       <p:sp>
         <p:nvSpPr>
-          <p:cNvPr id="18" name="TextBox 17"/>
+          <p:cNvPr id="19" name="TextBox 18"/>
           <p:cNvSpPr txBox="1"/>
           <p:nvPr/>
         </p:nvSpPr>
         <p:spPr>
           <a:xfrm>
-            <a:off x="6263640" y="4754880"/>
-            <a:ext cx="5120640" cy="1051560"/>
+            <a:off x="6272784" y="4654296"/>
+            <a:ext cx="5102352" cy="1069848"/>
           </a:xfrm>
           <a:prstGeom prst="rect">
             <a:avLst/>
@@ -12150,7 +12586,7 @@
             <a:r>
               <a:rPr sz="1200" b="1">
                 <a:solidFill>
-                  <a:srgbClr val="0D9488"/>
+                  <a:srgbClr val="E6F1FF"/>
                 </a:solidFill>
                 <a:latin typeface="Microsoft YaHei"/>
                 <a:ea typeface="Microsoft YaHei"/>
@@ -12161,13 +12597,13 @@
           <a:p>
             <a:pPr>
               <a:spcBef>
-                <a:spcPts val="400"/>
+                <a:spcPts val="300"/>
               </a:spcBef>
             </a:pPr>
             <a:r>
               <a:rPr sz="1050" b="0">
                 <a:solidFill>
-                  <a:srgbClr val="334155"/>
+                  <a:srgbClr val="8892B0"/>
                 </a:solidFill>
                 <a:latin typeface="Microsoft YaHei"/>
                 <a:ea typeface="Microsoft YaHei"/>

--- a/competition/initial/01-solution-deck.pptx
+++ b/competition/initial/01-solution-deck.pptx
@@ -3115,7 +3115,7 @@
             <a:avLst/>
           </a:prstGeom>
           <a:solidFill>
-            <a:srgbClr val="0A192F"/>
+            <a:srgbClr val="F5F0E8"/>
           </a:solidFill>
           <a:ln>
             <a:noFill/>
@@ -3174,12 +3174,12 @@
             <a:r>
               <a:rPr sz="1300" b="0">
                 <a:solidFill>
-                  <a:srgbClr val="64FFDA"/>
-                </a:solidFill>
-                <a:latin typeface="Consolas"/>
-                <a:ea typeface="Microsoft YaHei"/>
-              </a:rPr>
-              <a:t>01 · GOAI AGENT INFRA</a:t>
+                  <a:srgbClr val="8A7A6F"/>
+                </a:solidFill>
+                <a:latin typeface="Microsoft YaHei"/>
+                <a:ea typeface="Microsoft YaHei"/>
+              </a:rPr>
+              <a:t>职途智策 · GOAI Agent Infra 赛道</a:t>
             </a:r>
           </a:p>
         </p:txBody>
@@ -3212,12 +3212,12 @@
               </a:spcAft>
             </a:pPr>
             <a:r>
-              <a:rPr sz="4500" b="1">
-                <a:solidFill>
-                  <a:srgbClr val="E6F1FF"/>
-                </a:solidFill>
-                <a:latin typeface="Microsoft YaHei"/>
-                <a:ea typeface="Microsoft YaHei"/>
+              <a:rPr sz="4600" b="1">
+                <a:solidFill>
+                  <a:srgbClr val="191919"/>
+                </a:solidFill>
+                <a:latin typeface="SimSun"/>
+                <a:ea typeface="SimSun"/>
               </a:rPr>
               <a:t>职途智策 AgentTeam</a:t>
             </a:r>
@@ -3252,9 +3252,9 @@
               </a:spcAft>
             </a:pPr>
             <a:r>
-              <a:rPr sz="2000" b="0">
-                <a:solidFill>
-                  <a:srgbClr val="8892B0"/>
+              <a:rPr sz="1900" b="0">
+                <a:solidFill>
+                  <a:srgbClr val="5A4A40"/>
                 </a:solidFill>
                 <a:latin typeface="Microsoft YaHei"/>
                 <a:ea typeface="Microsoft YaHei"/>
@@ -3279,7 +3279,7 @@
             <a:avLst/>
           </a:prstGeom>
           <a:solidFill>
-            <a:srgbClr val="64FFDA"/>
+            <a:srgbClr val="CC785C"/>
           </a:solidFill>
           <a:ln>
             <a:noFill/>
@@ -3338,7 +3338,7 @@
             <a:r>
               <a:rPr sz="1300" b="0">
                 <a:solidFill>
-                  <a:srgbClr val="5A7A9E"/>
+                  <a:srgbClr val="8A7A6F"/>
                 </a:solidFill>
                 <a:latin typeface="Microsoft YaHei"/>
                 <a:ea typeface="Microsoft YaHei"/>
@@ -3378,9 +3378,9 @@
             <a:r>
               <a:rPr sz="1200" b="0">
                 <a:solidFill>
-                  <a:srgbClr val="64FFDA"/>
-                </a:solidFill>
-                <a:latin typeface="Consolas"/>
+                  <a:srgbClr val="B95C3F"/>
+                </a:solidFill>
+                <a:latin typeface="Microsoft YaHei"/>
                 <a:ea typeface="Microsoft YaHei"/>
               </a:rPr>
               <a:t>AgentTeams   Skill   可信门禁   可观测   可回放</a:t>
@@ -3421,7 +3421,7 @@
             <a:avLst/>
           </a:prstGeom>
           <a:solidFill>
-            <a:srgbClr val="0A192F"/>
+            <a:srgbClr val="F5F0E8"/>
           </a:solidFill>
           <a:ln>
             <a:noFill/>
@@ -3480,9 +3480,9 @@
             <a:r>
               <a:rPr sz="1400" b="1">
                 <a:solidFill>
-                  <a:srgbClr val="64FFDA"/>
-                </a:solidFill>
-                <a:latin typeface="Consolas"/>
+                  <a:srgbClr val="CC785C"/>
+                </a:solidFill>
+                <a:latin typeface="Microsoft YaHei"/>
                 <a:ea typeface="Microsoft YaHei"/>
               </a:rPr>
               <a:t>10</a:t>
@@ -3520,10 +3520,10 @@
             <a:r>
               <a:rPr sz="2300" b="1">
                 <a:solidFill>
-                  <a:srgbClr val="E6F1FF"/>
-                </a:solidFill>
-                <a:latin typeface="Microsoft YaHei"/>
-                <a:ea typeface="Microsoft YaHei"/>
+                  <a:srgbClr val="191919"/>
+                </a:solidFill>
+                <a:latin typeface="SimSun"/>
+                <a:ea typeface="SimSun"/>
               </a:rPr>
               <a:t>  工程与可观测</a:t>
             </a:r>
@@ -3545,7 +3545,7 @@
             <a:avLst/>
           </a:prstGeom>
           <a:solidFill>
-            <a:srgbClr val="64FFDA"/>
+            <a:srgbClr val="CC785C"/>
           </a:solidFill>
           <a:ln>
             <a:noFill/>
@@ -3604,9 +3604,9 @@
             <a:r>
               <a:rPr sz="900" b="0">
                 <a:solidFill>
-                  <a:srgbClr val="5A7A9E"/>
-                </a:solidFill>
-                <a:latin typeface="Consolas"/>
+                  <a:srgbClr val="8A7A6F"/>
+                </a:solidFill>
+                <a:latin typeface="Microsoft YaHei"/>
                 <a:ea typeface="Microsoft YaHei"/>
               </a:rPr>
               <a:t>10 / 13</a:t>
@@ -3631,11 +3631,11 @@
             </a:avLst>
           </a:prstGeom>
           <a:solidFill>
-            <a:srgbClr val="112240"/>
+            <a:srgbClr val="FDFBF7"/>
           </a:solidFill>
           <a:ln w="15240">
             <a:solidFill>
-              <a:srgbClr val="1E3A5F"/>
+              <a:srgbClr val="E8DFD2"/>
             </a:solidFill>
           </a:ln>
           <a:effectLst/>
@@ -3687,10 +3687,10 @@
             <a:r>
               <a:rPr sz="1200" b="1">
                 <a:solidFill>
-                  <a:srgbClr val="E6F1FF"/>
-                </a:solidFill>
-                <a:latin typeface="Microsoft YaHei"/>
-                <a:ea typeface="Microsoft YaHei"/>
+                  <a:srgbClr val="191919"/>
+                </a:solidFill>
+                <a:latin typeface="SimSun"/>
+                <a:ea typeface="SimSun"/>
               </a:rPr>
               <a:t>结构化校验</a:t>
             </a:r>
@@ -3704,7 +3704,7 @@
             <a:r>
               <a:rPr sz="1050" b="0">
                 <a:solidFill>
-                  <a:srgbClr val="8892B0"/>
+                  <a:srgbClr val="5A4A40"/>
                 </a:solidFill>
                 <a:latin typeface="Microsoft YaHei"/>
                 <a:ea typeface="Microsoft YaHei"/>
@@ -3731,11 +3731,11 @@
             </a:avLst>
           </a:prstGeom>
           <a:solidFill>
-            <a:srgbClr val="112240"/>
+            <a:srgbClr val="FDFBF7"/>
           </a:solidFill>
           <a:ln w="15240">
             <a:solidFill>
-              <a:srgbClr val="1E3A5F"/>
+              <a:srgbClr val="E8DFD2"/>
             </a:solidFill>
           </a:ln>
           <a:effectLst/>
@@ -3787,10 +3787,10 @@
             <a:r>
               <a:rPr sz="1200" b="1">
                 <a:solidFill>
-                  <a:srgbClr val="E6F1FF"/>
-                </a:solidFill>
-                <a:latin typeface="Microsoft YaHei"/>
-                <a:ea typeface="Microsoft YaHei"/>
+                  <a:srgbClr val="191919"/>
+                </a:solidFill>
+                <a:latin typeface="SimSun"/>
+                <a:ea typeface="SimSun"/>
               </a:rPr>
               <a:t>资源控制</a:t>
             </a:r>
@@ -3804,7 +3804,7 @@
             <a:r>
               <a:rPr sz="1050" b="0">
                 <a:solidFill>
-                  <a:srgbClr val="8892B0"/>
+                  <a:srgbClr val="5A4A40"/>
                 </a:solidFill>
                 <a:latin typeface="Microsoft YaHei"/>
                 <a:ea typeface="Microsoft YaHei"/>
@@ -3831,11 +3831,11 @@
             </a:avLst>
           </a:prstGeom>
           <a:solidFill>
-            <a:srgbClr val="112240"/>
+            <a:srgbClr val="FDFBF7"/>
           </a:solidFill>
           <a:ln w="15240">
             <a:solidFill>
-              <a:srgbClr val="1E3A5F"/>
+              <a:srgbClr val="E8DFD2"/>
             </a:solidFill>
           </a:ln>
           <a:effectLst/>
@@ -3887,10 +3887,10 @@
             <a:r>
               <a:rPr sz="1200" b="1">
                 <a:solidFill>
-                  <a:srgbClr val="E6F1FF"/>
-                </a:solidFill>
-                <a:latin typeface="Microsoft YaHei"/>
-                <a:ea typeface="Microsoft YaHei"/>
+                  <a:srgbClr val="191919"/>
+                </a:solidFill>
+                <a:latin typeface="SimSun"/>
+                <a:ea typeface="SimSun"/>
               </a:rPr>
               <a:t>可观测</a:t>
             </a:r>
@@ -3904,7 +3904,7 @@
             <a:r>
               <a:rPr sz="1050" b="0">
                 <a:solidFill>
-                  <a:srgbClr val="8892B0"/>
+                  <a:srgbClr val="5A4A40"/>
                 </a:solidFill>
                 <a:latin typeface="Microsoft YaHei"/>
                 <a:ea typeface="Microsoft YaHei"/>
@@ -3931,11 +3931,11 @@
             </a:avLst>
           </a:prstGeom>
           <a:solidFill>
-            <a:srgbClr val="112240"/>
+            <a:srgbClr val="FDFBF7"/>
           </a:solidFill>
           <a:ln w="15240">
             <a:solidFill>
-              <a:srgbClr val="1E3A5F"/>
+              <a:srgbClr val="E8DFD2"/>
             </a:solidFill>
           </a:ln>
           <a:effectLst/>
@@ -3987,10 +3987,10 @@
             <a:r>
               <a:rPr sz="1200" b="1">
                 <a:solidFill>
-                  <a:srgbClr val="E6F1FF"/>
-                </a:solidFill>
-                <a:latin typeface="Microsoft YaHei"/>
-                <a:ea typeface="Microsoft YaHei"/>
+                  <a:srgbClr val="191919"/>
+                </a:solidFill>
+                <a:latin typeface="SimSun"/>
+                <a:ea typeface="SimSun"/>
               </a:rPr>
               <a:t>可复现</a:t>
             </a:r>
@@ -4004,7 +4004,7 @@
             <a:r>
               <a:rPr sz="1050" b="0">
                 <a:solidFill>
-                  <a:srgbClr val="8892B0"/>
+                  <a:srgbClr val="5A4A40"/>
                 </a:solidFill>
                 <a:latin typeface="Microsoft YaHei"/>
                 <a:ea typeface="Microsoft YaHei"/>
@@ -4044,7 +4044,7 @@
             <a:r>
               <a:rPr sz="1300" b="1">
                 <a:solidFill>
-                  <a:srgbClr val="64FFDA"/>
+                  <a:srgbClr val="B95C3F"/>
                 </a:solidFill>
                 <a:latin typeface="Microsoft YaHei"/>
                 <a:ea typeface="Microsoft YaHei"/>
@@ -4087,7 +4087,7 @@
             <a:avLst/>
           </a:prstGeom>
           <a:solidFill>
-            <a:srgbClr val="0A192F"/>
+            <a:srgbClr val="F5F0E8"/>
           </a:solidFill>
           <a:ln>
             <a:noFill/>
@@ -4146,9 +4146,9 @@
             <a:r>
               <a:rPr sz="1400" b="1">
                 <a:solidFill>
-                  <a:srgbClr val="64FFDA"/>
-                </a:solidFill>
-                <a:latin typeface="Consolas"/>
+                  <a:srgbClr val="CC785C"/>
+                </a:solidFill>
+                <a:latin typeface="Microsoft YaHei"/>
                 <a:ea typeface="Microsoft YaHei"/>
               </a:rPr>
               <a:t>11</a:t>
@@ -4186,10 +4186,10 @@
             <a:r>
               <a:rPr sz="2300" b="1">
                 <a:solidFill>
-                  <a:srgbClr val="E6F1FF"/>
-                </a:solidFill>
-                <a:latin typeface="Microsoft YaHei"/>
-                <a:ea typeface="Microsoft YaHei"/>
+                  <a:srgbClr val="191919"/>
+                </a:solidFill>
+                <a:latin typeface="SimSun"/>
+                <a:ea typeface="SimSun"/>
               </a:rPr>
               <a:t>  当前 Demo：合成材料的可信闭环</a:t>
             </a:r>
@@ -4211,7 +4211,7 @@
             <a:avLst/>
           </a:prstGeom>
           <a:solidFill>
-            <a:srgbClr val="64FFDA"/>
+            <a:srgbClr val="CC785C"/>
           </a:solidFill>
           <a:ln>
             <a:noFill/>
@@ -4270,9 +4270,9 @@
             <a:r>
               <a:rPr sz="900" b="0">
                 <a:solidFill>
-                  <a:srgbClr val="5A7A9E"/>
-                </a:solidFill>
-                <a:latin typeface="Consolas"/>
+                  <a:srgbClr val="8A7A6F"/>
+                </a:solidFill>
+                <a:latin typeface="Microsoft YaHei"/>
                 <a:ea typeface="Microsoft YaHei"/>
               </a:rPr>
               <a:t>11 / 13</a:t>
@@ -4334,9 +4334,9 @@
             <a:r>
               <a:rPr sz="1100" b="0">
                 <a:solidFill>
-                  <a:srgbClr val="5A7A9E"/>
-                </a:solidFill>
-                <a:latin typeface="Consolas"/>
+                  <a:srgbClr val="8A7A6F"/>
+                </a:solidFill>
+                <a:latin typeface="Microsoft YaHei"/>
                 <a:ea typeface="Microsoft YaHei"/>
               </a:rPr>
               <a:t>材料</a:t>
@@ -4398,9 +4398,9 @@
             <a:r>
               <a:rPr sz="1100" b="0">
                 <a:solidFill>
-                  <a:srgbClr val="5A7A9E"/>
-                </a:solidFill>
-                <a:latin typeface="Consolas"/>
+                  <a:srgbClr val="8A7A6F"/>
+                </a:solidFill>
+                <a:latin typeface="Microsoft YaHei"/>
                 <a:ea typeface="Microsoft YaHei"/>
               </a:rPr>
               <a:t>需求地图确认</a:t>
@@ -4462,9 +4462,9 @@
             <a:r>
               <a:rPr sz="1100" b="0">
                 <a:solidFill>
-                  <a:srgbClr val="5A7A9E"/>
-                </a:solidFill>
-                <a:latin typeface="Consolas"/>
+                  <a:srgbClr val="8A7A6F"/>
+                </a:solidFill>
+                <a:latin typeface="Microsoft YaHei"/>
                 <a:ea typeface="Microsoft YaHei"/>
               </a:rPr>
               <a:t>事实匹配</a:t>
@@ -4502,7 +4502,7 @@
             <a:r>
               <a:rPr sz="1300" b="0">
                 <a:solidFill>
-                  <a:srgbClr val="8892B0"/>
+                  <a:srgbClr val="5A4A40"/>
                 </a:solidFill>
                 <a:latin typeface="Microsoft YaHei"/>
                 <a:ea typeface="Microsoft YaHei"/>
@@ -4545,7 +4545,7 @@
             <a:avLst/>
           </a:prstGeom>
           <a:solidFill>
-            <a:srgbClr val="0A192F"/>
+            <a:srgbClr val="F5F0E8"/>
           </a:solidFill>
           <a:ln>
             <a:noFill/>
@@ -4604,9 +4604,9 @@
             <a:r>
               <a:rPr sz="1400" b="1">
                 <a:solidFill>
-                  <a:srgbClr val="64FFDA"/>
-                </a:solidFill>
-                <a:latin typeface="Consolas"/>
+                  <a:srgbClr val="CC785C"/>
+                </a:solidFill>
+                <a:latin typeface="Microsoft YaHei"/>
                 <a:ea typeface="Microsoft YaHei"/>
               </a:rPr>
               <a:t>12</a:t>
@@ -4644,10 +4644,10 @@
             <a:r>
               <a:rPr sz="2300" b="1">
                 <a:solidFill>
-                  <a:srgbClr val="E6F1FF"/>
-                </a:solidFill>
-                <a:latin typeface="Microsoft YaHei"/>
-                <a:ea typeface="Microsoft YaHei"/>
+                  <a:srgbClr val="191919"/>
+                </a:solidFill>
+                <a:latin typeface="SimSun"/>
+                <a:ea typeface="SimSun"/>
               </a:rPr>
               <a:t>  安全、开放与合规</a:t>
             </a:r>
@@ -4669,7 +4669,7 @@
             <a:avLst/>
           </a:prstGeom>
           <a:solidFill>
-            <a:srgbClr val="64FFDA"/>
+            <a:srgbClr val="CC785C"/>
           </a:solidFill>
           <a:ln>
             <a:noFill/>
@@ -4728,9 +4728,9 @@
             <a:r>
               <a:rPr sz="900" b="0">
                 <a:solidFill>
-                  <a:srgbClr val="5A7A9E"/>
-                </a:solidFill>
-                <a:latin typeface="Consolas"/>
+                  <a:srgbClr val="8A7A6F"/>
+                </a:solidFill>
+                <a:latin typeface="Microsoft YaHei"/>
                 <a:ea typeface="Microsoft YaHei"/>
               </a:rPr>
               <a:t>12 / 13</a:t>
@@ -4755,11 +4755,11 @@
             </a:avLst>
           </a:prstGeom>
           <a:solidFill>
-            <a:srgbClr val="112240"/>
+            <a:srgbClr val="FDFBF7"/>
           </a:solidFill>
           <a:ln w="15240">
             <a:solidFill>
-              <a:srgbClr val="1E3A5F"/>
+              <a:srgbClr val="E8DFD2"/>
             </a:solidFill>
           </a:ln>
           <a:effectLst/>
@@ -4811,10 +4811,10 @@
             <a:r>
               <a:rPr sz="1200" b="1">
                 <a:solidFill>
-                  <a:srgbClr val="E6F1FF"/>
-                </a:solidFill>
-                <a:latin typeface="Microsoft YaHei"/>
-                <a:ea typeface="Microsoft YaHei"/>
+                  <a:srgbClr val="191919"/>
+                </a:solidFill>
+                <a:latin typeface="SimSun"/>
+                <a:ea typeface="SimSun"/>
               </a:rPr>
               <a:t>本地优先</a:t>
             </a:r>
@@ -4828,7 +4828,7 @@
             <a:r>
               <a:rPr sz="1050" b="0">
                 <a:solidFill>
-                  <a:srgbClr val="8892B0"/>
+                  <a:srgbClr val="5A4A40"/>
                 </a:solidFill>
                 <a:latin typeface="Microsoft YaHei"/>
                 <a:ea typeface="Microsoft YaHei"/>
@@ -4855,11 +4855,11 @@
             </a:avLst>
           </a:prstGeom>
           <a:solidFill>
-            <a:srgbClr val="112240"/>
+            <a:srgbClr val="FDFBF7"/>
           </a:solidFill>
           <a:ln w="15240">
             <a:solidFill>
-              <a:srgbClr val="1E3A5F"/>
+              <a:srgbClr val="E8DFD2"/>
             </a:solidFill>
           </a:ln>
           <a:effectLst/>
@@ -4911,10 +4911,10 @@
             <a:r>
               <a:rPr sz="1200" b="1">
                 <a:solidFill>
-                  <a:srgbClr val="E6F1FF"/>
-                </a:solidFill>
-                <a:latin typeface="Microsoft YaHei"/>
-                <a:ea typeface="Microsoft YaHei"/>
+                  <a:srgbClr val="191919"/>
+                </a:solidFill>
+                <a:latin typeface="SimSun"/>
+                <a:ea typeface="SimSun"/>
               </a:rPr>
               <a:t>隐私</a:t>
             </a:r>
@@ -4928,7 +4928,7 @@
             <a:r>
               <a:rPr sz="1050" b="0">
                 <a:solidFill>
-                  <a:srgbClr val="8892B0"/>
+                  <a:srgbClr val="5A4A40"/>
                 </a:solidFill>
                 <a:latin typeface="Microsoft YaHei"/>
                 <a:ea typeface="Microsoft YaHei"/>
@@ -4955,11 +4955,11 @@
             </a:avLst>
           </a:prstGeom>
           <a:solidFill>
-            <a:srgbClr val="112240"/>
+            <a:srgbClr val="FDFBF7"/>
           </a:solidFill>
           <a:ln w="15240">
             <a:solidFill>
-              <a:srgbClr val="1E3A5F"/>
+              <a:srgbClr val="E8DFD2"/>
             </a:solidFill>
           </a:ln>
           <a:effectLst/>
@@ -5011,10 +5011,10 @@
             <a:r>
               <a:rPr sz="1200" b="1">
                 <a:solidFill>
-                  <a:srgbClr val="E6F1FF"/>
-                </a:solidFill>
-                <a:latin typeface="Microsoft YaHei"/>
-                <a:ea typeface="Microsoft YaHei"/>
+                  <a:srgbClr val="191919"/>
+                </a:solidFill>
+                <a:latin typeface="SimSun"/>
+                <a:ea typeface="SimSun"/>
               </a:rPr>
               <a:t>模型服务披露</a:t>
             </a:r>
@@ -5028,7 +5028,7 @@
             <a:r>
               <a:rPr sz="1050" b="0">
                 <a:solidFill>
-                  <a:srgbClr val="8892B0"/>
+                  <a:srgbClr val="5A4A40"/>
                 </a:solidFill>
                 <a:latin typeface="Microsoft YaHei"/>
                 <a:ea typeface="Microsoft YaHei"/>
@@ -5055,11 +5055,11 @@
             </a:avLst>
           </a:prstGeom>
           <a:solidFill>
-            <a:srgbClr val="112240"/>
+            <a:srgbClr val="FDFBF7"/>
           </a:solidFill>
           <a:ln w="15240">
             <a:solidFill>
-              <a:srgbClr val="1E3A5F"/>
+              <a:srgbClr val="E8DFD2"/>
             </a:solidFill>
           </a:ln>
           <a:effectLst/>
@@ -5111,10 +5111,10 @@
             <a:r>
               <a:rPr sz="1200" b="1">
                 <a:solidFill>
-                  <a:srgbClr val="E6F1FF"/>
-                </a:solidFill>
-                <a:latin typeface="Microsoft YaHei"/>
-                <a:ea typeface="Microsoft YaHei"/>
+                  <a:srgbClr val="191919"/>
+                </a:solidFill>
+                <a:latin typeface="SimSun"/>
+                <a:ea typeface="SimSun"/>
               </a:rPr>
               <a:t>开源</a:t>
             </a:r>
@@ -5128,7 +5128,7 @@
             <a:r>
               <a:rPr sz="1050" b="0">
                 <a:solidFill>
-                  <a:srgbClr val="8892B0"/>
+                  <a:srgbClr val="5A4A40"/>
                 </a:solidFill>
                 <a:latin typeface="Microsoft YaHei"/>
                 <a:ea typeface="Microsoft YaHei"/>
@@ -5168,7 +5168,7 @@
             <a:r>
               <a:rPr sz="1200" b="0">
                 <a:solidFill>
-                  <a:srgbClr val="8892B0"/>
+                  <a:srgbClr val="5A4A40"/>
                 </a:solidFill>
                 <a:latin typeface="Microsoft YaHei"/>
                 <a:ea typeface="Microsoft YaHei"/>
@@ -5208,7 +5208,7 @@
             <a:r>
               <a:rPr sz="1200" b="0">
                 <a:solidFill>
-                  <a:srgbClr val="8892B0"/>
+                  <a:srgbClr val="5A4A40"/>
                 </a:solidFill>
                 <a:latin typeface="Microsoft YaHei"/>
                 <a:ea typeface="Microsoft YaHei"/>
@@ -5251,7 +5251,7 @@
             <a:avLst/>
           </a:prstGeom>
           <a:solidFill>
-            <a:srgbClr val="0A192F"/>
+            <a:srgbClr val="F5F0E8"/>
           </a:solidFill>
           <a:ln>
             <a:noFill/>
@@ -5310,9 +5310,9 @@
             <a:r>
               <a:rPr sz="1400" b="1">
                 <a:solidFill>
-                  <a:srgbClr val="64FFDA"/>
-                </a:solidFill>
-                <a:latin typeface="Consolas"/>
+                  <a:srgbClr val="CC785C"/>
+                </a:solidFill>
+                <a:latin typeface="Microsoft YaHei"/>
                 <a:ea typeface="Microsoft YaHei"/>
               </a:rPr>
               <a:t>13</a:t>
@@ -5350,10 +5350,10 @@
             <a:r>
               <a:rPr sz="2300" b="1">
                 <a:solidFill>
-                  <a:srgbClr val="E6F1FF"/>
-                </a:solidFill>
-                <a:latin typeface="Microsoft YaHei"/>
-                <a:ea typeface="Microsoft YaHei"/>
+                  <a:srgbClr val="191919"/>
+                </a:solidFill>
+                <a:latin typeface="SimSun"/>
+                <a:ea typeface="SimSun"/>
               </a:rPr>
               <a:t>  复赛路线：从方案到可运行系统</a:t>
             </a:r>
@@ -5375,7 +5375,7 @@
             <a:avLst/>
           </a:prstGeom>
           <a:solidFill>
-            <a:srgbClr val="64FFDA"/>
+            <a:srgbClr val="CC785C"/>
           </a:solidFill>
           <a:ln>
             <a:noFill/>
@@ -5434,9 +5434,9 @@
             <a:r>
               <a:rPr sz="900" b="0">
                 <a:solidFill>
-                  <a:srgbClr val="5A7A9E"/>
-                </a:solidFill>
-                <a:latin typeface="Consolas"/>
+                  <a:srgbClr val="8A7A6F"/>
+                </a:solidFill>
+                <a:latin typeface="Microsoft YaHei"/>
                 <a:ea typeface="Microsoft YaHei"/>
               </a:rPr>
               <a:t>13 / 13</a:t>
@@ -5461,11 +5461,11 @@
             </a:avLst>
           </a:prstGeom>
           <a:solidFill>
-            <a:srgbClr val="112240"/>
+            <a:srgbClr val="FDFBF7"/>
           </a:solidFill>
           <a:ln w="15240">
             <a:solidFill>
-              <a:srgbClr val="1E3A5F"/>
+              <a:srgbClr val="E8DFD2"/>
             </a:solidFill>
           </a:ln>
           <a:effectLst/>
@@ -5522,9 +5522,9 @@
             <a:r>
               <a:rPr sz="1900" b="1">
                 <a:solidFill>
-                  <a:srgbClr val="64FFDA"/>
-                </a:solidFill>
-                <a:latin typeface="Consolas"/>
+                  <a:srgbClr val="B95C3F"/>
+                </a:solidFill>
+                <a:latin typeface="Microsoft YaHei"/>
                 <a:ea typeface="Microsoft YaHei"/>
               </a:rPr>
               <a:t>01</a:t>
@@ -5562,7 +5562,7 @@
             <a:r>
               <a:rPr sz="1050" b="0">
                 <a:solidFill>
-                  <a:srgbClr val="8892B0"/>
+                  <a:srgbClr val="5A4A40"/>
                 </a:solidFill>
                 <a:latin typeface="Microsoft YaHei"/>
                 <a:ea typeface="Microsoft YaHei"/>
@@ -5579,7 +5579,7 @@
             <a:r>
               <a:rPr sz="1050" b="0">
                 <a:solidFill>
-                  <a:srgbClr val="8892B0"/>
+                  <a:srgbClr val="5A4A40"/>
                 </a:solidFill>
                 <a:latin typeface="Microsoft YaHei"/>
                 <a:ea typeface="Microsoft YaHei"/>
@@ -5606,11 +5606,11 @@
             </a:avLst>
           </a:prstGeom>
           <a:solidFill>
-            <a:srgbClr val="112240"/>
+            <a:srgbClr val="FDFBF7"/>
           </a:solidFill>
           <a:ln w="15240">
             <a:solidFill>
-              <a:srgbClr val="1E3A5F"/>
+              <a:srgbClr val="E8DFD2"/>
             </a:solidFill>
           </a:ln>
           <a:effectLst/>
@@ -5667,9 +5667,9 @@
             <a:r>
               <a:rPr sz="1900" b="1">
                 <a:solidFill>
-                  <a:srgbClr val="64FFDA"/>
-                </a:solidFill>
-                <a:latin typeface="Consolas"/>
+                  <a:srgbClr val="B95C3F"/>
+                </a:solidFill>
+                <a:latin typeface="Microsoft YaHei"/>
                 <a:ea typeface="Microsoft YaHei"/>
               </a:rPr>
               <a:t>02</a:t>
@@ -5707,7 +5707,7 @@
             <a:r>
               <a:rPr sz="1050" b="0">
                 <a:solidFill>
-                  <a:srgbClr val="8892B0"/>
+                  <a:srgbClr val="5A4A40"/>
                 </a:solidFill>
                 <a:latin typeface="Microsoft YaHei"/>
                 <a:ea typeface="Microsoft YaHei"/>
@@ -5724,7 +5724,7 @@
             <a:r>
               <a:rPr sz="1050" b="0">
                 <a:solidFill>
-                  <a:srgbClr val="8892B0"/>
+                  <a:srgbClr val="5A4A40"/>
                 </a:solidFill>
                 <a:latin typeface="Microsoft YaHei"/>
                 <a:ea typeface="Microsoft YaHei"/>
@@ -5751,11 +5751,11 @@
             </a:avLst>
           </a:prstGeom>
           <a:solidFill>
-            <a:srgbClr val="112240"/>
+            <a:srgbClr val="FDFBF7"/>
           </a:solidFill>
           <a:ln w="15240">
             <a:solidFill>
-              <a:srgbClr val="1E3A5F"/>
+              <a:srgbClr val="E8DFD2"/>
             </a:solidFill>
           </a:ln>
           <a:effectLst/>
@@ -5812,9 +5812,9 @@
             <a:r>
               <a:rPr sz="1900" b="1">
                 <a:solidFill>
-                  <a:srgbClr val="64FFDA"/>
-                </a:solidFill>
-                <a:latin typeface="Consolas"/>
+                  <a:srgbClr val="B95C3F"/>
+                </a:solidFill>
+                <a:latin typeface="Microsoft YaHei"/>
                 <a:ea typeface="Microsoft YaHei"/>
               </a:rPr>
               <a:t>03</a:t>
@@ -5852,7 +5852,7 @@
             <a:r>
               <a:rPr sz="1050" b="0">
                 <a:solidFill>
-                  <a:srgbClr val="8892B0"/>
+                  <a:srgbClr val="5A4A40"/>
                 </a:solidFill>
                 <a:latin typeface="Microsoft YaHei"/>
                 <a:ea typeface="Microsoft YaHei"/>
@@ -5869,7 +5869,7 @@
             <a:r>
               <a:rPr sz="1050" b="0">
                 <a:solidFill>
-                  <a:srgbClr val="8892B0"/>
+                  <a:srgbClr val="5A4A40"/>
                 </a:solidFill>
                 <a:latin typeface="Microsoft YaHei"/>
                 <a:ea typeface="Microsoft YaHei"/>
@@ -5896,11 +5896,11 @@
             </a:avLst>
           </a:prstGeom>
           <a:solidFill>
-            <a:srgbClr val="112240"/>
+            <a:srgbClr val="FDFBF7"/>
           </a:solidFill>
           <a:ln w="15240">
             <a:solidFill>
-              <a:srgbClr val="1E3A5F"/>
+              <a:srgbClr val="E8DFD2"/>
             </a:solidFill>
           </a:ln>
           <a:effectLst/>
@@ -5957,9 +5957,9 @@
             <a:r>
               <a:rPr sz="1900" b="1">
                 <a:solidFill>
-                  <a:srgbClr val="64FFDA"/>
-                </a:solidFill>
-                <a:latin typeface="Consolas"/>
+                  <a:srgbClr val="B95C3F"/>
+                </a:solidFill>
+                <a:latin typeface="Microsoft YaHei"/>
                 <a:ea typeface="Microsoft YaHei"/>
               </a:rPr>
               <a:t>04</a:t>
@@ -5997,7 +5997,7 @@
             <a:r>
               <a:rPr sz="1050" b="0">
                 <a:solidFill>
-                  <a:srgbClr val="8892B0"/>
+                  <a:srgbClr val="5A4A40"/>
                 </a:solidFill>
                 <a:latin typeface="Microsoft YaHei"/>
                 <a:ea typeface="Microsoft YaHei"/>
@@ -6014,7 +6014,7 @@
             <a:r>
               <a:rPr sz="1050" b="0">
                 <a:solidFill>
-                  <a:srgbClr val="8892B0"/>
+                  <a:srgbClr val="5A4A40"/>
                 </a:solidFill>
                 <a:latin typeface="Microsoft YaHei"/>
                 <a:ea typeface="Microsoft YaHei"/>
@@ -6041,11 +6041,11 @@
             </a:avLst>
           </a:prstGeom>
           <a:solidFill>
-            <a:srgbClr val="112240"/>
+            <a:srgbClr val="FDFBF7"/>
           </a:solidFill>
           <a:ln w="15240">
             <a:solidFill>
-              <a:srgbClr val="1E3A5F"/>
+              <a:srgbClr val="E8DFD2"/>
             </a:solidFill>
           </a:ln>
           <a:effectLst/>
@@ -6102,9 +6102,9 @@
             <a:r>
               <a:rPr sz="1900" b="1">
                 <a:solidFill>
-                  <a:srgbClr val="64FFDA"/>
-                </a:solidFill>
-                <a:latin typeface="Consolas"/>
+                  <a:srgbClr val="B95C3F"/>
+                </a:solidFill>
+                <a:latin typeface="Microsoft YaHei"/>
                 <a:ea typeface="Microsoft YaHei"/>
               </a:rPr>
               <a:t>05</a:t>
@@ -6142,7 +6142,7 @@
             <a:r>
               <a:rPr sz="1050" b="0">
                 <a:solidFill>
-                  <a:srgbClr val="8892B0"/>
+                  <a:srgbClr val="5A4A40"/>
                 </a:solidFill>
                 <a:latin typeface="Microsoft YaHei"/>
                 <a:ea typeface="Microsoft YaHei"/>
@@ -6159,7 +6159,7 @@
             <a:r>
               <a:rPr sz="1050" b="0">
                 <a:solidFill>
-                  <a:srgbClr val="8892B0"/>
+                  <a:srgbClr val="5A4A40"/>
                 </a:solidFill>
                 <a:latin typeface="Microsoft YaHei"/>
                 <a:ea typeface="Microsoft YaHei"/>
@@ -6199,7 +6199,7 @@
             <a:r>
               <a:rPr sz="1500" b="1">
                 <a:solidFill>
-                  <a:srgbClr val="FFC864"/>
+                  <a:srgbClr val="B95C3F"/>
                 </a:solidFill>
                 <a:latin typeface="Microsoft YaHei"/>
                 <a:ea typeface="Microsoft YaHei"/>
@@ -6242,7 +6242,7 @@
             <a:avLst/>
           </a:prstGeom>
           <a:solidFill>
-            <a:srgbClr val="0A192F"/>
+            <a:srgbClr val="F5F0E8"/>
           </a:solidFill>
           <a:ln>
             <a:noFill/>
@@ -6301,9 +6301,9 @@
             <a:r>
               <a:rPr sz="1400" b="1">
                 <a:solidFill>
-                  <a:srgbClr val="64FFDA"/>
-                </a:solidFill>
-                <a:latin typeface="Consolas"/>
+                  <a:srgbClr val="CC785C"/>
+                </a:solidFill>
+                <a:latin typeface="Microsoft YaHei"/>
                 <a:ea typeface="Microsoft YaHei"/>
               </a:rPr>
               <a:t>02</a:t>
@@ -6341,10 +6341,10 @@
             <a:r>
               <a:rPr sz="2300" b="1">
                 <a:solidFill>
-                  <a:srgbClr val="E6F1FF"/>
-                </a:solidFill>
-                <a:latin typeface="Microsoft YaHei"/>
-                <a:ea typeface="Microsoft YaHei"/>
+                  <a:srgbClr val="191919"/>
+                </a:solidFill>
+                <a:latin typeface="SimSun"/>
+                <a:ea typeface="SimSun"/>
               </a:rPr>
               <a:t>  场景：可信求职决策是普遍且真实的问题</a:t>
             </a:r>
@@ -6366,7 +6366,7 @@
             <a:avLst/>
           </a:prstGeom>
           <a:solidFill>
-            <a:srgbClr val="64FFDA"/>
+            <a:srgbClr val="CC785C"/>
           </a:solidFill>
           <a:ln>
             <a:noFill/>
@@ -6425,9 +6425,9 @@
             <a:r>
               <a:rPr sz="900" b="0">
                 <a:solidFill>
-                  <a:srgbClr val="5A7A9E"/>
-                </a:solidFill>
-                <a:latin typeface="Consolas"/>
+                  <a:srgbClr val="8A7A6F"/>
+                </a:solidFill>
+                <a:latin typeface="Microsoft YaHei"/>
                 <a:ea typeface="Microsoft YaHei"/>
               </a:rPr>
               <a:t>02 / 13</a:t>
@@ -6452,11 +6452,11 @@
             </a:avLst>
           </a:prstGeom>
           <a:solidFill>
-            <a:srgbClr val="112240"/>
+            <a:srgbClr val="FDFBF7"/>
           </a:solidFill>
           <a:ln w="15240">
             <a:solidFill>
-              <a:srgbClr val="1E3A5F"/>
+              <a:srgbClr val="E8DFD2"/>
             </a:solidFill>
           </a:ln>
           <a:effectLst/>
@@ -6508,10 +6508,10 @@
             <a:r>
               <a:rPr sz="1200" b="1">
                 <a:solidFill>
-                  <a:srgbClr val="E6F1FF"/>
-                </a:solidFill>
-                <a:latin typeface="Microsoft YaHei"/>
-                <a:ea typeface="Microsoft YaHei"/>
+                  <a:srgbClr val="191919"/>
+                </a:solidFill>
+                <a:latin typeface="SimSun"/>
+                <a:ea typeface="SimSun"/>
               </a:rPr>
               <a:t>核心问题</a:t>
             </a:r>
@@ -6525,7 +6525,7 @@
             <a:r>
               <a:rPr sz="1050" b="0">
                 <a:solidFill>
-                  <a:srgbClr val="8892B0"/>
+                  <a:srgbClr val="5A4A40"/>
                 </a:solidFill>
                 <a:latin typeface="Microsoft YaHei"/>
                 <a:ea typeface="Microsoft YaHei"/>
@@ -6552,11 +6552,11 @@
             </a:avLst>
           </a:prstGeom>
           <a:solidFill>
-            <a:srgbClr val="112240"/>
+            <a:srgbClr val="FDFBF7"/>
           </a:solidFill>
           <a:ln w="15240">
             <a:solidFill>
-              <a:srgbClr val="1E3A5F"/>
+              <a:srgbClr val="E8DFD2"/>
             </a:solidFill>
           </a:ln>
           <a:effectLst/>
@@ -6608,10 +6608,10 @@
             <a:r>
               <a:rPr sz="1200" b="1">
                 <a:solidFill>
-                  <a:srgbClr val="E6F1FF"/>
-                </a:solidFill>
-                <a:latin typeface="Microsoft YaHei"/>
-                <a:ea typeface="Microsoft YaHei"/>
+                  <a:srgbClr val="191919"/>
+                </a:solidFill>
+                <a:latin typeface="SimSun"/>
+                <a:ea typeface="SimSun"/>
               </a:rPr>
               <a:t>目标用户</a:t>
             </a:r>
@@ -6625,7 +6625,7 @@
             <a:r>
               <a:rPr sz="1050" b="0">
                 <a:solidFill>
-                  <a:srgbClr val="8892B0"/>
+                  <a:srgbClr val="5A4A40"/>
                 </a:solidFill>
                 <a:latin typeface="Microsoft YaHei"/>
                 <a:ea typeface="Microsoft YaHei"/>
@@ -6652,11 +6652,11 @@
             </a:avLst>
           </a:prstGeom>
           <a:solidFill>
-            <a:srgbClr val="112240"/>
+            <a:srgbClr val="FDFBF7"/>
           </a:solidFill>
           <a:ln w="15240">
             <a:solidFill>
-              <a:srgbClr val="1E3A5F"/>
+              <a:srgbClr val="E8DFD2"/>
             </a:solidFill>
           </a:ln>
           <a:effectLst/>
@@ -6708,10 +6708,10 @@
             <a:r>
               <a:rPr sz="1200" b="1">
                 <a:solidFill>
-                  <a:srgbClr val="E6F1FF"/>
-                </a:solidFill>
-                <a:latin typeface="Microsoft YaHei"/>
-                <a:ea typeface="Microsoft YaHei"/>
+                  <a:srgbClr val="191919"/>
+                </a:solidFill>
+                <a:latin typeface="SimSun"/>
+                <a:ea typeface="SimSun"/>
               </a:rPr>
               <a:t>输入</a:t>
             </a:r>
@@ -6725,7 +6725,7 @@
             <a:r>
               <a:rPr sz="1050" b="0">
                 <a:solidFill>
-                  <a:srgbClr val="8892B0"/>
+                  <a:srgbClr val="5A4A40"/>
                 </a:solidFill>
                 <a:latin typeface="Microsoft YaHei"/>
                 <a:ea typeface="Microsoft YaHei"/>
@@ -6752,11 +6752,11 @@
             </a:avLst>
           </a:prstGeom>
           <a:solidFill>
-            <a:srgbClr val="112240"/>
+            <a:srgbClr val="FDFBF7"/>
           </a:solidFill>
           <a:ln w="15240">
             <a:solidFill>
-              <a:srgbClr val="1E3A5F"/>
+              <a:srgbClr val="E8DFD2"/>
             </a:solidFill>
           </a:ln>
           <a:effectLst/>
@@ -6808,10 +6808,10 @@
             <a:r>
               <a:rPr sz="1200" b="1">
                 <a:solidFill>
-                  <a:srgbClr val="E6F1FF"/>
-                </a:solidFill>
-                <a:latin typeface="Microsoft YaHei"/>
-                <a:ea typeface="Microsoft YaHei"/>
+                  <a:srgbClr val="191919"/>
+                </a:solidFill>
+                <a:latin typeface="SimSun"/>
+                <a:ea typeface="SimSun"/>
               </a:rPr>
               <a:t>输出</a:t>
             </a:r>
@@ -6825,7 +6825,7 @@
             <a:r>
               <a:rPr sz="1050" b="0">
                 <a:solidFill>
-                  <a:srgbClr val="8892B0"/>
+                  <a:srgbClr val="5A4A40"/>
                 </a:solidFill>
                 <a:latin typeface="Microsoft YaHei"/>
                 <a:ea typeface="Microsoft YaHei"/>
@@ -6865,7 +6865,7 @@
             <a:r>
               <a:rPr sz="1300" b="1">
                 <a:solidFill>
-                  <a:srgbClr val="64FFDA"/>
+                  <a:srgbClr val="B95C3F"/>
                 </a:solidFill>
                 <a:latin typeface="Microsoft YaHei"/>
                 <a:ea typeface="Microsoft YaHei"/>
@@ -6905,7 +6905,7 @@
             <a:r>
               <a:rPr sz="1300" b="1">
                 <a:solidFill>
-                  <a:srgbClr val="64FFDA"/>
+                  <a:srgbClr val="B95C3F"/>
                 </a:solidFill>
                 <a:latin typeface="Microsoft YaHei"/>
                 <a:ea typeface="Microsoft YaHei"/>
@@ -6948,7 +6948,7 @@
             <a:avLst/>
           </a:prstGeom>
           <a:solidFill>
-            <a:srgbClr val="0A192F"/>
+            <a:srgbClr val="F5F0E8"/>
           </a:solidFill>
           <a:ln>
             <a:noFill/>
@@ -7007,9 +7007,9 @@
             <a:r>
               <a:rPr sz="1400" b="1">
                 <a:solidFill>
-                  <a:srgbClr val="64FFDA"/>
-                </a:solidFill>
-                <a:latin typeface="Consolas"/>
+                  <a:srgbClr val="CC785C"/>
+                </a:solidFill>
+                <a:latin typeface="Microsoft YaHei"/>
                 <a:ea typeface="Microsoft YaHei"/>
               </a:rPr>
               <a:t>03</a:t>
@@ -7047,10 +7047,10 @@
             <a:r>
               <a:rPr sz="2300" b="1">
                 <a:solidFill>
-                  <a:srgbClr val="E6F1FF"/>
-                </a:solidFill>
-                <a:latin typeface="Microsoft YaHei"/>
-                <a:ea typeface="Microsoft YaHei"/>
+                  <a:srgbClr val="191919"/>
+                </a:solidFill>
+                <a:latin typeface="SimSun"/>
+                <a:ea typeface="SimSun"/>
               </a:rPr>
               <a:t>  痛点：四个高频失真的来源</a:t>
             </a:r>
@@ -7072,7 +7072,7 @@
             <a:avLst/>
           </a:prstGeom>
           <a:solidFill>
-            <a:srgbClr val="64FFDA"/>
+            <a:srgbClr val="CC785C"/>
           </a:solidFill>
           <a:ln>
             <a:noFill/>
@@ -7131,9 +7131,9 @@
             <a:r>
               <a:rPr sz="900" b="0">
                 <a:solidFill>
-                  <a:srgbClr val="5A7A9E"/>
-                </a:solidFill>
-                <a:latin typeface="Consolas"/>
+                  <a:srgbClr val="8A7A6F"/>
+                </a:solidFill>
+                <a:latin typeface="Microsoft YaHei"/>
                 <a:ea typeface="Microsoft YaHei"/>
               </a:rPr>
               <a:t>03 / 13</a:t>
@@ -7158,11 +7158,11 @@
             </a:avLst>
           </a:prstGeom>
           <a:solidFill>
-            <a:srgbClr val="112240"/>
+            <a:srgbClr val="FDFBF7"/>
           </a:solidFill>
           <a:ln w="15240">
             <a:solidFill>
-              <a:srgbClr val="1E3A5F"/>
+              <a:srgbClr val="E8DFD2"/>
             </a:solidFill>
           </a:ln>
           <a:effectLst/>
@@ -7214,10 +7214,10 @@
             <a:r>
               <a:rPr sz="1200" b="1">
                 <a:solidFill>
-                  <a:srgbClr val="E6F1FF"/>
-                </a:solidFill>
-                <a:latin typeface="Microsoft YaHei"/>
-                <a:ea typeface="Microsoft YaHei"/>
+                  <a:srgbClr val="191919"/>
+                </a:solidFill>
+                <a:latin typeface="SimSun"/>
+                <a:ea typeface="SimSun"/>
               </a:rPr>
               <a:t>JD 误读</a:t>
             </a:r>
@@ -7231,7 +7231,7 @@
             <a:r>
               <a:rPr sz="1050" b="0">
                 <a:solidFill>
-                  <a:srgbClr val="8892B0"/>
+                  <a:srgbClr val="5A4A40"/>
                 </a:solidFill>
                 <a:latin typeface="Microsoft YaHei"/>
                 <a:ea typeface="Microsoft YaHei"/>
@@ -7258,11 +7258,11 @@
             </a:avLst>
           </a:prstGeom>
           <a:solidFill>
-            <a:srgbClr val="112240"/>
+            <a:srgbClr val="FDFBF7"/>
           </a:solidFill>
           <a:ln w="15240">
             <a:solidFill>
-              <a:srgbClr val="1E3A5F"/>
+              <a:srgbClr val="E8DFD2"/>
             </a:solidFill>
           </a:ln>
           <a:effectLst/>
@@ -7314,10 +7314,10 @@
             <a:r>
               <a:rPr sz="1200" b="1">
                 <a:solidFill>
-                  <a:srgbClr val="E6F1FF"/>
-                </a:solidFill>
-                <a:latin typeface="Microsoft YaHei"/>
-                <a:ea typeface="Microsoft YaHei"/>
+                  <a:srgbClr val="191919"/>
+                </a:solidFill>
+                <a:latin typeface="SimSun"/>
+                <a:ea typeface="SimSun"/>
               </a:rPr>
               <a:t>经历虚构</a:t>
             </a:r>
@@ -7331,7 +7331,7 @@
             <a:r>
               <a:rPr sz="1050" b="0">
                 <a:solidFill>
-                  <a:srgbClr val="8892B0"/>
+                  <a:srgbClr val="5A4A40"/>
                 </a:solidFill>
                 <a:latin typeface="Microsoft YaHei"/>
                 <a:ea typeface="Microsoft YaHei"/>
@@ -7358,11 +7358,11 @@
             </a:avLst>
           </a:prstGeom>
           <a:solidFill>
-            <a:srgbClr val="112240"/>
+            <a:srgbClr val="FDFBF7"/>
           </a:solidFill>
           <a:ln w="15240">
             <a:solidFill>
-              <a:srgbClr val="1E3A5F"/>
+              <a:srgbClr val="E8DFD2"/>
             </a:solidFill>
           </a:ln>
           <a:effectLst/>
@@ -7414,10 +7414,10 @@
             <a:r>
               <a:rPr sz="1200" b="1">
                 <a:solidFill>
-                  <a:srgbClr val="E6F1FF"/>
-                </a:solidFill>
-                <a:latin typeface="Microsoft YaHei"/>
-                <a:ea typeface="Microsoft YaHei"/>
+                  <a:srgbClr val="191919"/>
+                </a:solidFill>
+                <a:latin typeface="SimSun"/>
+                <a:ea typeface="SimSun"/>
               </a:rPr>
               <a:t>版本混乱</a:t>
             </a:r>
@@ -7431,7 +7431,7 @@
             <a:r>
               <a:rPr sz="1050" b="0">
                 <a:solidFill>
-                  <a:srgbClr val="8892B0"/>
+                  <a:srgbClr val="5A4A40"/>
                 </a:solidFill>
                 <a:latin typeface="Microsoft YaHei"/>
                 <a:ea typeface="Microsoft YaHei"/>
@@ -7458,11 +7458,11 @@
             </a:avLst>
           </a:prstGeom>
           <a:solidFill>
-            <a:srgbClr val="112240"/>
+            <a:srgbClr val="FDFBF7"/>
           </a:solidFill>
           <a:ln w="15240">
             <a:solidFill>
-              <a:srgbClr val="1E3A5F"/>
+              <a:srgbClr val="E8DFD2"/>
             </a:solidFill>
           </a:ln>
           <a:effectLst/>
@@ -7514,10 +7514,10 @@
             <a:r>
               <a:rPr sz="1200" b="1">
                 <a:solidFill>
-                  <a:srgbClr val="E6F1FF"/>
-                </a:solidFill>
-                <a:latin typeface="Microsoft YaHei"/>
-                <a:ea typeface="Microsoft YaHei"/>
+                  <a:srgbClr val="191919"/>
+                </a:solidFill>
+                <a:latin typeface="SimSun"/>
+                <a:ea typeface="SimSun"/>
               </a:rPr>
               <a:t>结果不可审计</a:t>
             </a:r>
@@ -7531,7 +7531,7 @@
             <a:r>
               <a:rPr sz="1050" b="0">
                 <a:solidFill>
-                  <a:srgbClr val="8892B0"/>
+                  <a:srgbClr val="5A4A40"/>
                 </a:solidFill>
                 <a:latin typeface="Microsoft YaHei"/>
                 <a:ea typeface="Microsoft YaHei"/>
@@ -7574,7 +7574,7 @@
             <a:avLst/>
           </a:prstGeom>
           <a:solidFill>
-            <a:srgbClr val="0A192F"/>
+            <a:srgbClr val="F5F0E8"/>
           </a:solidFill>
           <a:ln>
             <a:noFill/>
@@ -7633,9 +7633,9 @@
             <a:r>
               <a:rPr sz="1400" b="1">
                 <a:solidFill>
-                  <a:srgbClr val="64FFDA"/>
-                </a:solidFill>
-                <a:latin typeface="Consolas"/>
+                  <a:srgbClr val="CC785C"/>
+                </a:solidFill>
+                <a:latin typeface="Microsoft YaHei"/>
                 <a:ea typeface="Microsoft YaHei"/>
               </a:rPr>
               <a:t>04</a:t>
@@ -7673,10 +7673,10 @@
             <a:r>
               <a:rPr sz="2300" b="1">
                 <a:solidFill>
-                  <a:srgbClr val="E6F1FF"/>
-                </a:solidFill>
-                <a:latin typeface="Microsoft YaHei"/>
-                <a:ea typeface="Microsoft YaHei"/>
+                  <a:srgbClr val="191919"/>
+                </a:solidFill>
+                <a:latin typeface="SimSun"/>
+                <a:ea typeface="SimSun"/>
               </a:rPr>
               <a:t>  方案总览：从材料到交付的可信闭环</a:t>
             </a:r>
@@ -7698,7 +7698,7 @@
             <a:avLst/>
           </a:prstGeom>
           <a:solidFill>
-            <a:srgbClr val="64FFDA"/>
+            <a:srgbClr val="CC785C"/>
           </a:solidFill>
           <a:ln>
             <a:noFill/>
@@ -7757,9 +7757,9 @@
             <a:r>
               <a:rPr sz="900" b="0">
                 <a:solidFill>
-                  <a:srgbClr val="5A7A9E"/>
-                </a:solidFill>
-                <a:latin typeface="Consolas"/>
+                  <a:srgbClr val="8A7A6F"/>
+                </a:solidFill>
+                <a:latin typeface="Microsoft YaHei"/>
                 <a:ea typeface="Microsoft YaHei"/>
               </a:rPr>
               <a:t>04 / 13</a:t>
@@ -7784,11 +7784,11 @@
             </a:avLst>
           </a:prstGeom>
           <a:solidFill>
-            <a:srgbClr val="112240"/>
+            <a:srgbClr val="FDFBF7"/>
           </a:solidFill>
           <a:ln w="15240">
             <a:solidFill>
-              <a:srgbClr val="3F6FCC"/>
+              <a:srgbClr val="D9BFA6"/>
             </a:solidFill>
           </a:ln>
           <a:effectLst/>
@@ -7815,7 +7815,7 @@
             <a:r>
               <a:rPr sz="1150" b="1">
                 <a:solidFill>
-                  <a:srgbClr val="E6F1FF"/>
+                  <a:srgbClr val="191919"/>
                 </a:solidFill>
                 <a:latin typeface="Microsoft YaHei"/>
                 <a:ea typeface="Microsoft YaHei"/>
@@ -7828,7 +7828,7 @@
             <a:r>
               <a:rPr sz="800" b="0">
                 <a:solidFill>
-                  <a:srgbClr val="5A7A9E"/>
+                  <a:srgbClr val="8A7A6F"/>
                 </a:solidFill>
                 <a:latin typeface="Microsoft YaHei"/>
                 <a:ea typeface="Microsoft YaHei"/>
@@ -7868,7 +7868,7 @@
             <a:r>
               <a:rPr sz="1500" b="1">
                 <a:solidFill>
-                  <a:srgbClr val="64FFDA"/>
+                  <a:srgbClr val="CC785C"/>
                 </a:solidFill>
                 <a:latin typeface="Microsoft YaHei"/>
                 <a:ea typeface="Microsoft YaHei"/>
@@ -7895,11 +7895,11 @@
             </a:avLst>
           </a:prstGeom>
           <a:solidFill>
-            <a:srgbClr val="112240"/>
+            <a:srgbClr val="FDFBF7"/>
           </a:solidFill>
           <a:ln w="15240">
             <a:solidFill>
-              <a:srgbClr val="3F6FCC"/>
+              <a:srgbClr val="D9BFA6"/>
             </a:solidFill>
           </a:ln>
           <a:effectLst/>
@@ -7926,7 +7926,7 @@
             <a:r>
               <a:rPr sz="1150" b="1">
                 <a:solidFill>
-                  <a:srgbClr val="E6F1FF"/>
+                  <a:srgbClr val="191919"/>
                 </a:solidFill>
                 <a:latin typeface="Microsoft YaHei"/>
                 <a:ea typeface="Microsoft YaHei"/>
@@ -7939,7 +7939,7 @@
             <a:r>
               <a:rPr sz="800" b="0">
                 <a:solidFill>
-                  <a:srgbClr val="5A7A9E"/>
+                  <a:srgbClr val="8A7A6F"/>
                 </a:solidFill>
                 <a:latin typeface="Microsoft YaHei"/>
                 <a:ea typeface="Microsoft YaHei"/>
@@ -7979,7 +7979,7 @@
             <a:r>
               <a:rPr sz="1500" b="1">
                 <a:solidFill>
-                  <a:srgbClr val="64FFDA"/>
+                  <a:srgbClr val="CC785C"/>
                 </a:solidFill>
                 <a:latin typeface="Microsoft YaHei"/>
                 <a:ea typeface="Microsoft YaHei"/>
@@ -8006,11 +8006,11 @@
             </a:avLst>
           </a:prstGeom>
           <a:solidFill>
-            <a:srgbClr val="112240"/>
+            <a:srgbClr val="FDFBF7"/>
           </a:solidFill>
           <a:ln w="15240">
             <a:solidFill>
-              <a:srgbClr val="3F6FCC"/>
+              <a:srgbClr val="D9BFA6"/>
             </a:solidFill>
           </a:ln>
           <a:effectLst/>
@@ -8037,7 +8037,7 @@
             <a:r>
               <a:rPr sz="1150" b="1">
                 <a:solidFill>
-                  <a:srgbClr val="E6F1FF"/>
+                  <a:srgbClr val="191919"/>
                 </a:solidFill>
                 <a:latin typeface="Microsoft YaHei"/>
                 <a:ea typeface="Microsoft YaHei"/>
@@ -8050,7 +8050,7 @@
             <a:r>
               <a:rPr sz="800" b="0">
                 <a:solidFill>
-                  <a:srgbClr val="5A7A9E"/>
+                  <a:srgbClr val="8A7A6F"/>
                 </a:solidFill>
                 <a:latin typeface="Microsoft YaHei"/>
                 <a:ea typeface="Microsoft YaHei"/>
@@ -8090,7 +8090,7 @@
             <a:r>
               <a:rPr sz="1500" b="1">
                 <a:solidFill>
-                  <a:srgbClr val="64FFDA"/>
+                  <a:srgbClr val="CC785C"/>
                 </a:solidFill>
                 <a:latin typeface="Microsoft YaHei"/>
                 <a:ea typeface="Microsoft YaHei"/>
@@ -8117,11 +8117,11 @@
             </a:avLst>
           </a:prstGeom>
           <a:solidFill>
-            <a:srgbClr val="112240"/>
+            <a:srgbClr val="FDFBF7"/>
           </a:solidFill>
           <a:ln w="15240">
             <a:solidFill>
-              <a:srgbClr val="3F6FCC"/>
+              <a:srgbClr val="D9BFA6"/>
             </a:solidFill>
           </a:ln>
           <a:effectLst/>
@@ -8148,7 +8148,7 @@
             <a:r>
               <a:rPr sz="1150" b="1">
                 <a:solidFill>
-                  <a:srgbClr val="E6F1FF"/>
+                  <a:srgbClr val="191919"/>
                 </a:solidFill>
                 <a:latin typeface="Microsoft YaHei"/>
                 <a:ea typeface="Microsoft YaHei"/>
@@ -8161,7 +8161,7 @@
             <a:r>
               <a:rPr sz="800" b="0">
                 <a:solidFill>
-                  <a:srgbClr val="5A7A9E"/>
+                  <a:srgbClr val="8A7A6F"/>
                 </a:solidFill>
                 <a:latin typeface="Microsoft YaHei"/>
                 <a:ea typeface="Microsoft YaHei"/>
@@ -8201,7 +8201,7 @@
             <a:r>
               <a:rPr sz="1400" b="1">
                 <a:solidFill>
-                  <a:srgbClr val="FFC864"/>
+                  <a:srgbClr val="B95C3F"/>
                 </a:solidFill>
                 <a:latin typeface="Microsoft YaHei"/>
                 <a:ea typeface="Microsoft YaHei"/>
@@ -8241,12 +8241,12 @@
             <a:r>
               <a:rPr sz="1300" b="0">
                 <a:solidFill>
-                  <a:srgbClr val="8892B0"/>
-                </a:solidFill>
-                <a:latin typeface="Microsoft YaHei"/>
-                <a:ea typeface="Microsoft YaHei"/>
-              </a:rPr>
-              <a:t>●  事实库带原文引用与确认状态，全程可追溯</a:t>
+                  <a:srgbClr val="5A4A40"/>
+                </a:solidFill>
+                <a:latin typeface="Microsoft YaHei"/>
+                <a:ea typeface="Microsoft YaHei"/>
+              </a:rPr>
+              <a:t>—  事实库带原文引用与确认状态，全程可追溯</a:t>
             </a:r>
           </a:p>
         </p:txBody>
@@ -8281,12 +8281,12 @@
             <a:r>
               <a:rPr sz="1300" b="0">
                 <a:solidFill>
-                  <a:srgbClr val="8892B0"/>
-                </a:solidFill>
-                <a:latin typeface="Microsoft YaHei"/>
-                <a:ea typeface="Microsoft YaHei"/>
-              </a:rPr>
-              <a:t>●  面试策略为辅助流程，不阻塞简历交付</a:t>
+                  <a:srgbClr val="5A4A40"/>
+                </a:solidFill>
+                <a:latin typeface="Microsoft YaHei"/>
+                <a:ea typeface="Microsoft YaHei"/>
+              </a:rPr>
+              <a:t>—  面试策略为辅助流程，不阻塞简历交付</a:t>
             </a:r>
           </a:p>
         </p:txBody>
@@ -8324,7 +8324,7 @@
             <a:avLst/>
           </a:prstGeom>
           <a:solidFill>
-            <a:srgbClr val="0A192F"/>
+            <a:srgbClr val="F5F0E8"/>
           </a:solidFill>
           <a:ln>
             <a:noFill/>
@@ -8383,9 +8383,9 @@
             <a:r>
               <a:rPr sz="1400" b="1">
                 <a:solidFill>
-                  <a:srgbClr val="64FFDA"/>
-                </a:solidFill>
-                <a:latin typeface="Consolas"/>
+                  <a:srgbClr val="CC785C"/>
+                </a:solidFill>
+                <a:latin typeface="Microsoft YaHei"/>
                 <a:ea typeface="Microsoft YaHei"/>
               </a:rPr>
               <a:t>05</a:t>
@@ -8423,10 +8423,10 @@
             <a:r>
               <a:rPr sz="2300" b="1">
                 <a:solidFill>
-                  <a:srgbClr val="E6F1FF"/>
-                </a:solidFill>
-                <a:latin typeface="Microsoft YaHei"/>
-                <a:ea typeface="Microsoft YaHei"/>
+                  <a:srgbClr val="191919"/>
+                </a:solidFill>
+                <a:latin typeface="SimSun"/>
+                <a:ea typeface="SimSun"/>
               </a:rPr>
               <a:t>  AgentTeams 架构：分层 + 主控路由</a:t>
             </a:r>
@@ -8448,7 +8448,7 @@
             <a:avLst/>
           </a:prstGeom>
           <a:solidFill>
-            <a:srgbClr val="64FFDA"/>
+            <a:srgbClr val="CC785C"/>
           </a:solidFill>
           <a:ln>
             <a:noFill/>
@@ -8507,9 +8507,9 @@
             <a:r>
               <a:rPr sz="900" b="0">
                 <a:solidFill>
-                  <a:srgbClr val="5A7A9E"/>
-                </a:solidFill>
-                <a:latin typeface="Consolas"/>
+                  <a:srgbClr val="8A7A6F"/>
+                </a:solidFill>
+                <a:latin typeface="Microsoft YaHei"/>
                 <a:ea typeface="Microsoft YaHei"/>
               </a:rPr>
               <a:t>05 / 13</a:t>
@@ -8534,7 +8534,7 @@
             </a:avLst>
           </a:prstGeom>
           <a:solidFill>
-            <a:srgbClr val="1F3A6B"/>
+            <a:srgbClr val="F0DFD3"/>
           </a:solidFill>
           <a:ln>
             <a:noFill/>
@@ -8563,17 +8563,17 @@
             <a:r>
               <a:rPr sz="1250" b="1">
                 <a:solidFill>
-                  <a:srgbClr val="E6F1FF"/>
-                </a:solidFill>
-                <a:latin typeface="Microsoft YaHei"/>
-                <a:ea typeface="Microsoft YaHei"/>
+                  <a:srgbClr val="191919"/>
+                </a:solidFill>
+                <a:latin typeface="SimSun"/>
+                <a:ea typeface="SimSun"/>
               </a:rPr>
               <a:t>入口层  </a:t>
             </a:r>
             <a:r>
               <a:rPr sz="1000" b="0">
                 <a:solidFill>
-                  <a:srgbClr val="A8B2D1"/>
+                  <a:srgbClr val="5A4A40"/>
                 </a:solidFill>
                 <a:latin typeface="Microsoft YaHei"/>
                 <a:ea typeface="Microsoft YaHei"/>
@@ -8600,7 +8600,7 @@
             </a:avLst>
           </a:prstGeom>
           <a:solidFill>
-            <a:srgbClr val="1C4A5E"/>
+            <a:srgbClr val="F0E7DC"/>
           </a:solidFill>
           <a:ln>
             <a:noFill/>
@@ -8629,17 +8629,17 @@
             <a:r>
               <a:rPr sz="1250" b="1">
                 <a:solidFill>
-                  <a:srgbClr val="E6F1FF"/>
-                </a:solidFill>
-                <a:latin typeface="Microsoft YaHei"/>
-                <a:ea typeface="Microsoft YaHei"/>
+                  <a:srgbClr val="191919"/>
+                </a:solidFill>
+                <a:latin typeface="SimSun"/>
+                <a:ea typeface="SimSun"/>
               </a:rPr>
               <a:t>AgentTeams 编排层  </a:t>
             </a:r>
             <a:r>
               <a:rPr sz="1000" b="0">
                 <a:solidFill>
-                  <a:srgbClr val="A8B2D1"/>
+                  <a:srgbClr val="5A4A40"/>
                 </a:solidFill>
                 <a:latin typeface="Microsoft YaHei"/>
                 <a:ea typeface="Microsoft YaHei"/>
@@ -8666,7 +8666,7 @@
             </a:avLst>
           </a:prstGeom>
           <a:solidFill>
-            <a:srgbClr val="3A2E6B"/>
+            <a:srgbClr val="EBE3F0"/>
           </a:solidFill>
           <a:ln>
             <a:noFill/>
@@ -8695,17 +8695,17 @@
             <a:r>
               <a:rPr sz="1250" b="1">
                 <a:solidFill>
-                  <a:srgbClr val="E6F1FF"/>
-                </a:solidFill>
-                <a:latin typeface="Microsoft YaHei"/>
-                <a:ea typeface="Microsoft YaHei"/>
+                  <a:srgbClr val="191919"/>
+                </a:solidFill>
+                <a:latin typeface="SimSun"/>
+                <a:ea typeface="SimSun"/>
               </a:rPr>
               <a:t>多 Agent 层  </a:t>
             </a:r>
             <a:r>
               <a:rPr sz="1000" b="0">
                 <a:solidFill>
-                  <a:srgbClr val="A8B2D1"/>
+                  <a:srgbClr val="5A4A40"/>
                 </a:solidFill>
                 <a:latin typeface="Microsoft YaHei"/>
                 <a:ea typeface="Microsoft YaHei"/>
@@ -8732,7 +8732,7 @@
             </a:avLst>
           </a:prstGeom>
           <a:solidFill>
-            <a:srgbClr val="164E4A"/>
+            <a:srgbClr val="E7EFE6"/>
           </a:solidFill>
           <a:ln>
             <a:noFill/>
@@ -8761,17 +8761,17 @@
             <a:r>
               <a:rPr sz="1250" b="1">
                 <a:solidFill>
-                  <a:srgbClr val="E6F1FF"/>
-                </a:solidFill>
-                <a:latin typeface="Microsoft YaHei"/>
-                <a:ea typeface="Microsoft YaHei"/>
+                  <a:srgbClr val="191919"/>
+                </a:solidFill>
+                <a:latin typeface="SimSun"/>
+                <a:ea typeface="SimSun"/>
               </a:rPr>
               <a:t>Skill 能力层  </a:t>
             </a:r>
             <a:r>
               <a:rPr sz="1000" b="0">
                 <a:solidFill>
-                  <a:srgbClr val="A8B2D1"/>
+                  <a:srgbClr val="5A4A40"/>
                 </a:solidFill>
                 <a:latin typeface="Microsoft YaHei"/>
                 <a:ea typeface="Microsoft YaHei"/>
@@ -8798,7 +8798,7 @@
             </a:avLst>
           </a:prstGeom>
           <a:solidFill>
-            <a:srgbClr val="2A3550"/>
+            <a:srgbClr val="F0EDE8"/>
           </a:solidFill>
           <a:ln>
             <a:noFill/>
@@ -8827,17 +8827,17 @@
             <a:r>
               <a:rPr sz="1250" b="1">
                 <a:solidFill>
-                  <a:srgbClr val="E6F1FF"/>
-                </a:solidFill>
-                <a:latin typeface="Microsoft YaHei"/>
-                <a:ea typeface="Microsoft YaHei"/>
+                  <a:srgbClr val="191919"/>
+                </a:solidFill>
+                <a:latin typeface="SimSun"/>
+                <a:ea typeface="SimSun"/>
               </a:rPr>
               <a:t>连接器契约层  </a:t>
             </a:r>
             <a:r>
               <a:rPr sz="1000" b="0">
                 <a:solidFill>
-                  <a:srgbClr val="A8B2D1"/>
+                  <a:srgbClr val="5A4A40"/>
                 </a:solidFill>
                 <a:latin typeface="Microsoft YaHei"/>
                 <a:ea typeface="Microsoft YaHei"/>
@@ -8864,7 +8864,7 @@
             </a:avLst>
           </a:prstGeom>
           <a:solidFill>
-            <a:srgbClr val="20293D"/>
+            <a:srgbClr val="EAE6E0"/>
           </a:solidFill>
           <a:ln>
             <a:noFill/>
@@ -8893,17 +8893,17 @@
             <a:r>
               <a:rPr sz="1250" b="1">
                 <a:solidFill>
-                  <a:srgbClr val="E6F1FF"/>
-                </a:solidFill>
-                <a:latin typeface="Microsoft YaHei"/>
-                <a:ea typeface="Microsoft YaHei"/>
+                  <a:srgbClr val="191919"/>
+                </a:solidFill>
+                <a:latin typeface="SimSun"/>
+                <a:ea typeface="SimSun"/>
               </a:rPr>
               <a:t>证据治理层  </a:t>
             </a:r>
             <a:r>
               <a:rPr sz="1000" b="0">
                 <a:solidFill>
-                  <a:srgbClr val="A8B2D1"/>
+                  <a:srgbClr val="5A4A40"/>
                 </a:solidFill>
                 <a:latin typeface="Microsoft YaHei"/>
                 <a:ea typeface="Microsoft YaHei"/>
@@ -8946,7 +8946,7 @@
             <a:avLst/>
           </a:prstGeom>
           <a:solidFill>
-            <a:srgbClr val="0A192F"/>
+            <a:srgbClr val="F5F0E8"/>
           </a:solidFill>
           <a:ln>
             <a:noFill/>
@@ -9005,9 +9005,9 @@
             <a:r>
               <a:rPr sz="1400" b="1">
                 <a:solidFill>
-                  <a:srgbClr val="64FFDA"/>
-                </a:solidFill>
-                <a:latin typeface="Consolas"/>
+                  <a:srgbClr val="CC785C"/>
+                </a:solidFill>
+                <a:latin typeface="Microsoft YaHei"/>
                 <a:ea typeface="Microsoft YaHei"/>
               </a:rPr>
               <a:t>06</a:t>
@@ -9045,10 +9045,10 @@
             <a:r>
               <a:rPr sz="2300" b="1">
                 <a:solidFill>
-                  <a:srgbClr val="E6F1FF"/>
-                </a:solidFill>
-                <a:latin typeface="Microsoft YaHei"/>
-                <a:ea typeface="Microsoft YaHei"/>
+                  <a:srgbClr val="191919"/>
+                </a:solidFill>
+                <a:latin typeface="SimSun"/>
+                <a:ea typeface="SimSun"/>
               </a:rPr>
               <a:t>  完整任务链路：一条可追溯闭环</a:t>
             </a:r>
@@ -9070,7 +9070,7 @@
             <a:avLst/>
           </a:prstGeom>
           <a:solidFill>
-            <a:srgbClr val="64FFDA"/>
+            <a:srgbClr val="CC785C"/>
           </a:solidFill>
           <a:ln>
             <a:noFill/>
@@ -9129,9 +9129,9 @@
             <a:r>
               <a:rPr sz="900" b="0">
                 <a:solidFill>
-                  <a:srgbClr val="5A7A9E"/>
-                </a:solidFill>
-                <a:latin typeface="Consolas"/>
+                  <a:srgbClr val="8A7A6F"/>
+                </a:solidFill>
+                <a:latin typeface="Microsoft YaHei"/>
                 <a:ea typeface="Microsoft YaHei"/>
               </a:rPr>
               <a:t>06 / 13</a:t>
@@ -9156,11 +9156,11 @@
             </a:avLst>
           </a:prstGeom>
           <a:solidFill>
-            <a:srgbClr val="112240"/>
+            <a:srgbClr val="FDFBF7"/>
           </a:solidFill>
           <a:ln w="15240">
             <a:solidFill>
-              <a:srgbClr val="3F6FCC"/>
+              <a:srgbClr val="D9BFA6"/>
             </a:solidFill>
           </a:ln>
           <a:effectLst/>
@@ -9187,7 +9187,7 @@
             <a:r>
               <a:rPr sz="1150" b="1">
                 <a:solidFill>
-                  <a:srgbClr val="E6F1FF"/>
+                  <a:srgbClr val="191919"/>
                 </a:solidFill>
                 <a:latin typeface="Microsoft YaHei"/>
                 <a:ea typeface="Microsoft YaHei"/>
@@ -9227,7 +9227,7 @@
             <a:r>
               <a:rPr sz="1500" b="1">
                 <a:solidFill>
-                  <a:srgbClr val="64FFDA"/>
+                  <a:srgbClr val="CC785C"/>
                 </a:solidFill>
                 <a:latin typeface="Microsoft YaHei"/>
                 <a:ea typeface="Microsoft YaHei"/>
@@ -9254,11 +9254,11 @@
             </a:avLst>
           </a:prstGeom>
           <a:solidFill>
-            <a:srgbClr val="112240"/>
+            <a:srgbClr val="FDFBF7"/>
           </a:solidFill>
           <a:ln w="15240">
             <a:solidFill>
-              <a:srgbClr val="3F6FCC"/>
+              <a:srgbClr val="D9BFA6"/>
             </a:solidFill>
           </a:ln>
           <a:effectLst/>
@@ -9285,7 +9285,7 @@
             <a:r>
               <a:rPr sz="1150" b="1">
                 <a:solidFill>
-                  <a:srgbClr val="E6F1FF"/>
+                  <a:srgbClr val="191919"/>
                 </a:solidFill>
                 <a:latin typeface="Microsoft YaHei"/>
                 <a:ea typeface="Microsoft YaHei"/>
@@ -9298,7 +9298,7 @@
             <a:r>
               <a:rPr sz="800" b="0">
                 <a:solidFill>
-                  <a:srgbClr val="5A7A9E"/>
+                  <a:srgbClr val="8A7A6F"/>
                 </a:solidFill>
                 <a:latin typeface="Microsoft YaHei"/>
                 <a:ea typeface="Microsoft YaHei"/>
@@ -9338,7 +9338,7 @@
             <a:r>
               <a:rPr sz="1500" b="1">
                 <a:solidFill>
-                  <a:srgbClr val="64FFDA"/>
+                  <a:srgbClr val="CC785C"/>
                 </a:solidFill>
                 <a:latin typeface="Microsoft YaHei"/>
                 <a:ea typeface="Microsoft YaHei"/>
@@ -9365,11 +9365,11 @@
             </a:avLst>
           </a:prstGeom>
           <a:solidFill>
-            <a:srgbClr val="112240"/>
+            <a:srgbClr val="FDFBF7"/>
           </a:solidFill>
           <a:ln w="15240">
             <a:solidFill>
-              <a:srgbClr val="3F6FCC"/>
+              <a:srgbClr val="D9BFA6"/>
             </a:solidFill>
           </a:ln>
           <a:effectLst/>
@@ -9396,7 +9396,7 @@
             <a:r>
               <a:rPr sz="1150" b="1">
                 <a:solidFill>
-                  <a:srgbClr val="E6F1FF"/>
+                  <a:srgbClr val="191919"/>
                 </a:solidFill>
                 <a:latin typeface="Microsoft YaHei"/>
                 <a:ea typeface="Microsoft YaHei"/>
@@ -9436,7 +9436,7 @@
             <a:r>
               <a:rPr sz="1500" b="1">
                 <a:solidFill>
-                  <a:srgbClr val="64FFDA"/>
+                  <a:srgbClr val="CC785C"/>
                 </a:solidFill>
                 <a:latin typeface="Microsoft YaHei"/>
                 <a:ea typeface="Microsoft YaHei"/>
@@ -9463,11 +9463,11 @@
             </a:avLst>
           </a:prstGeom>
           <a:solidFill>
-            <a:srgbClr val="112240"/>
+            <a:srgbClr val="FDFBF7"/>
           </a:solidFill>
           <a:ln w="15240">
             <a:solidFill>
-              <a:srgbClr val="3F6FCC"/>
+              <a:srgbClr val="D9BFA6"/>
             </a:solidFill>
           </a:ln>
           <a:effectLst/>
@@ -9494,7 +9494,7 @@
             <a:r>
               <a:rPr sz="1150" b="1">
                 <a:solidFill>
-                  <a:srgbClr val="E6F1FF"/>
+                  <a:srgbClr val="191919"/>
                 </a:solidFill>
                 <a:latin typeface="Microsoft YaHei"/>
                 <a:ea typeface="Microsoft YaHei"/>
@@ -9534,7 +9534,7 @@
             <a:r>
               <a:rPr sz="1500" b="1">
                 <a:solidFill>
-                  <a:srgbClr val="64FFDA"/>
+                  <a:srgbClr val="CC785C"/>
                 </a:solidFill>
                 <a:latin typeface="Microsoft YaHei"/>
                 <a:ea typeface="Microsoft YaHei"/>
@@ -9561,11 +9561,11 @@
             </a:avLst>
           </a:prstGeom>
           <a:solidFill>
-            <a:srgbClr val="112240"/>
+            <a:srgbClr val="FDFBF7"/>
           </a:solidFill>
           <a:ln w="15240">
             <a:solidFill>
-              <a:srgbClr val="3F6FCC"/>
+              <a:srgbClr val="D9BFA6"/>
             </a:solidFill>
           </a:ln>
           <a:effectLst/>
@@ -9592,7 +9592,7 @@
             <a:r>
               <a:rPr sz="1150" b="1">
                 <a:solidFill>
-                  <a:srgbClr val="E6F1FF"/>
+                  <a:srgbClr val="191919"/>
                 </a:solidFill>
                 <a:latin typeface="Microsoft YaHei"/>
                 <a:ea typeface="Microsoft YaHei"/>
@@ -9632,7 +9632,7 @@
             <a:r>
               <a:rPr sz="1500" b="1">
                 <a:solidFill>
-                  <a:srgbClr val="64FFDA"/>
+                  <a:srgbClr val="CC785C"/>
                 </a:solidFill>
                 <a:latin typeface="Microsoft YaHei"/>
                 <a:ea typeface="Microsoft YaHei"/>
@@ -9659,11 +9659,11 @@
             </a:avLst>
           </a:prstGeom>
           <a:solidFill>
-            <a:srgbClr val="112240"/>
+            <a:srgbClr val="FDFBF7"/>
           </a:solidFill>
           <a:ln w="15240">
             <a:solidFill>
-              <a:srgbClr val="3F6FCC"/>
+              <a:srgbClr val="D9BFA6"/>
             </a:solidFill>
           </a:ln>
           <a:effectLst/>
@@ -9690,7 +9690,7 @@
             <a:r>
               <a:rPr sz="1150" b="1">
                 <a:solidFill>
-                  <a:srgbClr val="E6F1FF"/>
+                  <a:srgbClr val="191919"/>
                 </a:solidFill>
                 <a:latin typeface="Microsoft YaHei"/>
                 <a:ea typeface="Microsoft YaHei"/>
@@ -9730,7 +9730,7 @@
             <a:r>
               <a:rPr sz="1500" b="1">
                 <a:solidFill>
-                  <a:srgbClr val="64FFDA"/>
+                  <a:srgbClr val="CC785C"/>
                 </a:solidFill>
                 <a:latin typeface="Microsoft YaHei"/>
                 <a:ea typeface="Microsoft YaHei"/>
@@ -9757,11 +9757,11 @@
             </a:avLst>
           </a:prstGeom>
           <a:solidFill>
-            <a:srgbClr val="112240"/>
+            <a:srgbClr val="FDFBF7"/>
           </a:solidFill>
           <a:ln w="15240">
             <a:solidFill>
-              <a:srgbClr val="3F6FCC"/>
+              <a:srgbClr val="D9BFA6"/>
             </a:solidFill>
           </a:ln>
           <a:effectLst/>
@@ -9788,7 +9788,7 @@
             <a:r>
               <a:rPr sz="1150" b="1">
                 <a:solidFill>
-                  <a:srgbClr val="E6F1FF"/>
+                  <a:srgbClr val="191919"/>
                 </a:solidFill>
                 <a:latin typeface="Microsoft YaHei"/>
                 <a:ea typeface="Microsoft YaHei"/>
@@ -9828,7 +9828,7 @@
             <a:r>
               <a:rPr sz="1200" b="0">
                 <a:solidFill>
-                  <a:srgbClr val="FFC864"/>
+                  <a:srgbClr val="A0663A"/>
                 </a:solidFill>
                 <a:latin typeface="Microsoft YaHei"/>
                 <a:ea typeface="Microsoft YaHei"/>
@@ -9868,12 +9868,12 @@
             <a:r>
               <a:rPr sz="1300" b="0">
                 <a:solidFill>
-                  <a:srgbClr val="8892B0"/>
-                </a:solidFill>
-                <a:latin typeface="Microsoft YaHei"/>
-                <a:ea typeface="Microsoft YaHei"/>
-              </a:rPr>
-              <a:t>●  依赖变化 → 结果置为过期，禁止导出旧结果</a:t>
+                  <a:srgbClr val="5A4A40"/>
+                </a:solidFill>
+                <a:latin typeface="Microsoft YaHei"/>
+                <a:ea typeface="Microsoft YaHei"/>
+              </a:rPr>
+              <a:t>—  依赖变化 → 结果置为过期，禁止导出旧结果</a:t>
             </a:r>
           </a:p>
         </p:txBody>
@@ -9908,12 +9908,12 @@
             <a:r>
               <a:rPr sz="1300" b="0">
                 <a:solidFill>
-                  <a:srgbClr val="8892B0"/>
-                </a:solidFill>
-                <a:latin typeface="Microsoft YaHei"/>
-                <a:ea typeface="Microsoft YaHei"/>
-              </a:rPr>
-              <a:t>●  上下文传递：requirementId · claimId · traceId 贯穿引用链</a:t>
+                  <a:srgbClr val="5A4A40"/>
+                </a:solidFill>
+                <a:latin typeface="Microsoft YaHei"/>
+                <a:ea typeface="Microsoft YaHei"/>
+              </a:rPr>
+              <a:t>—  上下文传递：requirementId · claimId · traceId 贯穿引用链</a:t>
             </a:r>
           </a:p>
         </p:txBody>
@@ -9951,7 +9951,7 @@
             <a:avLst/>
           </a:prstGeom>
           <a:solidFill>
-            <a:srgbClr val="0A192F"/>
+            <a:srgbClr val="F5F0E8"/>
           </a:solidFill>
           <a:ln>
             <a:noFill/>
@@ -10010,9 +10010,9 @@
             <a:r>
               <a:rPr sz="1400" b="1">
                 <a:solidFill>
-                  <a:srgbClr val="64FFDA"/>
-                </a:solidFill>
-                <a:latin typeface="Consolas"/>
+                  <a:srgbClr val="CC785C"/>
+                </a:solidFill>
+                <a:latin typeface="Microsoft YaHei"/>
                 <a:ea typeface="Microsoft YaHei"/>
               </a:rPr>
               <a:t>07</a:t>
@@ -10050,10 +10050,10 @@
             <a:r>
               <a:rPr sz="2300" b="1">
                 <a:solidFill>
-                  <a:srgbClr val="E6F1FF"/>
-                </a:solidFill>
-                <a:latin typeface="Microsoft YaHei"/>
-                <a:ea typeface="Microsoft YaHei"/>
+                  <a:srgbClr val="191919"/>
+                </a:solidFill>
+                <a:latin typeface="SimSun"/>
+                <a:ea typeface="SimSun"/>
               </a:rPr>
               <a:t>  Agent 身份与协作</a:t>
             </a:r>
@@ -10075,7 +10075,7 @@
             <a:avLst/>
           </a:prstGeom>
           <a:solidFill>
-            <a:srgbClr val="A78BFA"/>
+            <a:srgbClr val="CC785C"/>
           </a:solidFill>
           <a:ln>
             <a:noFill/>
@@ -10134,9 +10134,9 @@
             <a:r>
               <a:rPr sz="900" b="0">
                 <a:solidFill>
-                  <a:srgbClr val="5A7A9E"/>
-                </a:solidFill>
-                <a:latin typeface="Consolas"/>
+                  <a:srgbClr val="8A7A6F"/>
+                </a:solidFill>
+                <a:latin typeface="Microsoft YaHei"/>
                 <a:ea typeface="Microsoft YaHei"/>
               </a:rPr>
               <a:t>07 / 13</a:t>
@@ -10159,7 +10159,7 @@
             <a:avLst/>
           </a:prstGeom>
           <a:solidFill>
-            <a:srgbClr val="0F1F3D"/>
+            <a:srgbClr val="F0E7DC"/>
           </a:solidFill>
           <a:ln>
             <a:noFill/>
@@ -10218,7 +10218,7 @@
             <a:r>
               <a:rPr sz="1300" b="1">
                 <a:solidFill>
-                  <a:srgbClr val="E6F1FF"/>
+                  <a:srgbClr val="191919"/>
                 </a:solidFill>
                 <a:latin typeface="Microsoft YaHei"/>
                 <a:ea typeface="Microsoft YaHei"/>
@@ -10258,7 +10258,7 @@
             <a:r>
               <a:rPr sz="1250" b="1">
                 <a:solidFill>
-                  <a:srgbClr val="E6F1FF"/>
+                  <a:srgbClr val="191919"/>
                 </a:solidFill>
                 <a:latin typeface="Microsoft YaHei"/>
                 <a:ea typeface="Microsoft YaHei"/>
@@ -10298,7 +10298,7 @@
             <a:r>
               <a:rPr sz="1200" b="1">
                 <a:solidFill>
-                  <a:srgbClr val="E6F1FF"/>
+                  <a:srgbClr val="191919"/>
                 </a:solidFill>
                 <a:latin typeface="Microsoft YaHei"/>
                 <a:ea typeface="Microsoft YaHei"/>
@@ -10338,9 +10338,9 @@
             <a:r>
               <a:rPr sz="1300" b="0">
                 <a:solidFill>
-                  <a:srgbClr val="64FFDA"/>
-                </a:solidFill>
-                <a:latin typeface="Consolas"/>
+                  <a:srgbClr val="B95C3F"/>
+                </a:solidFill>
+                <a:latin typeface="Microsoft YaHei"/>
                 <a:ea typeface="Microsoft YaHei"/>
               </a:rPr>
               <a:t>JobRequirementAnalyst</a:t>
@@ -10378,7 +10378,7 @@
             <a:r>
               <a:rPr sz="1250" b="0">
                 <a:solidFill>
-                  <a:srgbClr val="8892B0"/>
+                  <a:srgbClr val="5A4A40"/>
                 </a:solidFill>
                 <a:latin typeface="Microsoft YaHei"/>
                 <a:ea typeface="Microsoft YaHei"/>
@@ -10418,7 +10418,7 @@
             <a:r>
               <a:rPr sz="1200" b="0">
                 <a:solidFill>
-                  <a:srgbClr val="FFC864"/>
+                  <a:srgbClr val="A0663A"/>
                 </a:solidFill>
                 <a:latin typeface="Microsoft YaHei"/>
                 <a:ea typeface="Microsoft YaHei"/>
@@ -10458,9 +10458,9 @@
             <a:r>
               <a:rPr sz="1300" b="0">
                 <a:solidFill>
-                  <a:srgbClr val="64FFDA"/>
-                </a:solidFill>
-                <a:latin typeface="Consolas"/>
+                  <a:srgbClr val="B95C3F"/>
+                </a:solidFill>
+                <a:latin typeface="Microsoft YaHei"/>
                 <a:ea typeface="Microsoft YaHei"/>
               </a:rPr>
               <a:t>EvidenceCurator</a:t>
@@ -10498,7 +10498,7 @@
             <a:r>
               <a:rPr sz="1250" b="0">
                 <a:solidFill>
-                  <a:srgbClr val="8892B0"/>
+                  <a:srgbClr val="5A4A40"/>
                 </a:solidFill>
                 <a:latin typeface="Microsoft YaHei"/>
                 <a:ea typeface="Microsoft YaHei"/>
@@ -10538,7 +10538,7 @@
             <a:r>
               <a:rPr sz="1200" b="0">
                 <a:solidFill>
-                  <a:srgbClr val="FFC864"/>
+                  <a:srgbClr val="A0663A"/>
                 </a:solidFill>
                 <a:latin typeface="Microsoft YaHei"/>
                 <a:ea typeface="Microsoft YaHei"/>
@@ -10578,9 +10578,9 @@
             <a:r>
               <a:rPr sz="1300" b="0">
                 <a:solidFill>
-                  <a:srgbClr val="64FFDA"/>
-                </a:solidFill>
-                <a:latin typeface="Consolas"/>
+                  <a:srgbClr val="B95C3F"/>
+                </a:solidFill>
+                <a:latin typeface="Microsoft YaHei"/>
                 <a:ea typeface="Microsoft YaHei"/>
               </a:rPr>
               <a:t>ResumeStrategist</a:t>
@@ -10618,7 +10618,7 @@
             <a:r>
               <a:rPr sz="1250" b="0">
                 <a:solidFill>
-                  <a:srgbClr val="8892B0"/>
+                  <a:srgbClr val="5A4A40"/>
                 </a:solidFill>
                 <a:latin typeface="Microsoft YaHei"/>
                 <a:ea typeface="Microsoft YaHei"/>
@@ -10658,7 +10658,7 @@
             <a:r>
               <a:rPr sz="1200" b="0">
                 <a:solidFill>
-                  <a:srgbClr val="FFC864"/>
+                  <a:srgbClr val="A0663A"/>
                 </a:solidFill>
                 <a:latin typeface="Microsoft YaHei"/>
                 <a:ea typeface="Microsoft YaHei"/>
@@ -10698,9 +10698,9 @@
             <a:r>
               <a:rPr sz="1300" b="0">
                 <a:solidFill>
-                  <a:srgbClr val="64FFDA"/>
-                </a:solidFill>
-                <a:latin typeface="Consolas"/>
+                  <a:srgbClr val="B95C3F"/>
+                </a:solidFill>
+                <a:latin typeface="Microsoft YaHei"/>
                 <a:ea typeface="Microsoft YaHei"/>
               </a:rPr>
               <a:t>QualityDeliveryGuardian</a:t>
@@ -10738,7 +10738,7 @@
             <a:r>
               <a:rPr sz="1250" b="0">
                 <a:solidFill>
-                  <a:srgbClr val="8892B0"/>
+                  <a:srgbClr val="5A4A40"/>
                 </a:solidFill>
                 <a:latin typeface="Microsoft YaHei"/>
                 <a:ea typeface="Microsoft YaHei"/>
@@ -10778,7 +10778,7 @@
             <a:r>
               <a:rPr sz="1200" b="0">
                 <a:solidFill>
-                  <a:srgbClr val="FFC864"/>
+                  <a:srgbClr val="A0663A"/>
                 </a:solidFill>
                 <a:latin typeface="Microsoft YaHei"/>
                 <a:ea typeface="Microsoft YaHei"/>
@@ -10818,7 +10818,7 @@
             <a:r>
               <a:rPr sz="1200" b="0">
                 <a:solidFill>
-                  <a:srgbClr val="5A7A9E"/>
+                  <a:srgbClr val="8A7A6F"/>
                 </a:solidFill>
                 <a:latin typeface="Microsoft YaHei"/>
                 <a:ea typeface="Microsoft YaHei"/>
@@ -10861,7 +10861,7 @@
             <a:avLst/>
           </a:prstGeom>
           <a:solidFill>
-            <a:srgbClr val="0A192F"/>
+            <a:srgbClr val="F5F0E8"/>
           </a:solidFill>
           <a:ln>
             <a:noFill/>
@@ -10920,9 +10920,9 @@
             <a:r>
               <a:rPr sz="1400" b="1">
                 <a:solidFill>
-                  <a:srgbClr val="64FFDA"/>
-                </a:solidFill>
-                <a:latin typeface="Consolas"/>
+                  <a:srgbClr val="CC785C"/>
+                </a:solidFill>
+                <a:latin typeface="Microsoft YaHei"/>
                 <a:ea typeface="Microsoft YaHei"/>
               </a:rPr>
               <a:t>08</a:t>
@@ -10960,10 +10960,10 @@
             <a:r>
               <a:rPr sz="2300" b="1">
                 <a:solidFill>
-                  <a:srgbClr val="E6F1FF"/>
-                </a:solidFill>
-                <a:latin typeface="Microsoft YaHei"/>
-                <a:ea typeface="Microsoft YaHei"/>
+                  <a:srgbClr val="191919"/>
+                </a:solidFill>
+                <a:latin typeface="SimSun"/>
+                <a:ea typeface="SimSun"/>
               </a:rPr>
               <a:t>  Skill 体系：能力抽象层（必选项）</a:t>
             </a:r>
@@ -10985,7 +10985,7 @@
             <a:avLst/>
           </a:prstGeom>
           <a:solidFill>
-            <a:srgbClr val="64FFDA"/>
+            <a:srgbClr val="CC785C"/>
           </a:solidFill>
           <a:ln>
             <a:noFill/>
@@ -11044,9 +11044,9 @@
             <a:r>
               <a:rPr sz="900" b="0">
                 <a:solidFill>
-                  <a:srgbClr val="5A7A9E"/>
-                </a:solidFill>
-                <a:latin typeface="Consolas"/>
+                  <a:srgbClr val="8A7A6F"/>
+                </a:solidFill>
+                <a:latin typeface="Microsoft YaHei"/>
                 <a:ea typeface="Microsoft YaHei"/>
               </a:rPr>
               <a:t>08 / 13</a:t>
@@ -11071,11 +11071,11 @@
             </a:avLst>
           </a:prstGeom>
           <a:solidFill>
-            <a:srgbClr val="112240"/>
+            <a:srgbClr val="FDFBF7"/>
           </a:solidFill>
           <a:ln w="15240">
             <a:solidFill>
-              <a:srgbClr val="1E3A5F"/>
+              <a:srgbClr val="E8DFD2"/>
             </a:solidFill>
           </a:ln>
           <a:effectLst/>
@@ -11127,10 +11127,10 @@
             <a:r>
               <a:rPr sz="1200" b="1">
                 <a:solidFill>
-                  <a:srgbClr val="E6F1FF"/>
-                </a:solidFill>
-                <a:latin typeface="Microsoft YaHei"/>
-                <a:ea typeface="Microsoft YaHei"/>
+                  <a:srgbClr val="191919"/>
+                </a:solidFill>
+                <a:latin typeface="SimSun"/>
+                <a:ea typeface="SimSun"/>
               </a:rPr>
               <a:t>material-validation</a:t>
             </a:r>
@@ -11144,7 +11144,7 @@
             <a:r>
               <a:rPr sz="1050" b="0">
                 <a:solidFill>
-                  <a:srgbClr val="8892B0"/>
+                  <a:srgbClr val="5A4A40"/>
                 </a:solidFill>
                 <a:latin typeface="Microsoft YaHei"/>
                 <a:ea typeface="Microsoft YaHei"/>
@@ -11171,11 +11171,11 @@
             </a:avLst>
           </a:prstGeom>
           <a:solidFill>
-            <a:srgbClr val="112240"/>
+            <a:srgbClr val="FDFBF7"/>
           </a:solidFill>
           <a:ln w="15240">
             <a:solidFill>
-              <a:srgbClr val="1E3A5F"/>
+              <a:srgbClr val="E8DFD2"/>
             </a:solidFill>
           </a:ln>
           <a:effectLst/>
@@ -11227,10 +11227,10 @@
             <a:r>
               <a:rPr sz="1200" b="1">
                 <a:solidFill>
-                  <a:srgbClr val="E6F1FF"/>
-                </a:solidFill>
-                <a:latin typeface="Microsoft YaHei"/>
-                <a:ea typeface="Microsoft YaHei"/>
+                  <a:srgbClr val="191919"/>
+                </a:solidFill>
+                <a:latin typeface="SimSun"/>
+                <a:ea typeface="SimSun"/>
               </a:rPr>
               <a:t>jd-decision-map</a:t>
             </a:r>
@@ -11244,7 +11244,7 @@
             <a:r>
               <a:rPr sz="1050" b="0">
                 <a:solidFill>
-                  <a:srgbClr val="8892B0"/>
+                  <a:srgbClr val="5A4A40"/>
                 </a:solidFill>
                 <a:latin typeface="Microsoft YaHei"/>
                 <a:ea typeface="Microsoft YaHei"/>
@@ -11271,11 +11271,11 @@
             </a:avLst>
           </a:prstGeom>
           <a:solidFill>
-            <a:srgbClr val="112240"/>
+            <a:srgbClr val="FDFBF7"/>
           </a:solidFill>
           <a:ln w="15240">
             <a:solidFill>
-              <a:srgbClr val="1E3A5F"/>
+              <a:srgbClr val="E8DFD2"/>
             </a:solidFill>
           </a:ln>
           <a:effectLst/>
@@ -11327,10 +11327,10 @@
             <a:r>
               <a:rPr sz="1200" b="1">
                 <a:solidFill>
-                  <a:srgbClr val="E6F1FF"/>
-                </a:solidFill>
-                <a:latin typeface="Microsoft YaHei"/>
-                <a:ea typeface="Microsoft YaHei"/>
+                  <a:srgbClr val="191919"/>
+                </a:solidFill>
+                <a:latin typeface="SimSun"/>
+                <a:ea typeface="SimSun"/>
               </a:rPr>
               <a:t>fact-retrieval / evidence-curation</a:t>
             </a:r>
@@ -11344,7 +11344,7 @@
             <a:r>
               <a:rPr sz="1050" b="0">
                 <a:solidFill>
-                  <a:srgbClr val="8892B0"/>
+                  <a:srgbClr val="5A4A40"/>
                 </a:solidFill>
                 <a:latin typeface="Microsoft YaHei"/>
                 <a:ea typeface="Microsoft YaHei"/>
@@ -11371,11 +11371,11 @@
             </a:avLst>
           </a:prstGeom>
           <a:solidFill>
-            <a:srgbClr val="112240"/>
+            <a:srgbClr val="FDFBF7"/>
           </a:solidFill>
           <a:ln w="15240">
             <a:solidFill>
-              <a:srgbClr val="1E3A5F"/>
+              <a:srgbClr val="E8DFD2"/>
             </a:solidFill>
           </a:ln>
           <a:effectLst/>
@@ -11427,10 +11427,10 @@
             <a:r>
               <a:rPr sz="1200" b="1">
                 <a:solidFill>
-                  <a:srgbClr val="E6F1FF"/>
-                </a:solidFill>
-                <a:latin typeface="Microsoft YaHei"/>
-                <a:ea typeface="Microsoft YaHei"/>
+                  <a:srgbClr val="191919"/>
+                </a:solidFill>
+                <a:latin typeface="SimSun"/>
+                <a:ea typeface="SimSun"/>
               </a:rPr>
               <a:t>trusted-rewrite</a:t>
             </a:r>
@@ -11444,7 +11444,7 @@
             <a:r>
               <a:rPr sz="1050" b="0">
                 <a:solidFill>
-                  <a:srgbClr val="8892B0"/>
+                  <a:srgbClr val="5A4A40"/>
                 </a:solidFill>
                 <a:latin typeface="Microsoft YaHei"/>
                 <a:ea typeface="Microsoft YaHei"/>
@@ -11471,11 +11471,11 @@
             </a:avLst>
           </a:prstGeom>
           <a:solidFill>
-            <a:srgbClr val="112240"/>
+            <a:srgbClr val="FDFBF7"/>
           </a:solidFill>
           <a:ln w="15240">
             <a:solidFill>
-              <a:srgbClr val="1E3A5F"/>
+              <a:srgbClr val="E8DFD2"/>
             </a:solidFill>
           </a:ln>
           <a:effectLst/>
@@ -11527,10 +11527,10 @@
             <a:r>
               <a:rPr sz="1200" b="1">
                 <a:solidFill>
-                  <a:srgbClr val="E6F1FF"/>
-                </a:solidFill>
-                <a:latin typeface="Microsoft YaHei"/>
-                <a:ea typeface="Microsoft YaHei"/>
+                  <a:srgbClr val="191919"/>
+                </a:solidFill>
+                <a:latin typeface="SimSun"/>
+                <a:ea typeface="SimSun"/>
               </a:rPr>
               <a:t>delivery-gate</a:t>
             </a:r>
@@ -11544,7 +11544,7 @@
             <a:r>
               <a:rPr sz="1050" b="0">
                 <a:solidFill>
-                  <a:srgbClr val="8892B0"/>
+                  <a:srgbClr val="5A4A40"/>
                 </a:solidFill>
                 <a:latin typeface="Microsoft YaHei"/>
                 <a:ea typeface="Microsoft YaHei"/>
@@ -11571,11 +11571,11 @@
             </a:avLst>
           </a:prstGeom>
           <a:solidFill>
-            <a:srgbClr val="112240"/>
+            <a:srgbClr val="FDFBF7"/>
           </a:solidFill>
           <a:ln w="15240">
             <a:solidFill>
-              <a:srgbClr val="1E3A5F"/>
+              <a:srgbClr val="E8DFD2"/>
             </a:solidFill>
           </a:ln>
           <a:effectLst/>
@@ -11627,10 +11627,10 @@
             <a:r>
               <a:rPr sz="1200" b="1">
                 <a:solidFill>
-                  <a:srgbClr val="E6F1FF"/>
-                </a:solidFill>
-                <a:latin typeface="Microsoft YaHei"/>
-                <a:ea typeface="Microsoft YaHei"/>
+                  <a:srgbClr val="191919"/>
+                </a:solidFill>
+                <a:latin typeface="SimSun"/>
+                <a:ea typeface="SimSun"/>
               </a:rPr>
               <a:t>trace-observability / mock-evaluation</a:t>
             </a:r>
@@ -11644,7 +11644,7 @@
             <a:r>
               <a:rPr sz="1050" b="0">
                 <a:solidFill>
-                  <a:srgbClr val="8892B0"/>
+                  <a:srgbClr val="5A4A40"/>
                 </a:solidFill>
                 <a:latin typeface="Microsoft YaHei"/>
                 <a:ea typeface="Microsoft YaHei"/>
@@ -11684,7 +11684,7 @@
             <a:r>
               <a:rPr sz="1200" b="0">
                 <a:solidFill>
-                  <a:srgbClr val="FFC864"/>
+                  <a:srgbClr val="A0663A"/>
                 </a:solidFill>
                 <a:latin typeface="Microsoft YaHei"/>
                 <a:ea typeface="Microsoft YaHei"/>
@@ -11727,7 +11727,7 @@
             <a:avLst/>
           </a:prstGeom>
           <a:solidFill>
-            <a:srgbClr val="0A192F"/>
+            <a:srgbClr val="F5F0E8"/>
           </a:solidFill>
           <a:ln>
             <a:noFill/>
@@ -11786,9 +11786,9 @@
             <a:r>
               <a:rPr sz="1400" b="1">
                 <a:solidFill>
-                  <a:srgbClr val="64FFDA"/>
-                </a:solidFill>
-                <a:latin typeface="Consolas"/>
+                  <a:srgbClr val="CC785C"/>
+                </a:solidFill>
+                <a:latin typeface="Microsoft YaHei"/>
                 <a:ea typeface="Microsoft YaHei"/>
               </a:rPr>
               <a:t>09</a:t>
@@ -11826,10 +11826,10 @@
             <a:r>
               <a:rPr sz="2300" b="1">
                 <a:solidFill>
-                  <a:srgbClr val="E6F1FF"/>
-                </a:solidFill>
-                <a:latin typeface="Microsoft YaHei"/>
-                <a:ea typeface="Microsoft YaHei"/>
+                  <a:srgbClr val="191919"/>
+                </a:solidFill>
+                <a:latin typeface="SimSun"/>
+                <a:ea typeface="SimSun"/>
               </a:rPr>
               <a:t>  数据与可信机制</a:t>
             </a:r>
@@ -11851,7 +11851,7 @@
             <a:avLst/>
           </a:prstGeom>
           <a:solidFill>
-            <a:srgbClr val="64FFDA"/>
+            <a:srgbClr val="CC785C"/>
           </a:solidFill>
           <a:ln>
             <a:noFill/>
@@ -11910,9 +11910,9 @@
             <a:r>
               <a:rPr sz="900" b="0">
                 <a:solidFill>
-                  <a:srgbClr val="5A7A9E"/>
-                </a:solidFill>
-                <a:latin typeface="Consolas"/>
+                  <a:srgbClr val="8A7A6F"/>
+                </a:solidFill>
+                <a:latin typeface="Microsoft YaHei"/>
                 <a:ea typeface="Microsoft YaHei"/>
               </a:rPr>
               <a:t>09 / 13</a:t>
@@ -11937,11 +11937,11 @@
             </a:avLst>
           </a:prstGeom>
           <a:solidFill>
-            <a:srgbClr val="112240"/>
+            <a:srgbClr val="FDFBF7"/>
           </a:solidFill>
           <a:ln w="15240">
             <a:solidFill>
-              <a:srgbClr val="3F6FCC"/>
+              <a:srgbClr val="D9BFA6"/>
             </a:solidFill>
           </a:ln>
           <a:effectLst/>
@@ -11968,7 +11968,7 @@
             <a:r>
               <a:rPr sz="1150" b="1">
                 <a:solidFill>
-                  <a:srgbClr val="E6F1FF"/>
+                  <a:srgbClr val="191919"/>
                 </a:solidFill>
                 <a:latin typeface="Microsoft YaHei"/>
                 <a:ea typeface="Microsoft YaHei"/>
@@ -11981,7 +11981,7 @@
             <a:r>
               <a:rPr sz="800" b="0">
                 <a:solidFill>
-                  <a:srgbClr val="5A7A9E"/>
+                  <a:srgbClr val="8A7A6F"/>
                 </a:solidFill>
                 <a:latin typeface="Microsoft YaHei"/>
                 <a:ea typeface="Microsoft YaHei"/>
@@ -12021,7 +12021,7 @@
             <a:r>
               <a:rPr sz="1500" b="1">
                 <a:solidFill>
-                  <a:srgbClr val="64FFDA"/>
+                  <a:srgbClr val="CC785C"/>
                 </a:solidFill>
                 <a:latin typeface="Microsoft YaHei"/>
                 <a:ea typeface="Microsoft YaHei"/>
@@ -12048,11 +12048,11 @@
             </a:avLst>
           </a:prstGeom>
           <a:solidFill>
-            <a:srgbClr val="112240"/>
+            <a:srgbClr val="FDFBF7"/>
           </a:solidFill>
           <a:ln w="15240">
             <a:solidFill>
-              <a:srgbClr val="3F6FCC"/>
+              <a:srgbClr val="D9BFA6"/>
             </a:solidFill>
           </a:ln>
           <a:effectLst/>
@@ -12079,7 +12079,7 @@
             <a:r>
               <a:rPr sz="1150" b="1">
                 <a:solidFill>
-                  <a:srgbClr val="E6F1FF"/>
+                  <a:srgbClr val="191919"/>
                 </a:solidFill>
                 <a:latin typeface="Microsoft YaHei"/>
                 <a:ea typeface="Microsoft YaHei"/>
@@ -12092,7 +12092,7 @@
             <a:r>
               <a:rPr sz="800" b="0">
                 <a:solidFill>
-                  <a:srgbClr val="5A7A9E"/>
+                  <a:srgbClr val="8A7A6F"/>
                 </a:solidFill>
                 <a:latin typeface="Microsoft YaHei"/>
                 <a:ea typeface="Microsoft YaHei"/>
@@ -12132,7 +12132,7 @@
             <a:r>
               <a:rPr sz="1500" b="1">
                 <a:solidFill>
-                  <a:srgbClr val="64FFDA"/>
+                  <a:srgbClr val="CC785C"/>
                 </a:solidFill>
                 <a:latin typeface="Microsoft YaHei"/>
                 <a:ea typeface="Microsoft YaHei"/>
@@ -12159,11 +12159,11 @@
             </a:avLst>
           </a:prstGeom>
           <a:solidFill>
-            <a:srgbClr val="112240"/>
+            <a:srgbClr val="FDFBF7"/>
           </a:solidFill>
           <a:ln w="15240">
             <a:solidFill>
-              <a:srgbClr val="3F6FCC"/>
+              <a:srgbClr val="D9BFA6"/>
             </a:solidFill>
           </a:ln>
           <a:effectLst/>
@@ -12190,7 +12190,7 @@
             <a:r>
               <a:rPr sz="1150" b="1">
                 <a:solidFill>
-                  <a:srgbClr val="E6F1FF"/>
+                  <a:srgbClr val="191919"/>
                 </a:solidFill>
                 <a:latin typeface="Microsoft YaHei"/>
                 <a:ea typeface="Microsoft YaHei"/>
@@ -12203,7 +12203,7 @@
             <a:r>
               <a:rPr sz="800" b="0">
                 <a:solidFill>
-                  <a:srgbClr val="5A7A9E"/>
+                  <a:srgbClr val="8A7A6F"/>
                 </a:solidFill>
                 <a:latin typeface="Microsoft YaHei"/>
                 <a:ea typeface="Microsoft YaHei"/>
@@ -12230,11 +12230,11 @@
             </a:avLst>
           </a:prstGeom>
           <a:solidFill>
-            <a:srgbClr val="112240"/>
+            <a:srgbClr val="FDFBF7"/>
           </a:solidFill>
           <a:ln w="15240">
             <a:solidFill>
-              <a:srgbClr val="1E3A5F"/>
+              <a:srgbClr val="E8DFD2"/>
             </a:solidFill>
           </a:ln>
           <a:effectLst/>
@@ -12286,10 +12286,10 @@
             <a:r>
               <a:rPr sz="1200" b="1">
                 <a:solidFill>
-                  <a:srgbClr val="E6F1FF"/>
-                </a:solidFill>
-                <a:latin typeface="Microsoft YaHei"/>
-                <a:ea typeface="Microsoft YaHei"/>
+                  <a:srgbClr val="191919"/>
+                </a:solidFill>
+                <a:latin typeface="SimSun"/>
+                <a:ea typeface="SimSun"/>
               </a:rPr>
               <a:t>过期传播</a:t>
             </a:r>
@@ -12303,7 +12303,7 @@
             <a:r>
               <a:rPr sz="1050" b="0">
                 <a:solidFill>
-                  <a:srgbClr val="8892B0"/>
+                  <a:srgbClr val="5A4A40"/>
                 </a:solidFill>
                 <a:latin typeface="Microsoft YaHei"/>
                 <a:ea typeface="Microsoft YaHei"/>
@@ -12330,11 +12330,11 @@
             </a:avLst>
           </a:prstGeom>
           <a:solidFill>
-            <a:srgbClr val="112240"/>
+            <a:srgbClr val="FDFBF7"/>
           </a:solidFill>
           <a:ln w="15240">
             <a:solidFill>
-              <a:srgbClr val="1E3A5F"/>
+              <a:srgbClr val="E8DFD2"/>
             </a:solidFill>
           </a:ln>
           <a:effectLst/>
@@ -12386,10 +12386,10 @@
             <a:r>
               <a:rPr sz="1200" b="1">
                 <a:solidFill>
-                  <a:srgbClr val="E6F1FF"/>
-                </a:solidFill>
-                <a:latin typeface="Microsoft YaHei"/>
-                <a:ea typeface="Microsoft YaHei"/>
+                  <a:srgbClr val="191919"/>
+                </a:solidFill>
+                <a:latin typeface="SimSun"/>
+                <a:ea typeface="SimSun"/>
               </a:rPr>
               <a:t>四道人工门禁</a:t>
             </a:r>
@@ -12403,7 +12403,7 @@
             <a:r>
               <a:rPr sz="1050" b="0">
                 <a:solidFill>
-                  <a:srgbClr val="8892B0"/>
+                  <a:srgbClr val="5A4A40"/>
                 </a:solidFill>
                 <a:latin typeface="Microsoft YaHei"/>
                 <a:ea typeface="Microsoft YaHei"/>
@@ -12430,11 +12430,11 @@
             </a:avLst>
           </a:prstGeom>
           <a:solidFill>
-            <a:srgbClr val="112240"/>
+            <a:srgbClr val="FDFBF7"/>
           </a:solidFill>
           <a:ln w="15240">
             <a:solidFill>
-              <a:srgbClr val="1E3A5F"/>
+              <a:srgbClr val="E8DFD2"/>
             </a:solidFill>
           </a:ln>
           <a:effectLst/>
@@ -12486,10 +12486,10 @@
             <a:r>
               <a:rPr sz="1200" b="1">
                 <a:solidFill>
-                  <a:srgbClr val="E6F1FF"/>
-                </a:solidFill>
-                <a:latin typeface="Microsoft YaHei"/>
-                <a:ea typeface="Microsoft YaHei"/>
+                  <a:srgbClr val="191919"/>
+                </a:solidFill>
+                <a:latin typeface="SimSun"/>
+                <a:ea typeface="SimSun"/>
               </a:rPr>
               <a:t>确定性评分</a:t>
             </a:r>
@@ -12503,7 +12503,7 @@
             <a:r>
               <a:rPr sz="1050" b="0">
                 <a:solidFill>
-                  <a:srgbClr val="8892B0"/>
+                  <a:srgbClr val="5A4A40"/>
                 </a:solidFill>
                 <a:latin typeface="Microsoft YaHei"/>
                 <a:ea typeface="Microsoft YaHei"/>
@@ -12530,11 +12530,11 @@
             </a:avLst>
           </a:prstGeom>
           <a:solidFill>
-            <a:srgbClr val="112240"/>
+            <a:srgbClr val="FDFBF7"/>
           </a:solidFill>
           <a:ln w="15240">
             <a:solidFill>
-              <a:srgbClr val="1E3A5F"/>
+              <a:srgbClr val="E8DFD2"/>
             </a:solidFill>
           </a:ln>
           <a:effectLst/>
@@ -12586,10 +12586,10 @@
             <a:r>
               <a:rPr sz="1200" b="1">
                 <a:solidFill>
-                  <a:srgbClr val="E6F1FF"/>
-                </a:solidFill>
-                <a:latin typeface="Microsoft YaHei"/>
-                <a:ea typeface="Microsoft YaHei"/>
+                  <a:srgbClr val="191919"/>
+                </a:solidFill>
+                <a:latin typeface="SimSun"/>
+                <a:ea typeface="SimSun"/>
               </a:rPr>
               <a:t>全程可审计</a:t>
             </a:r>
@@ -12603,7 +12603,7 @@
             <a:r>
               <a:rPr sz="1050" b="0">
                 <a:solidFill>
-                  <a:srgbClr val="8892B0"/>
+                  <a:srgbClr val="5A4A40"/>
                 </a:solidFill>
                 <a:latin typeface="Microsoft YaHei"/>
                 <a:ea typeface="Microsoft YaHei"/>
